--- a/docs/SCSS/SCSS_FeatureEngineering_Diana_Nenu.pptx
+++ b/docs/SCSS/SCSS_FeatureEngineering_Diana_Nenu.pptx
@@ -2035,7 +2035,7 @@
               <a:buNone/>
             </a:pPr>
             <a:r>
-              <a:rPr lang="en-US" sz="4200" b="1" dirty="0">
+              <a:rPr lang="en-US" sz="4000" b="1" dirty="0">
                 <a:solidFill>
                   <a:srgbClr val="FFFFFF"/>
                 </a:solidFill>
@@ -2043,9 +2043,9 @@
                 <a:ea typeface="Calibri" pitchFamily="34" charset="-122"/>
                 <a:cs typeface="Calibri" pitchFamily="34" charset="-120"/>
               </a:rPr>
-              <a:t>Feature Engineering pentru</a:t>
-            </a:r>
-            <a:endParaRPr lang="en-US" sz="4200" dirty="0"/>
+              <a:t>Tehnici de feature engineering</a:t>
+            </a:r>
+            <a:endParaRPr lang="en-US" sz="4000" dirty="0"/>
           </a:p>
           <a:p>
             <a:pPr indent="0" marL="0">
@@ -2055,7 +2055,7 @@
               <a:buNone/>
             </a:pPr>
             <a:r>
-              <a:rPr lang="en-US" sz="4200" b="1" dirty="0">
+              <a:rPr lang="en-US" sz="4000" b="1" dirty="0">
                 <a:solidFill>
                   <a:srgbClr val="FFFFFF"/>
                 </a:solidFill>
@@ -2063,9 +2063,9 @@
                 <a:ea typeface="Calibri" pitchFamily="34" charset="-122"/>
                 <a:cs typeface="Calibri" pitchFamily="34" charset="-120"/>
               </a:rPr>
-              <a:t>time series energetice</a:t>
-            </a:r>
-            <a:endParaRPr lang="en-US" sz="4200" dirty="0"/>
+              <a:t>pentru serii temporale</a:t>
+            </a:r>
+            <a:endParaRPr lang="en-US" sz="4000" dirty="0"/>
           </a:p>
         </p:txBody>
       </p:sp>
@@ -2077,8 +2077,8 @@
         </p:nvSpPr>
         <p:spPr>
           <a:xfrm>
-            <a:off x="731520" y="3474720"/>
-            <a:ext cx="10515600" cy="914400"/>
+            <a:off x="731520" y="3383280"/>
+            <a:ext cx="10515600" cy="1005840"/>
           </a:xfrm>
           <a:prstGeom prst="rect">
             <a:avLst/>
@@ -2102,7 +2102,7 @@
                 <a:ea typeface="Calibri" pitchFamily="34" charset="-122"/>
                 <a:cs typeface="Calibri" pitchFamily="34" charset="-120"/>
               </a:rPr>
-              <a:t>Trei tehnici matematice simple care fac diferenta</a:t>
+              <a:t>Encoding ciclic, lag features si rolling features</a:t>
             </a:r>
             <a:endParaRPr lang="en-US" sz="1900" dirty="0"/>
           </a:p>
@@ -2119,7 +2119,7 @@
                 <a:ea typeface="Calibri" pitchFamily="34" charset="-122"/>
                 <a:cs typeface="Calibri" pitchFamily="34" charset="-120"/>
               </a:rPr>
-              <a:t>intre date brute si predictii utile</a:t>
+              <a:t>— cu aplicatii in domeniul energetic</a:t>
             </a:r>
             <a:endParaRPr lang="en-US" sz="1900" dirty="0"/>
           </a:p>
@@ -2562,7 +2562,7 @@
                 <a:ea typeface="Calibri" pitchFamily="34" charset="-122"/>
                 <a:cs typeface="Calibri" pitchFamily="34" charset="-120"/>
               </a:rPr>
-              <a:t>Diana Nenu  -  SCSS 2026  -  Feature Engineering pentru date energetice</a:t>
+              <a:t>Diana Nenu  -  SCSS 2026  -  Feature engineering pentru serii temporale</a:t>
             </a:r>
             <a:endParaRPr lang="en-US" sz="900" dirty="0"/>
           </a:p>
@@ -2981,7 +2981,7 @@
                 <a:ea typeface="Calibri" pitchFamily="34" charset="-122"/>
                 <a:cs typeface="Calibri" pitchFamily="34" charset="-120"/>
               </a:rPr>
-              <a:t>Diana Nenu  -  SCSS 2026  -  Feature Engineering pentru date energetice</a:t>
+              <a:t>Diana Nenu  -  SCSS 2026  -  Feature engineering pentru serii temporale</a:t>
             </a:r>
             <a:endParaRPr lang="en-US" sz="900" dirty="0"/>
           </a:p>
@@ -3645,7 +3645,7 @@
                 <a:ea typeface="Calibri" pitchFamily="34" charset="-122"/>
                 <a:cs typeface="Calibri" pitchFamily="34" charset="-120"/>
               </a:rPr>
-              <a:t>Diana Nenu  -  SCSS 2026  -  Feature Engineering pentru date energetice</a:t>
+              <a:t>Diana Nenu  -  SCSS 2026  -  Feature engineering pentru serii temporale</a:t>
             </a:r>
             <a:endParaRPr lang="en-US" sz="900" dirty="0"/>
           </a:p>
@@ -4991,7 +4991,7 @@
                 <a:ea typeface="Calibri" pitchFamily="34" charset="-122"/>
                 <a:cs typeface="Calibri" pitchFamily="34" charset="-120"/>
               </a:rPr>
-              <a:t>Diana Nenu  -  SCSS 2026  -  Feature Engineering pentru date energetice</a:t>
+              <a:t>Diana Nenu  -  SCSS 2026  -  Feature engineering pentru serii temporale</a:t>
             </a:r>
             <a:endParaRPr lang="en-US" sz="900" dirty="0"/>
           </a:p>
@@ -6603,7 +6603,7 @@
                 <a:ea typeface="Calibri" pitchFamily="34" charset="-122"/>
                 <a:cs typeface="Calibri" pitchFamily="34" charset="-120"/>
               </a:rPr>
-              <a:t>Diana Nenu  -  SCSS 2026  -  Feature Engineering pentru date energetice</a:t>
+              <a:t>Diana Nenu  -  SCSS 2026  -  Feature engineering pentru serii temporale</a:t>
             </a:r>
             <a:endParaRPr lang="en-US" sz="900" dirty="0"/>
           </a:p>
@@ -7678,7 +7678,7 @@
                 <a:ea typeface="Calibri" pitchFamily="34" charset="-122"/>
                 <a:cs typeface="Calibri" pitchFamily="34" charset="-120"/>
               </a:rPr>
-              <a:t>Diana Nenu  -  SCSS 2026  -  Feature Engineering pentru date energetice</a:t>
+              <a:t>Diana Nenu  -  SCSS 2026  -  Feature engineering pentru serii temporale</a:t>
             </a:r>
             <a:endParaRPr lang="en-US" sz="900" dirty="0"/>
           </a:p>
@@ -8062,7 +8062,7 @@
                 <a:ea typeface="Calibri" pitchFamily="34" charset="-122"/>
                 <a:cs typeface="Calibri" pitchFamily="34" charset="-120"/>
               </a:rPr>
-              <a:t>Diana Nenu  -  SCSS 2026  -  Feature Engineering pentru date energetice</a:t>
+              <a:t>Diana Nenu  -  SCSS 2026  -  Feature engineering pentru serii temporale</a:t>
             </a:r>
             <a:endParaRPr lang="en-US" sz="900" dirty="0"/>
           </a:p>
@@ -8626,7 +8626,7 @@
                 <a:ea typeface="Calibri" pitchFamily="34" charset="-122"/>
                 <a:cs typeface="Calibri" pitchFamily="34" charset="-120"/>
               </a:rPr>
-              <a:t>Diana Nenu  -  SCSS 2026  -  Feature Engineering pentru date energetice</a:t>
+              <a:t>Diana Nenu  -  SCSS 2026  -  Feature engineering pentru serii temporale</a:t>
             </a:r>
             <a:endParaRPr lang="en-US" sz="900" dirty="0"/>
           </a:p>
@@ -11205,7 +11205,7 @@
                 <a:ea typeface="Calibri" pitchFamily="34" charset="-122"/>
                 <a:cs typeface="Calibri" pitchFamily="34" charset="-120"/>
               </a:rPr>
-              <a:t>Diana Nenu  -  SCSS 2026  -  Feature Engineering pentru date energetice</a:t>
+              <a:t>Diana Nenu  -  SCSS 2026  -  Feature engineering pentru serii temporale</a:t>
             </a:r>
             <a:endParaRPr lang="en-US" sz="900" dirty="0"/>
           </a:p>
@@ -12033,7 +12033,7 @@
                 <a:ea typeface="Calibri" pitchFamily="34" charset="-122"/>
                 <a:cs typeface="Calibri" pitchFamily="34" charset="-120"/>
               </a:rPr>
-              <a:t>Diana Nenu  -  SCSS 2026  -  Feature Engineering pentru date energetice</a:t>
+              <a:t>Diana Nenu  -  SCSS 2026  -  Feature engineering pentru serii temporale</a:t>
             </a:r>
             <a:endParaRPr lang="en-US" sz="900" dirty="0"/>
           </a:p>
@@ -12431,7 +12431,7 @@
                 <a:ea typeface="Calibri" pitchFamily="34" charset="-122"/>
                 <a:cs typeface="Calibri" pitchFamily="34" charset="-120"/>
               </a:rPr>
-              <a:t>Diana Nenu  -  SCSS 2026  -  Feature Engineering pentru date energetice</a:t>
+              <a:t>Diana Nenu  -  SCSS 2026  -  Feature engineering pentru serii temporale</a:t>
             </a:r>
             <a:endParaRPr lang="en-US" sz="900" dirty="0"/>
           </a:p>

--- a/docs/SCSS/SCSS_FeatureEngineering_Diana_Nenu.pptx
+++ b/docs/SCSS/SCSS_FeatureEngineering_Diana_Nenu.pptx
@@ -18,9 +18,11 @@
     <p:sldId id="266" r:id="rId12"/>
     <p:sldId id="267" r:id="rId13"/>
     <p:sldId id="268" r:id="rId14"/>
+    <p:sldId id="269" r:id="rId15"/>
+    <p:sldId id="270" r:id="rId16"/>
   </p:sldIdLst>
   <p:notesMasterIdLst>
-    <p:notesMasterId r:id="rId15"/>
+    <p:notesMasterId r:id="rId17"/>
   </p:notesMasterIdLst>
   <p:sldSz cx="12192000" cy="6858000"/>
   <p:notesSz cx="6858000" cy="12192000"/>
@@ -602,7 +604,7 @@
           <a:p>
             <a:r>
               <a:rPr lang="en-US" dirty="0"/>
-              <a:t>Aceasta figura este din capitolul 4.6 al disertatiei mele si arata cum cele trei tehnici se completeaza. In albastru aveti valoarea reala - target-ul predictiei. In portocaliu, lag_1 - aceeasi serie decalata cu o pozitie. Vedeti ca urmareste extrem de bine valoarea reala, cu un decalaj de o ora. In verde, rolling mean 24 - o linie mai neteda care captureaza trend-ul de fond, fara salturile de scurta durata. Cele trei perspective sunt complementare. Lag-ul ne spune 'unde a fost recent', rolling mean ne spune 'in ce directie generala merge', iar encoding-ul ciclic ne spune 'unde suntem in ciclul zilnic si saptamanal'. Modelul XGBoost, cand are aceste trei tipuri de features, are toate ingredientele de care are nevoie pentru a invata pattern-urile time series energetice.</a:t>
+              <a:t>Tehnica a treia se numeste rolling features sau caracteristici calculate pe un rolling window. Ideea de baza este ca un singur punct din trecut - chiar si lag_1 - poate fi atipic. De exemplu, daca acum o ora a fost o anomalie de pret din cauza unei pene de curent, modelul ar fi indus in eroare. Mai bine combinam mai multe puncte din trecut intr-o singura statistica. Cea mai naturala este media. Implementarea: rolling(24).mean() calculeaza media ultimelor 24 de valori, plimband fereastra cu o pozitie la fiecare pas. Rolling mean captureaza tendinta - daca media ultimelor 3 ore este 60 EUR, pretul actual este probabil tot in zona 60 EUR. Rolling std calculeaza deviatia standard - captureaza volatilitatea. Daca pretul a sarit haotic in ultimele 24 ore, deviatia e mare, modelul stie ca e o perioada instabila. DAR exista o problema TEHNICA importanta cu codul pe care l-am scris pe slide. Aceste linii de cod, executate exact asa, vor produce un rezultat foarte performant in evaluare - DAR FALS. Vom vedea de ce pe urmatorul slide.</a:t>
             </a:r>
             <a:endParaRPr lang="en-US" dirty="0"/>
           </a:p>
@@ -690,7 +692,7 @@
           <a:p>
             <a:r>
               <a:rPr lang="en-US" dirty="0"/>
-              <a:t>Acum sa vedem rezultatele empirice. Am aplicat cele trei tehnici de feature engineering pe setul de date al pretului energetic spaniol - 34.896 de ore inregistrate pe 4 ani, 78 de features dupa preprocessing. Am antrenat 7 modele diferite: LinearRegression ca baseline, doua variante regularizate Ridge si Lasso, RandomForest, XGBoost, XGBoost cu hyperparameter tuning prin Optuna, si LSTM ca model deep learning. Toate modelele clasice obtin scoruri foarte bune - R-patrat intre 0.947 si 0.968. Asta este o validare puternica: feature engineering-ul a creat coloane atat de informative, incat aproape orice model performeaza bine. Castigatorul este XGBoost cu R-patrat de 0.968, eroare medie patratica de 2.07 EUR/MWh si eroare procentuala medie de 2.57%. LSTM-ul a obtinut R-patrat negativ doar pentru ca in MODE demo l-am rulat pe 1000 de randuri si putine epoci - date insuficiente pentru deep learning. Cand voi rula pe Databricks cu MODE full pe 15.000 randuri si 15 epoci, va recupera. Insight-ul important: diferenta intre cele 6 modele clasice este sub 0.02 in R-patrat. Ceea ce face diferenta nu este atat alegerea modelului, cat calitatea features-urilor. Asa este in time series.</a:t>
+              <a:t>Acesta este momentul tehnic cel mai important din prezentarea mea. Sa privim ce se intampla in cele doua panouri. In stanga am calculat rolling mean de 3 ore FARA shift. Cand calculez media valorilor de la momentele t-2, t-1 si t, problema este ca includ si valoarea de la t - exact valoarea pe care vrem sa o prezicem. Modelul, antrenat cu acest feature, va invata ca daca roll_mean este 50, atunci pretul este aproape sigur in zona 50, cu R-patrat de 0.9361 - aparent excelent. DAR acesta este DATA LEAKAGE. Modelul nu va functiona pe date noi pentru ca acolo nu avem valoarea curenta - exact pe ea o prezicem. In dreapta am corectat folosind .shift(1) inainte de rolling. Asta deplaseaza fereastra cu un pas - acum media include doar valorile de la t-3, t-2 si t-1, FARA t. R-patrat scade aparent la 0.7460, dar acesta este scorul CINSTIT. Modelul invata o relatie REALA care va functiona si in productie. Aceasta diferenta - un simplu .shift(1) - este diferenta intre un model care arata bine pe evaluare dar esueaza in productie, si un model care performeaza consistent. Este genul de detaliu pe care literatura tehnica nu il subliniaza dar care decide intre proiecte reusite si esecuri.</a:t>
             </a:r>
             <a:endParaRPr lang="en-US" dirty="0"/>
           </a:p>
@@ -778,7 +780,7 @@
           <a:p>
             <a:r>
               <a:rPr lang="en-US" dirty="0"/>
-              <a:t>Sa rezumam in trei puncte cheie. Primul: pe time series, feature engineering este mai important decat selectia modelului. Pe pretul Spania, toate cele 6 modele clasice au obtinut R-patrat intre 0.947 si 0.968 - o diferenta minima de 2 procente. Ce a contat cu adevarat au fost cele 3 tehnici - encoding ciclic, lag features si rolling features - aplicate corect pe datele brute. Modelul ar fi performat slab cu orice algoritm, fara aceste features. Acesta este un lucru de mare valoare pentru orice profesionist care lucreaza pe time series. Al doilea: detaliile tehnice fac diferenta intre cinstit si fals. Un simplu .shift(1) inainte de rolling separa un model care 'pacaleste' pe test, de un model care va performa consistent in productie. Atentia la detaliile aparente, dar care matematic schimba complet semnificatia features-urilor, este esentiala. Al treilea: aceste tehnici sunt universal aplicabile. Le-am aplicat pe consum SUA, pret Spania, si le voi aplica pe productia solara India. Sunt un fundament metodologic care se transfera intre domenii.</a:t>
+              <a:t>Aceasta figura este din capitolul 4.6 al disertatiei mele si arata cum cele trei tehnici se completeaza. In albastru aveti valoarea reala - target-ul predictiei. In portocaliu, lag_1 - aceeasi serie decalata cu o pozitie. Vedeti ca urmareste extrem de bine valoarea reala, cu un decalaj de o ora. In verde, rolling mean 24 - o linie mai neteda care captureaza trend-ul de fond, fara salturile de scurta durata. Cele trei perspective sunt complementare. Lag-ul ne spune 'unde a fost recent', rolling mean ne spune 'in ce directie generala merge', iar encoding-ul ciclic ne spune 'unde suntem in ciclul zilnic si saptamanal'. Modelul XGBoost, cand are aceste trei tipuri de features, are toate ingredientele de care are nevoie pentru a invata pattern-urile time series energetice.</a:t>
             </a:r>
             <a:endParaRPr lang="en-US" dirty="0"/>
           </a:p>
@@ -866,7 +868,7 @@
           <a:p>
             <a:r>
               <a:rPr lang="en-US" dirty="0"/>
-              <a:t>Va multumesc pentru atentie. Aceasta a fost o privire de ansamblu asupra feature engineering-ului pentru time series energetice, asa cum l-am implementat eu in lucrarea de disertatie. Cele trei idei de retinut sunt: encoding ciclic pune orele pe cerc, lag features dau memorie modelului - cu descoperirea ca lag_1 domina enorm, si rolling cu shift(1) este detaliul tehnic care decide intre cinstit si fals. Astept acum intrebarile dumneavoastra cu placere. Intrebari posibile pe care le-am anticipat: 1. De ce nu folosesti deep learning direct cu seria bruta? Raspuns: am incercat LSTM, dar pe seria pretului Spania XGBoost cu features-urile mele il bate (R² 0.968 vs negativ in demo). Plus XGBoost se antreneaza in secunde, LSTM in zeci de minute. Pentru productie, raportul performanta/cost favorizeaza XGBoost. 2. De ce numar de ore in lag? Raspuns: lag 1 - memoria foarte scurta, lag 24 - acelasi moment ieri, lag 168 - acelasi moment saptamana trecuta. Sunt valori canonice in literatura time series energetice. 3. Cum tratezi valorile lipsa create de shift? Raspuns: shift(168) creeaza 168 de NaN-uri la inceputul seriei. Le elimin prin .dropna() inainte de antrenare - pierd 168 randuri din 35.000, deci neglijabil. 4. Cum se transfera pe India / productie solara? Raspuns: aceleasi tehnici, dar lag-urile relevante difera - productia solara are periodicitate zilnica puternica (lag_24) si nu saptamanala. Voi calibra in sesiunea 3.</a:t>
+              <a:t>Acum sa vedem rezultatele empirice. Am aplicat cele trei tehnici de feature engineering pe setul de date al pretului energetic spaniol - 34.896 de ore inregistrate pe 4 ani, 78 de features dupa preprocessing. Am antrenat 7 modele diferite: LinearRegression ca baseline, doua variante regularizate Ridge si Lasso, RandomForest, XGBoost, XGBoost cu hyperparameter tuning prin Optuna, si LSTM ca model deep learning. Toate modelele clasice obtin scoruri foarte bune - R-patrat intre 0.947 si 0.968. Asta este o validare puternica: feature engineering-ul a creat coloane atat de informative, incat aproape orice model performeaza bine. Castigatorul este XGBoost cu R-patrat de 0.968, eroare medie patratica de 2.07 EUR/MWh si eroare procentuala medie de 2.57%. LSTM-ul a obtinut R-patrat negativ doar pentru ca in MODE demo l-am rulat pe 1000 de randuri si putine epoci - date insuficiente pentru deep learning. Cand voi rula pe Databricks cu MODE full pe 15.000 randuri si 15 epoci, va recupera. Insight-ul important: diferenta intre cele 6 modele clasice este sub 0.02 in R-patrat. Ceea ce face diferenta nu este atat alegerea modelului, cat calitatea features-urilor. Asa este in time series.</a:t>
             </a:r>
             <a:endParaRPr lang="en-US" dirty="0"/>
           </a:p>
@@ -890,6 +892,182 @@
             <a:fld id="{F7021451-1387-4CA6-816F-3879F97B5CBC}" type="slidenum">
               <a:rPr lang="en-US"/>
               <a:t>13</a:t>
+            </a:fld>
+            <a:endParaRPr lang="en-US"/>
+          </a:p>
+        </p:txBody>
+      </p:sp>
+    </p:spTree>
+    <p:extLst>
+      <p:ext uri="{BB962C8B-B14F-4D97-AF65-F5344CB8AC3E}">
+        <p14:creationId xmlns:p14="http://schemas.microsoft.com/office/powerpoint/2010/main" val="1024086991"/>
+      </p:ext>
+    </p:extLst>
+  </p:cSld>
+  <p:clrMapOvr>
+    <a:masterClrMapping/>
+  </p:clrMapOvr>
+</p:notes>
+</file>
+
+<file path=ppt/notesSlides/notesSlide14.xml><?xml version="1.0" encoding="utf-8"?>
+<p:notes xmlns:a="http://schemas.openxmlformats.org/drawingml/2006/main" xmlns:r="http://schemas.openxmlformats.org/officeDocument/2006/relationships" xmlns:p="http://schemas.openxmlformats.org/presentationml/2006/main">
+  <p:cSld>
+    <p:spTree>
+      <p:nvGrpSpPr>
+        <p:cNvPr id="1" name=""/>
+        <p:cNvGrpSpPr/>
+        <p:nvPr/>
+      </p:nvGrpSpPr>
+      <p:grpSpPr>
+        <a:xfrm>
+          <a:off x="0" y="0"/>
+          <a:ext cx="0" cy="0"/>
+          <a:chOff x="0" y="0"/>
+          <a:chExt cx="0" cy="0"/>
+        </a:xfrm>
+      </p:grpSpPr>
+      <p:sp>
+        <p:nvSpPr>
+          <p:cNvPr id="2" name="Slide Image Placeholder 1"/>
+          <p:cNvSpPr>
+            <a:spLocks noGrp="1" noRot="1" noChangeAspect="1"/>
+          </p:cNvSpPr>
+          <p:nvPr>
+            <p:ph type="sldImg"/>
+          </p:nvPr>
+        </p:nvSpPr>
+        <p:spPr/>
+      </p:sp>
+      <p:sp>
+        <p:nvSpPr>
+          <p:cNvPr id="3" name="Notes Placeholder 2"/>
+          <p:cNvSpPr>
+            <a:spLocks noGrp="1"/>
+          </p:cNvSpPr>
+          <p:nvPr>
+            <p:ph type="body" idx="1"/>
+          </p:nvPr>
+        </p:nvSpPr>
+        <p:spPr/>
+        <p:txBody>
+          <a:bodyPr/>
+          <a:lstStyle/>
+          <a:p>
+            <a:r>
+              <a:rPr lang="en-US" dirty="0"/>
+              <a:t>Sa rezumam in trei puncte cheie. Primul: pe time series, feature engineering este mai important decat selectia modelului. Pe pretul Spania, toate cele 6 modele clasice au obtinut R-patrat intre 0.947 si 0.968 - o diferenta minima de 2 procente. Ce a contat cu adevarat au fost cele 3 tehnici - encoding ciclic, lag features si rolling features - aplicate corect pe datele brute. Modelul ar fi performat slab cu orice algoritm, fara aceste features. Acesta este un lucru de mare valoare pentru orice profesionist care lucreaza pe time series. Al doilea: detaliile tehnice fac diferenta intre cinstit si fals. Un simplu .shift(1) inainte de rolling separa un model care 'pacaleste' pe test, de un model care va performa consistent in productie. Atentia la detaliile aparente, dar care matematic schimba complet semnificatia features-urilor, este esentiala. Al treilea: aceste tehnici sunt universal aplicabile. Le-am aplicat pe consum SUA, pret Spania, si le voi aplica pe productia solara India. Sunt un fundament metodologic care se transfera intre domenii.</a:t>
+            </a:r>
+            <a:endParaRPr lang="en-US" dirty="0"/>
+          </a:p>
+        </p:txBody>
+      </p:sp>
+      <p:sp>
+        <p:nvSpPr>
+          <p:cNvPr id="4" name="Slide Number Placeholder 3"/>
+          <p:cNvSpPr>
+            <a:spLocks noGrp="1"/>
+          </p:cNvSpPr>
+          <p:nvPr>
+            <p:ph type="sldNum" sz="quarter" idx="10"/>
+          </p:nvPr>
+        </p:nvSpPr>
+        <p:spPr/>
+        <p:txBody>
+          <a:bodyPr/>
+          <a:lstStyle/>
+          <a:p>
+            <a:fld id="{F7021451-1387-4CA6-816F-3879F97B5CBC}" type="slidenum">
+              <a:rPr lang="en-US"/>
+              <a:t>14</a:t>
+            </a:fld>
+            <a:endParaRPr lang="en-US"/>
+          </a:p>
+        </p:txBody>
+      </p:sp>
+    </p:spTree>
+    <p:extLst>
+      <p:ext uri="{BB962C8B-B14F-4D97-AF65-F5344CB8AC3E}">
+        <p14:creationId xmlns:p14="http://schemas.microsoft.com/office/powerpoint/2010/main" val="1024086991"/>
+      </p:ext>
+    </p:extLst>
+  </p:cSld>
+  <p:clrMapOvr>
+    <a:masterClrMapping/>
+  </p:clrMapOvr>
+</p:notes>
+</file>
+
+<file path=ppt/notesSlides/notesSlide15.xml><?xml version="1.0" encoding="utf-8"?>
+<p:notes xmlns:a="http://schemas.openxmlformats.org/drawingml/2006/main" xmlns:r="http://schemas.openxmlformats.org/officeDocument/2006/relationships" xmlns:p="http://schemas.openxmlformats.org/presentationml/2006/main">
+  <p:cSld>
+    <p:spTree>
+      <p:nvGrpSpPr>
+        <p:cNvPr id="1" name=""/>
+        <p:cNvGrpSpPr/>
+        <p:nvPr/>
+      </p:nvGrpSpPr>
+      <p:grpSpPr>
+        <a:xfrm>
+          <a:off x="0" y="0"/>
+          <a:ext cx="0" cy="0"/>
+          <a:chOff x="0" y="0"/>
+          <a:chExt cx="0" cy="0"/>
+        </a:xfrm>
+      </p:grpSpPr>
+      <p:sp>
+        <p:nvSpPr>
+          <p:cNvPr id="2" name="Slide Image Placeholder 1"/>
+          <p:cNvSpPr>
+            <a:spLocks noGrp="1" noRot="1" noChangeAspect="1"/>
+          </p:cNvSpPr>
+          <p:nvPr>
+            <p:ph type="sldImg"/>
+          </p:nvPr>
+        </p:nvSpPr>
+        <p:spPr/>
+      </p:sp>
+      <p:sp>
+        <p:nvSpPr>
+          <p:cNvPr id="3" name="Notes Placeholder 2"/>
+          <p:cNvSpPr>
+            <a:spLocks noGrp="1"/>
+          </p:cNvSpPr>
+          <p:nvPr>
+            <p:ph type="body" idx="1"/>
+          </p:nvPr>
+        </p:nvSpPr>
+        <p:spPr/>
+        <p:txBody>
+          <a:bodyPr/>
+          <a:lstStyle/>
+          <a:p>
+            <a:r>
+              <a:rPr lang="en-US" dirty="0"/>
+              <a:t>Va multumesc pentru atentie. Aceasta a fost o privire de ansamblu asupra feature engineering-ului pentru time series energetice, asa cum l-am implementat eu in lucrarea de disertatie. Cele trei idei de retinut sunt: encoding ciclic pune orele pe cerc, lag features dau memorie modelului - cu descoperirea ca lag_1 domina enorm, si rolling cu shift(1) este detaliul tehnic care decide intre cinstit si fals. Astept acum intrebarile dumneavoastra cu placere. Intrebari posibile pe care le-am anticipat: 1. De ce nu folosesti deep learning direct cu seria bruta? Raspuns: am incercat LSTM, dar pe seria pretului Spania XGBoost cu features-urile mele il bate (R² 0.968 vs negativ in demo). Plus XGBoost se antreneaza in secunde, LSTM in zeci de minute. Pentru productie, raportul performanta/cost favorizeaza XGBoost. 2. De ce numar de ore in lag? Raspuns: lag 1 - memoria foarte scurta, lag 24 - acelasi moment ieri, lag 168 - acelasi moment saptamana trecuta. Sunt valori canonice in literatura time series energetice. 3. Cum tratezi valorile lipsa create de shift? Raspuns: shift(168) creeaza 168 de NaN-uri la inceputul seriei. Le elimin prin .dropna() inainte de antrenare - pierd 168 randuri din 35.000, deci neglijabil. 4. Cum se transfera pe India / productie solara? Raspuns: aceleasi tehnici, dar lag-urile relevante difera - productia solara are periodicitate zilnica puternica (lag_24) si nu saptamanala. Voi calibra in sesiunea 3.</a:t>
+            </a:r>
+            <a:endParaRPr lang="en-US" dirty="0"/>
+          </a:p>
+        </p:txBody>
+      </p:sp>
+      <p:sp>
+        <p:nvSpPr>
+          <p:cNvPr id="4" name="Slide Number Placeholder 3"/>
+          <p:cNvSpPr>
+            <a:spLocks noGrp="1"/>
+          </p:cNvSpPr>
+          <p:nvPr>
+            <p:ph type="sldNum" sz="quarter" idx="10"/>
+          </p:nvPr>
+        </p:nvSpPr>
+        <p:spPr/>
+        <p:txBody>
+          <a:bodyPr/>
+          <a:lstStyle/>
+          <a:p>
+            <a:fld id="{F7021451-1387-4CA6-816F-3879F97B5CBC}" type="slidenum">
+              <a:rPr lang="en-US"/>
+              <a:t>15</a:t>
             </a:fld>
             <a:endParaRPr lang="en-US"/>
           </a:p>
@@ -1306,7 +1484,7 @@
           <a:p>
             <a:r>
               <a:rPr lang="en-US" dirty="0"/>
-              <a:t>Solutia matematica este eleganta si simpla. Inlocuim ora, care era o singura coloana cu numere 0-23, cu DOUA coloane: sin si cos al unghiului corespunzator orei. Formula: hour_sin = sin(2 pi inmultit cu ora impartit la 24), si analog pentru cos. Geometric, asezam fiecare ora pe un cerc cu raza 1. Ora 0 e in pozitia (1, 0), ora 6 e in (0, 1), ora 12 in (-1, 0), ora 18 in (0, -1). De ce functioneaza? Pentru ca acum ora 23 si ora 0, care erau la distanta 23 in reprezentare liniara, sunt aproape egale - cosinusul de 23 si cosinusul de 0 sunt aproape identice. Calculand distanta euclidiana intre punctele lor pe cerc obtin 0.27 unitati - foarte mica, exact cum este si distanta lor in realitatea fizica. In dreapta vedeti figura din capitolul 4.2 al disertatiei mele - vizualizarea cercului trigonometric cu cele 24 de ore. Aceeasi tehnica se aplica si pentru ziua saptamanii, luna anului, ziua din an - orice variabila care are natura ciclica.</a:t>
+              <a:t>Inainte de a vedea cum aplicam sin si cos pentru reprezentarea timpului, sa reamintim pe scurt ce sunt aceste functii. In panoul stang vedeti cercul unitate - cercul cu raza 1, centrat in origine. Pentru orice unghi theta, exista un punct P pe cerc cu coordonatele (cos theta, sin theta). Cosinusul este coordonata pe orizontala, sinusul este coordonata pe verticala. In panoul drept vedeti cele doua functii ca grafic, pe perioada 0 - 2 pi. Vedeti ca sunt curbe netede, periodice. Cos porneste de la 1 si scade, sin porneste de la 0 si creste. Trei proprietati cheie ne intereseaza pe noi. Prima: sunt PERIODICE cu perioada 2 pi. Dupa o oscilatie completa se repeta identic. Asta e exact ce ne trebuie pentru ciclurile temporale - ora 0 si ora 24 trebuie sa coincida ca semnificatie. A doua: sunt CONTINUE si NETEDE. Nu au salturi. Asta inseamna ca pentru ore consecutive 22, 23, 0, 1 nu vom avea o discontinuitate falsa. A treia: cele DOUA functii impreuna identifica UNIC un punct pe cerc. Daca am folosi doar sinusul, ora 5 si ora 7 ar avea aproape aceeasi valoare - ambigue. Cu ambele, fiecare ora are o pozitie unica pe cerc. Acum, in slide-ul urmator, aplicam aceste functii ca sa reprezentam ora corect.</a:t>
             </a:r>
             <a:endParaRPr lang="en-US" dirty="0"/>
           </a:p>
@@ -1394,7 +1572,7 @@
           <a:p>
             <a:r>
               <a:rPr lang="en-US" dirty="0"/>
-              <a:t>Tehnica a doua se numeste lag features si raspunde la intrebarea: cum dam modelului memorie scurta? Ideea este foarte intuitiva. Pretul electricitatii peste o ora va fi aproape sigur foarte aproape de pretul de acum. Pretul nu sare de la 50 la 100 EUR/MWh intr-o ora - cererea si oferta nu se schimba brusc. Implementarea in Python e o linie de cod. Functia shift din pandas muta valorile cu un anumit numar de pozitii. shift(1) creeaza o coloana cu valoarea de acum o ora, shift(24) cu valoarea de acum 24 ore - aceeasi ora a zilei precedente, shift(168) cu valoarea de acum o saptamana - aceeasi ora a zilei similare din saptamana trecuta. Astfel modelul primeste o 'memorie' explicita - vede in fiecare rand nu doar valoarea actuala, ci si ce era cu o ora, o zi, o saptamana in urma. Descoperirea pe care am facut-o in sesiunea 1 din disertatie este socantra: pe modelul USA, doar feature-ul lag_1 explica peste 90% din varianta predictiei XGBoost. Celelalte 28 de features combinate explica restul de 10%. Asta inseamna ca pentru predictia pe serii energetice, ceea ce s-a intamplat acum o ora este de departe cea mai importanta informatie - mai importanta decat ora, ziua, vremea, tot ce ne-am gandi.</a:t>
+              <a:t>Solutia matematica este eleganta si simpla. Inlocuim ora, care era o singura coloana cu numere 0-23, cu DOUA coloane: sin si cos al unghiului corespunzator orei. Formula: hour_sin = sin(2 pi inmultit cu ora impartit la 24), si analog pentru cos. Geometric, asezam fiecare ora pe un cerc cu raza 1. Ora 0 e in pozitia (1, 0), ora 6 e in (0, 1), ora 12 in (-1, 0), ora 18 in (0, -1). De ce functioneaza? Pentru ca acum ora 23 si ora 0, care erau la distanta 23 in reprezentare liniara, sunt aproape egale - cosinusul de 23 si cosinusul de 0 sunt aproape identice. Calculand distanta euclidiana intre punctele lor pe cerc obtin 0.27 unitati - foarte mica, exact cum este si distanta lor in realitatea fizica. In dreapta vedeti figura din capitolul 4.2 al disertatiei mele - vizualizarea cercului trigonometric cu cele 24 de ore. Aceeasi tehnica se aplica si pentru ziua saptamanii, luna anului, ziua din an - orice variabila care are natura ciclica.</a:t>
             </a:r>
             <a:endParaRPr lang="en-US" dirty="0"/>
           </a:p>
@@ -1482,7 +1660,7 @@
           <a:p>
             <a:r>
               <a:rPr lang="en-US" dirty="0"/>
-              <a:t>Tehnica a treia se numeste rolling features sau caracteristici cu fereastra alunecatoare. Ideea de baza este ca un singur punct din trecut - chiar si lag_1 - poate fi atipic. De exemplu, daca acum o ora a fost o anomalie de pret din cauza unei pene de curent, modelul ar fi indus in eroare. Mai bine combinam mai multe puncte din trecut intr-o singura statistica. Cea mai naturala este media. Implementarea: rolling(24).mean() calculeaza media ultimelor 24 de valori, plimband fereastra cu o pozitie la fiecare pas. Rolling mean captureaza tendinta - daca media ultimelor 3 ore este 60 EUR, pretul actual este probabil tot in zona 60 EUR. Rolling std calculeaza deviatia standard - captureaza volatilitatea. Daca pretul a sarit haotic in ultimele 24 ore, deviatia e mare, modelul stie ca e o perioada instabila. DAR exista o problema TEHNICA importanta cu codul pe care l-am scris pe slide. Aceste linii de cod, executate exact asa, vor produce un rezultat foarte performant in evaluare - DAR FALS. Vom vedea de ce pe urmatorul slide.</a:t>
+              <a:t>Acest concept matematic - autoregresivitatea - este fundamentul teoretic pentru tehnica urmatoare, lag features. Definitia simpla este aceasta: o serie temporala se numeste autoregresiva daca valorile ei viitoare pot fi prezise folosind propriile valori trecute. Etimologia ne ajuta sa retinem termenul: auto inseamna 'de la sine', regresie in statistica inseamna explicarea unei variabile in functie de alte variabile, deci autoregresia inseamna ca o variabila se explica pe sine prin propriile valori anterioare. Cel mai simplu model matematic este AR de ordinul 1, prescurtat AR(1). Valoarea la momentul t este o combinatie liniara intre o constanta c, valoarea anterioara y(t-1) inmultita cu un coeficient phi (intre -1 si 1), si un zgomot aleator epsilon. Cu cat phi este mai aproape de 1, cu atat seria este mai autoregresiva. Cu phi 0 nu mai exista relatie - este zgomot pur. In dreapta vedeti vizualizarea pe date sintetice care simuleaza un pret energetic cu phi de 0.95. In panoul stang vedeti seria propriu-zisa. Pentru predictia la momentul t = 180 (punctul galben), ne uitam la valorile de la t-1 (punctul coral) si t-24 (punctul violet). In panoul drept vedeti scatter-ul pret(t-1) versus pret(t) - punctele sunt aliniate aproape perfect pe diagonala y=x. Corelatia Pearson este aproape 0.9. Pe DATELE REALE Spania din lucrarea mea, corelatia pret(t) cu pret(t-1) este aproape 0.99. Aceasta este de ce, atunci cand spun in capitolul 5 al disertatiei ca lag_1 explica peste 90% din decizia modelului, am o explicatie teoretica solida - autoregresivitatea aproape perfecta a seriei.</a:t>
             </a:r>
             <a:endParaRPr lang="en-US" dirty="0"/>
           </a:p>
@@ -1570,7 +1748,7 @@
           <a:p>
             <a:r>
               <a:rPr lang="en-US" dirty="0"/>
-              <a:t>Acesta este momentul tehnic cel mai important din prezentarea mea. Sa privim ce se intampla in cele doua panouri. In stanga am calculat rolling mean de 3 ore FARA shift. Cand calculez media valorilor de la momentele t-2, t-1 si t, problema este ca includ si valoarea de la t - exact valoarea pe care vrem sa o prezicem. Modelul, antrenat cu acest feature, va invata ca daca roll_mean este 50, atunci pretul este aproape sigur in zona 50, cu R-patrat de 0.9361 - aparent excelent. DAR acesta este DATA LEAKAGE. Modelul nu va functiona pe date noi pentru ca acolo nu avem valoarea curenta - exact pe ea o prezicem. In dreapta am corectat folosind .shift(1) inainte de rolling. Asta deplaseaza fereastra cu un pas - acum media include doar valorile de la t-3, t-2 si t-1, FARA t. R-patrat scade aparent la 0.7460, dar acesta este scorul CINSTIT. Modelul invata o relatie REALA care va functiona si in productie. Aceasta diferenta - un simplu .shift(1) - este diferenta intre un model care arata bine pe evaluare dar esueaza in productie, si un model care performeaza consistent. Este genul de detaliu pe care literatura tehnica nu il subliniaza dar care decide intre proiecte reusite si esecuri.</a:t>
+              <a:t>Tehnica a doua se numeste lag features si raspunde la intrebarea: cum dam modelului memorie scurta? Ideea este foarte intuitiva. Pretul electricitatii peste o ora va fi aproape sigur foarte aproape de pretul de acum. Pretul nu sare de la 50 la 100 EUR/MWh intr-o ora - cererea si oferta nu se schimba brusc. Implementarea in Python e o linie de cod. Functia shift din pandas muta valorile cu un anumit numar de pozitii. shift(1) creeaza o coloana cu valoarea de acum o ora, shift(24) cu valoarea de acum 24 ore - aceeasi ora a zilei precedente, shift(168) cu valoarea de acum o saptamana - aceeasi ora a zilei similare din saptamana trecuta. Astfel modelul primeste o 'memorie' explicita - vede in fiecare rand nu doar valoarea actuala, ci si ce era cu o ora, o zi, o saptamana in urma. Descoperirea pe care am facut-o in sesiunea 1 din disertatie este socantra: pe modelul USA, doar feature-ul lag_1 explica peste 90% din varianta predictiei XGBoost. Celelalte 28 de features combinate explica restul de 10%. Asta inseamna ca pentru predictia pe serii energetice, ceea ce s-a intamplat acum o ora este de departe cea mai importanta informatie - mai importanta decat ora, ziua, vremea, tot ce ne-am gandi.</a:t>
             </a:r>
             <a:endParaRPr lang="en-US" dirty="0"/>
           </a:p>
@@ -2313,7 +2491,7 @@
                 <a:ea typeface="Calibri" pitchFamily="34" charset="-122"/>
                 <a:cs typeface="Calibri" pitchFamily="34" charset="-120"/>
               </a:rPr>
-              <a:t>SINERGIE</a:t>
+              <a:t>TREND SI VOLATILITATE</a:t>
             </a:r>
             <a:endParaRPr lang="en-US" sz="1100" dirty="0"/>
           </a:p>
@@ -2352,7 +2530,7 @@
                 <a:ea typeface="Calibri" pitchFamily="34" charset="-122"/>
                 <a:cs typeface="Calibri" pitchFamily="34" charset="-120"/>
               </a:rPr>
-              <a:t>Cele trei tehnici impreuna</a:t>
+              <a:t>Tehnica 3A. Rolling features - rolling window</a:t>
             </a:r>
             <a:endParaRPr lang="en-US" sz="2800" dirty="0"/>
           </a:p>
@@ -2383,49 +2561,163 @@
           </a:ln>
         </p:spPr>
       </p:sp>
-      <p:pic>
-        <p:nvPicPr>
-          <p:cNvPr id="6" name="Image 0" descr="/sessions/vibrant-elegant-pasteur/mnt/Disertatie_AI_Platform/reports/figures/fig_4_2_lag_vs_real_vs_rolling.png">    </p:cNvPr>
-          <p:cNvPicPr>
-            <a:picLocks noChangeAspect="1"/>
-          </p:cNvPicPr>
-          <p:nvPr/>
-        </p:nvPicPr>
-        <p:blipFill>
-          <a:blip r:embed="rId1"/>
-          <a:srcRect l="0" r="0" t="0" b="0"/>
-          <a:stretch/>
-        </p:blipFill>
-        <p:spPr>
-          <a:xfrm>
-            <a:off x="914400" y="1463040"/>
-            <a:ext cx="10332720" cy="4114800"/>
-          </a:xfrm>
-          <a:prstGeom prst="rect">
-            <a:avLst/>
-          </a:prstGeom>
-        </p:spPr>
-      </p:pic>
-      <p:sp>
-        <p:nvSpPr>
-          <p:cNvPr id="7" name="Shape 4"/>
-          <p:cNvSpPr/>
-          <p:nvPr/>
-        </p:nvSpPr>
-        <p:spPr>
-          <a:xfrm>
-            <a:off x="548640" y="5669280"/>
-            <a:ext cx="11064240" cy="868680"/>
+      <p:sp>
+        <p:nvSpPr>
+          <p:cNvPr id="6" name="Text 4"/>
+          <p:cNvSpPr/>
+          <p:nvPr/>
+        </p:nvSpPr>
+        <p:spPr>
+          <a:xfrm>
+            <a:off x="548640" y="1554480"/>
+            <a:ext cx="11018520" cy="1554480"/>
+          </a:xfrm>
+          <a:prstGeom prst="rect">
+            <a:avLst/>
+          </a:prstGeom>
+          <a:noFill/>
+          <a:ln/>
+        </p:spPr>
+        <p:txBody>
+          <a:bodyPr wrap="square" rtlCol="0" anchor="t"/>
+          <a:lstStyle/>
+          <a:p>
+            <a:pPr indent="0" marL="0">
+              <a:buNone/>
+            </a:pPr>
+            <a:r>
+              <a:rPr lang="en-US" sz="1600" b="1" dirty="0">
+                <a:solidFill>
+                  <a:srgbClr val="F96167"/>
+                </a:solidFill>
+                <a:latin typeface="Calibri" pitchFamily="34" charset="0"/>
+                <a:ea typeface="Calibri" pitchFamily="34" charset="-122"/>
+                <a:cs typeface="Calibri" pitchFamily="34" charset="-120"/>
+              </a:rPr>
+              <a:t>Ideea
+</a:t>
+            </a:r>
+            <a:pPr indent="0" marL="0">
+              <a:buNone/>
+            </a:pPr>
+            <a:r>
+              <a:rPr lang="en-US" sz="1250" dirty="0">
+                <a:solidFill>
+                  <a:srgbClr val="1F2937"/>
+                </a:solidFill>
+                <a:latin typeface="Calibri" pitchFamily="34" charset="0"/>
+                <a:ea typeface="Calibri" pitchFamily="34" charset="-122"/>
+                <a:cs typeface="Calibri" pitchFamily="34" charset="-120"/>
+              </a:rPr>
+              <a:t>Cat de bine prezice un singur punct din trecut? Nu intotdeauna - poate fi un punct atipic. Mai bine combinam mai multe valori recente.
+</a:t>
+            </a:r>
+            <a:pPr indent="0" marL="0">
+              <a:buNone/>
+            </a:pPr>
+            <a:r>
+              <a:rPr lang="en-US" sz="1400" b="1" dirty="0">
+                <a:solidFill>
+                  <a:srgbClr val="F96167"/>
+                </a:solidFill>
+                <a:latin typeface="Calibri" pitchFamily="34" charset="0"/>
+                <a:ea typeface="Calibri" pitchFamily="34" charset="-122"/>
+                <a:cs typeface="Calibri" pitchFamily="34" charset="-120"/>
+              </a:rPr>
+              <a:t>Solutia
+</a:t>
+            </a:r>
+            <a:pPr indent="0" marL="0">
+              <a:buNone/>
+            </a:pPr>
+            <a:r>
+              <a:rPr lang="en-US" sz="1250" dirty="0">
+                <a:solidFill>
+                  <a:srgbClr val="1F2937"/>
+                </a:solidFill>
+                <a:latin typeface="Calibri" pitchFamily="34" charset="0"/>
+                <a:ea typeface="Calibri" pitchFamily="34" charset="-122"/>
+                <a:cs typeface="Calibri" pitchFamily="34" charset="-120"/>
+              </a:rPr>
+              <a:t>Calculez statistici (medie, deviatie) pe o </a:t>
+            </a:r>
+            <a:pPr indent="0" marL="0">
+              <a:buNone/>
+            </a:pPr>
+            <a:r>
+              <a:rPr lang="en-US" sz="1250" b="1" dirty="0">
+                <a:solidFill>
+                  <a:srgbClr val="1F2937"/>
+                </a:solidFill>
+                <a:latin typeface="Calibri" pitchFamily="34" charset="0"/>
+                <a:ea typeface="Calibri" pitchFamily="34" charset="-122"/>
+                <a:cs typeface="Calibri" pitchFamily="34" charset="-120"/>
+              </a:rPr>
+              <a:t>rolling window</a:t>
+            </a:r>
+            <a:pPr indent="0" marL="0">
+              <a:buNone/>
+            </a:pPr>
+            <a:r>
+              <a:rPr lang="en-US" sz="1250" dirty="0">
+                <a:solidFill>
+                  <a:srgbClr val="1F2937"/>
+                </a:solidFill>
+                <a:latin typeface="Calibri" pitchFamily="34" charset="0"/>
+                <a:ea typeface="Calibri" pitchFamily="34" charset="-122"/>
+                <a:cs typeface="Calibri" pitchFamily="34" charset="-120"/>
+              </a:rPr>
+              <a:t> de N ore din trecut. Aceasta fereastra se 'plimba' odata cu timpul.</a:t>
+            </a:r>
+            <a:endParaRPr lang="en-US" sz="1600" dirty="0"/>
+          </a:p>
+        </p:txBody>
+      </p:sp>
+      <p:sp>
+        <p:nvSpPr>
+          <p:cNvPr id="7" name="Shape 5"/>
+          <p:cNvSpPr/>
+          <p:nvPr/>
+        </p:nvSpPr>
+        <p:spPr>
+          <a:xfrm>
+            <a:off x="548640" y="3200400"/>
+            <a:ext cx="5486400" cy="3017520"/>
           </a:xfrm>
           <a:prstGeom prst="rect">
             <a:avLst/>
           </a:prstGeom>
           <a:solidFill>
-            <a:srgbClr val="F4F5F7"/>
+            <a:srgbClr val="FFFFFF"/>
+          </a:solidFill>
+          <a:ln w="25400">
+            <a:solidFill>
+              <a:srgbClr val="F96167"/>
+            </a:solidFill>
+            <a:prstDash val="solid"/>
+          </a:ln>
+        </p:spPr>
+      </p:sp>
+      <p:sp>
+        <p:nvSpPr>
+          <p:cNvPr id="8" name="Shape 6"/>
+          <p:cNvSpPr/>
+          <p:nvPr/>
+        </p:nvSpPr>
+        <p:spPr>
+          <a:xfrm>
+            <a:off x="548640" y="3200400"/>
+            <a:ext cx="5486400" cy="502920"/>
+          </a:xfrm>
+          <a:prstGeom prst="rect">
+            <a:avLst/>
+          </a:prstGeom>
+          <a:solidFill>
+            <a:srgbClr val="F96167"/>
           </a:solidFill>
           <a:ln w="12700">
             <a:solidFill>
-              <a:srgbClr val="E5E7EB"/>
+              <a:srgbClr val="F96167"/>
             </a:solidFill>
             <a:prstDash val="solid"/>
           </a:ln>
@@ -2433,14 +2725,14 @@
       </p:sp>
       <p:sp>
         <p:nvSpPr>
-          <p:cNvPr id="8" name="Text 5"/>
-          <p:cNvSpPr/>
-          <p:nvPr/>
-        </p:nvSpPr>
-        <p:spPr>
-          <a:xfrm>
-            <a:off x="868680" y="5760720"/>
-            <a:ext cx="10515600" cy="777240"/>
+          <p:cNvPr id="9" name="Text 7"/>
+          <p:cNvSpPr/>
+          <p:nvPr/>
+        </p:nvSpPr>
+        <p:spPr>
+          <a:xfrm>
+            <a:off x="548640" y="3200400"/>
+            <a:ext cx="5486400" cy="502920"/>
           </a:xfrm>
           <a:prstGeom prst="rect">
             <a:avLst/>
@@ -2452,93 +2744,34 @@
           <a:bodyPr wrap="square" rtlCol="0" anchor="ctr"/>
           <a:lstStyle/>
           <a:p>
-            <a:pPr indent="0" marL="0">
-              <a:buNone/>
-            </a:pPr>
-            <a:r>
-              <a:rPr lang="en-US" sz="1300" b="1" dirty="0">
-                <a:solidFill>
-                  <a:srgbClr val="1F2937"/>
-                </a:solidFill>
-                <a:latin typeface="Calibri" pitchFamily="34" charset="0"/>
-                <a:ea typeface="Calibri" pitchFamily="34" charset="-122"/>
-                <a:cs typeface="Calibri" pitchFamily="34" charset="-120"/>
-              </a:rPr>
-              <a:t>Trei perspective complementare: </a:t>
-            </a:r>
-            <a:pPr indent="0" marL="0">
-              <a:buNone/>
-            </a:pPr>
-            <a:r>
-              <a:rPr lang="en-US" sz="1300" dirty="0">
-                <a:solidFill>
-                  <a:srgbClr val="1F2937"/>
-                </a:solidFill>
-                <a:latin typeface="Calibri" pitchFamily="34" charset="0"/>
-                <a:ea typeface="Calibri" pitchFamily="34" charset="-122"/>
-                <a:cs typeface="Calibri" pitchFamily="34" charset="-120"/>
-              </a:rPr>
-              <a:t>valoarea reala (ce vrem sa prezicem) + lag_1 (memoria scurta, replica decalata) + roll_mean_24 (trendul ultimelor 24 ore). </a:t>
-            </a:r>
-            <a:endParaRPr lang="en-US" sz="1300" dirty="0"/>
-          </a:p>
-          <a:p>
-            <a:pPr indent="0" marL="0">
-              <a:buNone/>
-            </a:pPr>
-            <a:r>
-              <a:rPr lang="en-US" sz="1300" dirty="0">
-                <a:solidFill>
-                  <a:srgbClr val="1F2937"/>
-                </a:solidFill>
-                <a:latin typeface="Calibri" pitchFamily="34" charset="0"/>
-                <a:ea typeface="Calibri" pitchFamily="34" charset="-122"/>
-                <a:cs typeface="Calibri" pitchFamily="34" charset="-120"/>
-              </a:rPr>
-              <a:t>Combinate cu encoding ciclic al timpului, formeaza </a:t>
-            </a:r>
-            <a:pPr indent="0" marL="0">
-              <a:buNone/>
-            </a:pPr>
-            <a:r>
-              <a:rPr lang="en-US" sz="1300" b="1" dirty="0">
-                <a:solidFill>
-                  <a:srgbClr val="065A82"/>
-                </a:solidFill>
-                <a:latin typeface="Calibri" pitchFamily="34" charset="0"/>
-                <a:ea typeface="Calibri" pitchFamily="34" charset="-122"/>
-                <a:cs typeface="Calibri" pitchFamily="34" charset="-120"/>
-              </a:rPr>
-              <a:t>setul minimal de features</a:t>
-            </a:r>
-            <a:pPr indent="0" marL="0">
-              <a:buNone/>
-            </a:pPr>
-            <a:r>
-              <a:rPr lang="en-US" sz="1300" dirty="0">
-                <a:solidFill>
-                  <a:srgbClr val="1F2937"/>
-                </a:solidFill>
-                <a:latin typeface="Calibri" pitchFamily="34" charset="0"/>
-                <a:ea typeface="Calibri" pitchFamily="34" charset="-122"/>
-                <a:cs typeface="Calibri" pitchFamily="34" charset="-120"/>
-              </a:rPr>
-              <a:t> pentru predictie energetica.</a:t>
-            </a:r>
-            <a:endParaRPr lang="en-US" sz="1300" dirty="0"/>
-          </a:p>
-        </p:txBody>
-      </p:sp>
-      <p:sp>
-        <p:nvSpPr>
-          <p:cNvPr id="9" name="Text 6"/>
-          <p:cNvSpPr/>
-          <p:nvPr/>
-        </p:nvSpPr>
-        <p:spPr>
-          <a:xfrm>
-            <a:off x="457200" y="6446520"/>
-            <a:ext cx="8229600" cy="274320"/>
+            <a:pPr algn="ctr" indent="0" marL="0">
+              <a:buNone/>
+            </a:pPr>
+            <a:r>
+              <a:rPr lang="en-US" sz="1500" b="1" dirty="0">
+                <a:solidFill>
+                  <a:srgbClr val="FFFFFF"/>
+                </a:solidFill>
+                <a:latin typeface="Calibri" pitchFamily="34" charset="0"/>
+                <a:ea typeface="Calibri" pitchFamily="34" charset="-122"/>
+                <a:cs typeface="Calibri" pitchFamily="34" charset="-120"/>
+              </a:rPr>
+              <a:t>roll_mean - trend recent</a:t>
+            </a:r>
+            <a:endParaRPr lang="en-US" sz="1500" dirty="0"/>
+          </a:p>
+        </p:txBody>
+      </p:sp>
+      <p:sp>
+        <p:nvSpPr>
+          <p:cNvPr id="10" name="Text 8"/>
+          <p:cNvSpPr/>
+          <p:nvPr/>
+        </p:nvSpPr>
+        <p:spPr>
+          <a:xfrm>
+            <a:off x="777240" y="3840480"/>
+            <a:ext cx="5029200" cy="2286000"/>
           </a:xfrm>
           <a:prstGeom prst="rect">
             <a:avLst/>
@@ -2547,37 +2780,166 @@
           <a:ln/>
         </p:spPr>
         <p:txBody>
-          <a:bodyPr wrap="square" rtlCol="0" anchor="ctr"/>
-          <a:lstStyle/>
-          <a:p>
-            <a:pPr indent="0" marL="0">
-              <a:buNone/>
-            </a:pPr>
-            <a:r>
-              <a:rPr lang="en-US" sz="900" dirty="0">
-                <a:solidFill>
-                  <a:srgbClr val="6B7280"/>
-                </a:solidFill>
-                <a:latin typeface="Calibri" pitchFamily="34" charset="0"/>
-                <a:ea typeface="Calibri" pitchFamily="34" charset="-122"/>
-                <a:cs typeface="Calibri" pitchFamily="34" charset="-120"/>
-              </a:rPr>
-              <a:t>Diana Nenu  -  SCSS 2026  -  Feature engineering pentru serii temporale</a:t>
-            </a:r>
-            <a:endParaRPr lang="en-US" sz="900" dirty="0"/>
-          </a:p>
-        </p:txBody>
-      </p:sp>
-      <p:sp>
-        <p:nvSpPr>
-          <p:cNvPr id="10" name="Text 7"/>
-          <p:cNvSpPr/>
-          <p:nvPr/>
-        </p:nvSpPr>
-        <p:spPr>
-          <a:xfrm>
-            <a:off x="10789920" y="6446520"/>
-            <a:ext cx="914400" cy="274320"/>
+          <a:bodyPr wrap="square" rtlCol="0" anchor="t"/>
+          <a:lstStyle/>
+          <a:p>
+            <a:pPr indent="0" marL="0">
+              <a:buNone/>
+            </a:pPr>
+            <a:r>
+              <a:rPr lang="en-US" sz="1100" dirty="0">
+                <a:solidFill>
+                  <a:srgbClr val="1F2937"/>
+                </a:solidFill>
+                <a:latin typeface="Consolas" pitchFamily="34" charset="0"/>
+                <a:ea typeface="Consolas" pitchFamily="34" charset="-122"/>
+                <a:cs typeface="Consolas" pitchFamily="34" charset="-120"/>
+              </a:rPr>
+              <a:t>df['roll_mean_3']  = df['pret'].rolling(3).mean()</a:t>
+            </a:r>
+            <a:endParaRPr lang="en-US" sz="1100" dirty="0"/>
+          </a:p>
+          <a:p>
+            <a:pPr indent="0" marL="0">
+              <a:buNone/>
+            </a:pPr>
+            <a:r>
+              <a:rPr lang="en-US" sz="1100" dirty="0">
+                <a:solidFill>
+                  <a:srgbClr val="1F2937"/>
+                </a:solidFill>
+                <a:latin typeface="Consolas" pitchFamily="34" charset="0"/>
+                <a:ea typeface="Consolas" pitchFamily="34" charset="-122"/>
+                <a:cs typeface="Consolas" pitchFamily="34" charset="-120"/>
+              </a:rPr>
+              <a:t>df['roll_mean_24'] = df['pret'].rolling(24).mean()</a:t>
+            </a:r>
+            <a:endParaRPr lang="en-US" sz="1100" dirty="0"/>
+          </a:p>
+          <a:p>
+            <a:pPr indent="0" marL="0">
+              <a:buNone/>
+            </a:pPr>
+            <a:r>
+              <a:rPr lang="en-US" sz="800" dirty="0">
+                <a:solidFill>
+                  <a:srgbClr val="000000"/>
+                </a:solidFill>
+                <a:latin typeface="Calibri" pitchFamily="34" charset="0"/>
+                <a:ea typeface="Calibri" pitchFamily="34" charset="-122"/>
+                <a:cs typeface="Calibri" pitchFamily="34" charset="-120"/>
+              </a:rPr>
+              <a:t> </a:t>
+            </a:r>
+            <a:endParaRPr lang="en-US" sz="1100" dirty="0"/>
+          </a:p>
+          <a:p>
+            <a:pPr indent="0" marL="0">
+              <a:buNone/>
+            </a:pPr>
+            <a:r>
+              <a:rPr lang="en-US" sz="1200" dirty="0">
+                <a:solidFill>
+                  <a:srgbClr val="1F2937"/>
+                </a:solidFill>
+                <a:latin typeface="Calibri" pitchFamily="34" charset="0"/>
+                <a:ea typeface="Calibri" pitchFamily="34" charset="-122"/>
+                <a:cs typeface="Calibri" pitchFamily="34" charset="-120"/>
+              </a:rPr>
+              <a:t>Captureaza </a:t>
+            </a:r>
+            <a:pPr indent="0" marL="0">
+              <a:buNone/>
+            </a:pPr>
+            <a:r>
+              <a:rPr lang="en-US" sz="1200" b="1" dirty="0">
+                <a:solidFill>
+                  <a:srgbClr val="1F2937"/>
+                </a:solidFill>
+                <a:latin typeface="Calibri" pitchFamily="34" charset="0"/>
+                <a:ea typeface="Calibri" pitchFamily="34" charset="-122"/>
+                <a:cs typeface="Calibri" pitchFamily="34" charset="-120"/>
+              </a:rPr>
+              <a:t>directia generala</a:t>
+            </a:r>
+            <a:pPr indent="0" marL="0">
+              <a:buNone/>
+            </a:pPr>
+            <a:r>
+              <a:rPr lang="en-US" sz="1200" dirty="0">
+                <a:solidFill>
+                  <a:srgbClr val="1F2937"/>
+                </a:solidFill>
+                <a:latin typeface="Calibri" pitchFamily="34" charset="0"/>
+                <a:ea typeface="Calibri" pitchFamily="34" charset="-122"/>
+                <a:cs typeface="Calibri" pitchFamily="34" charset="-120"/>
+              </a:rPr>
+              <a:t> - daca media ultimelor 3 ore e ridicata, pretul actual e probabil tot ridicat. Filtreaza zgomotul.</a:t>
+            </a:r>
+            <a:endParaRPr lang="en-US" sz="1100" dirty="0"/>
+          </a:p>
+        </p:txBody>
+      </p:sp>
+      <p:sp>
+        <p:nvSpPr>
+          <p:cNvPr id="11" name="Shape 9"/>
+          <p:cNvSpPr/>
+          <p:nvPr/>
+        </p:nvSpPr>
+        <p:spPr>
+          <a:xfrm>
+            <a:off x="6172200" y="3200400"/>
+            <a:ext cx="5486400" cy="3017520"/>
+          </a:xfrm>
+          <a:prstGeom prst="rect">
+            <a:avLst/>
+          </a:prstGeom>
+          <a:solidFill>
+            <a:srgbClr val="FFFFFF"/>
+          </a:solidFill>
+          <a:ln w="25400">
+            <a:solidFill>
+              <a:srgbClr val="F96167"/>
+            </a:solidFill>
+            <a:prstDash val="solid"/>
+          </a:ln>
+        </p:spPr>
+      </p:sp>
+      <p:sp>
+        <p:nvSpPr>
+          <p:cNvPr id="12" name="Shape 10"/>
+          <p:cNvSpPr/>
+          <p:nvPr/>
+        </p:nvSpPr>
+        <p:spPr>
+          <a:xfrm>
+            <a:off x="6172200" y="3200400"/>
+            <a:ext cx="5486400" cy="502920"/>
+          </a:xfrm>
+          <a:prstGeom prst="rect">
+            <a:avLst/>
+          </a:prstGeom>
+          <a:solidFill>
+            <a:srgbClr val="F96167"/>
+          </a:solidFill>
+          <a:ln w="12700">
+            <a:solidFill>
+              <a:srgbClr val="F96167"/>
+            </a:solidFill>
+            <a:prstDash val="solid"/>
+          </a:ln>
+        </p:spPr>
+      </p:sp>
+      <p:sp>
+        <p:nvSpPr>
+          <p:cNvPr id="13" name="Text 11"/>
+          <p:cNvSpPr/>
+          <p:nvPr/>
+        </p:nvSpPr>
+        <p:spPr>
+          <a:xfrm>
+            <a:off x="6172200" y="3200400"/>
+            <a:ext cx="5486400" cy="502920"/>
           </a:xfrm>
           <a:prstGeom prst="rect">
             <a:avLst/>
@@ -2589,6 +2951,283 @@
           <a:bodyPr wrap="square" rtlCol="0" anchor="ctr"/>
           <a:lstStyle/>
           <a:p>
+            <a:pPr algn="ctr" indent="0" marL="0">
+              <a:buNone/>
+            </a:pPr>
+            <a:r>
+              <a:rPr lang="en-US" sz="1500" b="1" dirty="0">
+                <a:solidFill>
+                  <a:srgbClr val="FFFFFF"/>
+                </a:solidFill>
+                <a:latin typeface="Calibri" pitchFamily="34" charset="0"/>
+                <a:ea typeface="Calibri" pitchFamily="34" charset="-122"/>
+                <a:cs typeface="Calibri" pitchFamily="34" charset="-120"/>
+              </a:rPr>
+              <a:t>roll_std - volatilitate recenta</a:t>
+            </a:r>
+            <a:endParaRPr lang="en-US" sz="1500" dirty="0"/>
+          </a:p>
+        </p:txBody>
+      </p:sp>
+      <p:sp>
+        <p:nvSpPr>
+          <p:cNvPr id="14" name="Text 12"/>
+          <p:cNvSpPr/>
+          <p:nvPr/>
+        </p:nvSpPr>
+        <p:spPr>
+          <a:xfrm>
+            <a:off x="6400800" y="3840480"/>
+            <a:ext cx="5029200" cy="2286000"/>
+          </a:xfrm>
+          <a:prstGeom prst="rect">
+            <a:avLst/>
+          </a:prstGeom>
+          <a:noFill/>
+          <a:ln/>
+        </p:spPr>
+        <p:txBody>
+          <a:bodyPr wrap="square" rtlCol="0" anchor="t"/>
+          <a:lstStyle/>
+          <a:p>
+            <a:pPr indent="0" marL="0">
+              <a:buNone/>
+            </a:pPr>
+            <a:r>
+              <a:rPr lang="en-US" sz="1100" dirty="0">
+                <a:solidFill>
+                  <a:srgbClr val="1F2937"/>
+                </a:solidFill>
+                <a:latin typeface="Consolas" pitchFamily="34" charset="0"/>
+                <a:ea typeface="Consolas" pitchFamily="34" charset="-122"/>
+                <a:cs typeface="Consolas" pitchFamily="34" charset="-120"/>
+              </a:rPr>
+              <a:t>df['roll_std_24']  = df['pret'].rolling(24).std()</a:t>
+            </a:r>
+            <a:endParaRPr lang="en-US" sz="1100" dirty="0"/>
+          </a:p>
+          <a:p>
+            <a:pPr indent="0" marL="0">
+              <a:buNone/>
+            </a:pPr>
+            <a:r>
+              <a:rPr lang="en-US" sz="1100" dirty="0">
+                <a:solidFill>
+                  <a:srgbClr val="1F2937"/>
+                </a:solidFill>
+                <a:latin typeface="Consolas" pitchFamily="34" charset="0"/>
+                <a:ea typeface="Consolas" pitchFamily="34" charset="-122"/>
+                <a:cs typeface="Consolas" pitchFamily="34" charset="-120"/>
+              </a:rPr>
+              <a:t>df['roll_std_168'] = df['pret'].rolling(168).std()</a:t>
+            </a:r>
+            <a:endParaRPr lang="en-US" sz="1100" dirty="0"/>
+          </a:p>
+          <a:p>
+            <a:pPr indent="0" marL="0">
+              <a:buNone/>
+            </a:pPr>
+            <a:r>
+              <a:rPr lang="en-US" sz="800" dirty="0">
+                <a:solidFill>
+                  <a:srgbClr val="000000"/>
+                </a:solidFill>
+                <a:latin typeface="Calibri" pitchFamily="34" charset="0"/>
+                <a:ea typeface="Calibri" pitchFamily="34" charset="-122"/>
+                <a:cs typeface="Calibri" pitchFamily="34" charset="-120"/>
+              </a:rPr>
+              <a:t> </a:t>
+            </a:r>
+            <a:endParaRPr lang="en-US" sz="1100" dirty="0"/>
+          </a:p>
+          <a:p>
+            <a:pPr indent="0" marL="0">
+              <a:buNone/>
+            </a:pPr>
+            <a:r>
+              <a:rPr lang="en-US" sz="1200" dirty="0">
+                <a:solidFill>
+                  <a:srgbClr val="1F2937"/>
+                </a:solidFill>
+                <a:latin typeface="Calibri" pitchFamily="34" charset="0"/>
+                <a:ea typeface="Calibri" pitchFamily="34" charset="-122"/>
+                <a:cs typeface="Calibri" pitchFamily="34" charset="-120"/>
+              </a:rPr>
+              <a:t>Captureaza </a:t>
+            </a:r>
+            <a:pPr indent="0" marL="0">
+              <a:buNone/>
+            </a:pPr>
+            <a:r>
+              <a:rPr lang="en-US" sz="1200" b="1" dirty="0">
+                <a:solidFill>
+                  <a:srgbClr val="1F2937"/>
+                </a:solidFill>
+                <a:latin typeface="Calibri" pitchFamily="34" charset="0"/>
+                <a:ea typeface="Calibri" pitchFamily="34" charset="-122"/>
+                <a:cs typeface="Calibri" pitchFamily="34" charset="-120"/>
+              </a:rPr>
+              <a:t>cat de instabil</a:t>
+            </a:r>
+            <a:pPr indent="0" marL="0">
+              <a:buNone/>
+            </a:pPr>
+            <a:r>
+              <a:rPr lang="en-US" sz="1200" dirty="0">
+                <a:solidFill>
+                  <a:srgbClr val="1F2937"/>
+                </a:solidFill>
+                <a:latin typeface="Calibri" pitchFamily="34" charset="0"/>
+                <a:ea typeface="Calibri" pitchFamily="34" charset="-122"/>
+                <a:cs typeface="Calibri" pitchFamily="34" charset="-120"/>
+              </a:rPr>
+              <a:t> a fost pretul recent. Volatilitate mare = piata sub presiune, valorile pot fluctua mult.</a:t>
+            </a:r>
+            <a:endParaRPr lang="en-US" sz="1100" dirty="0"/>
+          </a:p>
+        </p:txBody>
+      </p:sp>
+      <p:sp>
+        <p:nvSpPr>
+          <p:cNvPr id="15" name="Shape 13"/>
+          <p:cNvSpPr/>
+          <p:nvPr/>
+        </p:nvSpPr>
+        <p:spPr>
+          <a:xfrm>
+            <a:off x="548640" y="5943600"/>
+            <a:ext cx="11064240" cy="365760"/>
+          </a:xfrm>
+          <a:prstGeom prst="rect">
+            <a:avLst/>
+          </a:prstGeom>
+          <a:solidFill>
+            <a:srgbClr val="F9C846"/>
+          </a:solidFill>
+          <a:ln w="12700">
+            <a:solidFill>
+              <a:srgbClr val="F9C846"/>
+            </a:solidFill>
+            <a:prstDash val="solid"/>
+          </a:ln>
+        </p:spPr>
+      </p:sp>
+      <p:sp>
+        <p:nvSpPr>
+          <p:cNvPr id="16" name="Text 14"/>
+          <p:cNvSpPr/>
+          <p:nvPr/>
+        </p:nvSpPr>
+        <p:spPr>
+          <a:xfrm>
+            <a:off x="548640" y="5943600"/>
+            <a:ext cx="11064240" cy="365760"/>
+          </a:xfrm>
+          <a:prstGeom prst="rect">
+            <a:avLst/>
+          </a:prstGeom>
+          <a:noFill/>
+          <a:ln/>
+        </p:spPr>
+        <p:txBody>
+          <a:bodyPr wrap="square" rtlCol="0" anchor="ctr"/>
+          <a:lstStyle/>
+          <a:p>
+            <a:pPr algn="ctr" indent="0" marL="0">
+              <a:buNone/>
+            </a:pPr>
+            <a:r>
+              <a:rPr lang="en-US" sz="1150" b="1" i="1" dirty="0">
+                <a:solidFill>
+                  <a:srgbClr val="1F2937"/>
+                </a:solidFill>
+                <a:latin typeface="Calibri" pitchFamily="34" charset="0"/>
+                <a:ea typeface="Calibri" pitchFamily="34" charset="-122"/>
+                <a:cs typeface="Calibri" pitchFamily="34" charset="-120"/>
+              </a:rPr>
+              <a:t>DAR cele de mai sus contin o eroare critica! Vom vedea pe slide-ul urmator de ce e necesar .shift(1).</a:t>
+            </a:r>
+            <a:endParaRPr lang="en-US" sz="1150" dirty="0"/>
+          </a:p>
+        </p:txBody>
+      </p:sp>
+      <p:sp>
+        <p:nvSpPr>
+          <p:cNvPr id="17" name="Text 15"/>
+          <p:cNvSpPr/>
+          <p:nvPr/>
+        </p:nvSpPr>
+        <p:spPr>
+          <a:xfrm>
+            <a:off x="457200" y="6355080"/>
+            <a:ext cx="10058400" cy="411480"/>
+          </a:xfrm>
+          <a:prstGeom prst="rect">
+            <a:avLst/>
+          </a:prstGeom>
+          <a:noFill/>
+          <a:ln/>
+        </p:spPr>
+        <p:txBody>
+          <a:bodyPr wrap="square" rtlCol="0" anchor="ctr"/>
+          <a:lstStyle/>
+          <a:p>
+            <a:pPr indent="0" marL="0">
+              <a:buNone/>
+            </a:pPr>
+            <a:r>
+              <a:rPr lang="en-US" sz="800" b="1" dirty="0">
+                <a:solidFill>
+                  <a:srgbClr val="6B7280"/>
+                </a:solidFill>
+                <a:latin typeface="Calibri" pitchFamily="34" charset="0"/>
+                <a:ea typeface="Calibri" pitchFamily="34" charset="-122"/>
+                <a:cs typeface="Calibri" pitchFamily="34" charset="-120"/>
+              </a:rPr>
+              <a:t>Sesiune Comunicari Stiintifice Mai 2026</a:t>
+            </a:r>
+            <a:endParaRPr lang="en-US" sz="800" dirty="0"/>
+          </a:p>
+          <a:p>
+            <a:pPr indent="0" marL="0">
+              <a:buNone/>
+            </a:pPr>
+            <a:r>
+              <a:rPr lang="en-US" sz="800" i="1" dirty="0">
+                <a:solidFill>
+                  <a:srgbClr val="6B7280"/>
+                </a:solidFill>
+                <a:latin typeface="Calibri" pitchFamily="34" charset="0"/>
+                <a:ea typeface="Calibri" pitchFamily="34" charset="-122"/>
+                <a:cs typeface="Calibri" pitchFamily="34" charset="-120"/>
+              </a:rPr>
+              <a:t>Tehnici de feature engineering pentru serii temporale, cu aplicatii in domeniul energetic</a:t>
+            </a:r>
+            <a:endParaRPr lang="en-US" sz="800" dirty="0"/>
+          </a:p>
+        </p:txBody>
+      </p:sp>
+      <p:sp>
+        <p:nvSpPr>
+          <p:cNvPr id="18" name="Text 16"/>
+          <p:cNvSpPr/>
+          <p:nvPr/>
+        </p:nvSpPr>
+        <p:spPr>
+          <a:xfrm>
+            <a:off x="10789920" y="6400800"/>
+            <a:ext cx="914400" cy="320040"/>
+          </a:xfrm>
+          <a:prstGeom prst="rect">
+            <a:avLst/>
+          </a:prstGeom>
+          <a:noFill/>
+          <a:ln/>
+        </p:spPr>
+        <p:txBody>
+          <a:bodyPr wrap="square" rtlCol="0" anchor="ctr"/>
+          <a:lstStyle/>
+          <a:p>
             <a:pPr algn="r" indent="0" marL="0">
               <a:buNone/>
             </a:pPr>
@@ -2601,7 +3240,7 @@
                 <a:ea typeface="Calibri" pitchFamily="34" charset="-122"/>
                 <a:cs typeface="Calibri" pitchFamily="34" charset="-120"/>
               </a:rPr>
-              <a:t>10 / 13</a:t>
+              <a:t>10 / 15</a:t>
             </a:r>
             <a:endParaRPr lang="en-US" sz="900" dirty="0"/>
           </a:p>
@@ -2697,7 +3336,7 @@
                 <a:ea typeface="Calibri" pitchFamily="34" charset="-122"/>
                 <a:cs typeface="Calibri" pitchFamily="34" charset="-120"/>
               </a:rPr>
-              <a:t>REZULTATE PROPRII</a:t>
+              <a:t>ANTI DATA-LEAKAGE</a:t>
             </a:r>
             <a:endParaRPr lang="en-US" sz="1100" dirty="0"/>
           </a:p>
@@ -2736,7 +3375,7 @@
                 <a:ea typeface="Calibri" pitchFamily="34" charset="-122"/>
                 <a:cs typeface="Calibri" pitchFamily="34" charset="-120"/>
               </a:rPr>
-              <a:t>Validare empirica: cele 3 tehnici aplicate pe pretul Spania</a:t>
+              <a:t>Tehnica 3B. Detaliul critic: .shift(1) anti-leakage</a:t>
             </a:r>
             <a:endParaRPr lang="en-US" sz="2800" dirty="0"/>
           </a:p>
@@ -2769,7 +3408,7 @@
       </p:sp>
       <p:pic>
         <p:nvPicPr>
-          <p:cNvPr id="6" name="Image 0" descr="/sessions/vibrant-elegant-pasteur/mnt/Disertatie_AI_Platform/reports/figures/fig_fe_tabel_modele.png">    </p:cNvPr>
+          <p:cNvPr id="6" name="Image 0" descr="/sessions/vibrant-elegant-pasteur/mnt/Disertatie_AI_Platform/reports/figures/fig_fe_shift1_demonstratie.png">    </p:cNvPr>
           <p:cNvPicPr>
             <a:picLocks noChangeAspect="1"/>
           </p:cNvPicPr>
@@ -2782,8 +3421,8 @@
         </p:blipFill>
         <p:spPr>
           <a:xfrm>
-            <a:off x="365760" y="1463040"/>
-            <a:ext cx="11430000" cy="4114800"/>
+            <a:off x="274320" y="1417320"/>
+            <a:ext cx="11612880" cy="3931920"/>
           </a:xfrm>
           <a:prstGeom prst="rect">
             <a:avLst/>
@@ -2798,8 +3437,8 @@
         </p:nvSpPr>
         <p:spPr>
           <a:xfrm>
-            <a:off x="548640" y="5715000"/>
-            <a:ext cx="5440680" cy="777240"/>
+            <a:off x="548640" y="5440680"/>
+            <a:ext cx="11064240" cy="841248"/>
           </a:xfrm>
           <a:prstGeom prst="rect">
             <a:avLst/>
@@ -2809,7 +3448,7 @@
           </a:solidFill>
           <a:ln w="12700">
             <a:solidFill>
-              <a:srgbClr val="6FAE6F"/>
+              <a:srgbClr val="6B7280"/>
             </a:solidFill>
             <a:prstDash val="solid"/>
           </a:ln>
@@ -2823,8 +3462,8 @@
         </p:nvSpPr>
         <p:spPr>
           <a:xfrm>
-            <a:off x="777240" y="5760720"/>
-            <a:ext cx="5120640" cy="685800"/>
+            <a:off x="777240" y="5468112"/>
+            <a:ext cx="10607040" cy="777240"/>
           </a:xfrm>
           <a:prstGeom prst="rect">
             <a:avLst/>
@@ -2842,20 +3481,50 @@
             <a:r>
               <a:rPr lang="en-US" sz="1300" b="1" dirty="0">
                 <a:solidFill>
+                  <a:srgbClr val="1F2937"/>
+                </a:solidFill>
+                <a:latin typeface="Calibri" pitchFamily="34" charset="0"/>
+                <a:ea typeface="Calibri" pitchFamily="34" charset="-122"/>
+                <a:cs typeface="Calibri" pitchFamily="34" charset="-120"/>
+              </a:rPr>
+              <a:t>Ce s-a intamplat? </a:t>
+            </a:r>
+            <a:pPr indent="0" marL="0">
+              <a:buNone/>
+            </a:pPr>
+            <a:r>
+              <a:rPr lang="en-US" sz="1200" dirty="0">
+                <a:solidFill>
+                  <a:srgbClr val="1F2937"/>
+                </a:solidFill>
+                <a:latin typeface="Calibri" pitchFamily="34" charset="0"/>
+                <a:ea typeface="Calibri" pitchFamily="34" charset="-122"/>
+                <a:cs typeface="Calibri" pitchFamily="34" charset="-120"/>
+              </a:rPr>
+              <a:t>rolling(3).mean() la momentul t include si valoarea de la t! Modelul foloseste raspunsul ca sa-l prezica. </a:t>
+            </a:r>
+            <a:endParaRPr lang="en-US" sz="1300" dirty="0"/>
+          </a:p>
+          <a:p>
+            <a:pPr indent="0" marL="0">
+              <a:buNone/>
+            </a:pPr>
+            <a:r>
+              <a:rPr lang="en-US" sz="1300" b="1" dirty="0">
+                <a:solidFill>
                   <a:srgbClr val="6FAE6F"/>
                 </a:solidFill>
                 <a:latin typeface="Calibri" pitchFamily="34" charset="0"/>
                 <a:ea typeface="Calibri" pitchFamily="34" charset="-122"/>
                 <a:cs typeface="Calibri" pitchFamily="34" charset="-120"/>
               </a:rPr>
-              <a:t>Castigatorul: XGBoost
-</a:t>
-            </a:r>
-            <a:pPr indent="0" marL="0">
-              <a:buNone/>
-            </a:pPr>
-            <a:r>
-              <a:rPr lang="en-US" sz="1150" dirty="0">
+              <a:t>Solutia: </a:t>
+            </a:r>
+            <a:pPr indent="0" marL="0">
+              <a:buNone/>
+            </a:pPr>
+            <a:r>
+              <a:rPr lang="en-US" sz="1200" dirty="0">
                 <a:solidFill>
                   <a:srgbClr val="1F2937"/>
                 </a:solidFill>
@@ -2863,7 +3532,35 @@
                 <a:ea typeface="Calibri" pitchFamily="34" charset="-122"/>
                 <a:cs typeface="Calibri" pitchFamily="34" charset="-120"/>
               </a:rPr>
-              <a:t>R² = 0.968, RMSE = 2.07 EUR/MWh, MAPE = 2.57%</a:t>
+              <a:t>scriem </a:t>
+            </a:r>
+            <a:pPr indent="0" marL="0">
+              <a:buNone/>
+            </a:pPr>
+            <a:r>
+              <a:rPr lang="en-US" sz="1200" b="1" dirty="0">
+                <a:solidFill>
+                  <a:srgbClr val="21295C"/>
+                </a:solidFill>
+                <a:latin typeface="Consolas" pitchFamily="34" charset="0"/>
+                <a:ea typeface="Consolas" pitchFamily="34" charset="-122"/>
+                <a:cs typeface="Consolas" pitchFamily="34" charset="-120"/>
+              </a:rPr>
+              <a:t>df['pret'].shift(1).rolling(3).mean()</a:t>
+            </a:r>
+            <a:pPr indent="0" marL="0">
+              <a:buNone/>
+            </a:pPr>
+            <a:r>
+              <a:rPr lang="en-US" sz="1200" dirty="0">
+                <a:solidFill>
+                  <a:srgbClr val="1F2937"/>
+                </a:solidFill>
+                <a:latin typeface="Calibri" pitchFamily="34" charset="0"/>
+                <a:ea typeface="Calibri" pitchFamily="34" charset="-122"/>
+                <a:cs typeface="Calibri" pitchFamily="34" charset="-120"/>
+              </a:rPr>
+              <a:t> - mutam mai intai valoarea cu un pas in trecut, apoi facem media. Acum feature-ul foloseste DOAR trecutul.</a:t>
             </a:r>
             <a:endParaRPr lang="en-US" sz="1300" dirty="0"/>
           </a:p>
@@ -2871,39 +3568,14 @@
       </p:sp>
       <p:sp>
         <p:nvSpPr>
-          <p:cNvPr id="9" name="Shape 6"/>
-          <p:cNvSpPr/>
-          <p:nvPr/>
-        </p:nvSpPr>
-        <p:spPr>
-          <a:xfrm>
-            <a:off x="6172200" y="5715000"/>
-            <a:ext cx="5440680" cy="777240"/>
-          </a:xfrm>
-          <a:prstGeom prst="rect">
-            <a:avLst/>
-          </a:prstGeom>
-          <a:solidFill>
-            <a:srgbClr val="F4F5F7"/>
-          </a:solidFill>
-          <a:ln w="12700">
-            <a:solidFill>
-              <a:srgbClr val="F96167"/>
-            </a:solidFill>
-            <a:prstDash val="solid"/>
-          </a:ln>
-        </p:spPr>
-      </p:sp>
-      <p:sp>
-        <p:nvSpPr>
-          <p:cNvPr id="10" name="Text 7"/>
-          <p:cNvSpPr/>
-          <p:nvPr/>
-        </p:nvSpPr>
-        <p:spPr>
-          <a:xfrm>
-            <a:off x="6400800" y="5760720"/>
-            <a:ext cx="5120640" cy="685800"/>
+          <p:cNvPr id="9" name="Text 6"/>
+          <p:cNvSpPr/>
+          <p:nvPr/>
+        </p:nvSpPr>
+        <p:spPr>
+          <a:xfrm>
+            <a:off x="457200" y="6355080"/>
+            <a:ext cx="10058400" cy="411480"/>
           </a:xfrm>
           <a:prstGeom prst="rect">
             <a:avLst/>
@@ -2919,45 +3591,47 @@
               <a:buNone/>
             </a:pPr>
             <a:r>
-              <a:rPr lang="en-US" sz="1300" b="1" dirty="0">
-                <a:solidFill>
-                  <a:srgbClr val="F96167"/>
-                </a:solidFill>
-                <a:latin typeface="Calibri" pitchFamily="34" charset="0"/>
-                <a:ea typeface="Calibri" pitchFamily="34" charset="-122"/>
-                <a:cs typeface="Calibri" pitchFamily="34" charset="-120"/>
-              </a:rPr>
-              <a:t>LSTM in mod demo (1000 ore): R² negativ
-</a:t>
-            </a:r>
-            <a:pPr indent="0" marL="0">
-              <a:buNone/>
-            </a:pPr>
-            <a:r>
-              <a:rPr lang="en-US" sz="1150" dirty="0">
-                <a:solidFill>
-                  <a:srgbClr val="1F2937"/>
-                </a:solidFill>
-                <a:latin typeface="Calibri" pitchFamily="34" charset="0"/>
-                <a:ea typeface="Calibri" pitchFamily="34" charset="-122"/>
-                <a:cs typeface="Calibri" pitchFamily="34" charset="-120"/>
-              </a:rPr>
-              <a:t>Date insuficiente. In MODE=full pe Databricks va recupera.</a:t>
-            </a:r>
-            <a:endParaRPr lang="en-US" sz="1300" dirty="0"/>
-          </a:p>
-        </p:txBody>
-      </p:sp>
-      <p:sp>
-        <p:nvSpPr>
-          <p:cNvPr id="11" name="Text 8"/>
-          <p:cNvSpPr/>
-          <p:nvPr/>
-        </p:nvSpPr>
-        <p:spPr>
-          <a:xfrm>
-            <a:off x="457200" y="6446520"/>
-            <a:ext cx="8229600" cy="274320"/>
+              <a:rPr lang="en-US" sz="800" b="1" dirty="0">
+                <a:solidFill>
+                  <a:srgbClr val="6B7280"/>
+                </a:solidFill>
+                <a:latin typeface="Calibri" pitchFamily="34" charset="0"/>
+                <a:ea typeface="Calibri" pitchFamily="34" charset="-122"/>
+                <a:cs typeface="Calibri" pitchFamily="34" charset="-120"/>
+              </a:rPr>
+              <a:t>Sesiune Comunicari Stiintifice Mai 2026</a:t>
+            </a:r>
+            <a:endParaRPr lang="en-US" sz="800" dirty="0"/>
+          </a:p>
+          <a:p>
+            <a:pPr indent="0" marL="0">
+              <a:buNone/>
+            </a:pPr>
+            <a:r>
+              <a:rPr lang="en-US" sz="800" i="1" dirty="0">
+                <a:solidFill>
+                  <a:srgbClr val="6B7280"/>
+                </a:solidFill>
+                <a:latin typeface="Calibri" pitchFamily="34" charset="0"/>
+                <a:ea typeface="Calibri" pitchFamily="34" charset="-122"/>
+                <a:cs typeface="Calibri" pitchFamily="34" charset="-120"/>
+              </a:rPr>
+              <a:t>Tehnici de feature engineering pentru serii temporale, cu aplicatii in domeniul energetic</a:t>
+            </a:r>
+            <a:endParaRPr lang="en-US" sz="800" dirty="0"/>
+          </a:p>
+        </p:txBody>
+      </p:sp>
+      <p:sp>
+        <p:nvSpPr>
+          <p:cNvPr id="10" name="Text 7"/>
+          <p:cNvSpPr/>
+          <p:nvPr/>
+        </p:nvSpPr>
+        <p:spPr>
+          <a:xfrm>
+            <a:off x="10789920" y="6400800"/>
+            <a:ext cx="914400" cy="320040"/>
           </a:xfrm>
           <a:prstGeom prst="rect">
             <a:avLst/>
@@ -2969,7 +3643,7 @@
           <a:bodyPr wrap="square" rtlCol="0" anchor="ctr"/>
           <a:lstStyle/>
           <a:p>
-            <a:pPr indent="0" marL="0">
+            <a:pPr algn="r" indent="0" marL="0">
               <a:buNone/>
             </a:pPr>
             <a:r>
@@ -2981,46 +3655,7 @@
                 <a:ea typeface="Calibri" pitchFamily="34" charset="-122"/>
                 <a:cs typeface="Calibri" pitchFamily="34" charset="-120"/>
               </a:rPr>
-              <a:t>Diana Nenu  -  SCSS 2026  -  Feature engineering pentru serii temporale</a:t>
-            </a:r>
-            <a:endParaRPr lang="en-US" sz="900" dirty="0"/>
-          </a:p>
-        </p:txBody>
-      </p:sp>
-      <p:sp>
-        <p:nvSpPr>
-          <p:cNvPr id="12" name="Text 9"/>
-          <p:cNvSpPr/>
-          <p:nvPr/>
-        </p:nvSpPr>
-        <p:spPr>
-          <a:xfrm>
-            <a:off x="10789920" y="6446520"/>
-            <a:ext cx="914400" cy="274320"/>
-          </a:xfrm>
-          <a:prstGeom prst="rect">
-            <a:avLst/>
-          </a:prstGeom>
-          <a:noFill/>
-          <a:ln/>
-        </p:spPr>
-        <p:txBody>
-          <a:bodyPr wrap="square" rtlCol="0" anchor="ctr"/>
-          <a:lstStyle/>
-          <a:p>
-            <a:pPr algn="r" indent="0" marL="0">
-              <a:buNone/>
-            </a:pPr>
-            <a:r>
-              <a:rPr lang="en-US" sz="900" dirty="0">
-                <a:solidFill>
-                  <a:srgbClr val="6B7280"/>
-                </a:solidFill>
-                <a:latin typeface="Calibri" pitchFamily="34" charset="0"/>
-                <a:ea typeface="Calibri" pitchFamily="34" charset="-122"/>
-                <a:cs typeface="Calibri" pitchFamily="34" charset="-120"/>
-              </a:rPr>
-              <a:t>11 / 13</a:t>
+              <a:t>11 / 15</a:t>
             </a:r>
             <a:endParaRPr lang="en-US" sz="900" dirty="0"/>
           </a:p>
@@ -3116,7 +3751,7 @@
                 <a:ea typeface="Calibri" pitchFamily="34" charset="-122"/>
                 <a:cs typeface="Calibri" pitchFamily="34" charset="-120"/>
               </a:rPr>
-              <a:t>LECTII INVATATE</a:t>
+              <a:t>SINERGIE</a:t>
             </a:r>
             <a:endParaRPr lang="en-US" sz="1100" dirty="0"/>
           </a:p>
@@ -3155,7 +3790,7 @@
                 <a:ea typeface="Calibri" pitchFamily="34" charset="-122"/>
                 <a:cs typeface="Calibri" pitchFamily="34" charset="-120"/>
               </a:rPr>
-              <a:t>Concluzii</a:t>
+              <a:t>Cele trei tehnici impreuna</a:t>
             </a:r>
             <a:endParaRPr lang="en-US" sz="2800" dirty="0"/>
           </a:p>
@@ -3186,26 +3821,49 @@
           </a:ln>
         </p:spPr>
       </p:sp>
-      <p:sp>
-        <p:nvSpPr>
-          <p:cNvPr id="6" name="Shape 4"/>
-          <p:cNvSpPr/>
-          <p:nvPr/>
-        </p:nvSpPr>
-        <p:spPr>
-          <a:xfrm>
-            <a:off x="640080" y="1554480"/>
-            <a:ext cx="685800" cy="685800"/>
-          </a:xfrm>
-          <a:prstGeom prst="ellipse">
+      <p:pic>
+        <p:nvPicPr>
+          <p:cNvPr id="6" name="Image 0" descr="/sessions/vibrant-elegant-pasteur/mnt/Disertatie_AI_Platform/reports/figures/fig_4_2_lag_vs_real_vs_rolling.png">    </p:cNvPr>
+          <p:cNvPicPr>
+            <a:picLocks noChangeAspect="1"/>
+          </p:cNvPicPr>
+          <p:nvPr/>
+        </p:nvPicPr>
+        <p:blipFill>
+          <a:blip r:embed="rId1"/>
+          <a:srcRect l="0" r="0" t="0" b="0"/>
+          <a:stretch/>
+        </p:blipFill>
+        <p:spPr>
+          <a:xfrm>
+            <a:off x="914400" y="1463040"/>
+            <a:ext cx="10332720" cy="4114800"/>
+          </a:xfrm>
+          <a:prstGeom prst="rect">
+            <a:avLst/>
+          </a:prstGeom>
+        </p:spPr>
+      </p:pic>
+      <p:sp>
+        <p:nvSpPr>
+          <p:cNvPr id="7" name="Shape 4"/>
+          <p:cNvSpPr/>
+          <p:nvPr/>
+        </p:nvSpPr>
+        <p:spPr>
+          <a:xfrm>
+            <a:off x="548640" y="5669280"/>
+            <a:ext cx="11064240" cy="868680"/>
+          </a:xfrm>
+          <a:prstGeom prst="rect">
             <a:avLst/>
           </a:prstGeom>
           <a:solidFill>
-            <a:srgbClr val="065A82"/>
+            <a:srgbClr val="F4F5F7"/>
           </a:solidFill>
           <a:ln w="12700">
             <a:solidFill>
-              <a:srgbClr val="065A82"/>
+              <a:srgbClr val="E5E7EB"/>
             </a:solidFill>
             <a:prstDash val="solid"/>
           </a:ln>
@@ -3213,14 +3871,14 @@
       </p:sp>
       <p:sp>
         <p:nvSpPr>
-          <p:cNvPr id="7" name="Text 5"/>
-          <p:cNvSpPr/>
-          <p:nvPr/>
-        </p:nvSpPr>
-        <p:spPr>
-          <a:xfrm>
-            <a:off x="640080" y="1554480"/>
-            <a:ext cx="685800" cy="685800"/>
+          <p:cNvPr id="8" name="Text 5"/>
+          <p:cNvSpPr/>
+          <p:nvPr/>
+        </p:nvSpPr>
+        <p:spPr>
+          <a:xfrm>
+            <a:off x="868680" y="5760720"/>
+            <a:ext cx="10515600" cy="777240"/>
           </a:xfrm>
           <a:prstGeom prst="rect">
             <a:avLst/>
@@ -3232,34 +3890,93 @@
           <a:bodyPr wrap="square" rtlCol="0" anchor="ctr"/>
           <a:lstStyle/>
           <a:p>
-            <a:pPr algn="ctr" indent="0" marL="0">
-              <a:buNone/>
-            </a:pPr>
-            <a:r>
-              <a:rPr lang="en-US" sz="2200" b="1" dirty="0">
-                <a:solidFill>
-                  <a:srgbClr val="FFFFFF"/>
-                </a:solidFill>
-                <a:latin typeface="Calibri" pitchFamily="34" charset="0"/>
-                <a:ea typeface="Calibri" pitchFamily="34" charset="-122"/>
-                <a:cs typeface="Calibri" pitchFamily="34" charset="-120"/>
-              </a:rPr>
-              <a:t>1</a:t>
-            </a:r>
-            <a:endParaRPr lang="en-US" sz="2200" dirty="0"/>
-          </a:p>
-        </p:txBody>
-      </p:sp>
-      <p:sp>
-        <p:nvSpPr>
-          <p:cNvPr id="8" name="Text 6"/>
-          <p:cNvSpPr/>
-          <p:nvPr/>
-        </p:nvSpPr>
-        <p:spPr>
-          <a:xfrm>
-            <a:off x="1554480" y="1508760"/>
-            <a:ext cx="10058400" cy="457200"/>
+            <a:pPr indent="0" marL="0">
+              <a:buNone/>
+            </a:pPr>
+            <a:r>
+              <a:rPr lang="en-US" sz="1300" b="1" dirty="0">
+                <a:solidFill>
+                  <a:srgbClr val="1F2937"/>
+                </a:solidFill>
+                <a:latin typeface="Calibri" pitchFamily="34" charset="0"/>
+                <a:ea typeface="Calibri" pitchFamily="34" charset="-122"/>
+                <a:cs typeface="Calibri" pitchFamily="34" charset="-120"/>
+              </a:rPr>
+              <a:t>Trei perspective complementare: </a:t>
+            </a:r>
+            <a:pPr indent="0" marL="0">
+              <a:buNone/>
+            </a:pPr>
+            <a:r>
+              <a:rPr lang="en-US" sz="1300" dirty="0">
+                <a:solidFill>
+                  <a:srgbClr val="1F2937"/>
+                </a:solidFill>
+                <a:latin typeface="Calibri" pitchFamily="34" charset="0"/>
+                <a:ea typeface="Calibri" pitchFamily="34" charset="-122"/>
+                <a:cs typeface="Calibri" pitchFamily="34" charset="-120"/>
+              </a:rPr>
+              <a:t>valoarea reala (ce vrem sa prezicem) + lag_1 (memoria scurta, replica decalata) + roll_mean_24 (trendul ultimelor 24 ore). </a:t>
+            </a:r>
+            <a:endParaRPr lang="en-US" sz="1300" dirty="0"/>
+          </a:p>
+          <a:p>
+            <a:pPr indent="0" marL="0">
+              <a:buNone/>
+            </a:pPr>
+            <a:r>
+              <a:rPr lang="en-US" sz="1300" dirty="0">
+                <a:solidFill>
+                  <a:srgbClr val="1F2937"/>
+                </a:solidFill>
+                <a:latin typeface="Calibri" pitchFamily="34" charset="0"/>
+                <a:ea typeface="Calibri" pitchFamily="34" charset="-122"/>
+                <a:cs typeface="Calibri" pitchFamily="34" charset="-120"/>
+              </a:rPr>
+              <a:t>Combinate cu encoding ciclic al timpului, formeaza </a:t>
+            </a:r>
+            <a:pPr indent="0" marL="0">
+              <a:buNone/>
+            </a:pPr>
+            <a:r>
+              <a:rPr lang="en-US" sz="1300" b="1" dirty="0">
+                <a:solidFill>
+                  <a:srgbClr val="065A82"/>
+                </a:solidFill>
+                <a:latin typeface="Calibri" pitchFamily="34" charset="0"/>
+                <a:ea typeface="Calibri" pitchFamily="34" charset="-122"/>
+                <a:cs typeface="Calibri" pitchFamily="34" charset="-120"/>
+              </a:rPr>
+              <a:t>setul minimal de features</a:t>
+            </a:r>
+            <a:pPr indent="0" marL="0">
+              <a:buNone/>
+            </a:pPr>
+            <a:r>
+              <a:rPr lang="en-US" sz="1300" dirty="0">
+                <a:solidFill>
+                  <a:srgbClr val="1F2937"/>
+                </a:solidFill>
+                <a:latin typeface="Calibri" pitchFamily="34" charset="0"/>
+                <a:ea typeface="Calibri" pitchFamily="34" charset="-122"/>
+                <a:cs typeface="Calibri" pitchFamily="34" charset="-120"/>
+              </a:rPr>
+              <a:t> pentru predictie energetica.</a:t>
+            </a:r>
+            <a:endParaRPr lang="en-US" sz="1300" dirty="0"/>
+          </a:p>
+        </p:txBody>
+      </p:sp>
+      <p:sp>
+        <p:nvSpPr>
+          <p:cNvPr id="9" name="Text 6"/>
+          <p:cNvSpPr/>
+          <p:nvPr/>
+        </p:nvSpPr>
+        <p:spPr>
+          <a:xfrm>
+            <a:off x="457200" y="6355080"/>
+            <a:ext cx="10058400" cy="411480"/>
           </a:xfrm>
           <a:prstGeom prst="rect">
             <a:avLst/>
@@ -3275,30 +3992,47 @@
               <a:buNone/>
             </a:pPr>
             <a:r>
-              <a:rPr lang="en-US" sz="1700" b="1" dirty="0">
-                <a:solidFill>
-                  <a:srgbClr val="1F2937"/>
-                </a:solidFill>
-                <a:latin typeface="Calibri" pitchFamily="34" charset="0"/>
-                <a:ea typeface="Calibri" pitchFamily="34" charset="-122"/>
-                <a:cs typeface="Calibri" pitchFamily="34" charset="-120"/>
-              </a:rPr>
-              <a:t>Feature engineering &gt; selectia modelului (pe time series)</a:t>
-            </a:r>
-            <a:endParaRPr lang="en-US" sz="1700" dirty="0"/>
-          </a:p>
-        </p:txBody>
-      </p:sp>
-      <p:sp>
-        <p:nvSpPr>
-          <p:cNvPr id="9" name="Text 7"/>
-          <p:cNvSpPr/>
-          <p:nvPr/>
-        </p:nvSpPr>
-        <p:spPr>
-          <a:xfrm>
-            <a:off x="1554480" y="1965960"/>
-            <a:ext cx="10058400" cy="1005840"/>
+              <a:rPr lang="en-US" sz="800" b="1" dirty="0">
+                <a:solidFill>
+                  <a:srgbClr val="6B7280"/>
+                </a:solidFill>
+                <a:latin typeface="Calibri" pitchFamily="34" charset="0"/>
+                <a:ea typeface="Calibri" pitchFamily="34" charset="-122"/>
+                <a:cs typeface="Calibri" pitchFamily="34" charset="-120"/>
+              </a:rPr>
+              <a:t>Sesiune Comunicari Stiintifice Mai 2026</a:t>
+            </a:r>
+            <a:endParaRPr lang="en-US" sz="800" dirty="0"/>
+          </a:p>
+          <a:p>
+            <a:pPr indent="0" marL="0">
+              <a:buNone/>
+            </a:pPr>
+            <a:r>
+              <a:rPr lang="en-US" sz="800" i="1" dirty="0">
+                <a:solidFill>
+                  <a:srgbClr val="6B7280"/>
+                </a:solidFill>
+                <a:latin typeface="Calibri" pitchFamily="34" charset="0"/>
+                <a:ea typeface="Calibri" pitchFamily="34" charset="-122"/>
+                <a:cs typeface="Calibri" pitchFamily="34" charset="-120"/>
+              </a:rPr>
+              <a:t>Tehnici de feature engineering pentru serii temporale, cu aplicatii in domeniul energetic</a:t>
+            </a:r>
+            <a:endParaRPr lang="en-US" sz="800" dirty="0"/>
+          </a:p>
+        </p:txBody>
+      </p:sp>
+      <p:sp>
+        <p:nvSpPr>
+          <p:cNvPr id="10" name="Text 7"/>
+          <p:cNvSpPr/>
+          <p:nvPr/>
+        </p:nvSpPr>
+        <p:spPr>
+          <a:xfrm>
+            <a:off x="10789920" y="6400800"/>
+            <a:ext cx="914400" cy="320040"/>
           </a:xfrm>
           <a:prstGeom prst="rect">
             <a:avLst/>
@@ -3310,11 +4044,11 @@
           <a:bodyPr wrap="square" rtlCol="0" anchor="ctr"/>
           <a:lstStyle/>
           <a:p>
-            <a:pPr indent="0" marL="0">
-              <a:buNone/>
-            </a:pPr>
-            <a:r>
-              <a:rPr lang="en-US" sz="1300" dirty="0">
+            <a:pPr algn="r" indent="0" marL="0">
+              <a:buNone/>
+            </a:pPr>
+            <a:r>
+              <a:rPr lang="en-US" sz="900" dirty="0">
                 <a:solidFill>
                   <a:srgbClr val="6B7280"/>
                 </a:solidFill>
@@ -3322,369 +4056,7 @@
                 <a:ea typeface="Calibri" pitchFamily="34" charset="-122"/>
                 <a:cs typeface="Calibri" pitchFamily="34" charset="-120"/>
               </a:rPr>
-              <a:t>Pe pretul Spania, toate modelele clasice obtin R² intre 0.947 si 0.968. Diferentele sunt minime. Ceea ce a contat cu adevarat au fost cele 3 tehnici de feature engineering aplicate corect pe datele brute.</a:t>
-            </a:r>
-            <a:endParaRPr lang="en-US" sz="1300" dirty="0"/>
-          </a:p>
-        </p:txBody>
-      </p:sp>
-      <p:sp>
-        <p:nvSpPr>
-          <p:cNvPr id="10" name="Shape 8"/>
-          <p:cNvSpPr/>
-          <p:nvPr/>
-        </p:nvSpPr>
-        <p:spPr>
-          <a:xfrm>
-            <a:off x="640080" y="3108960"/>
-            <a:ext cx="685800" cy="685800"/>
-          </a:xfrm>
-          <a:prstGeom prst="ellipse">
-            <a:avLst/>
-          </a:prstGeom>
-          <a:solidFill>
-            <a:srgbClr val="F96167"/>
-          </a:solidFill>
-          <a:ln w="12700">
-            <a:solidFill>
-              <a:srgbClr val="F96167"/>
-            </a:solidFill>
-            <a:prstDash val="solid"/>
-          </a:ln>
-        </p:spPr>
-      </p:sp>
-      <p:sp>
-        <p:nvSpPr>
-          <p:cNvPr id="11" name="Text 9"/>
-          <p:cNvSpPr/>
-          <p:nvPr/>
-        </p:nvSpPr>
-        <p:spPr>
-          <a:xfrm>
-            <a:off x="640080" y="3108960"/>
-            <a:ext cx="685800" cy="685800"/>
-          </a:xfrm>
-          <a:prstGeom prst="rect">
-            <a:avLst/>
-          </a:prstGeom>
-          <a:noFill/>
-          <a:ln/>
-        </p:spPr>
-        <p:txBody>
-          <a:bodyPr wrap="square" rtlCol="0" anchor="ctr"/>
-          <a:lstStyle/>
-          <a:p>
-            <a:pPr algn="ctr" indent="0" marL="0">
-              <a:buNone/>
-            </a:pPr>
-            <a:r>
-              <a:rPr lang="en-US" sz="2200" b="1" dirty="0">
-                <a:solidFill>
-                  <a:srgbClr val="FFFFFF"/>
-                </a:solidFill>
-                <a:latin typeface="Calibri" pitchFamily="34" charset="0"/>
-                <a:ea typeface="Calibri" pitchFamily="34" charset="-122"/>
-                <a:cs typeface="Calibri" pitchFamily="34" charset="-120"/>
-              </a:rPr>
-              <a:t>2</a:t>
-            </a:r>
-            <a:endParaRPr lang="en-US" sz="2200" dirty="0"/>
-          </a:p>
-        </p:txBody>
-      </p:sp>
-      <p:sp>
-        <p:nvSpPr>
-          <p:cNvPr id="12" name="Text 10"/>
-          <p:cNvSpPr/>
-          <p:nvPr/>
-        </p:nvSpPr>
-        <p:spPr>
-          <a:xfrm>
-            <a:off x="1554480" y="3063240"/>
-            <a:ext cx="10058400" cy="457200"/>
-          </a:xfrm>
-          <a:prstGeom prst="rect">
-            <a:avLst/>
-          </a:prstGeom>
-          <a:noFill/>
-          <a:ln/>
-        </p:spPr>
-        <p:txBody>
-          <a:bodyPr wrap="square" rtlCol="0" anchor="ctr"/>
-          <a:lstStyle/>
-          <a:p>
-            <a:pPr indent="0" marL="0">
-              <a:buNone/>
-            </a:pPr>
-            <a:r>
-              <a:rPr lang="en-US" sz="1700" b="1" dirty="0">
-                <a:solidFill>
-                  <a:srgbClr val="1F2937"/>
-                </a:solidFill>
-                <a:latin typeface="Calibri" pitchFamily="34" charset="0"/>
-                <a:ea typeface="Calibri" pitchFamily="34" charset="-122"/>
-                <a:cs typeface="Calibri" pitchFamily="34" charset="-120"/>
-              </a:rPr>
-              <a:t>Detaliile tehnice (.shift(1)) decid intre cinstit si fals</a:t>
-            </a:r>
-            <a:endParaRPr lang="en-US" sz="1700" dirty="0"/>
-          </a:p>
-        </p:txBody>
-      </p:sp>
-      <p:sp>
-        <p:nvSpPr>
-          <p:cNvPr id="13" name="Text 11"/>
-          <p:cNvSpPr/>
-          <p:nvPr/>
-        </p:nvSpPr>
-        <p:spPr>
-          <a:xfrm>
-            <a:off x="1554480" y="3520440"/>
-            <a:ext cx="10058400" cy="1005840"/>
-          </a:xfrm>
-          <a:prstGeom prst="rect">
-            <a:avLst/>
-          </a:prstGeom>
-          <a:noFill/>
-          <a:ln/>
-        </p:spPr>
-        <p:txBody>
-          <a:bodyPr wrap="square" rtlCol="0" anchor="ctr"/>
-          <a:lstStyle/>
-          <a:p>
-            <a:pPr indent="0" marL="0">
-              <a:buNone/>
-            </a:pPr>
-            <a:r>
-              <a:rPr lang="en-US" sz="1300" dirty="0">
-                <a:solidFill>
-                  <a:srgbClr val="6B7280"/>
-                </a:solidFill>
-                <a:latin typeface="Calibri" pitchFamily="34" charset="0"/>
-                <a:ea typeface="Calibri" pitchFamily="34" charset="-122"/>
-                <a:cs typeface="Calibri" pitchFamily="34" charset="-120"/>
-              </a:rPr>
-              <a:t>Un detaliu de o linie de cod - .shift(1) inainte de rolling - este diferenta intre un model care arata bine pe test si esueaza in productie, si un model care performeaza consistent. Atentia la detaliu este esentiala.</a:t>
-            </a:r>
-            <a:endParaRPr lang="en-US" sz="1300" dirty="0"/>
-          </a:p>
-        </p:txBody>
-      </p:sp>
-      <p:sp>
-        <p:nvSpPr>
-          <p:cNvPr id="14" name="Shape 12"/>
-          <p:cNvSpPr/>
-          <p:nvPr/>
-        </p:nvSpPr>
-        <p:spPr>
-          <a:xfrm>
-            <a:off x="640080" y="4663440"/>
-            <a:ext cx="685800" cy="685800"/>
-          </a:xfrm>
-          <a:prstGeom prst="ellipse">
-            <a:avLst/>
-          </a:prstGeom>
-          <a:solidFill>
-            <a:srgbClr val="6FAE6F"/>
-          </a:solidFill>
-          <a:ln w="12700">
-            <a:solidFill>
-              <a:srgbClr val="6FAE6F"/>
-            </a:solidFill>
-            <a:prstDash val="solid"/>
-          </a:ln>
-        </p:spPr>
-      </p:sp>
-      <p:sp>
-        <p:nvSpPr>
-          <p:cNvPr id="15" name="Text 13"/>
-          <p:cNvSpPr/>
-          <p:nvPr/>
-        </p:nvSpPr>
-        <p:spPr>
-          <a:xfrm>
-            <a:off x="640080" y="4663440"/>
-            <a:ext cx="685800" cy="685800"/>
-          </a:xfrm>
-          <a:prstGeom prst="rect">
-            <a:avLst/>
-          </a:prstGeom>
-          <a:noFill/>
-          <a:ln/>
-        </p:spPr>
-        <p:txBody>
-          <a:bodyPr wrap="square" rtlCol="0" anchor="ctr"/>
-          <a:lstStyle/>
-          <a:p>
-            <a:pPr algn="ctr" indent="0" marL="0">
-              <a:buNone/>
-            </a:pPr>
-            <a:r>
-              <a:rPr lang="en-US" sz="2200" b="1" dirty="0">
-                <a:solidFill>
-                  <a:srgbClr val="FFFFFF"/>
-                </a:solidFill>
-                <a:latin typeface="Calibri" pitchFamily="34" charset="0"/>
-                <a:ea typeface="Calibri" pitchFamily="34" charset="-122"/>
-                <a:cs typeface="Calibri" pitchFamily="34" charset="-120"/>
-              </a:rPr>
-              <a:t>3</a:t>
-            </a:r>
-            <a:endParaRPr lang="en-US" sz="2200" dirty="0"/>
-          </a:p>
-        </p:txBody>
-      </p:sp>
-      <p:sp>
-        <p:nvSpPr>
-          <p:cNvPr id="16" name="Text 14"/>
-          <p:cNvSpPr/>
-          <p:nvPr/>
-        </p:nvSpPr>
-        <p:spPr>
-          <a:xfrm>
-            <a:off x="1554480" y="4617720"/>
-            <a:ext cx="10058400" cy="457200"/>
-          </a:xfrm>
-          <a:prstGeom prst="rect">
-            <a:avLst/>
-          </a:prstGeom>
-          <a:noFill/>
-          <a:ln/>
-        </p:spPr>
-        <p:txBody>
-          <a:bodyPr wrap="square" rtlCol="0" anchor="ctr"/>
-          <a:lstStyle/>
-          <a:p>
-            <a:pPr indent="0" marL="0">
-              <a:buNone/>
-            </a:pPr>
-            <a:r>
-              <a:rPr lang="en-US" sz="1700" b="1" dirty="0">
-                <a:solidFill>
-                  <a:srgbClr val="1F2937"/>
-                </a:solidFill>
-                <a:latin typeface="Calibri" pitchFamily="34" charset="0"/>
-                <a:ea typeface="Calibri" pitchFamily="34" charset="-122"/>
-                <a:cs typeface="Calibri" pitchFamily="34" charset="-120"/>
-              </a:rPr>
-              <a:t>Tehnicile sunt universale - aplicabile la orice time series</a:t>
-            </a:r>
-            <a:endParaRPr lang="en-US" sz="1700" dirty="0"/>
-          </a:p>
-        </p:txBody>
-      </p:sp>
-      <p:sp>
-        <p:nvSpPr>
-          <p:cNvPr id="17" name="Text 15"/>
-          <p:cNvSpPr/>
-          <p:nvPr/>
-        </p:nvSpPr>
-        <p:spPr>
-          <a:xfrm>
-            <a:off x="1554480" y="5074920"/>
-            <a:ext cx="10058400" cy="1005840"/>
-          </a:xfrm>
-          <a:prstGeom prst="rect">
-            <a:avLst/>
-          </a:prstGeom>
-          <a:noFill/>
-          <a:ln/>
-        </p:spPr>
-        <p:txBody>
-          <a:bodyPr wrap="square" rtlCol="0" anchor="ctr"/>
-          <a:lstStyle/>
-          <a:p>
-            <a:pPr indent="0" marL="0">
-              <a:buNone/>
-            </a:pPr>
-            <a:r>
-              <a:rPr lang="en-US" sz="1300" dirty="0">
-                <a:solidFill>
-                  <a:srgbClr val="6B7280"/>
-                </a:solidFill>
-                <a:latin typeface="Calibri" pitchFamily="34" charset="0"/>
-                <a:ea typeface="Calibri" pitchFamily="34" charset="-122"/>
-                <a:cs typeface="Calibri" pitchFamily="34" charset="-120"/>
-              </a:rPr>
-              <a:t>Encoding ciclic, lag si rolling features functioneaza la fel pe consum (USA), pret (Spania) si productie solara (India). Le voi aplica si pe sesiunile 2 si 3 cu acelasi pipeline.</a:t>
-            </a:r>
-            <a:endParaRPr lang="en-US" sz="1300" dirty="0"/>
-          </a:p>
-        </p:txBody>
-      </p:sp>
-      <p:sp>
-        <p:nvSpPr>
-          <p:cNvPr id="18" name="Text 16"/>
-          <p:cNvSpPr/>
-          <p:nvPr/>
-        </p:nvSpPr>
-        <p:spPr>
-          <a:xfrm>
-            <a:off x="457200" y="6446520"/>
-            <a:ext cx="8229600" cy="274320"/>
-          </a:xfrm>
-          <a:prstGeom prst="rect">
-            <a:avLst/>
-          </a:prstGeom>
-          <a:noFill/>
-          <a:ln/>
-        </p:spPr>
-        <p:txBody>
-          <a:bodyPr wrap="square" rtlCol="0" anchor="ctr"/>
-          <a:lstStyle/>
-          <a:p>
-            <a:pPr indent="0" marL="0">
-              <a:buNone/>
-            </a:pPr>
-            <a:r>
-              <a:rPr lang="en-US" sz="900" dirty="0">
-                <a:solidFill>
-                  <a:srgbClr val="6B7280"/>
-                </a:solidFill>
-                <a:latin typeface="Calibri" pitchFamily="34" charset="0"/>
-                <a:ea typeface="Calibri" pitchFamily="34" charset="-122"/>
-                <a:cs typeface="Calibri" pitchFamily="34" charset="-120"/>
-              </a:rPr>
-              <a:t>Diana Nenu  -  SCSS 2026  -  Feature engineering pentru serii temporale</a:t>
-            </a:r>
-            <a:endParaRPr lang="en-US" sz="900" dirty="0"/>
-          </a:p>
-        </p:txBody>
-      </p:sp>
-      <p:sp>
-        <p:nvSpPr>
-          <p:cNvPr id="19" name="Text 17"/>
-          <p:cNvSpPr/>
-          <p:nvPr/>
-        </p:nvSpPr>
-        <p:spPr>
-          <a:xfrm>
-            <a:off x="10789920" y="6446520"/>
-            <a:ext cx="914400" cy="274320"/>
-          </a:xfrm>
-          <a:prstGeom prst="rect">
-            <a:avLst/>
-          </a:prstGeom>
-          <a:noFill/>
-          <a:ln/>
-        </p:spPr>
-        <p:txBody>
-          <a:bodyPr wrap="square" rtlCol="0" anchor="ctr"/>
-          <a:lstStyle/>
-          <a:p>
-            <a:pPr algn="r" indent="0" marL="0">
-              <a:buNone/>
-            </a:pPr>
-            <a:r>
-              <a:rPr lang="en-US" sz="900" dirty="0">
-                <a:solidFill>
-                  <a:srgbClr val="6B7280"/>
-                </a:solidFill>
-                <a:latin typeface="Calibri" pitchFamily="34" charset="0"/>
-                <a:ea typeface="Calibri" pitchFamily="34" charset="-122"/>
-                <a:cs typeface="Calibri" pitchFamily="34" charset="-120"/>
-              </a:rPr>
-              <a:t>12 / 13</a:t>
+              <a:t>12 / 15</a:t>
             </a:r>
             <a:endParaRPr lang="en-US" sz="900" dirty="0"/>
           </a:p>
@@ -3701,6 +4073,1123 @@
 <file path=ppt/slides/slide13.xml><?xml version="1.0" encoding="utf-8"?>
 <p:sld xmlns:a="http://schemas.openxmlformats.org/drawingml/2006/main" xmlns:r="http://schemas.openxmlformats.org/officeDocument/2006/relationships" xmlns:p="http://schemas.openxmlformats.org/presentationml/2006/main">
   <p:cSld name="Slide 13">
+    <p:bg>
+      <p:bgPr>
+        <a:solidFill>
+          <a:srgbClr val="FFFFFF"/>
+        </a:solidFill>
+      </p:bgPr>
+    </p:bg>
+    <p:spTree>
+      <p:nvGrpSpPr>
+        <p:cNvPr id="1" name=""/>
+        <p:cNvGrpSpPr/>
+        <p:nvPr/>
+      </p:nvGrpSpPr>
+      <p:grpSpPr>
+        <a:xfrm>
+          <a:off x="0" y="0"/>
+          <a:ext cx="0" cy="0"/>
+          <a:chOff x="0" y="0"/>
+          <a:chExt cx="0" cy="0"/>
+        </a:xfrm>
+      </p:grpSpPr>
+      <p:sp>
+        <p:nvSpPr>
+          <p:cNvPr id="2" name="Shape 0"/>
+          <p:cNvSpPr/>
+          <p:nvPr/>
+        </p:nvSpPr>
+        <p:spPr>
+          <a:xfrm>
+            <a:off x="0" y="0"/>
+            <a:ext cx="12161520" cy="137160"/>
+          </a:xfrm>
+          <a:prstGeom prst="rect">
+            <a:avLst/>
+          </a:prstGeom>
+          <a:solidFill>
+            <a:srgbClr val="065A82"/>
+          </a:solidFill>
+          <a:ln w="12700">
+            <a:solidFill>
+              <a:srgbClr val="065A82"/>
+            </a:solidFill>
+            <a:prstDash val="solid"/>
+          </a:ln>
+        </p:spPr>
+      </p:sp>
+      <p:sp>
+        <p:nvSpPr>
+          <p:cNvPr id="3" name="Text 1"/>
+          <p:cNvSpPr/>
+          <p:nvPr/>
+        </p:nvSpPr>
+        <p:spPr>
+          <a:xfrm>
+            <a:off x="457200" y="274320"/>
+            <a:ext cx="11247120" cy="320040"/>
+          </a:xfrm>
+          <a:prstGeom prst="rect">
+            <a:avLst/>
+          </a:prstGeom>
+          <a:noFill/>
+          <a:ln/>
+        </p:spPr>
+        <p:txBody>
+          <a:bodyPr wrap="square" lIns="0" tIns="0" rIns="0" bIns="0" rtlCol="0" anchor="ctr"/>
+          <a:lstStyle/>
+          <a:p>
+            <a:pPr indent="0" marL="0">
+              <a:buNone/>
+            </a:pPr>
+            <a:r>
+              <a:rPr lang="en-US" sz="1100" b="1" spc="600" kern="0" dirty="0">
+                <a:solidFill>
+                  <a:srgbClr val="F96167"/>
+                </a:solidFill>
+                <a:latin typeface="Calibri" pitchFamily="34" charset="0"/>
+                <a:ea typeface="Calibri" pitchFamily="34" charset="-122"/>
+                <a:cs typeface="Calibri" pitchFamily="34" charset="-120"/>
+              </a:rPr>
+              <a:t>REZULTATE PROPRII</a:t>
+            </a:r>
+            <a:endParaRPr lang="en-US" sz="1100" dirty="0"/>
+          </a:p>
+        </p:txBody>
+      </p:sp>
+      <p:sp>
+        <p:nvSpPr>
+          <p:cNvPr id="4" name="Text 2"/>
+          <p:cNvSpPr/>
+          <p:nvPr/>
+        </p:nvSpPr>
+        <p:spPr>
+          <a:xfrm>
+            <a:off x="457200" y="594360"/>
+            <a:ext cx="11247120" cy="640080"/>
+          </a:xfrm>
+          <a:prstGeom prst="rect">
+            <a:avLst/>
+          </a:prstGeom>
+          <a:noFill/>
+          <a:ln/>
+        </p:spPr>
+        <p:txBody>
+          <a:bodyPr wrap="square" lIns="0" tIns="0" rIns="0" bIns="0" rtlCol="0" anchor="t"/>
+          <a:lstStyle/>
+          <a:p>
+            <a:pPr indent="0" marL="0">
+              <a:buNone/>
+            </a:pPr>
+            <a:r>
+              <a:rPr lang="en-US" sz="2800" b="1" dirty="0">
+                <a:solidFill>
+                  <a:srgbClr val="1F2937"/>
+                </a:solidFill>
+                <a:latin typeface="Calibri" pitchFamily="34" charset="0"/>
+                <a:ea typeface="Calibri" pitchFamily="34" charset="-122"/>
+                <a:cs typeface="Calibri" pitchFamily="34" charset="-120"/>
+              </a:rPr>
+              <a:t>Validare empirica: cele 3 tehnici aplicate pe pretul Spania</a:t>
+            </a:r>
+            <a:endParaRPr lang="en-US" sz="2800" dirty="0"/>
+          </a:p>
+        </p:txBody>
+      </p:sp>
+      <p:sp>
+        <p:nvSpPr>
+          <p:cNvPr id="5" name="Shape 3"/>
+          <p:cNvSpPr/>
+          <p:nvPr/>
+        </p:nvSpPr>
+        <p:spPr>
+          <a:xfrm>
+            <a:off x="457200" y="1280160"/>
+            <a:ext cx="1097280" cy="36576"/>
+          </a:xfrm>
+          <a:prstGeom prst="rect">
+            <a:avLst/>
+          </a:prstGeom>
+          <a:solidFill>
+            <a:srgbClr val="F96167"/>
+          </a:solidFill>
+          <a:ln w="12700">
+            <a:solidFill>
+              <a:srgbClr val="F96167"/>
+            </a:solidFill>
+            <a:prstDash val="solid"/>
+          </a:ln>
+        </p:spPr>
+      </p:sp>
+      <p:pic>
+        <p:nvPicPr>
+          <p:cNvPr id="6" name="Image 0" descr="/sessions/vibrant-elegant-pasteur/mnt/Disertatie_AI_Platform/reports/figures/fig_fe_tabel_modele.png">    </p:cNvPr>
+          <p:cNvPicPr>
+            <a:picLocks noChangeAspect="1"/>
+          </p:cNvPicPr>
+          <p:nvPr/>
+        </p:nvPicPr>
+        <p:blipFill>
+          <a:blip r:embed="rId1"/>
+          <a:srcRect l="0" r="0" t="0" b="0"/>
+          <a:stretch/>
+        </p:blipFill>
+        <p:spPr>
+          <a:xfrm>
+            <a:off x="365760" y="1463040"/>
+            <a:ext cx="11430000" cy="4114800"/>
+          </a:xfrm>
+          <a:prstGeom prst="rect">
+            <a:avLst/>
+          </a:prstGeom>
+        </p:spPr>
+      </p:pic>
+      <p:sp>
+        <p:nvSpPr>
+          <p:cNvPr id="7" name="Shape 4"/>
+          <p:cNvSpPr/>
+          <p:nvPr/>
+        </p:nvSpPr>
+        <p:spPr>
+          <a:xfrm>
+            <a:off x="548640" y="5440680"/>
+            <a:ext cx="5440680" cy="749808"/>
+          </a:xfrm>
+          <a:prstGeom prst="rect">
+            <a:avLst/>
+          </a:prstGeom>
+          <a:solidFill>
+            <a:srgbClr val="F4F5F7"/>
+          </a:solidFill>
+          <a:ln w="12700">
+            <a:solidFill>
+              <a:srgbClr val="6FAE6F"/>
+            </a:solidFill>
+            <a:prstDash val="solid"/>
+          </a:ln>
+        </p:spPr>
+      </p:sp>
+      <p:sp>
+        <p:nvSpPr>
+          <p:cNvPr id="8" name="Text 5"/>
+          <p:cNvSpPr/>
+          <p:nvPr/>
+        </p:nvSpPr>
+        <p:spPr>
+          <a:xfrm>
+            <a:off x="777240" y="5468112"/>
+            <a:ext cx="5120640" cy="685800"/>
+          </a:xfrm>
+          <a:prstGeom prst="rect">
+            <a:avLst/>
+          </a:prstGeom>
+          <a:noFill/>
+          <a:ln/>
+        </p:spPr>
+        <p:txBody>
+          <a:bodyPr wrap="square" rtlCol="0" anchor="ctr"/>
+          <a:lstStyle/>
+          <a:p>
+            <a:pPr indent="0" marL="0">
+              <a:buNone/>
+            </a:pPr>
+            <a:r>
+              <a:rPr lang="en-US" sz="1300" b="1" dirty="0">
+                <a:solidFill>
+                  <a:srgbClr val="6FAE6F"/>
+                </a:solidFill>
+                <a:latin typeface="Calibri" pitchFamily="34" charset="0"/>
+                <a:ea typeface="Calibri" pitchFamily="34" charset="-122"/>
+                <a:cs typeface="Calibri" pitchFamily="34" charset="-120"/>
+              </a:rPr>
+              <a:t>Castigatorul: XGBoost
+</a:t>
+            </a:r>
+            <a:pPr indent="0" marL="0">
+              <a:buNone/>
+            </a:pPr>
+            <a:r>
+              <a:rPr lang="en-US" sz="1150" dirty="0">
+                <a:solidFill>
+                  <a:srgbClr val="1F2937"/>
+                </a:solidFill>
+                <a:latin typeface="Calibri" pitchFamily="34" charset="0"/>
+                <a:ea typeface="Calibri" pitchFamily="34" charset="-122"/>
+                <a:cs typeface="Calibri" pitchFamily="34" charset="-120"/>
+              </a:rPr>
+              <a:t>R² = 0.968, RMSE = 2.07 EUR/MWh, MAPE = 2.57%</a:t>
+            </a:r>
+            <a:endParaRPr lang="en-US" sz="1300" dirty="0"/>
+          </a:p>
+        </p:txBody>
+      </p:sp>
+      <p:sp>
+        <p:nvSpPr>
+          <p:cNvPr id="9" name="Shape 6"/>
+          <p:cNvSpPr/>
+          <p:nvPr/>
+        </p:nvSpPr>
+        <p:spPr>
+          <a:xfrm>
+            <a:off x="6172200" y="5440680"/>
+            <a:ext cx="5440680" cy="749808"/>
+          </a:xfrm>
+          <a:prstGeom prst="rect">
+            <a:avLst/>
+          </a:prstGeom>
+          <a:solidFill>
+            <a:srgbClr val="F4F5F7"/>
+          </a:solidFill>
+          <a:ln w="12700">
+            <a:solidFill>
+              <a:srgbClr val="F96167"/>
+            </a:solidFill>
+            <a:prstDash val="solid"/>
+          </a:ln>
+        </p:spPr>
+      </p:sp>
+      <p:sp>
+        <p:nvSpPr>
+          <p:cNvPr id="10" name="Text 7"/>
+          <p:cNvSpPr/>
+          <p:nvPr/>
+        </p:nvSpPr>
+        <p:spPr>
+          <a:xfrm>
+            <a:off x="6400800" y="5468112"/>
+            <a:ext cx="5120640" cy="685800"/>
+          </a:xfrm>
+          <a:prstGeom prst="rect">
+            <a:avLst/>
+          </a:prstGeom>
+          <a:noFill/>
+          <a:ln/>
+        </p:spPr>
+        <p:txBody>
+          <a:bodyPr wrap="square" rtlCol="0" anchor="ctr"/>
+          <a:lstStyle/>
+          <a:p>
+            <a:pPr indent="0" marL="0">
+              <a:buNone/>
+            </a:pPr>
+            <a:r>
+              <a:rPr lang="en-US" sz="1300" b="1" dirty="0">
+                <a:solidFill>
+                  <a:srgbClr val="F96167"/>
+                </a:solidFill>
+                <a:latin typeface="Calibri" pitchFamily="34" charset="0"/>
+                <a:ea typeface="Calibri" pitchFamily="34" charset="-122"/>
+                <a:cs typeface="Calibri" pitchFamily="34" charset="-120"/>
+              </a:rPr>
+              <a:t>LSTM in mod demo (1000 ore): R² negativ
+</a:t>
+            </a:r>
+            <a:pPr indent="0" marL="0">
+              <a:buNone/>
+            </a:pPr>
+            <a:r>
+              <a:rPr lang="en-US" sz="1150" dirty="0">
+                <a:solidFill>
+                  <a:srgbClr val="1F2937"/>
+                </a:solidFill>
+                <a:latin typeface="Calibri" pitchFamily="34" charset="0"/>
+                <a:ea typeface="Calibri" pitchFamily="34" charset="-122"/>
+                <a:cs typeface="Calibri" pitchFamily="34" charset="-120"/>
+              </a:rPr>
+              <a:t>Date insuficiente. In MODE=full pe Databricks va recupera.</a:t>
+            </a:r>
+            <a:endParaRPr lang="en-US" sz="1300" dirty="0"/>
+          </a:p>
+        </p:txBody>
+      </p:sp>
+      <p:sp>
+        <p:nvSpPr>
+          <p:cNvPr id="11" name="Text 8"/>
+          <p:cNvSpPr/>
+          <p:nvPr/>
+        </p:nvSpPr>
+        <p:spPr>
+          <a:xfrm>
+            <a:off x="457200" y="6355080"/>
+            <a:ext cx="10058400" cy="411480"/>
+          </a:xfrm>
+          <a:prstGeom prst="rect">
+            <a:avLst/>
+          </a:prstGeom>
+          <a:noFill/>
+          <a:ln/>
+        </p:spPr>
+        <p:txBody>
+          <a:bodyPr wrap="square" rtlCol="0" anchor="ctr"/>
+          <a:lstStyle/>
+          <a:p>
+            <a:pPr indent="0" marL="0">
+              <a:buNone/>
+            </a:pPr>
+            <a:r>
+              <a:rPr lang="en-US" sz="800" b="1" dirty="0">
+                <a:solidFill>
+                  <a:srgbClr val="6B7280"/>
+                </a:solidFill>
+                <a:latin typeface="Calibri" pitchFamily="34" charset="0"/>
+                <a:ea typeface="Calibri" pitchFamily="34" charset="-122"/>
+                <a:cs typeface="Calibri" pitchFamily="34" charset="-120"/>
+              </a:rPr>
+              <a:t>Sesiune Comunicari Stiintifice Mai 2026</a:t>
+            </a:r>
+            <a:endParaRPr lang="en-US" sz="800" dirty="0"/>
+          </a:p>
+          <a:p>
+            <a:pPr indent="0" marL="0">
+              <a:buNone/>
+            </a:pPr>
+            <a:r>
+              <a:rPr lang="en-US" sz="800" i="1" dirty="0">
+                <a:solidFill>
+                  <a:srgbClr val="6B7280"/>
+                </a:solidFill>
+                <a:latin typeface="Calibri" pitchFamily="34" charset="0"/>
+                <a:ea typeface="Calibri" pitchFamily="34" charset="-122"/>
+                <a:cs typeface="Calibri" pitchFamily="34" charset="-120"/>
+              </a:rPr>
+              <a:t>Tehnici de feature engineering pentru serii temporale, cu aplicatii in domeniul energetic</a:t>
+            </a:r>
+            <a:endParaRPr lang="en-US" sz="800" dirty="0"/>
+          </a:p>
+        </p:txBody>
+      </p:sp>
+      <p:sp>
+        <p:nvSpPr>
+          <p:cNvPr id="12" name="Text 9"/>
+          <p:cNvSpPr/>
+          <p:nvPr/>
+        </p:nvSpPr>
+        <p:spPr>
+          <a:xfrm>
+            <a:off x="10789920" y="6400800"/>
+            <a:ext cx="914400" cy="320040"/>
+          </a:xfrm>
+          <a:prstGeom prst="rect">
+            <a:avLst/>
+          </a:prstGeom>
+          <a:noFill/>
+          <a:ln/>
+        </p:spPr>
+        <p:txBody>
+          <a:bodyPr wrap="square" rtlCol="0" anchor="ctr"/>
+          <a:lstStyle/>
+          <a:p>
+            <a:pPr algn="r" indent="0" marL="0">
+              <a:buNone/>
+            </a:pPr>
+            <a:r>
+              <a:rPr lang="en-US" sz="900" dirty="0">
+                <a:solidFill>
+                  <a:srgbClr val="6B7280"/>
+                </a:solidFill>
+                <a:latin typeface="Calibri" pitchFamily="34" charset="0"/>
+                <a:ea typeface="Calibri" pitchFamily="34" charset="-122"/>
+                <a:cs typeface="Calibri" pitchFamily="34" charset="-120"/>
+              </a:rPr>
+              <a:t>13 / 15</a:t>
+            </a:r>
+            <a:endParaRPr lang="en-US" sz="900" dirty="0"/>
+          </a:p>
+        </p:txBody>
+      </p:sp>
+    </p:spTree>
+  </p:cSld>
+  <p:clrMapOvr>
+    <a:masterClrMapping/>
+  </p:clrMapOvr>
+</p:sld>
+</file>
+
+<file path=ppt/slides/slide14.xml><?xml version="1.0" encoding="utf-8"?>
+<p:sld xmlns:a="http://schemas.openxmlformats.org/drawingml/2006/main" xmlns:r="http://schemas.openxmlformats.org/officeDocument/2006/relationships" xmlns:p="http://schemas.openxmlformats.org/presentationml/2006/main">
+  <p:cSld name="Slide 14">
+    <p:bg>
+      <p:bgPr>
+        <a:solidFill>
+          <a:srgbClr val="FFFFFF"/>
+        </a:solidFill>
+      </p:bgPr>
+    </p:bg>
+    <p:spTree>
+      <p:nvGrpSpPr>
+        <p:cNvPr id="1" name=""/>
+        <p:cNvGrpSpPr/>
+        <p:nvPr/>
+      </p:nvGrpSpPr>
+      <p:grpSpPr>
+        <a:xfrm>
+          <a:off x="0" y="0"/>
+          <a:ext cx="0" cy="0"/>
+          <a:chOff x="0" y="0"/>
+          <a:chExt cx="0" cy="0"/>
+        </a:xfrm>
+      </p:grpSpPr>
+      <p:sp>
+        <p:nvSpPr>
+          <p:cNvPr id="2" name="Shape 0"/>
+          <p:cNvSpPr/>
+          <p:nvPr/>
+        </p:nvSpPr>
+        <p:spPr>
+          <a:xfrm>
+            <a:off x="0" y="0"/>
+            <a:ext cx="12161520" cy="137160"/>
+          </a:xfrm>
+          <a:prstGeom prst="rect">
+            <a:avLst/>
+          </a:prstGeom>
+          <a:solidFill>
+            <a:srgbClr val="065A82"/>
+          </a:solidFill>
+          <a:ln w="12700">
+            <a:solidFill>
+              <a:srgbClr val="065A82"/>
+            </a:solidFill>
+            <a:prstDash val="solid"/>
+          </a:ln>
+        </p:spPr>
+      </p:sp>
+      <p:sp>
+        <p:nvSpPr>
+          <p:cNvPr id="3" name="Text 1"/>
+          <p:cNvSpPr/>
+          <p:nvPr/>
+        </p:nvSpPr>
+        <p:spPr>
+          <a:xfrm>
+            <a:off x="457200" y="274320"/>
+            <a:ext cx="11247120" cy="320040"/>
+          </a:xfrm>
+          <a:prstGeom prst="rect">
+            <a:avLst/>
+          </a:prstGeom>
+          <a:noFill/>
+          <a:ln/>
+        </p:spPr>
+        <p:txBody>
+          <a:bodyPr wrap="square" lIns="0" tIns="0" rIns="0" bIns="0" rtlCol="0" anchor="ctr"/>
+          <a:lstStyle/>
+          <a:p>
+            <a:pPr indent="0" marL="0">
+              <a:buNone/>
+            </a:pPr>
+            <a:r>
+              <a:rPr lang="en-US" sz="1100" b="1" spc="600" kern="0" dirty="0">
+                <a:solidFill>
+                  <a:srgbClr val="F96167"/>
+                </a:solidFill>
+                <a:latin typeface="Calibri" pitchFamily="34" charset="0"/>
+                <a:ea typeface="Calibri" pitchFamily="34" charset="-122"/>
+                <a:cs typeface="Calibri" pitchFamily="34" charset="-120"/>
+              </a:rPr>
+              <a:t>LECTII INVATATE</a:t>
+            </a:r>
+            <a:endParaRPr lang="en-US" sz="1100" dirty="0"/>
+          </a:p>
+        </p:txBody>
+      </p:sp>
+      <p:sp>
+        <p:nvSpPr>
+          <p:cNvPr id="4" name="Text 2"/>
+          <p:cNvSpPr/>
+          <p:nvPr/>
+        </p:nvSpPr>
+        <p:spPr>
+          <a:xfrm>
+            <a:off x="457200" y="594360"/>
+            <a:ext cx="11247120" cy="640080"/>
+          </a:xfrm>
+          <a:prstGeom prst="rect">
+            <a:avLst/>
+          </a:prstGeom>
+          <a:noFill/>
+          <a:ln/>
+        </p:spPr>
+        <p:txBody>
+          <a:bodyPr wrap="square" lIns="0" tIns="0" rIns="0" bIns="0" rtlCol="0" anchor="t"/>
+          <a:lstStyle/>
+          <a:p>
+            <a:pPr indent="0" marL="0">
+              <a:buNone/>
+            </a:pPr>
+            <a:r>
+              <a:rPr lang="en-US" sz="2800" b="1" dirty="0">
+                <a:solidFill>
+                  <a:srgbClr val="1F2937"/>
+                </a:solidFill>
+                <a:latin typeface="Calibri" pitchFamily="34" charset="0"/>
+                <a:ea typeface="Calibri" pitchFamily="34" charset="-122"/>
+                <a:cs typeface="Calibri" pitchFamily="34" charset="-120"/>
+              </a:rPr>
+              <a:t>Concluzii</a:t>
+            </a:r>
+            <a:endParaRPr lang="en-US" sz="2800" dirty="0"/>
+          </a:p>
+        </p:txBody>
+      </p:sp>
+      <p:sp>
+        <p:nvSpPr>
+          <p:cNvPr id="5" name="Shape 3"/>
+          <p:cNvSpPr/>
+          <p:nvPr/>
+        </p:nvSpPr>
+        <p:spPr>
+          <a:xfrm>
+            <a:off x="457200" y="1280160"/>
+            <a:ext cx="1097280" cy="36576"/>
+          </a:xfrm>
+          <a:prstGeom prst="rect">
+            <a:avLst/>
+          </a:prstGeom>
+          <a:solidFill>
+            <a:srgbClr val="F96167"/>
+          </a:solidFill>
+          <a:ln w="12700">
+            <a:solidFill>
+              <a:srgbClr val="F96167"/>
+            </a:solidFill>
+            <a:prstDash val="solid"/>
+          </a:ln>
+        </p:spPr>
+      </p:sp>
+      <p:sp>
+        <p:nvSpPr>
+          <p:cNvPr id="6" name="Shape 4"/>
+          <p:cNvSpPr/>
+          <p:nvPr/>
+        </p:nvSpPr>
+        <p:spPr>
+          <a:xfrm>
+            <a:off x="640080" y="1554480"/>
+            <a:ext cx="685800" cy="685800"/>
+          </a:xfrm>
+          <a:prstGeom prst="ellipse">
+            <a:avLst/>
+          </a:prstGeom>
+          <a:solidFill>
+            <a:srgbClr val="065A82"/>
+          </a:solidFill>
+          <a:ln w="12700">
+            <a:solidFill>
+              <a:srgbClr val="065A82"/>
+            </a:solidFill>
+            <a:prstDash val="solid"/>
+          </a:ln>
+        </p:spPr>
+      </p:sp>
+      <p:sp>
+        <p:nvSpPr>
+          <p:cNvPr id="7" name="Text 5"/>
+          <p:cNvSpPr/>
+          <p:nvPr/>
+        </p:nvSpPr>
+        <p:spPr>
+          <a:xfrm>
+            <a:off x="640080" y="1554480"/>
+            <a:ext cx="685800" cy="685800"/>
+          </a:xfrm>
+          <a:prstGeom prst="rect">
+            <a:avLst/>
+          </a:prstGeom>
+          <a:noFill/>
+          <a:ln/>
+        </p:spPr>
+        <p:txBody>
+          <a:bodyPr wrap="square" rtlCol="0" anchor="ctr"/>
+          <a:lstStyle/>
+          <a:p>
+            <a:pPr algn="ctr" indent="0" marL="0">
+              <a:buNone/>
+            </a:pPr>
+            <a:r>
+              <a:rPr lang="en-US" sz="2200" b="1" dirty="0">
+                <a:solidFill>
+                  <a:srgbClr val="FFFFFF"/>
+                </a:solidFill>
+                <a:latin typeface="Calibri" pitchFamily="34" charset="0"/>
+                <a:ea typeface="Calibri" pitchFamily="34" charset="-122"/>
+                <a:cs typeface="Calibri" pitchFamily="34" charset="-120"/>
+              </a:rPr>
+              <a:t>1</a:t>
+            </a:r>
+            <a:endParaRPr lang="en-US" sz="2200" dirty="0"/>
+          </a:p>
+        </p:txBody>
+      </p:sp>
+      <p:sp>
+        <p:nvSpPr>
+          <p:cNvPr id="8" name="Text 6"/>
+          <p:cNvSpPr/>
+          <p:nvPr/>
+        </p:nvSpPr>
+        <p:spPr>
+          <a:xfrm>
+            <a:off x="1554480" y="1508760"/>
+            <a:ext cx="10058400" cy="457200"/>
+          </a:xfrm>
+          <a:prstGeom prst="rect">
+            <a:avLst/>
+          </a:prstGeom>
+          <a:noFill/>
+          <a:ln/>
+        </p:spPr>
+        <p:txBody>
+          <a:bodyPr wrap="square" rtlCol="0" anchor="ctr"/>
+          <a:lstStyle/>
+          <a:p>
+            <a:pPr indent="0" marL="0">
+              <a:buNone/>
+            </a:pPr>
+            <a:r>
+              <a:rPr lang="en-US" sz="1700" b="1" dirty="0">
+                <a:solidFill>
+                  <a:srgbClr val="1F2937"/>
+                </a:solidFill>
+                <a:latin typeface="Calibri" pitchFamily="34" charset="0"/>
+                <a:ea typeface="Calibri" pitchFamily="34" charset="-122"/>
+                <a:cs typeface="Calibri" pitchFamily="34" charset="-120"/>
+              </a:rPr>
+              <a:t>Feature engineering &gt; selectia modelului (pe time series)</a:t>
+            </a:r>
+            <a:endParaRPr lang="en-US" sz="1700" dirty="0"/>
+          </a:p>
+        </p:txBody>
+      </p:sp>
+      <p:sp>
+        <p:nvSpPr>
+          <p:cNvPr id="9" name="Text 7"/>
+          <p:cNvSpPr/>
+          <p:nvPr/>
+        </p:nvSpPr>
+        <p:spPr>
+          <a:xfrm>
+            <a:off x="1554480" y="1965960"/>
+            <a:ext cx="10058400" cy="1005840"/>
+          </a:xfrm>
+          <a:prstGeom prst="rect">
+            <a:avLst/>
+          </a:prstGeom>
+          <a:noFill/>
+          <a:ln/>
+        </p:spPr>
+        <p:txBody>
+          <a:bodyPr wrap="square" rtlCol="0" anchor="ctr"/>
+          <a:lstStyle/>
+          <a:p>
+            <a:pPr indent="0" marL="0">
+              <a:buNone/>
+            </a:pPr>
+            <a:r>
+              <a:rPr lang="en-US" sz="1300" dirty="0">
+                <a:solidFill>
+                  <a:srgbClr val="6B7280"/>
+                </a:solidFill>
+                <a:latin typeface="Calibri" pitchFamily="34" charset="0"/>
+                <a:ea typeface="Calibri" pitchFamily="34" charset="-122"/>
+                <a:cs typeface="Calibri" pitchFamily="34" charset="-120"/>
+              </a:rPr>
+              <a:t>Pe pretul Spania, toate modelele clasice obtin R² intre 0.947 si 0.968. Diferentele sunt minime. Ceea ce a contat cu adevarat au fost cele 3 tehnici de feature engineering aplicate corect pe datele brute.</a:t>
+            </a:r>
+            <a:endParaRPr lang="en-US" sz="1300" dirty="0"/>
+          </a:p>
+        </p:txBody>
+      </p:sp>
+      <p:sp>
+        <p:nvSpPr>
+          <p:cNvPr id="10" name="Shape 8"/>
+          <p:cNvSpPr/>
+          <p:nvPr/>
+        </p:nvSpPr>
+        <p:spPr>
+          <a:xfrm>
+            <a:off x="640080" y="3108960"/>
+            <a:ext cx="685800" cy="685800"/>
+          </a:xfrm>
+          <a:prstGeom prst="ellipse">
+            <a:avLst/>
+          </a:prstGeom>
+          <a:solidFill>
+            <a:srgbClr val="F96167"/>
+          </a:solidFill>
+          <a:ln w="12700">
+            <a:solidFill>
+              <a:srgbClr val="F96167"/>
+            </a:solidFill>
+            <a:prstDash val="solid"/>
+          </a:ln>
+        </p:spPr>
+      </p:sp>
+      <p:sp>
+        <p:nvSpPr>
+          <p:cNvPr id="11" name="Text 9"/>
+          <p:cNvSpPr/>
+          <p:nvPr/>
+        </p:nvSpPr>
+        <p:spPr>
+          <a:xfrm>
+            <a:off x="640080" y="3108960"/>
+            <a:ext cx="685800" cy="685800"/>
+          </a:xfrm>
+          <a:prstGeom prst="rect">
+            <a:avLst/>
+          </a:prstGeom>
+          <a:noFill/>
+          <a:ln/>
+        </p:spPr>
+        <p:txBody>
+          <a:bodyPr wrap="square" rtlCol="0" anchor="ctr"/>
+          <a:lstStyle/>
+          <a:p>
+            <a:pPr algn="ctr" indent="0" marL="0">
+              <a:buNone/>
+            </a:pPr>
+            <a:r>
+              <a:rPr lang="en-US" sz="2200" b="1" dirty="0">
+                <a:solidFill>
+                  <a:srgbClr val="FFFFFF"/>
+                </a:solidFill>
+                <a:latin typeface="Calibri" pitchFamily="34" charset="0"/>
+                <a:ea typeface="Calibri" pitchFamily="34" charset="-122"/>
+                <a:cs typeface="Calibri" pitchFamily="34" charset="-120"/>
+              </a:rPr>
+              <a:t>2</a:t>
+            </a:r>
+            <a:endParaRPr lang="en-US" sz="2200" dirty="0"/>
+          </a:p>
+        </p:txBody>
+      </p:sp>
+      <p:sp>
+        <p:nvSpPr>
+          <p:cNvPr id="12" name="Text 10"/>
+          <p:cNvSpPr/>
+          <p:nvPr/>
+        </p:nvSpPr>
+        <p:spPr>
+          <a:xfrm>
+            <a:off x="1554480" y="3063240"/>
+            <a:ext cx="10058400" cy="457200"/>
+          </a:xfrm>
+          <a:prstGeom prst="rect">
+            <a:avLst/>
+          </a:prstGeom>
+          <a:noFill/>
+          <a:ln/>
+        </p:spPr>
+        <p:txBody>
+          <a:bodyPr wrap="square" rtlCol="0" anchor="ctr"/>
+          <a:lstStyle/>
+          <a:p>
+            <a:pPr indent="0" marL="0">
+              <a:buNone/>
+            </a:pPr>
+            <a:r>
+              <a:rPr lang="en-US" sz="1700" b="1" dirty="0">
+                <a:solidFill>
+                  <a:srgbClr val="1F2937"/>
+                </a:solidFill>
+                <a:latin typeface="Calibri" pitchFamily="34" charset="0"/>
+                <a:ea typeface="Calibri" pitchFamily="34" charset="-122"/>
+                <a:cs typeface="Calibri" pitchFamily="34" charset="-120"/>
+              </a:rPr>
+              <a:t>Detaliile tehnice (.shift(1)) decid intre cinstit si fals</a:t>
+            </a:r>
+            <a:endParaRPr lang="en-US" sz="1700" dirty="0"/>
+          </a:p>
+        </p:txBody>
+      </p:sp>
+      <p:sp>
+        <p:nvSpPr>
+          <p:cNvPr id="13" name="Text 11"/>
+          <p:cNvSpPr/>
+          <p:nvPr/>
+        </p:nvSpPr>
+        <p:spPr>
+          <a:xfrm>
+            <a:off x="1554480" y="3520440"/>
+            <a:ext cx="10058400" cy="1005840"/>
+          </a:xfrm>
+          <a:prstGeom prst="rect">
+            <a:avLst/>
+          </a:prstGeom>
+          <a:noFill/>
+          <a:ln/>
+        </p:spPr>
+        <p:txBody>
+          <a:bodyPr wrap="square" rtlCol="0" anchor="ctr"/>
+          <a:lstStyle/>
+          <a:p>
+            <a:pPr indent="0" marL="0">
+              <a:buNone/>
+            </a:pPr>
+            <a:r>
+              <a:rPr lang="en-US" sz="1300" dirty="0">
+                <a:solidFill>
+                  <a:srgbClr val="6B7280"/>
+                </a:solidFill>
+                <a:latin typeface="Calibri" pitchFamily="34" charset="0"/>
+                <a:ea typeface="Calibri" pitchFamily="34" charset="-122"/>
+                <a:cs typeface="Calibri" pitchFamily="34" charset="-120"/>
+              </a:rPr>
+              <a:t>Un detaliu de o linie de cod - .shift(1) inainte de rolling - este diferenta intre un model care arata bine pe test si esueaza in productie, si un model care performeaza consistent. Atentia la detaliu este esentiala.</a:t>
+            </a:r>
+            <a:endParaRPr lang="en-US" sz="1300" dirty="0"/>
+          </a:p>
+        </p:txBody>
+      </p:sp>
+      <p:sp>
+        <p:nvSpPr>
+          <p:cNvPr id="14" name="Shape 12"/>
+          <p:cNvSpPr/>
+          <p:nvPr/>
+        </p:nvSpPr>
+        <p:spPr>
+          <a:xfrm>
+            <a:off x="640080" y="4663440"/>
+            <a:ext cx="685800" cy="685800"/>
+          </a:xfrm>
+          <a:prstGeom prst="ellipse">
+            <a:avLst/>
+          </a:prstGeom>
+          <a:solidFill>
+            <a:srgbClr val="6FAE6F"/>
+          </a:solidFill>
+          <a:ln w="12700">
+            <a:solidFill>
+              <a:srgbClr val="6FAE6F"/>
+            </a:solidFill>
+            <a:prstDash val="solid"/>
+          </a:ln>
+        </p:spPr>
+      </p:sp>
+      <p:sp>
+        <p:nvSpPr>
+          <p:cNvPr id="15" name="Text 13"/>
+          <p:cNvSpPr/>
+          <p:nvPr/>
+        </p:nvSpPr>
+        <p:spPr>
+          <a:xfrm>
+            <a:off x="640080" y="4663440"/>
+            <a:ext cx="685800" cy="685800"/>
+          </a:xfrm>
+          <a:prstGeom prst="rect">
+            <a:avLst/>
+          </a:prstGeom>
+          <a:noFill/>
+          <a:ln/>
+        </p:spPr>
+        <p:txBody>
+          <a:bodyPr wrap="square" rtlCol="0" anchor="ctr"/>
+          <a:lstStyle/>
+          <a:p>
+            <a:pPr algn="ctr" indent="0" marL="0">
+              <a:buNone/>
+            </a:pPr>
+            <a:r>
+              <a:rPr lang="en-US" sz="2200" b="1" dirty="0">
+                <a:solidFill>
+                  <a:srgbClr val="FFFFFF"/>
+                </a:solidFill>
+                <a:latin typeface="Calibri" pitchFamily="34" charset="0"/>
+                <a:ea typeface="Calibri" pitchFamily="34" charset="-122"/>
+                <a:cs typeface="Calibri" pitchFamily="34" charset="-120"/>
+              </a:rPr>
+              <a:t>3</a:t>
+            </a:r>
+            <a:endParaRPr lang="en-US" sz="2200" dirty="0"/>
+          </a:p>
+        </p:txBody>
+      </p:sp>
+      <p:sp>
+        <p:nvSpPr>
+          <p:cNvPr id="16" name="Text 14"/>
+          <p:cNvSpPr/>
+          <p:nvPr/>
+        </p:nvSpPr>
+        <p:spPr>
+          <a:xfrm>
+            <a:off x="1554480" y="4617720"/>
+            <a:ext cx="10058400" cy="457200"/>
+          </a:xfrm>
+          <a:prstGeom prst="rect">
+            <a:avLst/>
+          </a:prstGeom>
+          <a:noFill/>
+          <a:ln/>
+        </p:spPr>
+        <p:txBody>
+          <a:bodyPr wrap="square" rtlCol="0" anchor="ctr"/>
+          <a:lstStyle/>
+          <a:p>
+            <a:pPr indent="0" marL="0">
+              <a:buNone/>
+            </a:pPr>
+            <a:r>
+              <a:rPr lang="en-US" sz="1700" b="1" dirty="0">
+                <a:solidFill>
+                  <a:srgbClr val="1F2937"/>
+                </a:solidFill>
+                <a:latin typeface="Calibri" pitchFamily="34" charset="0"/>
+                <a:ea typeface="Calibri" pitchFamily="34" charset="-122"/>
+                <a:cs typeface="Calibri" pitchFamily="34" charset="-120"/>
+              </a:rPr>
+              <a:t>Tehnicile sunt universale - aplicabile la orice time series</a:t>
+            </a:r>
+            <a:endParaRPr lang="en-US" sz="1700" dirty="0"/>
+          </a:p>
+        </p:txBody>
+      </p:sp>
+      <p:sp>
+        <p:nvSpPr>
+          <p:cNvPr id="17" name="Text 15"/>
+          <p:cNvSpPr/>
+          <p:nvPr/>
+        </p:nvSpPr>
+        <p:spPr>
+          <a:xfrm>
+            <a:off x="1554480" y="5074920"/>
+            <a:ext cx="10058400" cy="1005840"/>
+          </a:xfrm>
+          <a:prstGeom prst="rect">
+            <a:avLst/>
+          </a:prstGeom>
+          <a:noFill/>
+          <a:ln/>
+        </p:spPr>
+        <p:txBody>
+          <a:bodyPr wrap="square" rtlCol="0" anchor="ctr"/>
+          <a:lstStyle/>
+          <a:p>
+            <a:pPr indent="0" marL="0">
+              <a:buNone/>
+            </a:pPr>
+            <a:r>
+              <a:rPr lang="en-US" sz="1300" dirty="0">
+                <a:solidFill>
+                  <a:srgbClr val="6B7280"/>
+                </a:solidFill>
+                <a:latin typeface="Calibri" pitchFamily="34" charset="0"/>
+                <a:ea typeface="Calibri" pitchFamily="34" charset="-122"/>
+                <a:cs typeface="Calibri" pitchFamily="34" charset="-120"/>
+              </a:rPr>
+              <a:t>Encoding ciclic, lag si rolling features functioneaza la fel pe consum (USA), pret (Spania) si productie solara (India). Le voi aplica si pe sesiunile 2 si 3 cu acelasi pipeline.</a:t>
+            </a:r>
+            <a:endParaRPr lang="en-US" sz="1300" dirty="0"/>
+          </a:p>
+        </p:txBody>
+      </p:sp>
+      <p:sp>
+        <p:nvSpPr>
+          <p:cNvPr id="18" name="Text 16"/>
+          <p:cNvSpPr/>
+          <p:nvPr/>
+        </p:nvSpPr>
+        <p:spPr>
+          <a:xfrm>
+            <a:off x="457200" y="6355080"/>
+            <a:ext cx="10058400" cy="411480"/>
+          </a:xfrm>
+          <a:prstGeom prst="rect">
+            <a:avLst/>
+          </a:prstGeom>
+          <a:noFill/>
+          <a:ln/>
+        </p:spPr>
+        <p:txBody>
+          <a:bodyPr wrap="square" rtlCol="0" anchor="ctr"/>
+          <a:lstStyle/>
+          <a:p>
+            <a:pPr indent="0" marL="0">
+              <a:buNone/>
+            </a:pPr>
+            <a:r>
+              <a:rPr lang="en-US" sz="800" b="1" dirty="0">
+                <a:solidFill>
+                  <a:srgbClr val="6B7280"/>
+                </a:solidFill>
+                <a:latin typeface="Calibri" pitchFamily="34" charset="0"/>
+                <a:ea typeface="Calibri" pitchFamily="34" charset="-122"/>
+                <a:cs typeface="Calibri" pitchFamily="34" charset="-120"/>
+              </a:rPr>
+              <a:t>Sesiune Comunicari Stiintifice Mai 2026</a:t>
+            </a:r>
+            <a:endParaRPr lang="en-US" sz="800" dirty="0"/>
+          </a:p>
+          <a:p>
+            <a:pPr indent="0" marL="0">
+              <a:buNone/>
+            </a:pPr>
+            <a:r>
+              <a:rPr lang="en-US" sz="800" i="1" dirty="0">
+                <a:solidFill>
+                  <a:srgbClr val="6B7280"/>
+                </a:solidFill>
+                <a:latin typeface="Calibri" pitchFamily="34" charset="0"/>
+                <a:ea typeface="Calibri" pitchFamily="34" charset="-122"/>
+                <a:cs typeface="Calibri" pitchFamily="34" charset="-120"/>
+              </a:rPr>
+              <a:t>Tehnici de feature engineering pentru serii temporale, cu aplicatii in domeniul energetic</a:t>
+            </a:r>
+            <a:endParaRPr lang="en-US" sz="800" dirty="0"/>
+          </a:p>
+        </p:txBody>
+      </p:sp>
+      <p:sp>
+        <p:nvSpPr>
+          <p:cNvPr id="19" name="Text 17"/>
+          <p:cNvSpPr/>
+          <p:nvPr/>
+        </p:nvSpPr>
+        <p:spPr>
+          <a:xfrm>
+            <a:off x="10789920" y="6400800"/>
+            <a:ext cx="914400" cy="320040"/>
+          </a:xfrm>
+          <a:prstGeom prst="rect">
+            <a:avLst/>
+          </a:prstGeom>
+          <a:noFill/>
+          <a:ln/>
+        </p:spPr>
+        <p:txBody>
+          <a:bodyPr wrap="square" rtlCol="0" anchor="ctr"/>
+          <a:lstStyle/>
+          <a:p>
+            <a:pPr algn="r" indent="0" marL="0">
+              <a:buNone/>
+            </a:pPr>
+            <a:r>
+              <a:rPr lang="en-US" sz="900" dirty="0">
+                <a:solidFill>
+                  <a:srgbClr val="6B7280"/>
+                </a:solidFill>
+                <a:latin typeface="Calibri" pitchFamily="34" charset="0"/>
+                <a:ea typeface="Calibri" pitchFamily="34" charset="-122"/>
+                <a:cs typeface="Calibri" pitchFamily="34" charset="-120"/>
+              </a:rPr>
+              <a:t>14 / 15</a:t>
+            </a:r>
+            <a:endParaRPr lang="en-US" sz="900" dirty="0"/>
+          </a:p>
+        </p:txBody>
+      </p:sp>
+    </p:spTree>
+  </p:cSld>
+  <p:clrMapOvr>
+    <a:masterClrMapping/>
+  </p:clrMapOvr>
+</p:sld>
+</file>
+
+<file path=ppt/slides/slide15.xml><?xml version="1.0" encoding="utf-8"?>
+<p:sld xmlns:a="http://schemas.openxmlformats.org/drawingml/2006/main" xmlns:r="http://schemas.openxmlformats.org/officeDocument/2006/relationships" xmlns:p="http://schemas.openxmlformats.org/presentationml/2006/main">
+  <p:cSld name="Slide 15">
     <p:bg>
       <p:bgPr>
         <a:solidFill>
@@ -4040,6 +5529,45 @@
               <a:t>Universitatea Titu Maiorescu - Master DSAI</a:t>
             </a:r>
             <a:endParaRPr lang="en-US" sz="1200" dirty="0"/>
+          </a:p>
+        </p:txBody>
+      </p:sp>
+      <p:sp>
+        <p:nvSpPr>
+          <p:cNvPr id="8" name="Text 6"/>
+          <p:cNvSpPr/>
+          <p:nvPr/>
+        </p:nvSpPr>
+        <p:spPr>
+          <a:xfrm>
+            <a:off x="10607040" y="6446520"/>
+            <a:ext cx="914400" cy="274320"/>
+          </a:xfrm>
+          <a:prstGeom prst="rect">
+            <a:avLst/>
+          </a:prstGeom>
+          <a:noFill/>
+          <a:ln/>
+        </p:spPr>
+        <p:txBody>
+          <a:bodyPr wrap="square" rtlCol="0" anchor="ctr"/>
+          <a:lstStyle/>
+          <a:p>
+            <a:pPr algn="r" indent="0" marL="0">
+              <a:buNone/>
+            </a:pPr>
+            <a:r>
+              <a:rPr lang="en-US" sz="900" dirty="0">
+                <a:solidFill>
+                  <a:srgbClr val="CADCFC"/>
+                </a:solidFill>
+                <a:latin typeface="Calibri" pitchFamily="34" charset="0"/>
+                <a:ea typeface="Calibri" pitchFamily="34" charset="-122"/>
+                <a:cs typeface="Calibri" pitchFamily="34" charset="-120"/>
+              </a:rPr>
+              <a:t>15 / 15</a:t>
+            </a:r>
+            <a:endParaRPr lang="en-US" sz="900" dirty="0"/>
           </a:p>
         </p:txBody>
       </p:sp>
@@ -4966,8 +6494,8 @@
         </p:nvSpPr>
         <p:spPr>
           <a:xfrm>
-            <a:off x="457200" y="6446520"/>
-            <a:ext cx="8229600" cy="274320"/>
+            <a:off x="457200" y="6355080"/>
+            <a:ext cx="10058400" cy="411480"/>
           </a:xfrm>
           <a:prstGeom prst="rect">
             <a:avLst/>
@@ -4983,7 +6511,7 @@
               <a:buNone/>
             </a:pPr>
             <a:r>
-              <a:rPr lang="en-US" sz="900" dirty="0">
+              <a:rPr lang="en-US" sz="800" b="1" dirty="0">
                 <a:solidFill>
                   <a:srgbClr val="6B7280"/>
                 </a:solidFill>
@@ -4991,9 +6519,26 @@
                 <a:ea typeface="Calibri" pitchFamily="34" charset="-122"/>
                 <a:cs typeface="Calibri" pitchFamily="34" charset="-120"/>
               </a:rPr>
-              <a:t>Diana Nenu  -  SCSS 2026  -  Feature engineering pentru serii temporale</a:t>
-            </a:r>
-            <a:endParaRPr lang="en-US" sz="900" dirty="0"/>
+              <a:t>Sesiune Comunicari Stiintifice Mai 2026</a:t>
+            </a:r>
+            <a:endParaRPr lang="en-US" sz="800" dirty="0"/>
+          </a:p>
+          <a:p>
+            <a:pPr indent="0" marL="0">
+              <a:buNone/>
+            </a:pPr>
+            <a:r>
+              <a:rPr lang="en-US" sz="800" i="1" dirty="0">
+                <a:solidFill>
+                  <a:srgbClr val="6B7280"/>
+                </a:solidFill>
+                <a:latin typeface="Calibri" pitchFamily="34" charset="0"/>
+                <a:ea typeface="Calibri" pitchFamily="34" charset="-122"/>
+                <a:cs typeface="Calibri" pitchFamily="34" charset="-120"/>
+              </a:rPr>
+              <a:t>Tehnici de feature engineering pentru serii temporale, cu aplicatii in domeniul energetic</a:t>
+            </a:r>
+            <a:endParaRPr lang="en-US" sz="800" dirty="0"/>
           </a:p>
         </p:txBody>
       </p:sp>
@@ -5005,8 +6550,8 @@
         </p:nvSpPr>
         <p:spPr>
           <a:xfrm>
-            <a:off x="10789920" y="6446520"/>
-            <a:ext cx="914400" cy="274320"/>
+            <a:off x="10789920" y="6400800"/>
+            <a:ext cx="914400" cy="320040"/>
           </a:xfrm>
           <a:prstGeom prst="rect">
             <a:avLst/>
@@ -5030,7 +6575,7 @@
                 <a:ea typeface="Calibri" pitchFamily="34" charset="-122"/>
                 <a:cs typeface="Calibri" pitchFamily="34" charset="-120"/>
               </a:rPr>
-              <a:t>2 / 13</a:t>
+              <a:t>2 / 15</a:t>
             </a:r>
             <a:endParaRPr lang="en-US" sz="900" dirty="0"/>
           </a:p>
@@ -6578,8 +8123,8 @@
         </p:nvSpPr>
         <p:spPr>
           <a:xfrm>
-            <a:off x="457200" y="6446520"/>
-            <a:ext cx="8229600" cy="274320"/>
+            <a:off x="457200" y="6355080"/>
+            <a:ext cx="10058400" cy="411480"/>
           </a:xfrm>
           <a:prstGeom prst="rect">
             <a:avLst/>
@@ -6595,7 +8140,7 @@
               <a:buNone/>
             </a:pPr>
             <a:r>
-              <a:rPr lang="en-US" sz="900" dirty="0">
+              <a:rPr lang="en-US" sz="800" b="1" dirty="0">
                 <a:solidFill>
                   <a:srgbClr val="6B7280"/>
                 </a:solidFill>
@@ -6603,9 +8148,26 @@
                 <a:ea typeface="Calibri" pitchFamily="34" charset="-122"/>
                 <a:cs typeface="Calibri" pitchFamily="34" charset="-120"/>
               </a:rPr>
-              <a:t>Diana Nenu  -  SCSS 2026  -  Feature engineering pentru serii temporale</a:t>
-            </a:r>
-            <a:endParaRPr lang="en-US" sz="900" dirty="0"/>
+              <a:t>Sesiune Comunicari Stiintifice Mai 2026</a:t>
+            </a:r>
+            <a:endParaRPr lang="en-US" sz="800" dirty="0"/>
+          </a:p>
+          <a:p>
+            <a:pPr indent="0" marL="0">
+              <a:buNone/>
+            </a:pPr>
+            <a:r>
+              <a:rPr lang="en-US" sz="800" i="1" dirty="0">
+                <a:solidFill>
+                  <a:srgbClr val="6B7280"/>
+                </a:solidFill>
+                <a:latin typeface="Calibri" pitchFamily="34" charset="0"/>
+                <a:ea typeface="Calibri" pitchFamily="34" charset="-122"/>
+                <a:cs typeface="Calibri" pitchFamily="34" charset="-120"/>
+              </a:rPr>
+              <a:t>Tehnici de feature engineering pentru serii temporale, cu aplicatii in domeniul energetic</a:t>
+            </a:r>
+            <a:endParaRPr lang="en-US" sz="800" dirty="0"/>
           </a:p>
         </p:txBody>
       </p:sp>
@@ -6617,8 +8179,8 @@
         </p:nvSpPr>
         <p:spPr>
           <a:xfrm>
-            <a:off x="10789920" y="6446520"/>
-            <a:ext cx="914400" cy="274320"/>
+            <a:off x="10789920" y="6400800"/>
+            <a:ext cx="914400" cy="320040"/>
           </a:xfrm>
           <a:prstGeom prst="rect">
             <a:avLst/>
@@ -6642,7 +8204,7 @@
                 <a:ea typeface="Calibri" pitchFamily="34" charset="-122"/>
                 <a:cs typeface="Calibri" pitchFamily="34" charset="-120"/>
               </a:rPr>
-              <a:t>3 / 13</a:t>
+              <a:t>3 / 15</a:t>
             </a:r>
             <a:endParaRPr lang="en-US" sz="900" dirty="0"/>
           </a:p>
@@ -7575,7 +9137,7 @@
                 <a:ea typeface="Calibri" pitchFamily="34" charset="-122"/>
                 <a:cs typeface="Calibri" pitchFamily="34" charset="-120"/>
               </a:rPr>
-              <a:t>Media + deviatia ultimelor N ore. PARTEA CRITICA: trebuie sa folosim .shift(1) ca sa nu vedem viitorul.</a:t>
+              <a:t>Media + deviatia pe un rolling window (ultimele N ore). PARTEA CRITICA: trebuie .shift(1) ca sa nu vedem viitorul.</a:t>
             </a:r>
             <a:endParaRPr lang="en-US" sz="1200" dirty="0"/>
           </a:p>
@@ -7589,7 +9151,7 @@
         </p:nvSpPr>
         <p:spPr>
           <a:xfrm>
-            <a:off x="548640" y="6217920"/>
+            <a:off x="548640" y="5897880"/>
             <a:ext cx="11018520" cy="365760"/>
           </a:xfrm>
           <a:prstGeom prst="rect">
@@ -7614,7 +9176,7 @@
         </p:nvSpPr>
         <p:spPr>
           <a:xfrm>
-            <a:off x="548640" y="6217920"/>
+            <a:off x="548640" y="5897880"/>
             <a:ext cx="11018520" cy="365760"/>
           </a:xfrm>
           <a:prstGeom prst="rect">
@@ -7653,8 +9215,8 @@
         </p:nvSpPr>
         <p:spPr>
           <a:xfrm>
-            <a:off x="457200" y="6446520"/>
-            <a:ext cx="8229600" cy="274320"/>
+            <a:off x="457200" y="6355080"/>
+            <a:ext cx="10058400" cy="411480"/>
           </a:xfrm>
           <a:prstGeom prst="rect">
             <a:avLst/>
@@ -7670,7 +9232,7 @@
               <a:buNone/>
             </a:pPr>
             <a:r>
-              <a:rPr lang="en-US" sz="900" dirty="0">
+              <a:rPr lang="en-US" sz="800" b="1" dirty="0">
                 <a:solidFill>
                   <a:srgbClr val="6B7280"/>
                 </a:solidFill>
@@ -7678,9 +9240,26 @@
                 <a:ea typeface="Calibri" pitchFamily="34" charset="-122"/>
                 <a:cs typeface="Calibri" pitchFamily="34" charset="-120"/>
               </a:rPr>
-              <a:t>Diana Nenu  -  SCSS 2026  -  Feature engineering pentru serii temporale</a:t>
-            </a:r>
-            <a:endParaRPr lang="en-US" sz="900" dirty="0"/>
+              <a:t>Sesiune Comunicari Stiintifice Mai 2026</a:t>
+            </a:r>
+            <a:endParaRPr lang="en-US" sz="800" dirty="0"/>
+          </a:p>
+          <a:p>
+            <a:pPr indent="0" marL="0">
+              <a:buNone/>
+            </a:pPr>
+            <a:r>
+              <a:rPr lang="en-US" sz="800" i="1" dirty="0">
+                <a:solidFill>
+                  <a:srgbClr val="6B7280"/>
+                </a:solidFill>
+                <a:latin typeface="Calibri" pitchFamily="34" charset="0"/>
+                <a:ea typeface="Calibri" pitchFamily="34" charset="-122"/>
+                <a:cs typeface="Calibri" pitchFamily="34" charset="-120"/>
+              </a:rPr>
+              <a:t>Tehnici de feature engineering pentru serii temporale, cu aplicatii in domeniul energetic</a:t>
+            </a:r>
+            <a:endParaRPr lang="en-US" sz="800" dirty="0"/>
           </a:p>
         </p:txBody>
       </p:sp>
@@ -7692,8 +9271,8 @@
         </p:nvSpPr>
         <p:spPr>
           <a:xfrm>
-            <a:off x="10789920" y="6446520"/>
-            <a:ext cx="914400" cy="274320"/>
+            <a:off x="10789920" y="6400800"/>
+            <a:ext cx="914400" cy="320040"/>
           </a:xfrm>
           <a:prstGeom prst="rect">
             <a:avLst/>
@@ -7717,7 +9296,7 @@
                 <a:ea typeface="Calibri" pitchFamily="34" charset="-122"/>
                 <a:cs typeface="Calibri" pitchFamily="34" charset="-120"/>
               </a:rPr>
-              <a:t>4 / 13</a:t>
+              <a:t>4 / 15</a:t>
             </a:r>
             <a:endParaRPr lang="en-US" sz="900" dirty="0"/>
           </a:p>
@@ -8037,8 +9616,8 @@
         </p:nvSpPr>
         <p:spPr>
           <a:xfrm>
-            <a:off x="457200" y="6446520"/>
-            <a:ext cx="8229600" cy="274320"/>
+            <a:off x="457200" y="6355080"/>
+            <a:ext cx="10058400" cy="411480"/>
           </a:xfrm>
           <a:prstGeom prst="rect">
             <a:avLst/>
@@ -8054,7 +9633,7 @@
               <a:buNone/>
             </a:pPr>
             <a:r>
-              <a:rPr lang="en-US" sz="900" dirty="0">
+              <a:rPr lang="en-US" sz="800" b="1" dirty="0">
                 <a:solidFill>
                   <a:srgbClr val="6B7280"/>
                 </a:solidFill>
@@ -8062,9 +9641,26 @@
                 <a:ea typeface="Calibri" pitchFamily="34" charset="-122"/>
                 <a:cs typeface="Calibri" pitchFamily="34" charset="-120"/>
               </a:rPr>
-              <a:t>Diana Nenu  -  SCSS 2026  -  Feature engineering pentru serii temporale</a:t>
-            </a:r>
-            <a:endParaRPr lang="en-US" sz="900" dirty="0"/>
+              <a:t>Sesiune Comunicari Stiintifice Mai 2026</a:t>
+            </a:r>
+            <a:endParaRPr lang="en-US" sz="800" dirty="0"/>
+          </a:p>
+          <a:p>
+            <a:pPr indent="0" marL="0">
+              <a:buNone/>
+            </a:pPr>
+            <a:r>
+              <a:rPr lang="en-US" sz="800" i="1" dirty="0">
+                <a:solidFill>
+                  <a:srgbClr val="6B7280"/>
+                </a:solidFill>
+                <a:latin typeface="Calibri" pitchFamily="34" charset="0"/>
+                <a:ea typeface="Calibri" pitchFamily="34" charset="-122"/>
+                <a:cs typeface="Calibri" pitchFamily="34" charset="-120"/>
+              </a:rPr>
+              <a:t>Tehnici de feature engineering pentru serii temporale, cu aplicatii in domeniul energetic</a:t>
+            </a:r>
+            <a:endParaRPr lang="en-US" sz="800" dirty="0"/>
           </a:p>
         </p:txBody>
       </p:sp>
@@ -8076,8 +9672,8 @@
         </p:nvSpPr>
         <p:spPr>
           <a:xfrm>
-            <a:off x="10789920" y="6446520"/>
-            <a:ext cx="914400" cy="274320"/>
+            <a:off x="10789920" y="6400800"/>
+            <a:ext cx="914400" cy="320040"/>
           </a:xfrm>
           <a:prstGeom prst="rect">
             <a:avLst/>
@@ -8101,7 +9697,7 @@
                 <a:ea typeface="Calibri" pitchFamily="34" charset="-122"/>
                 <a:cs typeface="Calibri" pitchFamily="34" charset="-120"/>
               </a:rPr>
-              <a:t>5 / 13</a:t>
+              <a:t>5 / 15</a:t>
             </a:r>
             <a:endParaRPr lang="en-US" sz="900" dirty="0"/>
           </a:p>
@@ -8197,7 +9793,7 @@
                 <a:ea typeface="Calibri" pitchFamily="34" charset="-122"/>
                 <a:cs typeface="Calibri" pitchFamily="34" charset="-120"/>
               </a:rPr>
-              <a:t>ENCODING CICLIC</a:t>
+              <a:t>INTERMEZZO MATEMATIC</a:t>
             </a:r>
             <a:endParaRPr lang="en-US" sz="1100" dirty="0"/>
           </a:p>
@@ -8236,7 +9832,7 @@
                 <a:ea typeface="Calibri" pitchFamily="34" charset="-122"/>
                 <a:cs typeface="Calibri" pitchFamily="34" charset="-120"/>
               </a:rPr>
-              <a:t>Tehnica 1B. Solutia matematica: cercul orelor</a:t>
+              <a:t>Functiile sin si cos pe scurt</a:t>
             </a:r>
             <a:endParaRPr lang="en-US" sz="2800" dirty="0"/>
           </a:p>
@@ -8267,24 +9863,47 @@
           </a:ln>
         </p:spPr>
       </p:sp>
-      <p:sp>
-        <p:nvSpPr>
-          <p:cNvPr id="6" name="Shape 4"/>
-          <p:cNvSpPr/>
-          <p:nvPr/>
-        </p:nvSpPr>
-        <p:spPr>
-          <a:xfrm>
-            <a:off x="548640" y="1554480"/>
-            <a:ext cx="5394960" cy="4572000"/>
+      <p:pic>
+        <p:nvPicPr>
+          <p:cNvPr id="6" name="Image 0" descr="/sessions/vibrant-elegant-pasteur/mnt/Disertatie_AI_Platform/reports/figures/fig_fe_sin_cos_basics.png">    </p:cNvPr>
+          <p:cNvPicPr>
+            <a:picLocks noChangeAspect="1"/>
+          </p:cNvPicPr>
+          <p:nvPr/>
+        </p:nvPicPr>
+        <p:blipFill>
+          <a:blip r:embed="rId1"/>
+          <a:srcRect l="0" r="0" t="0" b="0"/>
+          <a:stretch/>
+        </p:blipFill>
+        <p:spPr>
+          <a:xfrm>
+            <a:off x="365760" y="1417320"/>
+            <a:ext cx="11430000" cy="3291840"/>
+          </a:xfrm>
+          <a:prstGeom prst="rect">
+            <a:avLst/>
+          </a:prstGeom>
+        </p:spPr>
+      </p:pic>
+      <p:sp>
+        <p:nvSpPr>
+          <p:cNvPr id="7" name="Shape 4"/>
+          <p:cNvSpPr/>
+          <p:nvPr/>
+        </p:nvSpPr>
+        <p:spPr>
+          <a:xfrm>
+            <a:off x="548640" y="4846320"/>
+            <a:ext cx="3611880" cy="1371600"/>
           </a:xfrm>
           <a:prstGeom prst="rect">
             <a:avLst/>
           </a:prstGeom>
           <a:solidFill>
-            <a:srgbClr val="FFFFFF"/>
+            <a:srgbClr val="F4F5F7"/>
           </a:solidFill>
-          <a:ln w="25400">
+          <a:ln w="19050">
             <a:solidFill>
               <a:srgbClr val="065A82"/>
             </a:solidFill>
@@ -8294,14 +9913,14 @@
       </p:sp>
       <p:sp>
         <p:nvSpPr>
-          <p:cNvPr id="7" name="Shape 5"/>
-          <p:cNvSpPr/>
-          <p:nvPr/>
-        </p:nvSpPr>
-        <p:spPr>
-          <a:xfrm>
-            <a:off x="548640" y="1554480"/>
-            <a:ext cx="5394960" cy="502920"/>
+          <p:cNvPr id="8" name="Shape 5"/>
+          <p:cNvSpPr/>
+          <p:nvPr/>
+        </p:nvSpPr>
+        <p:spPr>
+          <a:xfrm>
+            <a:off x="548640" y="4846320"/>
+            <a:ext cx="109728" cy="1371600"/>
           </a:xfrm>
           <a:prstGeom prst="rect">
             <a:avLst/>
@@ -8319,14 +9938,14 @@
       </p:sp>
       <p:sp>
         <p:nvSpPr>
-          <p:cNvPr id="8" name="Text 6"/>
-          <p:cNvSpPr/>
-          <p:nvPr/>
-        </p:nvSpPr>
-        <p:spPr>
-          <a:xfrm>
-            <a:off x="548640" y="1554480"/>
-            <a:ext cx="5394960" cy="502920"/>
+          <p:cNvPr id="9" name="Text 6"/>
+          <p:cNvSpPr/>
+          <p:nvPr/>
+        </p:nvSpPr>
+        <p:spPr>
+          <a:xfrm>
+            <a:off x="777240" y="4937760"/>
+            <a:ext cx="3246120" cy="365760"/>
           </a:xfrm>
           <a:prstGeom prst="rect">
             <a:avLst/>
@@ -8338,34 +9957,96 @@
           <a:bodyPr wrap="square" rtlCol="0" anchor="ctr"/>
           <a:lstStyle/>
           <a:p>
-            <a:pPr algn="ctr" indent="0" marL="0">
-              <a:buNone/>
-            </a:pPr>
-            <a:r>
-              <a:rPr lang="en-US" sz="1600" b="1" dirty="0">
-                <a:solidFill>
-                  <a:srgbClr val="FFFFFF"/>
-                </a:solidFill>
-                <a:latin typeface="Calibri" pitchFamily="34" charset="0"/>
-                <a:ea typeface="Calibri" pitchFamily="34" charset="-122"/>
-                <a:cs typeface="Calibri" pitchFamily="34" charset="-120"/>
-              </a:rPr>
-              <a:t>Formula matematica</a:t>
-            </a:r>
-            <a:endParaRPr lang="en-US" sz="1600" dirty="0"/>
-          </a:p>
-        </p:txBody>
-      </p:sp>
-      <p:sp>
-        <p:nvSpPr>
-          <p:cNvPr id="9" name="Shape 7"/>
-          <p:cNvSpPr/>
-          <p:nvPr/>
-        </p:nvSpPr>
-        <p:spPr>
-          <a:xfrm>
-            <a:off x="822960" y="2331720"/>
-            <a:ext cx="4846320" cy="1554480"/>
+            <a:pPr indent="0" marL="0">
+              <a:buNone/>
+            </a:pPr>
+            <a:r>
+              <a:rPr lang="en-US" sz="1300" b="1" dirty="0">
+                <a:solidFill>
+                  <a:srgbClr val="065A82"/>
+                </a:solidFill>
+                <a:latin typeface="Calibri" pitchFamily="34" charset="0"/>
+                <a:ea typeface="Calibri" pitchFamily="34" charset="-122"/>
+                <a:cs typeface="Calibri" pitchFamily="34" charset="-120"/>
+              </a:rPr>
+              <a:t>Periodice (perioada 2π)</a:t>
+            </a:r>
+            <a:endParaRPr lang="en-US" sz="1300" dirty="0"/>
+          </a:p>
+        </p:txBody>
+      </p:sp>
+      <p:sp>
+        <p:nvSpPr>
+          <p:cNvPr id="10" name="Text 7"/>
+          <p:cNvSpPr/>
+          <p:nvPr/>
+        </p:nvSpPr>
+        <p:spPr>
+          <a:xfrm>
+            <a:off x="777240" y="5349240"/>
+            <a:ext cx="3246120" cy="777240"/>
+          </a:xfrm>
+          <a:prstGeom prst="rect">
+            <a:avLst/>
+          </a:prstGeom>
+          <a:noFill/>
+          <a:ln/>
+        </p:spPr>
+        <p:txBody>
+          <a:bodyPr wrap="square" rtlCol="0" anchor="ctr"/>
+          <a:lstStyle/>
+          <a:p>
+            <a:pPr indent="0" marL="0">
+              <a:lnSpc>
+                <a:spcPct val="120000"/>
+              </a:lnSpc>
+              <a:buNone/>
+            </a:pPr>
+            <a:r>
+              <a:rPr lang="en-US" sz="1100" dirty="0">
+                <a:solidFill>
+                  <a:srgbClr val="1F2937"/>
+                </a:solidFill>
+                <a:latin typeface="Calibri" pitchFamily="34" charset="0"/>
+                <a:ea typeface="Calibri" pitchFamily="34" charset="-122"/>
+                <a:cs typeface="Calibri" pitchFamily="34" charset="-120"/>
+              </a:rPr>
+              <a:t>Dupa 2π, functiile se repeta identic.</a:t>
+            </a:r>
+            <a:endParaRPr lang="en-US" sz="1100" dirty="0"/>
+          </a:p>
+          <a:p>
+            <a:pPr indent="0" marL="0">
+              <a:lnSpc>
+                <a:spcPct val="120000"/>
+              </a:lnSpc>
+              <a:buNone/>
+            </a:pPr>
+            <a:r>
+              <a:rPr lang="en-US" sz="1100" dirty="0">
+                <a:solidFill>
+                  <a:srgbClr val="1F2937"/>
+                </a:solidFill>
+                <a:latin typeface="Calibri" pitchFamily="34" charset="0"/>
+                <a:ea typeface="Calibri" pitchFamily="34" charset="-122"/>
+                <a:cs typeface="Calibri" pitchFamily="34" charset="-120"/>
+              </a:rPr>
+              <a:t>Ideal pentru a reprezenta cicluri (ore, zile, luni).</a:t>
+            </a:r>
+            <a:endParaRPr lang="en-US" sz="1100" dirty="0"/>
+          </a:p>
+        </p:txBody>
+      </p:sp>
+      <p:sp>
+        <p:nvSpPr>
+          <p:cNvPr id="11" name="Shape 8"/>
+          <p:cNvSpPr/>
+          <p:nvPr/>
+        </p:nvSpPr>
+        <p:spPr>
+          <a:xfrm>
+            <a:off x="4251960" y="4846320"/>
+            <a:ext cx="3611880" cy="1371600"/>
           </a:xfrm>
           <a:prstGeom prst="rect">
             <a:avLst/>
@@ -8373,9 +10054,9 @@
           <a:solidFill>
             <a:srgbClr val="F4F5F7"/>
           </a:solidFill>
-          <a:ln w="12700">
+          <a:ln w="19050">
             <a:solidFill>
-              <a:srgbClr val="E5E7EB"/>
+              <a:srgbClr val="1C7293"/>
             </a:solidFill>
             <a:prstDash val="solid"/>
           </a:ln>
@@ -8383,14 +10064,39 @@
       </p:sp>
       <p:sp>
         <p:nvSpPr>
-          <p:cNvPr id="10" name="Text 8"/>
-          <p:cNvSpPr/>
-          <p:nvPr/>
-        </p:nvSpPr>
-        <p:spPr>
-          <a:xfrm>
-            <a:off x="914400" y="2468880"/>
-            <a:ext cx="4663440" cy="1371600"/>
+          <p:cNvPr id="12" name="Shape 9"/>
+          <p:cNvSpPr/>
+          <p:nvPr/>
+        </p:nvSpPr>
+        <p:spPr>
+          <a:xfrm>
+            <a:off x="4251960" y="4846320"/>
+            <a:ext cx="109728" cy="1371600"/>
+          </a:xfrm>
+          <a:prstGeom prst="rect">
+            <a:avLst/>
+          </a:prstGeom>
+          <a:solidFill>
+            <a:srgbClr val="1C7293"/>
+          </a:solidFill>
+          <a:ln w="12700">
+            <a:solidFill>
+              <a:srgbClr val="1C7293"/>
+            </a:solidFill>
+            <a:prstDash val="solid"/>
+          </a:ln>
+        </p:spPr>
+      </p:sp>
+      <p:sp>
+        <p:nvSpPr>
+          <p:cNvPr id="13" name="Text 10"/>
+          <p:cNvSpPr/>
+          <p:nvPr/>
+        </p:nvSpPr>
+        <p:spPr>
+          <a:xfrm>
+            <a:off x="4480560" y="4937760"/>
+            <a:ext cx="3246120" cy="365760"/>
           </a:xfrm>
           <a:prstGeom prst="rect">
             <a:avLst/>
@@ -8402,85 +10108,34 @@
           <a:bodyPr wrap="square" rtlCol="0" anchor="ctr"/>
           <a:lstStyle/>
           <a:p>
-            <a:pPr algn="ctr" indent="0" marL="0">
+            <a:pPr indent="0" marL="0">
               <a:buNone/>
             </a:pPr>
             <a:r>
               <a:rPr lang="en-US" sz="1300" b="1" dirty="0">
                 <a:solidFill>
-                  <a:srgbClr val="1F2937"/>
-                </a:solidFill>
-                <a:latin typeface="Cambria" pitchFamily="34" charset="0"/>
-                <a:ea typeface="Cambria" pitchFamily="34" charset="-122"/>
-                <a:cs typeface="Cambria" pitchFamily="34" charset="-120"/>
-              </a:rPr>
-              <a:t>Inlocuim ora h cu DOUA coloane:</a:t>
+                  <a:srgbClr val="1C7293"/>
+                </a:solidFill>
+                <a:latin typeface="Calibri" pitchFamily="34" charset="0"/>
+                <a:ea typeface="Calibri" pitchFamily="34" charset="-122"/>
+                <a:cs typeface="Calibri" pitchFamily="34" charset="-120"/>
+              </a:rPr>
+              <a:t>Continue si netede</a:t>
             </a:r>
             <a:endParaRPr lang="en-US" sz="1300" dirty="0"/>
           </a:p>
-          <a:p>
-            <a:pPr algn="ctr" indent="0" marL="0">
-              <a:buNone/>
-            </a:pPr>
-            <a:r>
-              <a:rPr lang="en-US" sz="800" dirty="0">
-                <a:solidFill>
-                  <a:srgbClr val="000000"/>
-                </a:solidFill>
-                <a:latin typeface="Cambria" pitchFamily="34" charset="0"/>
-                <a:ea typeface="Cambria" pitchFamily="34" charset="-122"/>
-                <a:cs typeface="Cambria" pitchFamily="34" charset="-120"/>
-              </a:rPr>
-              <a:t> </a:t>
-            </a:r>
-            <a:endParaRPr lang="en-US" sz="1300" dirty="0"/>
-          </a:p>
-          <a:p>
-            <a:pPr algn="ctr" indent="0" marL="0">
-              <a:buNone/>
-            </a:pPr>
-            <a:r>
-              <a:rPr lang="en-US" sz="1400" b="1" dirty="0">
-                <a:solidFill>
-                  <a:srgbClr val="065A82"/>
-                </a:solidFill>
-                <a:latin typeface="Cambria" pitchFamily="34" charset="0"/>
-                <a:ea typeface="Cambria" pitchFamily="34" charset="-122"/>
-                <a:cs typeface="Cambria" pitchFamily="34" charset="-120"/>
-              </a:rPr>
-              <a:t>hour_sin = sin(2π · h / 24)</a:t>
-            </a:r>
-            <a:endParaRPr lang="en-US" sz="1300" dirty="0"/>
-          </a:p>
-          <a:p>
-            <a:pPr algn="ctr" indent="0" marL="0">
-              <a:buNone/>
-            </a:pPr>
-            <a:r>
-              <a:rPr lang="en-US" sz="1400" b="1" dirty="0">
-                <a:solidFill>
-                  <a:srgbClr val="065A82"/>
-                </a:solidFill>
-                <a:latin typeface="Cambria" pitchFamily="34" charset="0"/>
-                <a:ea typeface="Cambria" pitchFamily="34" charset="-122"/>
-                <a:cs typeface="Cambria" pitchFamily="34" charset="-120"/>
-              </a:rPr>
-              <a:t>hour_cos = cos(2π · h / 24)</a:t>
-            </a:r>
-            <a:endParaRPr lang="en-US" sz="1300" dirty="0"/>
-          </a:p>
-        </p:txBody>
-      </p:sp>
-      <p:sp>
-        <p:nvSpPr>
-          <p:cNvPr id="11" name="Text 9"/>
-          <p:cNvSpPr/>
-          <p:nvPr/>
-        </p:nvSpPr>
-        <p:spPr>
-          <a:xfrm>
-            <a:off x="822960" y="4114800"/>
-            <a:ext cx="4846320" cy="1828800"/>
+        </p:txBody>
+      </p:sp>
+      <p:sp>
+        <p:nvSpPr>
+          <p:cNvPr id="14" name="Text 11"/>
+          <p:cNvSpPr/>
+          <p:nvPr/>
+        </p:nvSpPr>
+        <p:spPr>
+          <a:xfrm>
+            <a:off x="4480560" y="5349240"/>
+            <a:ext cx="3246120" cy="777240"/>
           </a:xfrm>
           <a:prstGeom prst="rect">
             <a:avLst/>
@@ -8489,29 +10144,17 @@
           <a:ln/>
         </p:spPr>
         <p:txBody>
-          <a:bodyPr wrap="square" rtlCol="0" anchor="t"/>
-          <a:lstStyle/>
-          <a:p>
-            <a:pPr indent="0" marL="0">
-              <a:buNone/>
-            </a:pPr>
-            <a:r>
-              <a:rPr lang="en-US" sz="1300" b="1" dirty="0">
-                <a:solidFill>
-                  <a:srgbClr val="065A82"/>
-                </a:solidFill>
-                <a:latin typeface="Calibri" pitchFamily="34" charset="0"/>
-                <a:ea typeface="Calibri" pitchFamily="34" charset="-122"/>
-                <a:cs typeface="Calibri" pitchFamily="34" charset="-120"/>
-              </a:rPr>
-              <a:t>De ce functioneaza?
-</a:t>
-            </a:r>
-            <a:pPr indent="0" marL="0">
-              <a:buNone/>
-            </a:pPr>
-            <a:r>
-              <a:rPr lang="en-US" sz="1200" dirty="0">
+          <a:bodyPr wrap="square" rtlCol="0" anchor="ctr"/>
+          <a:lstStyle/>
+          <a:p>
+            <a:pPr indent="0" marL="0">
+              <a:lnSpc>
+                <a:spcPct val="120000"/>
+              </a:lnSpc>
+              <a:buNone/>
+            </a:pPr>
+            <a:r>
+              <a:rPr lang="en-US" sz="1100" dirty="0">
                 <a:solidFill>
                   <a:srgbClr val="1F2937"/>
                 </a:solidFill>
@@ -8519,90 +10162,92 @@
                 <a:ea typeface="Calibri" pitchFamily="34" charset="-122"/>
                 <a:cs typeface="Calibri" pitchFamily="34" charset="-120"/>
               </a:rPr>
-              <a:t>Cele 2 coloane (sin, cos) identifica UNIC fiecare ora ca un punct pe cercul trigonometric.
-</a:t>
-            </a:r>
-            <a:pPr indent="0" marL="0">
-              <a:buNone/>
-            </a:pPr>
-            <a:r>
-              <a:rPr lang="en-US" sz="1150" dirty="0">
-                <a:solidFill>
-                  <a:srgbClr val="6B7280"/>
-                </a:solidFill>
-                <a:latin typeface="Calibri" pitchFamily="34" charset="0"/>
-                <a:ea typeface="Calibri" pitchFamily="34" charset="-122"/>
-                <a:cs typeface="Calibri" pitchFamily="34" charset="-120"/>
-              </a:rPr>
-              <a:t>Ora 23 -&gt; ( cos = 0.97, sin = -0.26 )
-</a:t>
-            </a:r>
-            <a:pPr indent="0" marL="0">
-              <a:buNone/>
-            </a:pPr>
-            <a:r>
-              <a:rPr lang="en-US" sz="1150" dirty="0">
-                <a:solidFill>
-                  <a:srgbClr val="6B7280"/>
-                </a:solidFill>
-                <a:latin typeface="Calibri" pitchFamily="34" charset="0"/>
-                <a:ea typeface="Calibri" pitchFamily="34" charset="-122"/>
-                <a:cs typeface="Calibri" pitchFamily="34" charset="-120"/>
-              </a:rPr>
-              <a:t>Ora  0 -&gt; ( cos = 1.00, sin =  0.00 )
-</a:t>
-            </a:r>
-            <a:pPr indent="0" marL="0">
-              <a:buNone/>
-            </a:pPr>
-            <a:r>
-              <a:rPr lang="en-US" sz="1200" b="1" dirty="0">
-                <a:solidFill>
-                  <a:srgbClr val="6FAE6F"/>
-                </a:solidFill>
-                <a:latin typeface="Calibri" pitchFamily="34" charset="0"/>
-                <a:ea typeface="Calibri" pitchFamily="34" charset="-122"/>
-                <a:cs typeface="Calibri" pitchFamily="34" charset="-120"/>
-              </a:rPr>
-              <a:t>Distanta euclidiana: 0.27 unitati - MICA, ca in realitate.</a:t>
-            </a:r>
-            <a:endParaRPr lang="en-US" sz="1300" dirty="0"/>
-          </a:p>
-        </p:txBody>
-      </p:sp>
-      <p:pic>
-        <p:nvPicPr>
-          <p:cNvPr id="12" name="Image 0" descr="/sessions/vibrant-elegant-pasteur/mnt/Disertatie_AI_Platform/reports/figures/fig_4_1_cercul_orelor.png">    </p:cNvPr>
-          <p:cNvPicPr>
-            <a:picLocks noChangeAspect="1"/>
-          </p:cNvPicPr>
-          <p:nvPr/>
-        </p:nvPicPr>
-        <p:blipFill>
-          <a:blip r:embed="rId1"/>
-          <a:srcRect l="0" r="0" t="0" b="0"/>
-          <a:stretch/>
-        </p:blipFill>
-        <p:spPr>
-          <a:xfrm>
-            <a:off x="6217920" y="1554480"/>
-            <a:ext cx="5486400" cy="4572000"/>
-          </a:xfrm>
-          <a:prstGeom prst="rect">
-            <a:avLst/>
-          </a:prstGeom>
-        </p:spPr>
-      </p:pic>
-      <p:sp>
-        <p:nvSpPr>
-          <p:cNvPr id="13" name="Text 10"/>
-          <p:cNvSpPr/>
-          <p:nvPr/>
-        </p:nvSpPr>
-        <p:spPr>
-          <a:xfrm>
-            <a:off x="457200" y="6446520"/>
-            <a:ext cx="8229600" cy="274320"/>
+              <a:t>Trec lin de la o valoare la alta.</a:t>
+            </a:r>
+            <a:endParaRPr lang="en-US" sz="1100" dirty="0"/>
+          </a:p>
+          <a:p>
+            <a:pPr indent="0" marL="0">
+              <a:lnSpc>
+                <a:spcPct val="120000"/>
+              </a:lnSpc>
+              <a:buNone/>
+            </a:pPr>
+            <a:r>
+              <a:rPr lang="en-US" sz="1100" dirty="0">
+                <a:solidFill>
+                  <a:srgbClr val="1F2937"/>
+                </a:solidFill>
+                <a:latin typeface="Calibri" pitchFamily="34" charset="0"/>
+                <a:ea typeface="Calibri" pitchFamily="34" charset="-122"/>
+                <a:cs typeface="Calibri" pitchFamily="34" charset="-120"/>
+              </a:rPr>
+              <a:t>Fara salturi sau discontinuitati.</a:t>
+            </a:r>
+            <a:endParaRPr lang="en-US" sz="1100" dirty="0"/>
+          </a:p>
+        </p:txBody>
+      </p:sp>
+      <p:sp>
+        <p:nvSpPr>
+          <p:cNvPr id="15" name="Shape 12"/>
+          <p:cNvSpPr/>
+          <p:nvPr/>
+        </p:nvSpPr>
+        <p:spPr>
+          <a:xfrm>
+            <a:off x="7955280" y="4846320"/>
+            <a:ext cx="3611880" cy="1371600"/>
+          </a:xfrm>
+          <a:prstGeom prst="rect">
+            <a:avLst/>
+          </a:prstGeom>
+          <a:solidFill>
+            <a:srgbClr val="F4F5F7"/>
+          </a:solidFill>
+          <a:ln w="19050">
+            <a:solidFill>
+              <a:srgbClr val="F96167"/>
+            </a:solidFill>
+            <a:prstDash val="solid"/>
+          </a:ln>
+        </p:spPr>
+      </p:sp>
+      <p:sp>
+        <p:nvSpPr>
+          <p:cNvPr id="16" name="Shape 13"/>
+          <p:cNvSpPr/>
+          <p:nvPr/>
+        </p:nvSpPr>
+        <p:spPr>
+          <a:xfrm>
+            <a:off x="7955280" y="4846320"/>
+            <a:ext cx="109728" cy="1371600"/>
+          </a:xfrm>
+          <a:prstGeom prst="rect">
+            <a:avLst/>
+          </a:prstGeom>
+          <a:solidFill>
+            <a:srgbClr val="F96167"/>
+          </a:solidFill>
+          <a:ln w="12700">
+            <a:solidFill>
+              <a:srgbClr val="F96167"/>
+            </a:solidFill>
+            <a:prstDash val="solid"/>
+          </a:ln>
+        </p:spPr>
+      </p:sp>
+      <p:sp>
+        <p:nvSpPr>
+          <p:cNvPr id="17" name="Text 14"/>
+          <p:cNvSpPr/>
+          <p:nvPr/>
+        </p:nvSpPr>
+        <p:spPr>
+          <a:xfrm>
+            <a:off x="8183880" y="4937760"/>
+            <a:ext cx="3246120" cy="365760"/>
           </a:xfrm>
           <a:prstGeom prst="rect">
             <a:avLst/>
@@ -8618,30 +10263,30 @@
               <a:buNone/>
             </a:pPr>
             <a:r>
-              <a:rPr lang="en-US" sz="900" dirty="0">
-                <a:solidFill>
-                  <a:srgbClr val="6B7280"/>
-                </a:solidFill>
-                <a:latin typeface="Calibri" pitchFamily="34" charset="0"/>
-                <a:ea typeface="Calibri" pitchFamily="34" charset="-122"/>
-                <a:cs typeface="Calibri" pitchFamily="34" charset="-120"/>
-              </a:rPr>
-              <a:t>Diana Nenu  -  SCSS 2026  -  Feature engineering pentru serii temporale</a:t>
-            </a:r>
-            <a:endParaRPr lang="en-US" sz="900" dirty="0"/>
-          </a:p>
-        </p:txBody>
-      </p:sp>
-      <p:sp>
-        <p:nvSpPr>
-          <p:cNvPr id="14" name="Text 11"/>
-          <p:cNvSpPr/>
-          <p:nvPr/>
-        </p:nvSpPr>
-        <p:spPr>
-          <a:xfrm>
-            <a:off x="10789920" y="6446520"/>
-            <a:ext cx="914400" cy="274320"/>
+              <a:rPr lang="en-US" sz="1300" b="1" dirty="0">
+                <a:solidFill>
+                  <a:srgbClr val="F96167"/>
+                </a:solidFill>
+                <a:latin typeface="Calibri" pitchFamily="34" charset="0"/>
+                <a:ea typeface="Calibri" pitchFamily="34" charset="-122"/>
+                <a:cs typeface="Calibri" pitchFamily="34" charset="-120"/>
+              </a:rPr>
+              <a:t>Identifica UNIC un punct pe cerc</a:t>
+            </a:r>
+            <a:endParaRPr lang="en-US" sz="1300" dirty="0"/>
+          </a:p>
+        </p:txBody>
+      </p:sp>
+      <p:sp>
+        <p:nvSpPr>
+          <p:cNvPr id="18" name="Text 15"/>
+          <p:cNvSpPr/>
+          <p:nvPr/>
+        </p:nvSpPr>
+        <p:spPr>
+          <a:xfrm>
+            <a:off x="8183880" y="5349240"/>
+            <a:ext cx="3246120" cy="777240"/>
           </a:xfrm>
           <a:prstGeom prst="rect">
             <a:avLst/>
@@ -8653,6 +10298,124 @@
           <a:bodyPr wrap="square" rtlCol="0" anchor="ctr"/>
           <a:lstStyle/>
           <a:p>
+            <a:pPr indent="0" marL="0">
+              <a:lnSpc>
+                <a:spcPct val="120000"/>
+              </a:lnSpc>
+              <a:buNone/>
+            </a:pPr>
+            <a:r>
+              <a:rPr lang="en-US" sz="1100" dirty="0">
+                <a:solidFill>
+                  <a:srgbClr val="1F2937"/>
+                </a:solidFill>
+                <a:latin typeface="Calibri" pitchFamily="34" charset="0"/>
+                <a:ea typeface="Calibri" pitchFamily="34" charset="-122"/>
+                <a:cs typeface="Calibri" pitchFamily="34" charset="-120"/>
+              </a:rPr>
+              <a:t>Cele 2 valori (sin, cos) impreuna localizeaza precis o pozitie</a:t>
+            </a:r>
+            <a:endParaRPr lang="en-US" sz="1100" dirty="0"/>
+          </a:p>
+          <a:p>
+            <a:pPr indent="0" marL="0">
+              <a:lnSpc>
+                <a:spcPct val="120000"/>
+              </a:lnSpc>
+              <a:buNone/>
+            </a:pPr>
+            <a:r>
+              <a:rPr lang="en-US" sz="1100" dirty="0">
+                <a:solidFill>
+                  <a:srgbClr val="1F2937"/>
+                </a:solidFill>
+                <a:latin typeface="Calibri" pitchFamily="34" charset="0"/>
+                <a:ea typeface="Calibri" pitchFamily="34" charset="-122"/>
+                <a:cs typeface="Calibri" pitchFamily="34" charset="-120"/>
+              </a:rPr>
+              <a:t>— o singura coloana ar fi ambigua.</a:t>
+            </a:r>
+            <a:endParaRPr lang="en-US" sz="1100" dirty="0"/>
+          </a:p>
+        </p:txBody>
+      </p:sp>
+      <p:sp>
+        <p:nvSpPr>
+          <p:cNvPr id="19" name="Text 16"/>
+          <p:cNvSpPr/>
+          <p:nvPr/>
+        </p:nvSpPr>
+        <p:spPr>
+          <a:xfrm>
+            <a:off x="457200" y="6355080"/>
+            <a:ext cx="10058400" cy="411480"/>
+          </a:xfrm>
+          <a:prstGeom prst="rect">
+            <a:avLst/>
+          </a:prstGeom>
+          <a:noFill/>
+          <a:ln/>
+        </p:spPr>
+        <p:txBody>
+          <a:bodyPr wrap="square" rtlCol="0" anchor="ctr"/>
+          <a:lstStyle/>
+          <a:p>
+            <a:pPr indent="0" marL="0">
+              <a:buNone/>
+            </a:pPr>
+            <a:r>
+              <a:rPr lang="en-US" sz="800" b="1" dirty="0">
+                <a:solidFill>
+                  <a:srgbClr val="6B7280"/>
+                </a:solidFill>
+                <a:latin typeface="Calibri" pitchFamily="34" charset="0"/>
+                <a:ea typeface="Calibri" pitchFamily="34" charset="-122"/>
+                <a:cs typeface="Calibri" pitchFamily="34" charset="-120"/>
+              </a:rPr>
+              <a:t>Sesiune Comunicari Stiintifice Mai 2026</a:t>
+            </a:r>
+            <a:endParaRPr lang="en-US" sz="800" dirty="0"/>
+          </a:p>
+          <a:p>
+            <a:pPr indent="0" marL="0">
+              <a:buNone/>
+            </a:pPr>
+            <a:r>
+              <a:rPr lang="en-US" sz="800" i="1" dirty="0">
+                <a:solidFill>
+                  <a:srgbClr val="6B7280"/>
+                </a:solidFill>
+                <a:latin typeface="Calibri" pitchFamily="34" charset="0"/>
+                <a:ea typeface="Calibri" pitchFamily="34" charset="-122"/>
+                <a:cs typeface="Calibri" pitchFamily="34" charset="-120"/>
+              </a:rPr>
+              <a:t>Tehnici de feature engineering pentru serii temporale, cu aplicatii in domeniul energetic</a:t>
+            </a:r>
+            <a:endParaRPr lang="en-US" sz="800" dirty="0"/>
+          </a:p>
+        </p:txBody>
+      </p:sp>
+      <p:sp>
+        <p:nvSpPr>
+          <p:cNvPr id="20" name="Text 17"/>
+          <p:cNvSpPr/>
+          <p:nvPr/>
+        </p:nvSpPr>
+        <p:spPr>
+          <a:xfrm>
+            <a:off x="10789920" y="6400800"/>
+            <a:ext cx="914400" cy="320040"/>
+          </a:xfrm>
+          <a:prstGeom prst="rect">
+            <a:avLst/>
+          </a:prstGeom>
+          <a:noFill/>
+          <a:ln/>
+        </p:spPr>
+        <p:txBody>
+          <a:bodyPr wrap="square" rtlCol="0" anchor="ctr"/>
+          <a:lstStyle/>
+          <a:p>
             <a:pPr algn="r" indent="0" marL="0">
               <a:buNone/>
             </a:pPr>
@@ -8665,7 +10428,7 @@
                 <a:ea typeface="Calibri" pitchFamily="34" charset="-122"/>
                 <a:cs typeface="Calibri" pitchFamily="34" charset="-120"/>
               </a:rPr>
-              <a:t>6 / 13</a:t>
+              <a:t>6 / 15</a:t>
             </a:r>
             <a:endParaRPr lang="en-US" sz="900" dirty="0"/>
           </a:p>
@@ -8761,7 +10524,7 @@
                 <a:ea typeface="Calibri" pitchFamily="34" charset="-122"/>
                 <a:cs typeface="Calibri" pitchFamily="34" charset="-120"/>
               </a:rPr>
-              <a:t>AUTOREGRESIVITATE</a:t>
+              <a:t>ENCODING CICLIC</a:t>
             </a:r>
             <a:endParaRPr lang="en-US" sz="1100" dirty="0"/>
           </a:p>
@@ -8800,7 +10563,7 @@
                 <a:ea typeface="Calibri" pitchFamily="34" charset="-122"/>
                 <a:cs typeface="Calibri" pitchFamily="34" charset="-120"/>
               </a:rPr>
-              <a:t>Tehnica 2. Lag features - memoria scurta a modelului</a:t>
+              <a:t>Tehnica 1B. Solutia matematica: cercul orelor</a:t>
             </a:r>
             <a:endParaRPr lang="en-US" sz="2800" dirty="0"/>
           </a:p>
@@ -8833,14 +10596,64 @@
       </p:sp>
       <p:sp>
         <p:nvSpPr>
-          <p:cNvPr id="6" name="Text 4"/>
+          <p:cNvPr id="6" name="Shape 4"/>
           <p:cNvSpPr/>
           <p:nvPr/>
         </p:nvSpPr>
         <p:spPr>
           <a:xfrm>
             <a:off x="548640" y="1554480"/>
-            <a:ext cx="5486400" cy="1645920"/>
+            <a:ext cx="5394960" cy="4572000"/>
+          </a:xfrm>
+          <a:prstGeom prst="rect">
+            <a:avLst/>
+          </a:prstGeom>
+          <a:solidFill>
+            <a:srgbClr val="FFFFFF"/>
+          </a:solidFill>
+          <a:ln w="25400">
+            <a:solidFill>
+              <a:srgbClr val="065A82"/>
+            </a:solidFill>
+            <a:prstDash val="solid"/>
+          </a:ln>
+        </p:spPr>
+      </p:sp>
+      <p:sp>
+        <p:nvSpPr>
+          <p:cNvPr id="7" name="Shape 5"/>
+          <p:cNvSpPr/>
+          <p:nvPr/>
+        </p:nvSpPr>
+        <p:spPr>
+          <a:xfrm>
+            <a:off x="548640" y="1554480"/>
+            <a:ext cx="5394960" cy="502920"/>
+          </a:xfrm>
+          <a:prstGeom prst="rect">
+            <a:avLst/>
+          </a:prstGeom>
+          <a:solidFill>
+            <a:srgbClr val="065A82"/>
+          </a:solidFill>
+          <a:ln w="12700">
+            <a:solidFill>
+              <a:srgbClr val="065A82"/>
+            </a:solidFill>
+            <a:prstDash val="solid"/>
+          </a:ln>
+        </p:spPr>
+      </p:sp>
+      <p:sp>
+        <p:nvSpPr>
+          <p:cNvPr id="8" name="Text 6"/>
+          <p:cNvSpPr/>
+          <p:nvPr/>
+        </p:nvSpPr>
+        <p:spPr>
+          <a:xfrm>
+            <a:off x="548640" y="1554480"/>
+            <a:ext cx="5394960" cy="502920"/>
           </a:xfrm>
           <a:prstGeom prst="rect">
             <a:avLst/>
@@ -8849,6 +10662,160 @@
           <a:ln/>
         </p:spPr>
         <p:txBody>
+          <a:bodyPr wrap="square" rtlCol="0" anchor="ctr"/>
+          <a:lstStyle/>
+          <a:p>
+            <a:pPr algn="ctr" indent="0" marL="0">
+              <a:buNone/>
+            </a:pPr>
+            <a:r>
+              <a:rPr lang="en-US" sz="1600" b="1" dirty="0">
+                <a:solidFill>
+                  <a:srgbClr val="FFFFFF"/>
+                </a:solidFill>
+                <a:latin typeface="Calibri" pitchFamily="34" charset="0"/>
+                <a:ea typeface="Calibri" pitchFamily="34" charset="-122"/>
+                <a:cs typeface="Calibri" pitchFamily="34" charset="-120"/>
+              </a:rPr>
+              <a:t>Formula matematica</a:t>
+            </a:r>
+            <a:endParaRPr lang="en-US" sz="1600" dirty="0"/>
+          </a:p>
+        </p:txBody>
+      </p:sp>
+      <p:sp>
+        <p:nvSpPr>
+          <p:cNvPr id="9" name="Shape 7"/>
+          <p:cNvSpPr/>
+          <p:nvPr/>
+        </p:nvSpPr>
+        <p:spPr>
+          <a:xfrm>
+            <a:off x="822960" y="2331720"/>
+            <a:ext cx="4846320" cy="1554480"/>
+          </a:xfrm>
+          <a:prstGeom prst="rect">
+            <a:avLst/>
+          </a:prstGeom>
+          <a:solidFill>
+            <a:srgbClr val="F4F5F7"/>
+          </a:solidFill>
+          <a:ln w="12700">
+            <a:solidFill>
+              <a:srgbClr val="E5E7EB"/>
+            </a:solidFill>
+            <a:prstDash val="solid"/>
+          </a:ln>
+        </p:spPr>
+      </p:sp>
+      <p:sp>
+        <p:nvSpPr>
+          <p:cNvPr id="10" name="Text 8"/>
+          <p:cNvSpPr/>
+          <p:nvPr/>
+        </p:nvSpPr>
+        <p:spPr>
+          <a:xfrm>
+            <a:off x="914400" y="2468880"/>
+            <a:ext cx="4663440" cy="1371600"/>
+          </a:xfrm>
+          <a:prstGeom prst="rect">
+            <a:avLst/>
+          </a:prstGeom>
+          <a:noFill/>
+          <a:ln/>
+        </p:spPr>
+        <p:txBody>
+          <a:bodyPr wrap="square" rtlCol="0" anchor="ctr"/>
+          <a:lstStyle/>
+          <a:p>
+            <a:pPr algn="ctr" indent="0" marL="0">
+              <a:buNone/>
+            </a:pPr>
+            <a:r>
+              <a:rPr lang="en-US" sz="1300" b="1" dirty="0">
+                <a:solidFill>
+                  <a:srgbClr val="1F2937"/>
+                </a:solidFill>
+                <a:latin typeface="Cambria" pitchFamily="34" charset="0"/>
+                <a:ea typeface="Cambria" pitchFamily="34" charset="-122"/>
+                <a:cs typeface="Cambria" pitchFamily="34" charset="-120"/>
+              </a:rPr>
+              <a:t>Inlocuim ora h cu DOUA coloane:</a:t>
+            </a:r>
+            <a:endParaRPr lang="en-US" sz="1300" dirty="0"/>
+          </a:p>
+          <a:p>
+            <a:pPr algn="ctr" indent="0" marL="0">
+              <a:buNone/>
+            </a:pPr>
+            <a:r>
+              <a:rPr lang="en-US" sz="800" dirty="0">
+                <a:solidFill>
+                  <a:srgbClr val="000000"/>
+                </a:solidFill>
+                <a:latin typeface="Cambria" pitchFamily="34" charset="0"/>
+                <a:ea typeface="Cambria" pitchFamily="34" charset="-122"/>
+                <a:cs typeface="Cambria" pitchFamily="34" charset="-120"/>
+              </a:rPr>
+              <a:t> </a:t>
+            </a:r>
+            <a:endParaRPr lang="en-US" sz="1300" dirty="0"/>
+          </a:p>
+          <a:p>
+            <a:pPr algn="ctr" indent="0" marL="0">
+              <a:buNone/>
+            </a:pPr>
+            <a:r>
+              <a:rPr lang="en-US" sz="1400" b="1" dirty="0">
+                <a:solidFill>
+                  <a:srgbClr val="065A82"/>
+                </a:solidFill>
+                <a:latin typeface="Cambria" pitchFamily="34" charset="0"/>
+                <a:ea typeface="Cambria" pitchFamily="34" charset="-122"/>
+                <a:cs typeface="Cambria" pitchFamily="34" charset="-120"/>
+              </a:rPr>
+              <a:t>hour_sin = sin(2π · h / 24)</a:t>
+            </a:r>
+            <a:endParaRPr lang="en-US" sz="1300" dirty="0"/>
+          </a:p>
+          <a:p>
+            <a:pPr algn="ctr" indent="0" marL="0">
+              <a:buNone/>
+            </a:pPr>
+            <a:r>
+              <a:rPr lang="en-US" sz="1400" b="1" dirty="0">
+                <a:solidFill>
+                  <a:srgbClr val="065A82"/>
+                </a:solidFill>
+                <a:latin typeface="Cambria" pitchFamily="34" charset="0"/>
+                <a:ea typeface="Cambria" pitchFamily="34" charset="-122"/>
+                <a:cs typeface="Cambria" pitchFamily="34" charset="-120"/>
+              </a:rPr>
+              <a:t>hour_cos = cos(2π · h / 24)</a:t>
+            </a:r>
+            <a:endParaRPr lang="en-US" sz="1300" dirty="0"/>
+          </a:p>
+        </p:txBody>
+      </p:sp>
+      <p:sp>
+        <p:nvSpPr>
+          <p:cNvPr id="11" name="Text 9"/>
+          <p:cNvSpPr/>
+          <p:nvPr/>
+        </p:nvSpPr>
+        <p:spPr>
+          <a:xfrm>
+            <a:off x="822960" y="4114800"/>
+            <a:ext cx="4846320" cy="1828800"/>
+          </a:xfrm>
+          <a:prstGeom prst="rect">
+            <a:avLst/>
+          </a:prstGeom>
+          <a:noFill/>
+          <a:ln/>
+        </p:spPr>
+        <p:txBody>
           <a:bodyPr wrap="square" rtlCol="0" anchor="t"/>
           <a:lstStyle/>
           <a:p>
@@ -8856,7 +10823,613 @@
               <a:buNone/>
             </a:pPr>
             <a:r>
-              <a:rPr lang="en-US" sz="1600" b="1" dirty="0">
+              <a:rPr lang="en-US" sz="1300" b="1" dirty="0">
+                <a:solidFill>
+                  <a:srgbClr val="065A82"/>
+                </a:solidFill>
+                <a:latin typeface="Calibri" pitchFamily="34" charset="0"/>
+                <a:ea typeface="Calibri" pitchFamily="34" charset="-122"/>
+                <a:cs typeface="Calibri" pitchFamily="34" charset="-120"/>
+              </a:rPr>
+              <a:t>De ce functioneaza?
+</a:t>
+            </a:r>
+            <a:pPr indent="0" marL="0">
+              <a:buNone/>
+            </a:pPr>
+            <a:r>
+              <a:rPr lang="en-US" sz="1200" dirty="0">
+                <a:solidFill>
+                  <a:srgbClr val="1F2937"/>
+                </a:solidFill>
+                <a:latin typeface="Calibri" pitchFamily="34" charset="0"/>
+                <a:ea typeface="Calibri" pitchFamily="34" charset="-122"/>
+                <a:cs typeface="Calibri" pitchFamily="34" charset="-120"/>
+              </a:rPr>
+              <a:t>Cele 2 coloane (sin, cos) identifica UNIC fiecare ora ca un punct pe cercul trigonometric.
+</a:t>
+            </a:r>
+            <a:pPr indent="0" marL="0">
+              <a:buNone/>
+            </a:pPr>
+            <a:r>
+              <a:rPr lang="en-US" sz="1150" dirty="0">
+                <a:solidFill>
+                  <a:srgbClr val="6B7280"/>
+                </a:solidFill>
+                <a:latin typeface="Calibri" pitchFamily="34" charset="0"/>
+                <a:ea typeface="Calibri" pitchFamily="34" charset="-122"/>
+                <a:cs typeface="Calibri" pitchFamily="34" charset="-120"/>
+              </a:rPr>
+              <a:t>Ora 23 -&gt; ( cos = 0.97, sin = -0.26 )
+</a:t>
+            </a:r>
+            <a:pPr indent="0" marL="0">
+              <a:buNone/>
+            </a:pPr>
+            <a:r>
+              <a:rPr lang="en-US" sz="1150" dirty="0">
+                <a:solidFill>
+                  <a:srgbClr val="6B7280"/>
+                </a:solidFill>
+                <a:latin typeface="Calibri" pitchFamily="34" charset="0"/>
+                <a:ea typeface="Calibri" pitchFamily="34" charset="-122"/>
+                <a:cs typeface="Calibri" pitchFamily="34" charset="-120"/>
+              </a:rPr>
+              <a:t>Ora  0 -&gt; ( cos = 1.00, sin =  0.00 )
+</a:t>
+            </a:r>
+            <a:pPr indent="0" marL="0">
+              <a:buNone/>
+            </a:pPr>
+            <a:r>
+              <a:rPr lang="en-US" sz="1200" b="1" dirty="0">
+                <a:solidFill>
+                  <a:srgbClr val="6FAE6F"/>
+                </a:solidFill>
+                <a:latin typeface="Calibri" pitchFamily="34" charset="0"/>
+                <a:ea typeface="Calibri" pitchFamily="34" charset="-122"/>
+                <a:cs typeface="Calibri" pitchFamily="34" charset="-120"/>
+              </a:rPr>
+              <a:t>Distanta euclidiana: 0.27 unitati - MICA, ca in realitate.</a:t>
+            </a:r>
+            <a:endParaRPr lang="en-US" sz="1300" dirty="0"/>
+          </a:p>
+        </p:txBody>
+      </p:sp>
+      <p:pic>
+        <p:nvPicPr>
+          <p:cNvPr id="12" name="Image 0" descr="/sessions/vibrant-elegant-pasteur/mnt/Disertatie_AI_Platform/reports/figures/fig_4_1_cercul_orelor.png">    </p:cNvPr>
+          <p:cNvPicPr>
+            <a:picLocks noChangeAspect="1"/>
+          </p:cNvPicPr>
+          <p:nvPr/>
+        </p:nvPicPr>
+        <p:blipFill>
+          <a:blip r:embed="rId1"/>
+          <a:srcRect l="0" r="0" t="0" b="0"/>
+          <a:stretch/>
+        </p:blipFill>
+        <p:spPr>
+          <a:xfrm>
+            <a:off x="6217920" y="1554480"/>
+            <a:ext cx="5486400" cy="4572000"/>
+          </a:xfrm>
+          <a:prstGeom prst="rect">
+            <a:avLst/>
+          </a:prstGeom>
+        </p:spPr>
+      </p:pic>
+      <p:sp>
+        <p:nvSpPr>
+          <p:cNvPr id="13" name="Text 10"/>
+          <p:cNvSpPr/>
+          <p:nvPr/>
+        </p:nvSpPr>
+        <p:spPr>
+          <a:xfrm>
+            <a:off x="457200" y="6355080"/>
+            <a:ext cx="10058400" cy="411480"/>
+          </a:xfrm>
+          <a:prstGeom prst="rect">
+            <a:avLst/>
+          </a:prstGeom>
+          <a:noFill/>
+          <a:ln/>
+        </p:spPr>
+        <p:txBody>
+          <a:bodyPr wrap="square" rtlCol="0" anchor="ctr"/>
+          <a:lstStyle/>
+          <a:p>
+            <a:pPr indent="0" marL="0">
+              <a:buNone/>
+            </a:pPr>
+            <a:r>
+              <a:rPr lang="en-US" sz="800" b="1" dirty="0">
+                <a:solidFill>
+                  <a:srgbClr val="6B7280"/>
+                </a:solidFill>
+                <a:latin typeface="Calibri" pitchFamily="34" charset="0"/>
+                <a:ea typeface="Calibri" pitchFamily="34" charset="-122"/>
+                <a:cs typeface="Calibri" pitchFamily="34" charset="-120"/>
+              </a:rPr>
+              <a:t>Sesiune Comunicari Stiintifice Mai 2026</a:t>
+            </a:r>
+            <a:endParaRPr lang="en-US" sz="800" dirty="0"/>
+          </a:p>
+          <a:p>
+            <a:pPr indent="0" marL="0">
+              <a:buNone/>
+            </a:pPr>
+            <a:r>
+              <a:rPr lang="en-US" sz="800" i="1" dirty="0">
+                <a:solidFill>
+                  <a:srgbClr val="6B7280"/>
+                </a:solidFill>
+                <a:latin typeface="Calibri" pitchFamily="34" charset="0"/>
+                <a:ea typeface="Calibri" pitchFamily="34" charset="-122"/>
+                <a:cs typeface="Calibri" pitchFamily="34" charset="-120"/>
+              </a:rPr>
+              <a:t>Tehnici de feature engineering pentru serii temporale, cu aplicatii in domeniul energetic</a:t>
+            </a:r>
+            <a:endParaRPr lang="en-US" sz="800" dirty="0"/>
+          </a:p>
+        </p:txBody>
+      </p:sp>
+      <p:sp>
+        <p:nvSpPr>
+          <p:cNvPr id="14" name="Text 11"/>
+          <p:cNvSpPr/>
+          <p:nvPr/>
+        </p:nvSpPr>
+        <p:spPr>
+          <a:xfrm>
+            <a:off x="10789920" y="6400800"/>
+            <a:ext cx="914400" cy="320040"/>
+          </a:xfrm>
+          <a:prstGeom prst="rect">
+            <a:avLst/>
+          </a:prstGeom>
+          <a:noFill/>
+          <a:ln/>
+        </p:spPr>
+        <p:txBody>
+          <a:bodyPr wrap="square" rtlCol="0" anchor="ctr"/>
+          <a:lstStyle/>
+          <a:p>
+            <a:pPr algn="r" indent="0" marL="0">
+              <a:buNone/>
+            </a:pPr>
+            <a:r>
+              <a:rPr lang="en-US" sz="900" dirty="0">
+                <a:solidFill>
+                  <a:srgbClr val="6B7280"/>
+                </a:solidFill>
+                <a:latin typeface="Calibri" pitchFamily="34" charset="0"/>
+                <a:ea typeface="Calibri" pitchFamily="34" charset="-122"/>
+                <a:cs typeface="Calibri" pitchFamily="34" charset="-120"/>
+              </a:rPr>
+              <a:t>7 / 15</a:t>
+            </a:r>
+            <a:endParaRPr lang="en-US" sz="900" dirty="0"/>
+          </a:p>
+        </p:txBody>
+      </p:sp>
+    </p:spTree>
+  </p:cSld>
+  <p:clrMapOvr>
+    <a:masterClrMapping/>
+  </p:clrMapOvr>
+</p:sld>
+</file>
+
+<file path=ppt/slides/slide8.xml><?xml version="1.0" encoding="utf-8"?>
+<p:sld xmlns:a="http://schemas.openxmlformats.org/drawingml/2006/main" xmlns:r="http://schemas.openxmlformats.org/officeDocument/2006/relationships" xmlns:p="http://schemas.openxmlformats.org/presentationml/2006/main">
+  <p:cSld name="Slide 8">
+    <p:bg>
+      <p:bgPr>
+        <a:solidFill>
+          <a:srgbClr val="FFFFFF"/>
+        </a:solidFill>
+      </p:bgPr>
+    </p:bg>
+    <p:spTree>
+      <p:nvGrpSpPr>
+        <p:cNvPr id="1" name=""/>
+        <p:cNvGrpSpPr/>
+        <p:nvPr/>
+      </p:nvGrpSpPr>
+      <p:grpSpPr>
+        <a:xfrm>
+          <a:off x="0" y="0"/>
+          <a:ext cx="0" cy="0"/>
+          <a:chOff x="0" y="0"/>
+          <a:chExt cx="0" cy="0"/>
+        </a:xfrm>
+      </p:grpSpPr>
+      <p:sp>
+        <p:nvSpPr>
+          <p:cNvPr id="2" name="Shape 0"/>
+          <p:cNvSpPr/>
+          <p:nvPr/>
+        </p:nvSpPr>
+        <p:spPr>
+          <a:xfrm>
+            <a:off x="0" y="0"/>
+            <a:ext cx="12161520" cy="137160"/>
+          </a:xfrm>
+          <a:prstGeom prst="rect">
+            <a:avLst/>
+          </a:prstGeom>
+          <a:solidFill>
+            <a:srgbClr val="065A82"/>
+          </a:solidFill>
+          <a:ln w="12700">
+            <a:solidFill>
+              <a:srgbClr val="065A82"/>
+            </a:solidFill>
+            <a:prstDash val="solid"/>
+          </a:ln>
+        </p:spPr>
+      </p:sp>
+      <p:sp>
+        <p:nvSpPr>
+          <p:cNvPr id="3" name="Text 1"/>
+          <p:cNvSpPr/>
+          <p:nvPr/>
+        </p:nvSpPr>
+        <p:spPr>
+          <a:xfrm>
+            <a:off x="457200" y="274320"/>
+            <a:ext cx="11247120" cy="320040"/>
+          </a:xfrm>
+          <a:prstGeom prst="rect">
+            <a:avLst/>
+          </a:prstGeom>
+          <a:noFill/>
+          <a:ln/>
+        </p:spPr>
+        <p:txBody>
+          <a:bodyPr wrap="square" lIns="0" tIns="0" rIns="0" bIns="0" rtlCol="0" anchor="ctr"/>
+          <a:lstStyle/>
+          <a:p>
+            <a:pPr indent="0" marL="0">
+              <a:buNone/>
+            </a:pPr>
+            <a:r>
+              <a:rPr lang="en-US" sz="1100" b="1" spc="600" kern="0" dirty="0">
+                <a:solidFill>
+                  <a:srgbClr val="F96167"/>
+                </a:solidFill>
+                <a:latin typeface="Calibri" pitchFamily="34" charset="0"/>
+                <a:ea typeface="Calibri" pitchFamily="34" charset="-122"/>
+                <a:cs typeface="Calibri" pitchFamily="34" charset="-120"/>
+              </a:rPr>
+              <a:t>FUNDAMENTUL TEORETIC PENTRU LAG FEATURES</a:t>
+            </a:r>
+            <a:endParaRPr lang="en-US" sz="1100" dirty="0"/>
+          </a:p>
+        </p:txBody>
+      </p:sp>
+      <p:sp>
+        <p:nvSpPr>
+          <p:cNvPr id="4" name="Text 2"/>
+          <p:cNvSpPr/>
+          <p:nvPr/>
+        </p:nvSpPr>
+        <p:spPr>
+          <a:xfrm>
+            <a:off x="457200" y="594360"/>
+            <a:ext cx="11247120" cy="640080"/>
+          </a:xfrm>
+          <a:prstGeom prst="rect">
+            <a:avLst/>
+          </a:prstGeom>
+          <a:noFill/>
+          <a:ln/>
+        </p:spPr>
+        <p:txBody>
+          <a:bodyPr wrap="square" lIns="0" tIns="0" rIns="0" bIns="0" rtlCol="0" anchor="t"/>
+          <a:lstStyle/>
+          <a:p>
+            <a:pPr indent="0" marL="0">
+              <a:buNone/>
+            </a:pPr>
+            <a:r>
+              <a:rPr lang="en-US" sz="2800" b="1" dirty="0">
+                <a:solidFill>
+                  <a:srgbClr val="1F2937"/>
+                </a:solidFill>
+                <a:latin typeface="Calibri" pitchFamily="34" charset="0"/>
+                <a:ea typeface="Calibri" pitchFamily="34" charset="-122"/>
+                <a:cs typeface="Calibri" pitchFamily="34" charset="-120"/>
+              </a:rPr>
+              <a:t>Autoregresivitatea seriilor</a:t>
+            </a:r>
+            <a:endParaRPr lang="en-US" sz="2800" dirty="0"/>
+          </a:p>
+        </p:txBody>
+      </p:sp>
+      <p:sp>
+        <p:nvSpPr>
+          <p:cNvPr id="5" name="Shape 3"/>
+          <p:cNvSpPr/>
+          <p:nvPr/>
+        </p:nvSpPr>
+        <p:spPr>
+          <a:xfrm>
+            <a:off x="457200" y="1280160"/>
+            <a:ext cx="1097280" cy="36576"/>
+          </a:xfrm>
+          <a:prstGeom prst="rect">
+            <a:avLst/>
+          </a:prstGeom>
+          <a:solidFill>
+            <a:srgbClr val="F96167"/>
+          </a:solidFill>
+          <a:ln w="12700">
+            <a:solidFill>
+              <a:srgbClr val="F96167"/>
+            </a:solidFill>
+            <a:prstDash val="solid"/>
+          </a:ln>
+        </p:spPr>
+      </p:sp>
+      <p:sp>
+        <p:nvSpPr>
+          <p:cNvPr id="6" name="Shape 4"/>
+          <p:cNvSpPr/>
+          <p:nvPr/>
+        </p:nvSpPr>
+        <p:spPr>
+          <a:xfrm>
+            <a:off x="548640" y="1554480"/>
+            <a:ext cx="5212080" cy="1828800"/>
+          </a:xfrm>
+          <a:prstGeom prst="rect">
+            <a:avLst/>
+          </a:prstGeom>
+          <a:solidFill>
+            <a:srgbClr val="F4F5F7"/>
+          </a:solidFill>
+          <a:ln w="19050">
+            <a:solidFill>
+              <a:srgbClr val="065A82"/>
+            </a:solidFill>
+            <a:prstDash val="solid"/>
+          </a:ln>
+        </p:spPr>
+      </p:sp>
+      <p:sp>
+        <p:nvSpPr>
+          <p:cNvPr id="7" name="Shape 5"/>
+          <p:cNvSpPr/>
+          <p:nvPr/>
+        </p:nvSpPr>
+        <p:spPr>
+          <a:xfrm>
+            <a:off x="548640" y="1554480"/>
+            <a:ext cx="109728" cy="1828800"/>
+          </a:xfrm>
+          <a:prstGeom prst="rect">
+            <a:avLst/>
+          </a:prstGeom>
+          <a:solidFill>
+            <a:srgbClr val="065A82"/>
+          </a:solidFill>
+          <a:ln w="12700">
+            <a:solidFill>
+              <a:srgbClr val="065A82"/>
+            </a:solidFill>
+            <a:prstDash val="solid"/>
+          </a:ln>
+        </p:spPr>
+      </p:sp>
+      <p:sp>
+        <p:nvSpPr>
+          <p:cNvPr id="8" name="Text 6"/>
+          <p:cNvSpPr/>
+          <p:nvPr/>
+        </p:nvSpPr>
+        <p:spPr>
+          <a:xfrm>
+            <a:off x="868680" y="1645920"/>
+            <a:ext cx="4846320" cy="365760"/>
+          </a:xfrm>
+          <a:prstGeom prst="rect">
+            <a:avLst/>
+          </a:prstGeom>
+          <a:noFill/>
+          <a:ln/>
+        </p:spPr>
+        <p:txBody>
+          <a:bodyPr wrap="square" rtlCol="0" anchor="ctr"/>
+          <a:lstStyle/>
+          <a:p>
+            <a:pPr indent="0" marL="0">
+              <a:buNone/>
+            </a:pPr>
+            <a:r>
+              <a:rPr lang="en-US" sz="1500" b="1" dirty="0">
+                <a:solidFill>
+                  <a:srgbClr val="065A82"/>
+                </a:solidFill>
+                <a:latin typeface="Calibri" pitchFamily="34" charset="0"/>
+                <a:ea typeface="Calibri" pitchFamily="34" charset="-122"/>
+                <a:cs typeface="Calibri" pitchFamily="34" charset="-120"/>
+              </a:rPr>
+              <a:t>Definitie simpla</a:t>
+            </a:r>
+            <a:endParaRPr lang="en-US" sz="1500" dirty="0"/>
+          </a:p>
+        </p:txBody>
+      </p:sp>
+      <p:sp>
+        <p:nvSpPr>
+          <p:cNvPr id="9" name="Text 7"/>
+          <p:cNvSpPr/>
+          <p:nvPr/>
+        </p:nvSpPr>
+        <p:spPr>
+          <a:xfrm>
+            <a:off x="868680" y="2057400"/>
+            <a:ext cx="4846320" cy="1280160"/>
+          </a:xfrm>
+          <a:prstGeom prst="rect">
+            <a:avLst/>
+          </a:prstGeom>
+          <a:noFill/>
+          <a:ln/>
+        </p:spPr>
+        <p:txBody>
+          <a:bodyPr wrap="square" rtlCol="0" anchor="t"/>
+          <a:lstStyle/>
+          <a:p>
+            <a:pPr indent="0" marL="0">
+              <a:buNone/>
+            </a:pPr>
+            <a:r>
+              <a:rPr lang="en-US" sz="1300" dirty="0">
+                <a:solidFill>
+                  <a:srgbClr val="1F2937"/>
+                </a:solidFill>
+                <a:latin typeface="Calibri" pitchFamily="34" charset="0"/>
+                <a:ea typeface="Calibri" pitchFamily="34" charset="-122"/>
+                <a:cs typeface="Calibri" pitchFamily="34" charset="-120"/>
+              </a:rPr>
+              <a:t>O serie temporala este </a:t>
+            </a:r>
+            <a:pPr indent="0" marL="0">
+              <a:buNone/>
+            </a:pPr>
+            <a:r>
+              <a:rPr lang="en-US" sz="1300" b="1" dirty="0">
+                <a:solidFill>
+                  <a:srgbClr val="065A82"/>
+                </a:solidFill>
+                <a:latin typeface="Calibri" pitchFamily="34" charset="0"/>
+                <a:ea typeface="Calibri" pitchFamily="34" charset="-122"/>
+                <a:cs typeface="Calibri" pitchFamily="34" charset="-120"/>
+              </a:rPr>
+              <a:t>autoregresiva</a:t>
+            </a:r>
+            <a:pPr indent="0" marL="0">
+              <a:buNone/>
+            </a:pPr>
+            <a:r>
+              <a:rPr lang="en-US" sz="1300" dirty="0">
+                <a:solidFill>
+                  <a:srgbClr val="1F2937"/>
+                </a:solidFill>
+                <a:latin typeface="Calibri" pitchFamily="34" charset="0"/>
+                <a:ea typeface="Calibri" pitchFamily="34" charset="-122"/>
+                <a:cs typeface="Calibri" pitchFamily="34" charset="-120"/>
+              </a:rPr>
+              <a:t> daca </a:t>
+            </a:r>
+            <a:pPr indent="0" marL="0">
+              <a:buNone/>
+            </a:pPr>
+            <a:r>
+              <a:rPr lang="en-US" sz="1300" b="1" dirty="0">
+                <a:solidFill>
+                  <a:srgbClr val="1F2937"/>
+                </a:solidFill>
+                <a:latin typeface="Calibri" pitchFamily="34" charset="0"/>
+                <a:ea typeface="Calibri" pitchFamily="34" charset="-122"/>
+                <a:cs typeface="Calibri" pitchFamily="34" charset="-120"/>
+              </a:rPr>
+              <a:t>valorile ei viitoare pot fi prezise folosind propriile valori trecute.</a:t>
+            </a:r>
+            <a:endParaRPr lang="en-US" sz="1300" dirty="0"/>
+          </a:p>
+          <a:p>
+            <a:pPr indent="0" marL="0">
+              <a:buNone/>
+            </a:pPr>
+            <a:r>
+              <a:rPr lang="en-US" sz="800" dirty="0">
+                <a:solidFill>
+                  <a:srgbClr val="000000"/>
+                </a:solidFill>
+                <a:latin typeface="Calibri" pitchFamily="34" charset="0"/>
+                <a:ea typeface="Calibri" pitchFamily="34" charset="-122"/>
+                <a:cs typeface="Calibri" pitchFamily="34" charset="-120"/>
+              </a:rPr>
+              <a:t> </a:t>
+            </a:r>
+            <a:endParaRPr lang="en-US" sz="1300" dirty="0"/>
+          </a:p>
+          <a:p>
+            <a:pPr indent="0" marL="0">
+              <a:buNone/>
+            </a:pPr>
+            <a:r>
+              <a:rPr lang="en-US" sz="1150" i="1" dirty="0">
+                <a:solidFill>
+                  <a:srgbClr val="6B7280"/>
+                </a:solidFill>
+                <a:latin typeface="Calibri" pitchFamily="34" charset="0"/>
+                <a:ea typeface="Calibri" pitchFamily="34" charset="-122"/>
+                <a:cs typeface="Calibri" pitchFamily="34" charset="-120"/>
+              </a:rPr>
+              <a:t>Pretul de la 14:00 e foarte aproape de pretul de la 13:00, pentru ca cererea si oferta nu se schimba brusc.</a:t>
+            </a:r>
+            <a:endParaRPr lang="en-US" sz="1300" dirty="0"/>
+          </a:p>
+        </p:txBody>
+      </p:sp>
+      <p:sp>
+        <p:nvSpPr>
+          <p:cNvPr id="10" name="Shape 8"/>
+          <p:cNvSpPr/>
+          <p:nvPr/>
+        </p:nvSpPr>
+        <p:spPr>
+          <a:xfrm>
+            <a:off x="548640" y="3520440"/>
+            <a:ext cx="5212080" cy="1188720"/>
+          </a:xfrm>
+          <a:prstGeom prst="rect">
+            <a:avLst/>
+          </a:prstGeom>
+          <a:solidFill>
+            <a:srgbClr val="FFFFFF"/>
+          </a:solidFill>
+          <a:ln w="12700">
+            <a:solidFill>
+              <a:srgbClr val="E5E7EB"/>
+            </a:solidFill>
+            <a:prstDash val="solid"/>
+          </a:ln>
+        </p:spPr>
+      </p:sp>
+      <p:sp>
+        <p:nvSpPr>
+          <p:cNvPr id="11" name="Text 9"/>
+          <p:cNvSpPr/>
+          <p:nvPr/>
+        </p:nvSpPr>
+        <p:spPr>
+          <a:xfrm>
+            <a:off x="777240" y="3611880"/>
+            <a:ext cx="4937760" cy="1051560"/>
+          </a:xfrm>
+          <a:prstGeom prst="rect">
+            <a:avLst/>
+          </a:prstGeom>
+          <a:noFill/>
+          <a:ln/>
+        </p:spPr>
+        <p:txBody>
+          <a:bodyPr wrap="square" rtlCol="0" anchor="t"/>
+          <a:lstStyle/>
+          <a:p>
+            <a:pPr indent="0" marL="0">
+              <a:buNone/>
+            </a:pPr>
+            <a:r>
+              <a:rPr lang="en-US" sz="1300" b="1" dirty="0">
                 <a:solidFill>
                   <a:srgbClr val="1C7293"/>
                 </a:solidFill>
@@ -8864,14 +11437,28 @@
                 <a:ea typeface="Calibri" pitchFamily="34" charset="-122"/>
                 <a:cs typeface="Calibri" pitchFamily="34" charset="-120"/>
               </a:rPr>
-              <a:t>Ideea simpla
+              <a:t>Etimologie
 </a:t>
             </a:r>
             <a:pPr indent="0" marL="0">
               <a:buNone/>
             </a:pPr>
             <a:r>
-              <a:rPr lang="en-US" sz="1300" dirty="0">
+              <a:rPr lang="en-US" sz="1200" b="1" dirty="0">
+                <a:solidFill>
+                  <a:srgbClr val="065A82"/>
+                </a:solidFill>
+                <a:latin typeface="Calibri" pitchFamily="34" charset="0"/>
+                <a:ea typeface="Calibri" pitchFamily="34" charset="-122"/>
+                <a:cs typeface="Calibri" pitchFamily="34" charset="-120"/>
+              </a:rPr>
+              <a:t>auto</a:t>
+            </a:r>
+            <a:pPr indent="0" marL="0">
+              <a:buNone/>
+            </a:pPr>
+            <a:r>
+              <a:rPr lang="en-US" sz="1200" dirty="0">
                 <a:solidFill>
                   <a:srgbClr val="1F2937"/>
                 </a:solidFill>
@@ -8879,29 +11466,42 @@
                 <a:ea typeface="Calibri" pitchFamily="34" charset="-122"/>
                 <a:cs typeface="Calibri" pitchFamily="34" charset="-120"/>
               </a:rPr>
-              <a:t>Pretul peste o ora va fi probabil aproape de pretul actual. Cererea si oferta nu se schimba brusc.
+              <a:t> (de la sine) + </a:t>
+            </a:r>
+            <a:pPr indent="0" marL="0">
+              <a:buNone/>
+            </a:pPr>
+            <a:r>
+              <a:rPr lang="en-US" sz="1200" b="1" dirty="0">
+                <a:solidFill>
+                  <a:srgbClr val="065A82"/>
+                </a:solidFill>
+                <a:latin typeface="Calibri" pitchFamily="34" charset="0"/>
+                <a:ea typeface="Calibri" pitchFamily="34" charset="-122"/>
+                <a:cs typeface="Calibri" pitchFamily="34" charset="-120"/>
+              </a:rPr>
+              <a:t>regresie</a:t>
+            </a:r>
+            <a:pPr indent="0" marL="0">
+              <a:buNone/>
+            </a:pPr>
+            <a:r>
+              <a:rPr lang="en-US" sz="1200" dirty="0">
+                <a:solidFill>
+                  <a:srgbClr val="1F2937"/>
+                </a:solidFill>
+                <a:latin typeface="Calibri" pitchFamily="34" charset="0"/>
+                <a:ea typeface="Calibri" pitchFamily="34" charset="-122"/>
+                <a:cs typeface="Calibri" pitchFamily="34" charset="-120"/>
+              </a:rPr>
+              <a:t> (explicare a unei variabile)
 </a:t>
             </a:r>
             <a:pPr indent="0" marL="0">
               <a:buNone/>
             </a:pPr>
             <a:r>
-              <a:rPr lang="en-US" sz="1400" b="1" dirty="0">
-                <a:solidFill>
-                  <a:srgbClr val="1C7293"/>
-                </a:solidFill>
-                <a:latin typeface="Calibri" pitchFamily="34" charset="0"/>
-                <a:ea typeface="Calibri" pitchFamily="34" charset="-122"/>
-                <a:cs typeface="Calibri" pitchFamily="34" charset="-120"/>
-              </a:rPr>
-              <a:t>Cum implementez?
-</a:t>
-            </a:r>
-            <a:pPr indent="0" marL="0">
-              <a:buNone/>
-            </a:pPr>
-            <a:r>
-              <a:rPr lang="en-US" sz="1300" dirty="0">
+              <a:rPr lang="en-US" sz="1200" dirty="0">
                 <a:solidFill>
                   <a:srgbClr val="1F2937"/>
                 </a:solidFill>
@@ -8909,22 +11509,36 @@
                 <a:ea typeface="Calibri" pitchFamily="34" charset="-122"/>
                 <a:cs typeface="Calibri" pitchFamily="34" charset="-120"/>
               </a:rPr>
-              <a:t>Adaug coloane care contin valoarea cu un decalaj fix in trecut:</a:t>
-            </a:r>
-            <a:endParaRPr lang="en-US" sz="1600" dirty="0"/>
-          </a:p>
-        </p:txBody>
-      </p:sp>
-      <p:sp>
-        <p:nvSpPr>
-          <p:cNvPr id="7" name="Shape 5"/>
-          <p:cNvSpPr/>
-          <p:nvPr/>
-        </p:nvSpPr>
-        <p:spPr>
-          <a:xfrm>
-            <a:off x="548640" y="3291840"/>
-            <a:ext cx="5486400" cy="1371600"/>
+              <a:t>= </a:t>
+            </a:r>
+            <a:pPr indent="0" marL="0">
+              <a:buNone/>
+            </a:pPr>
+            <a:r>
+              <a:rPr lang="en-US" sz="1200" i="1" dirty="0">
+                <a:solidFill>
+                  <a:srgbClr val="1F2937"/>
+                </a:solidFill>
+                <a:latin typeface="Calibri" pitchFamily="34" charset="0"/>
+                <a:ea typeface="Calibri" pitchFamily="34" charset="-122"/>
+                <a:cs typeface="Calibri" pitchFamily="34" charset="-120"/>
+              </a:rPr>
+              <a:t>o variabila se explica pe sine prin propriile valori trecute</a:t>
+            </a:r>
+            <a:endParaRPr lang="en-US" sz="1300" dirty="0"/>
+          </a:p>
+        </p:txBody>
+      </p:sp>
+      <p:sp>
+        <p:nvSpPr>
+          <p:cNvPr id="12" name="Shape 10"/>
+          <p:cNvSpPr/>
+          <p:nvPr/>
+        </p:nvSpPr>
+        <p:spPr>
+          <a:xfrm>
+            <a:off x="548640" y="4846320"/>
+            <a:ext cx="5212080" cy="1280160"/>
           </a:xfrm>
           <a:prstGeom prst="rect">
             <a:avLst/>
@@ -8942,6 +11556,545 @@
       </p:sp>
       <p:sp>
         <p:nvSpPr>
+          <p:cNvPr id="13" name="Text 11"/>
+          <p:cNvSpPr/>
+          <p:nvPr/>
+        </p:nvSpPr>
+        <p:spPr>
+          <a:xfrm>
+            <a:off x="777240" y="4937760"/>
+            <a:ext cx="4937760" cy="1097280"/>
+          </a:xfrm>
+          <a:prstGeom prst="rect">
+            <a:avLst/>
+          </a:prstGeom>
+          <a:noFill/>
+          <a:ln/>
+        </p:spPr>
+        <p:txBody>
+          <a:bodyPr wrap="square" rtlCol="0" anchor="t"/>
+          <a:lstStyle/>
+          <a:p>
+            <a:pPr algn="ctr" indent="0" marL="0">
+              <a:buNone/>
+            </a:pPr>
+            <a:r>
+              <a:rPr lang="en-US" sz="1300" b="1" dirty="0">
+                <a:solidFill>
+                  <a:srgbClr val="F9C846"/>
+                </a:solidFill>
+                <a:latin typeface="Calibri" pitchFamily="34" charset="0"/>
+                <a:ea typeface="Calibri" pitchFamily="34" charset="-122"/>
+                <a:cs typeface="Calibri" pitchFamily="34" charset="-120"/>
+              </a:rPr>
+              <a:t>Model AR(1)
+</a:t>
+            </a:r>
+            <a:pPr algn="ctr" indent="0" marL="0">
+              <a:buNone/>
+            </a:pPr>
+            <a:r>
+              <a:rPr lang="en-US" sz="1800" b="1" dirty="0">
+                <a:solidFill>
+                  <a:srgbClr val="FFFFFF"/>
+                </a:solidFill>
+                <a:latin typeface="Cambria" pitchFamily="34" charset="0"/>
+                <a:ea typeface="Cambria" pitchFamily="34" charset="-122"/>
+                <a:cs typeface="Cambria" pitchFamily="34" charset="-120"/>
+              </a:rPr>
+              <a:t>y(t) = c + φ · y(t−1) + ε</a:t>
+            </a:r>
+            <a:endParaRPr lang="en-US" sz="1300" dirty="0"/>
+          </a:p>
+          <a:p>
+            <a:pPr algn="ctr" indent="0" marL="0">
+              <a:buNone/>
+            </a:pPr>
+            <a:r>
+              <a:rPr lang="en-US" sz="600" dirty="0">
+                <a:solidFill>
+                  <a:srgbClr val="000000"/>
+                </a:solidFill>
+                <a:latin typeface="Calibri" pitchFamily="34" charset="0"/>
+                <a:ea typeface="Calibri" pitchFamily="34" charset="-122"/>
+                <a:cs typeface="Calibri" pitchFamily="34" charset="-120"/>
+              </a:rPr>
+              <a:t> </a:t>
+            </a:r>
+            <a:endParaRPr lang="en-US" sz="1300" dirty="0"/>
+          </a:p>
+          <a:p>
+            <a:pPr algn="ctr" indent="0" marL="0">
+              <a:buNone/>
+            </a:pPr>
+            <a:r>
+              <a:rPr lang="en-US" sz="1000" i="1" dirty="0">
+                <a:solidFill>
+                  <a:srgbClr val="CADCFC"/>
+                </a:solidFill>
+                <a:latin typeface="Calibri" pitchFamily="34" charset="0"/>
+                <a:ea typeface="Calibri" pitchFamily="34" charset="-122"/>
+                <a:cs typeface="Calibri" pitchFamily="34" charset="-120"/>
+              </a:rPr>
+              <a:t>φ ≈ 1: autoregresivitate puternica   |   φ ≈ 0: zgomot</a:t>
+            </a:r>
+            <a:endParaRPr lang="en-US" sz="1300" dirty="0"/>
+          </a:p>
+        </p:txBody>
+      </p:sp>
+      <p:pic>
+        <p:nvPicPr>
+          <p:cNvPr id="14" name="Image 0" descr="/sessions/vibrant-elegant-pasteur/mnt/Disertatie_AI_Platform/reports/figures/fig_fe_autoregresivitate.png">    </p:cNvPr>
+          <p:cNvPicPr>
+            <a:picLocks noChangeAspect="1"/>
+          </p:cNvPicPr>
+          <p:nvPr/>
+        </p:nvPicPr>
+        <p:blipFill>
+          <a:blip r:embed="rId1"/>
+          <a:srcRect l="0" r="0" t="0" b="0"/>
+          <a:stretch/>
+        </p:blipFill>
+        <p:spPr>
+          <a:xfrm>
+            <a:off x="5943600" y="1554480"/>
+            <a:ext cx="5943600" cy="4480560"/>
+          </a:xfrm>
+          <a:prstGeom prst="rect">
+            <a:avLst/>
+          </a:prstGeom>
+        </p:spPr>
+      </p:pic>
+      <p:sp>
+        <p:nvSpPr>
+          <p:cNvPr id="15" name="Shape 12"/>
+          <p:cNvSpPr/>
+          <p:nvPr/>
+        </p:nvSpPr>
+        <p:spPr>
+          <a:xfrm>
+            <a:off x="548640" y="5870448"/>
+            <a:ext cx="11064240" cy="384048"/>
+          </a:xfrm>
+          <a:prstGeom prst="rect">
+            <a:avLst/>
+          </a:prstGeom>
+          <a:solidFill>
+            <a:srgbClr val="F96167"/>
+          </a:solidFill>
+          <a:ln w="12700">
+            <a:solidFill>
+              <a:srgbClr val="F96167"/>
+            </a:solidFill>
+            <a:prstDash val="solid"/>
+          </a:ln>
+        </p:spPr>
+      </p:sp>
+      <p:sp>
+        <p:nvSpPr>
+          <p:cNvPr id="16" name="Text 13"/>
+          <p:cNvSpPr/>
+          <p:nvPr/>
+        </p:nvSpPr>
+        <p:spPr>
+          <a:xfrm>
+            <a:off x="548640" y="5870448"/>
+            <a:ext cx="11064240" cy="384048"/>
+          </a:xfrm>
+          <a:prstGeom prst="rect">
+            <a:avLst/>
+          </a:prstGeom>
+          <a:noFill/>
+          <a:ln/>
+        </p:spPr>
+        <p:txBody>
+          <a:bodyPr wrap="square" rtlCol="0" anchor="ctr"/>
+          <a:lstStyle/>
+          <a:p>
+            <a:pPr algn="ctr" indent="0" marL="0">
+              <a:buNone/>
+            </a:pPr>
+            <a:r>
+              <a:rPr lang="en-US" sz="1200" b="1" i="1" dirty="0">
+                <a:solidFill>
+                  <a:srgbClr val="FFFFFF"/>
+                </a:solidFill>
+                <a:latin typeface="Calibri" pitchFamily="34" charset="0"/>
+                <a:ea typeface="Calibri" pitchFamily="34" charset="-122"/>
+                <a:cs typeface="Calibri" pitchFamily="34" charset="-120"/>
+              </a:rPr>
+              <a:t>Pe datele energetice, corelatia pret(t) cu pret(t−1) este ~0.99 -&gt; aici este motivul pentru care lag features functioneaza atat de bine.</a:t>
+            </a:r>
+            <a:endParaRPr lang="en-US" sz="1200" dirty="0"/>
+          </a:p>
+        </p:txBody>
+      </p:sp>
+      <p:sp>
+        <p:nvSpPr>
+          <p:cNvPr id="17" name="Text 14"/>
+          <p:cNvSpPr/>
+          <p:nvPr/>
+        </p:nvSpPr>
+        <p:spPr>
+          <a:xfrm>
+            <a:off x="457200" y="6355080"/>
+            <a:ext cx="10058400" cy="411480"/>
+          </a:xfrm>
+          <a:prstGeom prst="rect">
+            <a:avLst/>
+          </a:prstGeom>
+          <a:noFill/>
+          <a:ln/>
+        </p:spPr>
+        <p:txBody>
+          <a:bodyPr wrap="square" rtlCol="0" anchor="ctr"/>
+          <a:lstStyle/>
+          <a:p>
+            <a:pPr indent="0" marL="0">
+              <a:buNone/>
+            </a:pPr>
+            <a:r>
+              <a:rPr lang="en-US" sz="800" b="1" dirty="0">
+                <a:solidFill>
+                  <a:srgbClr val="6B7280"/>
+                </a:solidFill>
+                <a:latin typeface="Calibri" pitchFamily="34" charset="0"/>
+                <a:ea typeface="Calibri" pitchFamily="34" charset="-122"/>
+                <a:cs typeface="Calibri" pitchFamily="34" charset="-120"/>
+              </a:rPr>
+              <a:t>Sesiune Comunicari Stiintifice Mai 2026</a:t>
+            </a:r>
+            <a:endParaRPr lang="en-US" sz="800" dirty="0"/>
+          </a:p>
+          <a:p>
+            <a:pPr indent="0" marL="0">
+              <a:buNone/>
+            </a:pPr>
+            <a:r>
+              <a:rPr lang="en-US" sz="800" i="1" dirty="0">
+                <a:solidFill>
+                  <a:srgbClr val="6B7280"/>
+                </a:solidFill>
+                <a:latin typeface="Calibri" pitchFamily="34" charset="0"/>
+                <a:ea typeface="Calibri" pitchFamily="34" charset="-122"/>
+                <a:cs typeface="Calibri" pitchFamily="34" charset="-120"/>
+              </a:rPr>
+              <a:t>Tehnici de feature engineering pentru serii temporale, cu aplicatii in domeniul energetic</a:t>
+            </a:r>
+            <a:endParaRPr lang="en-US" sz="800" dirty="0"/>
+          </a:p>
+        </p:txBody>
+      </p:sp>
+      <p:sp>
+        <p:nvSpPr>
+          <p:cNvPr id="18" name="Text 15"/>
+          <p:cNvSpPr/>
+          <p:nvPr/>
+        </p:nvSpPr>
+        <p:spPr>
+          <a:xfrm>
+            <a:off x="10789920" y="6400800"/>
+            <a:ext cx="914400" cy="320040"/>
+          </a:xfrm>
+          <a:prstGeom prst="rect">
+            <a:avLst/>
+          </a:prstGeom>
+          <a:noFill/>
+          <a:ln/>
+        </p:spPr>
+        <p:txBody>
+          <a:bodyPr wrap="square" rtlCol="0" anchor="ctr"/>
+          <a:lstStyle/>
+          <a:p>
+            <a:pPr algn="r" indent="0" marL="0">
+              <a:buNone/>
+            </a:pPr>
+            <a:r>
+              <a:rPr lang="en-US" sz="900" dirty="0">
+                <a:solidFill>
+                  <a:srgbClr val="6B7280"/>
+                </a:solidFill>
+                <a:latin typeface="Calibri" pitchFamily="34" charset="0"/>
+                <a:ea typeface="Calibri" pitchFamily="34" charset="-122"/>
+                <a:cs typeface="Calibri" pitchFamily="34" charset="-120"/>
+              </a:rPr>
+              <a:t>8 / 15</a:t>
+            </a:r>
+            <a:endParaRPr lang="en-US" sz="900" dirty="0"/>
+          </a:p>
+        </p:txBody>
+      </p:sp>
+    </p:spTree>
+  </p:cSld>
+  <p:clrMapOvr>
+    <a:masterClrMapping/>
+  </p:clrMapOvr>
+</p:sld>
+</file>
+
+<file path=ppt/slides/slide9.xml><?xml version="1.0" encoding="utf-8"?>
+<p:sld xmlns:a="http://schemas.openxmlformats.org/drawingml/2006/main" xmlns:r="http://schemas.openxmlformats.org/officeDocument/2006/relationships" xmlns:p="http://schemas.openxmlformats.org/presentationml/2006/main">
+  <p:cSld name="Slide 9">
+    <p:bg>
+      <p:bgPr>
+        <a:solidFill>
+          <a:srgbClr val="FFFFFF"/>
+        </a:solidFill>
+      </p:bgPr>
+    </p:bg>
+    <p:spTree>
+      <p:nvGrpSpPr>
+        <p:cNvPr id="1" name=""/>
+        <p:cNvGrpSpPr/>
+        <p:nvPr/>
+      </p:nvGrpSpPr>
+      <p:grpSpPr>
+        <a:xfrm>
+          <a:off x="0" y="0"/>
+          <a:ext cx="0" cy="0"/>
+          <a:chOff x="0" y="0"/>
+          <a:chExt cx="0" cy="0"/>
+        </a:xfrm>
+      </p:grpSpPr>
+      <p:sp>
+        <p:nvSpPr>
+          <p:cNvPr id="2" name="Shape 0"/>
+          <p:cNvSpPr/>
+          <p:nvPr/>
+        </p:nvSpPr>
+        <p:spPr>
+          <a:xfrm>
+            <a:off x="0" y="0"/>
+            <a:ext cx="12161520" cy="137160"/>
+          </a:xfrm>
+          <a:prstGeom prst="rect">
+            <a:avLst/>
+          </a:prstGeom>
+          <a:solidFill>
+            <a:srgbClr val="065A82"/>
+          </a:solidFill>
+          <a:ln w="12700">
+            <a:solidFill>
+              <a:srgbClr val="065A82"/>
+            </a:solidFill>
+            <a:prstDash val="solid"/>
+          </a:ln>
+        </p:spPr>
+      </p:sp>
+      <p:sp>
+        <p:nvSpPr>
+          <p:cNvPr id="3" name="Text 1"/>
+          <p:cNvSpPr/>
+          <p:nvPr/>
+        </p:nvSpPr>
+        <p:spPr>
+          <a:xfrm>
+            <a:off x="457200" y="274320"/>
+            <a:ext cx="11247120" cy="320040"/>
+          </a:xfrm>
+          <a:prstGeom prst="rect">
+            <a:avLst/>
+          </a:prstGeom>
+          <a:noFill/>
+          <a:ln/>
+        </p:spPr>
+        <p:txBody>
+          <a:bodyPr wrap="square" lIns="0" tIns="0" rIns="0" bIns="0" rtlCol="0" anchor="ctr"/>
+          <a:lstStyle/>
+          <a:p>
+            <a:pPr indent="0" marL="0">
+              <a:buNone/>
+            </a:pPr>
+            <a:r>
+              <a:rPr lang="en-US" sz="1100" b="1" spc="600" kern="0" dirty="0">
+                <a:solidFill>
+                  <a:srgbClr val="F96167"/>
+                </a:solidFill>
+                <a:latin typeface="Calibri" pitchFamily="34" charset="0"/>
+                <a:ea typeface="Calibri" pitchFamily="34" charset="-122"/>
+                <a:cs typeface="Calibri" pitchFamily="34" charset="-120"/>
+              </a:rPr>
+              <a:t>AUTOREGRESIVITATE</a:t>
+            </a:r>
+            <a:endParaRPr lang="en-US" sz="1100" dirty="0"/>
+          </a:p>
+        </p:txBody>
+      </p:sp>
+      <p:sp>
+        <p:nvSpPr>
+          <p:cNvPr id="4" name="Text 2"/>
+          <p:cNvSpPr/>
+          <p:nvPr/>
+        </p:nvSpPr>
+        <p:spPr>
+          <a:xfrm>
+            <a:off x="457200" y="594360"/>
+            <a:ext cx="11247120" cy="640080"/>
+          </a:xfrm>
+          <a:prstGeom prst="rect">
+            <a:avLst/>
+          </a:prstGeom>
+          <a:noFill/>
+          <a:ln/>
+        </p:spPr>
+        <p:txBody>
+          <a:bodyPr wrap="square" lIns="0" tIns="0" rIns="0" bIns="0" rtlCol="0" anchor="t"/>
+          <a:lstStyle/>
+          <a:p>
+            <a:pPr indent="0" marL="0">
+              <a:buNone/>
+            </a:pPr>
+            <a:r>
+              <a:rPr lang="en-US" sz="2800" b="1" dirty="0">
+                <a:solidFill>
+                  <a:srgbClr val="1F2937"/>
+                </a:solidFill>
+                <a:latin typeface="Calibri" pitchFamily="34" charset="0"/>
+                <a:ea typeface="Calibri" pitchFamily="34" charset="-122"/>
+                <a:cs typeface="Calibri" pitchFamily="34" charset="-120"/>
+              </a:rPr>
+              <a:t>Tehnica 2. Lag features - memoria scurta a modelului</a:t>
+            </a:r>
+            <a:endParaRPr lang="en-US" sz="2800" dirty="0"/>
+          </a:p>
+        </p:txBody>
+      </p:sp>
+      <p:sp>
+        <p:nvSpPr>
+          <p:cNvPr id="5" name="Shape 3"/>
+          <p:cNvSpPr/>
+          <p:nvPr/>
+        </p:nvSpPr>
+        <p:spPr>
+          <a:xfrm>
+            <a:off x="457200" y="1280160"/>
+            <a:ext cx="1097280" cy="36576"/>
+          </a:xfrm>
+          <a:prstGeom prst="rect">
+            <a:avLst/>
+          </a:prstGeom>
+          <a:solidFill>
+            <a:srgbClr val="F96167"/>
+          </a:solidFill>
+          <a:ln w="12700">
+            <a:solidFill>
+              <a:srgbClr val="F96167"/>
+            </a:solidFill>
+            <a:prstDash val="solid"/>
+          </a:ln>
+        </p:spPr>
+      </p:sp>
+      <p:sp>
+        <p:nvSpPr>
+          <p:cNvPr id="6" name="Text 4"/>
+          <p:cNvSpPr/>
+          <p:nvPr/>
+        </p:nvSpPr>
+        <p:spPr>
+          <a:xfrm>
+            <a:off x="548640" y="1554480"/>
+            <a:ext cx="5486400" cy="1645920"/>
+          </a:xfrm>
+          <a:prstGeom prst="rect">
+            <a:avLst/>
+          </a:prstGeom>
+          <a:noFill/>
+          <a:ln/>
+        </p:spPr>
+        <p:txBody>
+          <a:bodyPr wrap="square" rtlCol="0" anchor="t"/>
+          <a:lstStyle/>
+          <a:p>
+            <a:pPr indent="0" marL="0">
+              <a:buNone/>
+            </a:pPr>
+            <a:r>
+              <a:rPr lang="en-US" sz="1600" b="1" dirty="0">
+                <a:solidFill>
+                  <a:srgbClr val="1C7293"/>
+                </a:solidFill>
+                <a:latin typeface="Calibri" pitchFamily="34" charset="0"/>
+                <a:ea typeface="Calibri" pitchFamily="34" charset="-122"/>
+                <a:cs typeface="Calibri" pitchFamily="34" charset="-120"/>
+              </a:rPr>
+              <a:t>Ideea simpla
+</a:t>
+            </a:r>
+            <a:pPr indent="0" marL="0">
+              <a:buNone/>
+            </a:pPr>
+            <a:r>
+              <a:rPr lang="en-US" sz="1300" dirty="0">
+                <a:solidFill>
+                  <a:srgbClr val="1F2937"/>
+                </a:solidFill>
+                <a:latin typeface="Calibri" pitchFamily="34" charset="0"/>
+                <a:ea typeface="Calibri" pitchFamily="34" charset="-122"/>
+                <a:cs typeface="Calibri" pitchFamily="34" charset="-120"/>
+              </a:rPr>
+              <a:t>Pretul peste o ora va fi probabil aproape de pretul actual. Cererea si oferta nu se schimba brusc.
+</a:t>
+            </a:r>
+            <a:pPr indent="0" marL="0">
+              <a:buNone/>
+            </a:pPr>
+            <a:r>
+              <a:rPr lang="en-US" sz="1400" b="1" dirty="0">
+                <a:solidFill>
+                  <a:srgbClr val="1C7293"/>
+                </a:solidFill>
+                <a:latin typeface="Calibri" pitchFamily="34" charset="0"/>
+                <a:ea typeface="Calibri" pitchFamily="34" charset="-122"/>
+                <a:cs typeface="Calibri" pitchFamily="34" charset="-120"/>
+              </a:rPr>
+              <a:t>Cum implementez?
+</a:t>
+            </a:r>
+            <a:pPr indent="0" marL="0">
+              <a:buNone/>
+            </a:pPr>
+            <a:r>
+              <a:rPr lang="en-US" sz="1300" dirty="0">
+                <a:solidFill>
+                  <a:srgbClr val="1F2937"/>
+                </a:solidFill>
+                <a:latin typeface="Calibri" pitchFamily="34" charset="0"/>
+                <a:ea typeface="Calibri" pitchFamily="34" charset="-122"/>
+                <a:cs typeface="Calibri" pitchFamily="34" charset="-120"/>
+              </a:rPr>
+              <a:t>Adaug coloane care contin valoarea cu un decalaj fix in trecut:</a:t>
+            </a:r>
+            <a:endParaRPr lang="en-US" sz="1600" dirty="0"/>
+          </a:p>
+        </p:txBody>
+      </p:sp>
+      <p:sp>
+        <p:nvSpPr>
+          <p:cNvPr id="7" name="Shape 5"/>
+          <p:cNvSpPr/>
+          <p:nvPr/>
+        </p:nvSpPr>
+        <p:spPr>
+          <a:xfrm>
+            <a:off x="548640" y="3291840"/>
+            <a:ext cx="5486400" cy="1371600"/>
+          </a:xfrm>
+          <a:prstGeom prst="rect">
+            <a:avLst/>
+          </a:prstGeom>
+          <a:solidFill>
+            <a:srgbClr val="21295C"/>
+          </a:solidFill>
+          <a:ln w="12700">
+            <a:solidFill>
+              <a:srgbClr val="21295C"/>
+            </a:solidFill>
+            <a:prstDash val="solid"/>
+          </a:ln>
+        </p:spPr>
+      </p:sp>
+      <p:sp>
+        <p:nvSpPr>
           <p:cNvPr id="8" name="Text 6"/>
           <p:cNvSpPr/>
           <p:nvPr/>
@@ -9149,7 +12302,7 @@
       </p:sp>
       <p:graphicFrame>
         <p:nvGraphicFramePr>
-          <p:cNvPr id="8" name="Table 0"/>
+          <p:cNvPr id="10" name="Table 0"/>
           <p:cNvGraphicFramePr>
             <a:graphicFrameLocks noGrp="1"/>
           </p:cNvGraphicFramePr>
@@ -11180,8 +14333,8 @@
         </p:nvSpPr>
         <p:spPr>
           <a:xfrm>
-            <a:off x="457200" y="6446520"/>
-            <a:ext cx="8229600" cy="274320"/>
+            <a:off x="457200" y="6355080"/>
+            <a:ext cx="10058400" cy="411480"/>
           </a:xfrm>
           <a:prstGeom prst="rect">
             <a:avLst/>
@@ -11197,7 +14350,7 @@
               <a:buNone/>
             </a:pPr>
             <a:r>
-              <a:rPr lang="en-US" sz="900" dirty="0">
+              <a:rPr lang="en-US" sz="800" b="1" dirty="0">
                 <a:solidFill>
                   <a:srgbClr val="6B7280"/>
                 </a:solidFill>
@@ -11205,9 +14358,26 @@
                 <a:ea typeface="Calibri" pitchFamily="34" charset="-122"/>
                 <a:cs typeface="Calibri" pitchFamily="34" charset="-120"/>
               </a:rPr>
-              <a:t>Diana Nenu  -  SCSS 2026  -  Feature engineering pentru serii temporale</a:t>
-            </a:r>
-            <a:endParaRPr lang="en-US" sz="900" dirty="0"/>
+              <a:t>Sesiune Comunicari Stiintifice Mai 2026</a:t>
+            </a:r>
+            <a:endParaRPr lang="en-US" sz="800" dirty="0"/>
+          </a:p>
+          <a:p>
+            <a:pPr indent="0" marL="0">
+              <a:buNone/>
+            </a:pPr>
+            <a:r>
+              <a:rPr lang="en-US" sz="800" i="1" dirty="0">
+                <a:solidFill>
+                  <a:srgbClr val="6B7280"/>
+                </a:solidFill>
+                <a:latin typeface="Calibri" pitchFamily="34" charset="0"/>
+                <a:ea typeface="Calibri" pitchFamily="34" charset="-122"/>
+                <a:cs typeface="Calibri" pitchFamily="34" charset="-120"/>
+              </a:rPr>
+              <a:t>Tehnici de feature engineering pentru serii temporale, cu aplicatii in domeniul energetic</a:t>
+            </a:r>
+            <a:endParaRPr lang="en-US" sz="800" dirty="0"/>
           </a:p>
         </p:txBody>
       </p:sp>
@@ -11219,8 +14389,8 @@
         </p:nvSpPr>
         <p:spPr>
           <a:xfrm>
-            <a:off x="10789920" y="6446520"/>
-            <a:ext cx="914400" cy="274320"/>
+            <a:off x="10789920" y="6400800"/>
+            <a:ext cx="914400" cy="320040"/>
           </a:xfrm>
           <a:prstGeom prst="rect">
             <a:avLst/>
@@ -11244,1233 +14414,7 @@
                 <a:ea typeface="Calibri" pitchFamily="34" charset="-122"/>
                 <a:cs typeface="Calibri" pitchFamily="34" charset="-120"/>
               </a:rPr>
-              <a:t>7 / 13</a:t>
-            </a:r>
-            <a:endParaRPr lang="en-US" sz="900" dirty="0"/>
-          </a:p>
-        </p:txBody>
-      </p:sp>
-    </p:spTree>
-  </p:cSld>
-  <p:clrMapOvr>
-    <a:masterClrMapping/>
-  </p:clrMapOvr>
-</p:sld>
-</file>
-
-<file path=ppt/slides/slide8.xml><?xml version="1.0" encoding="utf-8"?>
-<p:sld xmlns:a="http://schemas.openxmlformats.org/drawingml/2006/main" xmlns:r="http://schemas.openxmlformats.org/officeDocument/2006/relationships" xmlns:p="http://schemas.openxmlformats.org/presentationml/2006/main">
-  <p:cSld name="Slide 8">
-    <p:bg>
-      <p:bgPr>
-        <a:solidFill>
-          <a:srgbClr val="FFFFFF"/>
-        </a:solidFill>
-      </p:bgPr>
-    </p:bg>
-    <p:spTree>
-      <p:nvGrpSpPr>
-        <p:cNvPr id="1" name=""/>
-        <p:cNvGrpSpPr/>
-        <p:nvPr/>
-      </p:nvGrpSpPr>
-      <p:grpSpPr>
-        <a:xfrm>
-          <a:off x="0" y="0"/>
-          <a:ext cx="0" cy="0"/>
-          <a:chOff x="0" y="0"/>
-          <a:chExt cx="0" cy="0"/>
-        </a:xfrm>
-      </p:grpSpPr>
-      <p:sp>
-        <p:nvSpPr>
-          <p:cNvPr id="2" name="Shape 0"/>
-          <p:cNvSpPr/>
-          <p:nvPr/>
-        </p:nvSpPr>
-        <p:spPr>
-          <a:xfrm>
-            <a:off x="0" y="0"/>
-            <a:ext cx="12161520" cy="137160"/>
-          </a:xfrm>
-          <a:prstGeom prst="rect">
-            <a:avLst/>
-          </a:prstGeom>
-          <a:solidFill>
-            <a:srgbClr val="065A82"/>
-          </a:solidFill>
-          <a:ln w="12700">
-            <a:solidFill>
-              <a:srgbClr val="065A82"/>
-            </a:solidFill>
-            <a:prstDash val="solid"/>
-          </a:ln>
-        </p:spPr>
-      </p:sp>
-      <p:sp>
-        <p:nvSpPr>
-          <p:cNvPr id="3" name="Text 1"/>
-          <p:cNvSpPr/>
-          <p:nvPr/>
-        </p:nvSpPr>
-        <p:spPr>
-          <a:xfrm>
-            <a:off x="457200" y="274320"/>
-            <a:ext cx="11247120" cy="320040"/>
-          </a:xfrm>
-          <a:prstGeom prst="rect">
-            <a:avLst/>
-          </a:prstGeom>
-          <a:noFill/>
-          <a:ln/>
-        </p:spPr>
-        <p:txBody>
-          <a:bodyPr wrap="square" lIns="0" tIns="0" rIns="0" bIns="0" rtlCol="0" anchor="ctr"/>
-          <a:lstStyle/>
-          <a:p>
-            <a:pPr indent="0" marL="0">
-              <a:buNone/>
-            </a:pPr>
-            <a:r>
-              <a:rPr lang="en-US" sz="1100" b="1" spc="600" kern="0" dirty="0">
-                <a:solidFill>
-                  <a:srgbClr val="F96167"/>
-                </a:solidFill>
-                <a:latin typeface="Calibri" pitchFamily="34" charset="0"/>
-                <a:ea typeface="Calibri" pitchFamily="34" charset="-122"/>
-                <a:cs typeface="Calibri" pitchFamily="34" charset="-120"/>
-              </a:rPr>
-              <a:t>TREND SI VOLATILITATE</a:t>
-            </a:r>
-            <a:endParaRPr lang="en-US" sz="1100" dirty="0"/>
-          </a:p>
-        </p:txBody>
-      </p:sp>
-      <p:sp>
-        <p:nvSpPr>
-          <p:cNvPr id="4" name="Text 2"/>
-          <p:cNvSpPr/>
-          <p:nvPr/>
-        </p:nvSpPr>
-        <p:spPr>
-          <a:xfrm>
-            <a:off x="457200" y="594360"/>
-            <a:ext cx="11247120" cy="640080"/>
-          </a:xfrm>
-          <a:prstGeom prst="rect">
-            <a:avLst/>
-          </a:prstGeom>
-          <a:noFill/>
-          <a:ln/>
-        </p:spPr>
-        <p:txBody>
-          <a:bodyPr wrap="square" lIns="0" tIns="0" rIns="0" bIns="0" rtlCol="0" anchor="t"/>
-          <a:lstStyle/>
-          <a:p>
-            <a:pPr indent="0" marL="0">
-              <a:buNone/>
-            </a:pPr>
-            <a:r>
-              <a:rPr lang="en-US" sz="2800" b="1" dirty="0">
-                <a:solidFill>
-                  <a:srgbClr val="1F2937"/>
-                </a:solidFill>
-                <a:latin typeface="Calibri" pitchFamily="34" charset="0"/>
-                <a:ea typeface="Calibri" pitchFamily="34" charset="-122"/>
-                <a:cs typeface="Calibri" pitchFamily="34" charset="-120"/>
-              </a:rPr>
-              <a:t>Tehnica 3A. Rolling features - media plimbatoare</a:t>
-            </a:r>
-            <a:endParaRPr lang="en-US" sz="2800" dirty="0"/>
-          </a:p>
-        </p:txBody>
-      </p:sp>
-      <p:sp>
-        <p:nvSpPr>
-          <p:cNvPr id="5" name="Shape 3"/>
-          <p:cNvSpPr/>
-          <p:nvPr/>
-        </p:nvSpPr>
-        <p:spPr>
-          <a:xfrm>
-            <a:off x="457200" y="1280160"/>
-            <a:ext cx="1097280" cy="36576"/>
-          </a:xfrm>
-          <a:prstGeom prst="rect">
-            <a:avLst/>
-          </a:prstGeom>
-          <a:solidFill>
-            <a:srgbClr val="F96167"/>
-          </a:solidFill>
-          <a:ln w="12700">
-            <a:solidFill>
-              <a:srgbClr val="F96167"/>
-            </a:solidFill>
-            <a:prstDash val="solid"/>
-          </a:ln>
-        </p:spPr>
-      </p:sp>
-      <p:sp>
-        <p:nvSpPr>
-          <p:cNvPr id="6" name="Text 4"/>
-          <p:cNvSpPr/>
-          <p:nvPr/>
-        </p:nvSpPr>
-        <p:spPr>
-          <a:xfrm>
-            <a:off x="548640" y="1554480"/>
-            <a:ext cx="11018520" cy="1554480"/>
-          </a:xfrm>
-          <a:prstGeom prst="rect">
-            <a:avLst/>
-          </a:prstGeom>
-          <a:noFill/>
-          <a:ln/>
-        </p:spPr>
-        <p:txBody>
-          <a:bodyPr wrap="square" rtlCol="0" anchor="t"/>
-          <a:lstStyle/>
-          <a:p>
-            <a:pPr indent="0" marL="0">
-              <a:buNone/>
-            </a:pPr>
-            <a:r>
-              <a:rPr lang="en-US" sz="1600" b="1" dirty="0">
-                <a:solidFill>
-                  <a:srgbClr val="F96167"/>
-                </a:solidFill>
-                <a:latin typeface="Calibri" pitchFamily="34" charset="0"/>
-                <a:ea typeface="Calibri" pitchFamily="34" charset="-122"/>
-                <a:cs typeface="Calibri" pitchFamily="34" charset="-120"/>
-              </a:rPr>
-              <a:t>Ideea
-</a:t>
-            </a:r>
-            <a:pPr indent="0" marL="0">
-              <a:buNone/>
-            </a:pPr>
-            <a:r>
-              <a:rPr lang="en-US" sz="1250" dirty="0">
-                <a:solidFill>
-                  <a:srgbClr val="1F2937"/>
-                </a:solidFill>
-                <a:latin typeface="Calibri" pitchFamily="34" charset="0"/>
-                <a:ea typeface="Calibri" pitchFamily="34" charset="-122"/>
-                <a:cs typeface="Calibri" pitchFamily="34" charset="-120"/>
-              </a:rPr>
-              <a:t>Cat de bine prezice un singur punct din trecut? Nu intotdeauna - poate fi un punct atipic. Mai bine combinam mai multe valori recente.
-</a:t>
-            </a:r>
-            <a:pPr indent="0" marL="0">
-              <a:buNone/>
-            </a:pPr>
-            <a:r>
-              <a:rPr lang="en-US" sz="1400" b="1" dirty="0">
-                <a:solidFill>
-                  <a:srgbClr val="F96167"/>
-                </a:solidFill>
-                <a:latin typeface="Calibri" pitchFamily="34" charset="0"/>
-                <a:ea typeface="Calibri" pitchFamily="34" charset="-122"/>
-                <a:cs typeface="Calibri" pitchFamily="34" charset="-120"/>
-              </a:rPr>
-              <a:t>Solutia
-</a:t>
-            </a:r>
-            <a:pPr indent="0" marL="0">
-              <a:buNone/>
-            </a:pPr>
-            <a:r>
-              <a:rPr lang="en-US" sz="1250" dirty="0">
-                <a:solidFill>
-                  <a:srgbClr val="1F2937"/>
-                </a:solidFill>
-                <a:latin typeface="Calibri" pitchFamily="34" charset="0"/>
-                <a:ea typeface="Calibri" pitchFamily="34" charset="-122"/>
-                <a:cs typeface="Calibri" pitchFamily="34" charset="-120"/>
-              </a:rPr>
-              <a:t>Calculez statistici (medie, deviatie) pe o </a:t>
-            </a:r>
-            <a:pPr indent="0" marL="0">
-              <a:buNone/>
-            </a:pPr>
-            <a:r>
-              <a:rPr lang="en-US" sz="1250" b="1" dirty="0">
-                <a:solidFill>
-                  <a:srgbClr val="1F2937"/>
-                </a:solidFill>
-                <a:latin typeface="Calibri" pitchFamily="34" charset="0"/>
-                <a:ea typeface="Calibri" pitchFamily="34" charset="-122"/>
-                <a:cs typeface="Calibri" pitchFamily="34" charset="-120"/>
-              </a:rPr>
-              <a:t>fereastra alunecatoare</a:t>
-            </a:r>
-            <a:pPr indent="0" marL="0">
-              <a:buNone/>
-            </a:pPr>
-            <a:r>
-              <a:rPr lang="en-US" sz="1250" dirty="0">
-                <a:solidFill>
-                  <a:srgbClr val="1F2937"/>
-                </a:solidFill>
-                <a:latin typeface="Calibri" pitchFamily="34" charset="0"/>
-                <a:ea typeface="Calibri" pitchFamily="34" charset="-122"/>
-                <a:cs typeface="Calibri" pitchFamily="34" charset="-120"/>
-              </a:rPr>
-              <a:t> de N ore din trecut. Aceasta fereastra se 'plimba' odata cu timpul.</a:t>
-            </a:r>
-            <a:endParaRPr lang="en-US" sz="1600" dirty="0"/>
-          </a:p>
-        </p:txBody>
-      </p:sp>
-      <p:sp>
-        <p:nvSpPr>
-          <p:cNvPr id="7" name="Shape 5"/>
-          <p:cNvSpPr/>
-          <p:nvPr/>
-        </p:nvSpPr>
-        <p:spPr>
-          <a:xfrm>
-            <a:off x="548640" y="3200400"/>
-            <a:ext cx="5486400" cy="3017520"/>
-          </a:xfrm>
-          <a:prstGeom prst="rect">
-            <a:avLst/>
-          </a:prstGeom>
-          <a:solidFill>
-            <a:srgbClr val="FFFFFF"/>
-          </a:solidFill>
-          <a:ln w="25400">
-            <a:solidFill>
-              <a:srgbClr val="F96167"/>
-            </a:solidFill>
-            <a:prstDash val="solid"/>
-          </a:ln>
-        </p:spPr>
-      </p:sp>
-      <p:sp>
-        <p:nvSpPr>
-          <p:cNvPr id="8" name="Shape 6"/>
-          <p:cNvSpPr/>
-          <p:nvPr/>
-        </p:nvSpPr>
-        <p:spPr>
-          <a:xfrm>
-            <a:off x="548640" y="3200400"/>
-            <a:ext cx="5486400" cy="502920"/>
-          </a:xfrm>
-          <a:prstGeom prst="rect">
-            <a:avLst/>
-          </a:prstGeom>
-          <a:solidFill>
-            <a:srgbClr val="F96167"/>
-          </a:solidFill>
-          <a:ln w="12700">
-            <a:solidFill>
-              <a:srgbClr val="F96167"/>
-            </a:solidFill>
-            <a:prstDash val="solid"/>
-          </a:ln>
-        </p:spPr>
-      </p:sp>
-      <p:sp>
-        <p:nvSpPr>
-          <p:cNvPr id="9" name="Text 7"/>
-          <p:cNvSpPr/>
-          <p:nvPr/>
-        </p:nvSpPr>
-        <p:spPr>
-          <a:xfrm>
-            <a:off x="548640" y="3200400"/>
-            <a:ext cx="5486400" cy="502920"/>
-          </a:xfrm>
-          <a:prstGeom prst="rect">
-            <a:avLst/>
-          </a:prstGeom>
-          <a:noFill/>
-          <a:ln/>
-        </p:spPr>
-        <p:txBody>
-          <a:bodyPr wrap="square" rtlCol="0" anchor="ctr"/>
-          <a:lstStyle/>
-          <a:p>
-            <a:pPr algn="ctr" indent="0" marL="0">
-              <a:buNone/>
-            </a:pPr>
-            <a:r>
-              <a:rPr lang="en-US" sz="1500" b="1" dirty="0">
-                <a:solidFill>
-                  <a:srgbClr val="FFFFFF"/>
-                </a:solidFill>
-                <a:latin typeface="Calibri" pitchFamily="34" charset="0"/>
-                <a:ea typeface="Calibri" pitchFamily="34" charset="-122"/>
-                <a:cs typeface="Calibri" pitchFamily="34" charset="-120"/>
-              </a:rPr>
-              <a:t>roll_mean - trend recent</a:t>
-            </a:r>
-            <a:endParaRPr lang="en-US" sz="1500" dirty="0"/>
-          </a:p>
-        </p:txBody>
-      </p:sp>
-      <p:sp>
-        <p:nvSpPr>
-          <p:cNvPr id="10" name="Text 8"/>
-          <p:cNvSpPr/>
-          <p:nvPr/>
-        </p:nvSpPr>
-        <p:spPr>
-          <a:xfrm>
-            <a:off x="777240" y="3840480"/>
-            <a:ext cx="5029200" cy="2286000"/>
-          </a:xfrm>
-          <a:prstGeom prst="rect">
-            <a:avLst/>
-          </a:prstGeom>
-          <a:noFill/>
-          <a:ln/>
-        </p:spPr>
-        <p:txBody>
-          <a:bodyPr wrap="square" rtlCol="0" anchor="t"/>
-          <a:lstStyle/>
-          <a:p>
-            <a:pPr indent="0" marL="0">
-              <a:buNone/>
-            </a:pPr>
-            <a:r>
-              <a:rPr lang="en-US" sz="1100" dirty="0">
-                <a:solidFill>
-                  <a:srgbClr val="1F2937"/>
-                </a:solidFill>
-                <a:latin typeface="Consolas" pitchFamily="34" charset="0"/>
-                <a:ea typeface="Consolas" pitchFamily="34" charset="-122"/>
-                <a:cs typeface="Consolas" pitchFamily="34" charset="-120"/>
-              </a:rPr>
-              <a:t>df['roll_mean_3']  = df['pret'].rolling(3).mean()</a:t>
-            </a:r>
-            <a:endParaRPr lang="en-US" sz="1100" dirty="0"/>
-          </a:p>
-          <a:p>
-            <a:pPr indent="0" marL="0">
-              <a:buNone/>
-            </a:pPr>
-            <a:r>
-              <a:rPr lang="en-US" sz="1100" dirty="0">
-                <a:solidFill>
-                  <a:srgbClr val="1F2937"/>
-                </a:solidFill>
-                <a:latin typeface="Consolas" pitchFamily="34" charset="0"/>
-                <a:ea typeface="Consolas" pitchFamily="34" charset="-122"/>
-                <a:cs typeface="Consolas" pitchFamily="34" charset="-120"/>
-              </a:rPr>
-              <a:t>df['roll_mean_24'] = df['pret'].rolling(24).mean()</a:t>
-            </a:r>
-            <a:endParaRPr lang="en-US" sz="1100" dirty="0"/>
-          </a:p>
-          <a:p>
-            <a:pPr indent="0" marL="0">
-              <a:buNone/>
-            </a:pPr>
-            <a:r>
-              <a:rPr lang="en-US" sz="800" dirty="0">
-                <a:solidFill>
-                  <a:srgbClr val="000000"/>
-                </a:solidFill>
-                <a:latin typeface="Calibri" pitchFamily="34" charset="0"/>
-                <a:ea typeface="Calibri" pitchFamily="34" charset="-122"/>
-                <a:cs typeface="Calibri" pitchFamily="34" charset="-120"/>
-              </a:rPr>
-              <a:t> </a:t>
-            </a:r>
-            <a:endParaRPr lang="en-US" sz="1100" dirty="0"/>
-          </a:p>
-          <a:p>
-            <a:pPr indent="0" marL="0">
-              <a:buNone/>
-            </a:pPr>
-            <a:r>
-              <a:rPr lang="en-US" sz="1200" dirty="0">
-                <a:solidFill>
-                  <a:srgbClr val="1F2937"/>
-                </a:solidFill>
-                <a:latin typeface="Calibri" pitchFamily="34" charset="0"/>
-                <a:ea typeface="Calibri" pitchFamily="34" charset="-122"/>
-                <a:cs typeface="Calibri" pitchFamily="34" charset="-120"/>
-              </a:rPr>
-              <a:t>Captureaza </a:t>
-            </a:r>
-            <a:pPr indent="0" marL="0">
-              <a:buNone/>
-            </a:pPr>
-            <a:r>
-              <a:rPr lang="en-US" sz="1200" b="1" dirty="0">
-                <a:solidFill>
-                  <a:srgbClr val="1F2937"/>
-                </a:solidFill>
-                <a:latin typeface="Calibri" pitchFamily="34" charset="0"/>
-                <a:ea typeface="Calibri" pitchFamily="34" charset="-122"/>
-                <a:cs typeface="Calibri" pitchFamily="34" charset="-120"/>
-              </a:rPr>
-              <a:t>directia generala</a:t>
-            </a:r>
-            <a:pPr indent="0" marL="0">
-              <a:buNone/>
-            </a:pPr>
-            <a:r>
-              <a:rPr lang="en-US" sz="1200" dirty="0">
-                <a:solidFill>
-                  <a:srgbClr val="1F2937"/>
-                </a:solidFill>
-                <a:latin typeface="Calibri" pitchFamily="34" charset="0"/>
-                <a:ea typeface="Calibri" pitchFamily="34" charset="-122"/>
-                <a:cs typeface="Calibri" pitchFamily="34" charset="-120"/>
-              </a:rPr>
-              <a:t> - daca media ultimelor 3 ore e ridicata, pretul actual e probabil tot ridicat. Filtreaza zgomotul.</a:t>
-            </a:r>
-            <a:endParaRPr lang="en-US" sz="1100" dirty="0"/>
-          </a:p>
-        </p:txBody>
-      </p:sp>
-      <p:sp>
-        <p:nvSpPr>
-          <p:cNvPr id="11" name="Shape 9"/>
-          <p:cNvSpPr/>
-          <p:nvPr/>
-        </p:nvSpPr>
-        <p:spPr>
-          <a:xfrm>
-            <a:off x="6172200" y="3200400"/>
-            <a:ext cx="5486400" cy="3017520"/>
-          </a:xfrm>
-          <a:prstGeom prst="rect">
-            <a:avLst/>
-          </a:prstGeom>
-          <a:solidFill>
-            <a:srgbClr val="FFFFFF"/>
-          </a:solidFill>
-          <a:ln w="25400">
-            <a:solidFill>
-              <a:srgbClr val="F96167"/>
-            </a:solidFill>
-            <a:prstDash val="solid"/>
-          </a:ln>
-        </p:spPr>
-      </p:sp>
-      <p:sp>
-        <p:nvSpPr>
-          <p:cNvPr id="12" name="Shape 10"/>
-          <p:cNvSpPr/>
-          <p:nvPr/>
-        </p:nvSpPr>
-        <p:spPr>
-          <a:xfrm>
-            <a:off x="6172200" y="3200400"/>
-            <a:ext cx="5486400" cy="502920"/>
-          </a:xfrm>
-          <a:prstGeom prst="rect">
-            <a:avLst/>
-          </a:prstGeom>
-          <a:solidFill>
-            <a:srgbClr val="F96167"/>
-          </a:solidFill>
-          <a:ln w="12700">
-            <a:solidFill>
-              <a:srgbClr val="F96167"/>
-            </a:solidFill>
-            <a:prstDash val="solid"/>
-          </a:ln>
-        </p:spPr>
-      </p:sp>
-      <p:sp>
-        <p:nvSpPr>
-          <p:cNvPr id="13" name="Text 11"/>
-          <p:cNvSpPr/>
-          <p:nvPr/>
-        </p:nvSpPr>
-        <p:spPr>
-          <a:xfrm>
-            <a:off x="6172200" y="3200400"/>
-            <a:ext cx="5486400" cy="502920"/>
-          </a:xfrm>
-          <a:prstGeom prst="rect">
-            <a:avLst/>
-          </a:prstGeom>
-          <a:noFill/>
-          <a:ln/>
-        </p:spPr>
-        <p:txBody>
-          <a:bodyPr wrap="square" rtlCol="0" anchor="ctr"/>
-          <a:lstStyle/>
-          <a:p>
-            <a:pPr algn="ctr" indent="0" marL="0">
-              <a:buNone/>
-            </a:pPr>
-            <a:r>
-              <a:rPr lang="en-US" sz="1500" b="1" dirty="0">
-                <a:solidFill>
-                  <a:srgbClr val="FFFFFF"/>
-                </a:solidFill>
-                <a:latin typeface="Calibri" pitchFamily="34" charset="0"/>
-                <a:ea typeface="Calibri" pitchFamily="34" charset="-122"/>
-                <a:cs typeface="Calibri" pitchFamily="34" charset="-120"/>
-              </a:rPr>
-              <a:t>roll_std - volatilitate recenta</a:t>
-            </a:r>
-            <a:endParaRPr lang="en-US" sz="1500" dirty="0"/>
-          </a:p>
-        </p:txBody>
-      </p:sp>
-      <p:sp>
-        <p:nvSpPr>
-          <p:cNvPr id="14" name="Text 12"/>
-          <p:cNvSpPr/>
-          <p:nvPr/>
-        </p:nvSpPr>
-        <p:spPr>
-          <a:xfrm>
-            <a:off x="6400800" y="3840480"/>
-            <a:ext cx="5029200" cy="2286000"/>
-          </a:xfrm>
-          <a:prstGeom prst="rect">
-            <a:avLst/>
-          </a:prstGeom>
-          <a:noFill/>
-          <a:ln/>
-        </p:spPr>
-        <p:txBody>
-          <a:bodyPr wrap="square" rtlCol="0" anchor="t"/>
-          <a:lstStyle/>
-          <a:p>
-            <a:pPr indent="0" marL="0">
-              <a:buNone/>
-            </a:pPr>
-            <a:r>
-              <a:rPr lang="en-US" sz="1100" dirty="0">
-                <a:solidFill>
-                  <a:srgbClr val="1F2937"/>
-                </a:solidFill>
-                <a:latin typeface="Consolas" pitchFamily="34" charset="0"/>
-                <a:ea typeface="Consolas" pitchFamily="34" charset="-122"/>
-                <a:cs typeface="Consolas" pitchFamily="34" charset="-120"/>
-              </a:rPr>
-              <a:t>df['roll_std_24']  = df['pret'].rolling(24).std()</a:t>
-            </a:r>
-            <a:endParaRPr lang="en-US" sz="1100" dirty="0"/>
-          </a:p>
-          <a:p>
-            <a:pPr indent="0" marL="0">
-              <a:buNone/>
-            </a:pPr>
-            <a:r>
-              <a:rPr lang="en-US" sz="1100" dirty="0">
-                <a:solidFill>
-                  <a:srgbClr val="1F2937"/>
-                </a:solidFill>
-                <a:latin typeface="Consolas" pitchFamily="34" charset="0"/>
-                <a:ea typeface="Consolas" pitchFamily="34" charset="-122"/>
-                <a:cs typeface="Consolas" pitchFamily="34" charset="-120"/>
-              </a:rPr>
-              <a:t>df['roll_std_168'] = df['pret'].rolling(168).std()</a:t>
-            </a:r>
-            <a:endParaRPr lang="en-US" sz="1100" dirty="0"/>
-          </a:p>
-          <a:p>
-            <a:pPr indent="0" marL="0">
-              <a:buNone/>
-            </a:pPr>
-            <a:r>
-              <a:rPr lang="en-US" sz="800" dirty="0">
-                <a:solidFill>
-                  <a:srgbClr val="000000"/>
-                </a:solidFill>
-                <a:latin typeface="Calibri" pitchFamily="34" charset="0"/>
-                <a:ea typeface="Calibri" pitchFamily="34" charset="-122"/>
-                <a:cs typeface="Calibri" pitchFamily="34" charset="-120"/>
-              </a:rPr>
-              <a:t> </a:t>
-            </a:r>
-            <a:endParaRPr lang="en-US" sz="1100" dirty="0"/>
-          </a:p>
-          <a:p>
-            <a:pPr indent="0" marL="0">
-              <a:buNone/>
-            </a:pPr>
-            <a:r>
-              <a:rPr lang="en-US" sz="1200" dirty="0">
-                <a:solidFill>
-                  <a:srgbClr val="1F2937"/>
-                </a:solidFill>
-                <a:latin typeface="Calibri" pitchFamily="34" charset="0"/>
-                <a:ea typeface="Calibri" pitchFamily="34" charset="-122"/>
-                <a:cs typeface="Calibri" pitchFamily="34" charset="-120"/>
-              </a:rPr>
-              <a:t>Captureaza </a:t>
-            </a:r>
-            <a:pPr indent="0" marL="0">
-              <a:buNone/>
-            </a:pPr>
-            <a:r>
-              <a:rPr lang="en-US" sz="1200" b="1" dirty="0">
-                <a:solidFill>
-                  <a:srgbClr val="1F2937"/>
-                </a:solidFill>
-                <a:latin typeface="Calibri" pitchFamily="34" charset="0"/>
-                <a:ea typeface="Calibri" pitchFamily="34" charset="-122"/>
-                <a:cs typeface="Calibri" pitchFamily="34" charset="-120"/>
-              </a:rPr>
-              <a:t>cat de instabil</a:t>
-            </a:r>
-            <a:pPr indent="0" marL="0">
-              <a:buNone/>
-            </a:pPr>
-            <a:r>
-              <a:rPr lang="en-US" sz="1200" dirty="0">
-                <a:solidFill>
-                  <a:srgbClr val="1F2937"/>
-                </a:solidFill>
-                <a:latin typeface="Calibri" pitchFamily="34" charset="0"/>
-                <a:ea typeface="Calibri" pitchFamily="34" charset="-122"/>
-                <a:cs typeface="Calibri" pitchFamily="34" charset="-120"/>
-              </a:rPr>
-              <a:t> a fost pretul recent. Volatilitate mare = piata sub presiune, valorile pot fluctua mult.</a:t>
-            </a:r>
-            <a:endParaRPr lang="en-US" sz="1100" dirty="0"/>
-          </a:p>
-        </p:txBody>
-      </p:sp>
-      <p:sp>
-        <p:nvSpPr>
-          <p:cNvPr id="15" name="Shape 13"/>
-          <p:cNvSpPr/>
-          <p:nvPr/>
-        </p:nvSpPr>
-        <p:spPr>
-          <a:xfrm>
-            <a:off x="548640" y="5943600"/>
-            <a:ext cx="11064240" cy="365760"/>
-          </a:xfrm>
-          <a:prstGeom prst="rect">
-            <a:avLst/>
-          </a:prstGeom>
-          <a:solidFill>
-            <a:srgbClr val="F9C846"/>
-          </a:solidFill>
-          <a:ln w="12700">
-            <a:solidFill>
-              <a:srgbClr val="F9C846"/>
-            </a:solidFill>
-            <a:prstDash val="solid"/>
-          </a:ln>
-        </p:spPr>
-      </p:sp>
-      <p:sp>
-        <p:nvSpPr>
-          <p:cNvPr id="16" name="Text 14"/>
-          <p:cNvSpPr/>
-          <p:nvPr/>
-        </p:nvSpPr>
-        <p:spPr>
-          <a:xfrm>
-            <a:off x="548640" y="5943600"/>
-            <a:ext cx="11064240" cy="365760"/>
-          </a:xfrm>
-          <a:prstGeom prst="rect">
-            <a:avLst/>
-          </a:prstGeom>
-          <a:noFill/>
-          <a:ln/>
-        </p:spPr>
-        <p:txBody>
-          <a:bodyPr wrap="square" rtlCol="0" anchor="ctr"/>
-          <a:lstStyle/>
-          <a:p>
-            <a:pPr algn="ctr" indent="0" marL="0">
-              <a:buNone/>
-            </a:pPr>
-            <a:r>
-              <a:rPr lang="en-US" sz="1150" b="1" i="1" dirty="0">
-                <a:solidFill>
-                  <a:srgbClr val="1F2937"/>
-                </a:solidFill>
-                <a:latin typeface="Calibri" pitchFamily="34" charset="0"/>
-                <a:ea typeface="Calibri" pitchFamily="34" charset="-122"/>
-                <a:cs typeface="Calibri" pitchFamily="34" charset="-120"/>
-              </a:rPr>
-              <a:t>DAR cele de mai sus contin o eroare critica! Vom vedea pe slide-ul urmator de ce e necesar .shift(1).</a:t>
-            </a:r>
-            <a:endParaRPr lang="en-US" sz="1150" dirty="0"/>
-          </a:p>
-        </p:txBody>
-      </p:sp>
-      <p:sp>
-        <p:nvSpPr>
-          <p:cNvPr id="17" name="Text 15"/>
-          <p:cNvSpPr/>
-          <p:nvPr/>
-        </p:nvSpPr>
-        <p:spPr>
-          <a:xfrm>
-            <a:off x="457200" y="6446520"/>
-            <a:ext cx="8229600" cy="274320"/>
-          </a:xfrm>
-          <a:prstGeom prst="rect">
-            <a:avLst/>
-          </a:prstGeom>
-          <a:noFill/>
-          <a:ln/>
-        </p:spPr>
-        <p:txBody>
-          <a:bodyPr wrap="square" rtlCol="0" anchor="ctr"/>
-          <a:lstStyle/>
-          <a:p>
-            <a:pPr indent="0" marL="0">
-              <a:buNone/>
-            </a:pPr>
-            <a:r>
-              <a:rPr lang="en-US" sz="900" dirty="0">
-                <a:solidFill>
-                  <a:srgbClr val="6B7280"/>
-                </a:solidFill>
-                <a:latin typeface="Calibri" pitchFamily="34" charset="0"/>
-                <a:ea typeface="Calibri" pitchFamily="34" charset="-122"/>
-                <a:cs typeface="Calibri" pitchFamily="34" charset="-120"/>
-              </a:rPr>
-              <a:t>Diana Nenu  -  SCSS 2026  -  Feature engineering pentru serii temporale</a:t>
-            </a:r>
-            <a:endParaRPr lang="en-US" sz="900" dirty="0"/>
-          </a:p>
-        </p:txBody>
-      </p:sp>
-      <p:sp>
-        <p:nvSpPr>
-          <p:cNvPr id="18" name="Text 16"/>
-          <p:cNvSpPr/>
-          <p:nvPr/>
-        </p:nvSpPr>
-        <p:spPr>
-          <a:xfrm>
-            <a:off x="10789920" y="6446520"/>
-            <a:ext cx="914400" cy="274320"/>
-          </a:xfrm>
-          <a:prstGeom prst="rect">
-            <a:avLst/>
-          </a:prstGeom>
-          <a:noFill/>
-          <a:ln/>
-        </p:spPr>
-        <p:txBody>
-          <a:bodyPr wrap="square" rtlCol="0" anchor="ctr"/>
-          <a:lstStyle/>
-          <a:p>
-            <a:pPr algn="r" indent="0" marL="0">
-              <a:buNone/>
-            </a:pPr>
-            <a:r>
-              <a:rPr lang="en-US" sz="900" dirty="0">
-                <a:solidFill>
-                  <a:srgbClr val="6B7280"/>
-                </a:solidFill>
-                <a:latin typeface="Calibri" pitchFamily="34" charset="0"/>
-                <a:ea typeface="Calibri" pitchFamily="34" charset="-122"/>
-                <a:cs typeface="Calibri" pitchFamily="34" charset="-120"/>
-              </a:rPr>
-              <a:t>8 / 13</a:t>
-            </a:r>
-            <a:endParaRPr lang="en-US" sz="900" dirty="0"/>
-          </a:p>
-        </p:txBody>
-      </p:sp>
-    </p:spTree>
-  </p:cSld>
-  <p:clrMapOvr>
-    <a:masterClrMapping/>
-  </p:clrMapOvr>
-</p:sld>
-</file>
-
-<file path=ppt/slides/slide9.xml><?xml version="1.0" encoding="utf-8"?>
-<p:sld xmlns:a="http://schemas.openxmlformats.org/drawingml/2006/main" xmlns:r="http://schemas.openxmlformats.org/officeDocument/2006/relationships" xmlns:p="http://schemas.openxmlformats.org/presentationml/2006/main">
-  <p:cSld name="Slide 9">
-    <p:bg>
-      <p:bgPr>
-        <a:solidFill>
-          <a:srgbClr val="FFFFFF"/>
-        </a:solidFill>
-      </p:bgPr>
-    </p:bg>
-    <p:spTree>
-      <p:nvGrpSpPr>
-        <p:cNvPr id="1" name=""/>
-        <p:cNvGrpSpPr/>
-        <p:nvPr/>
-      </p:nvGrpSpPr>
-      <p:grpSpPr>
-        <a:xfrm>
-          <a:off x="0" y="0"/>
-          <a:ext cx="0" cy="0"/>
-          <a:chOff x="0" y="0"/>
-          <a:chExt cx="0" cy="0"/>
-        </a:xfrm>
-      </p:grpSpPr>
-      <p:sp>
-        <p:nvSpPr>
-          <p:cNvPr id="2" name="Shape 0"/>
-          <p:cNvSpPr/>
-          <p:nvPr/>
-        </p:nvSpPr>
-        <p:spPr>
-          <a:xfrm>
-            <a:off x="0" y="0"/>
-            <a:ext cx="12161520" cy="137160"/>
-          </a:xfrm>
-          <a:prstGeom prst="rect">
-            <a:avLst/>
-          </a:prstGeom>
-          <a:solidFill>
-            <a:srgbClr val="065A82"/>
-          </a:solidFill>
-          <a:ln w="12700">
-            <a:solidFill>
-              <a:srgbClr val="065A82"/>
-            </a:solidFill>
-            <a:prstDash val="solid"/>
-          </a:ln>
-        </p:spPr>
-      </p:sp>
-      <p:sp>
-        <p:nvSpPr>
-          <p:cNvPr id="3" name="Text 1"/>
-          <p:cNvSpPr/>
-          <p:nvPr/>
-        </p:nvSpPr>
-        <p:spPr>
-          <a:xfrm>
-            <a:off x="457200" y="274320"/>
-            <a:ext cx="11247120" cy="320040"/>
-          </a:xfrm>
-          <a:prstGeom prst="rect">
-            <a:avLst/>
-          </a:prstGeom>
-          <a:noFill/>
-          <a:ln/>
-        </p:spPr>
-        <p:txBody>
-          <a:bodyPr wrap="square" lIns="0" tIns="0" rIns="0" bIns="0" rtlCol="0" anchor="ctr"/>
-          <a:lstStyle/>
-          <a:p>
-            <a:pPr indent="0" marL="0">
-              <a:buNone/>
-            </a:pPr>
-            <a:r>
-              <a:rPr lang="en-US" sz="1100" b="1" spc="600" kern="0" dirty="0">
-                <a:solidFill>
-                  <a:srgbClr val="F96167"/>
-                </a:solidFill>
-                <a:latin typeface="Calibri" pitchFamily="34" charset="0"/>
-                <a:ea typeface="Calibri" pitchFamily="34" charset="-122"/>
-                <a:cs typeface="Calibri" pitchFamily="34" charset="-120"/>
-              </a:rPr>
-              <a:t>ANTI DATA-LEAKAGE</a:t>
-            </a:r>
-            <a:endParaRPr lang="en-US" sz="1100" dirty="0"/>
-          </a:p>
-        </p:txBody>
-      </p:sp>
-      <p:sp>
-        <p:nvSpPr>
-          <p:cNvPr id="4" name="Text 2"/>
-          <p:cNvSpPr/>
-          <p:nvPr/>
-        </p:nvSpPr>
-        <p:spPr>
-          <a:xfrm>
-            <a:off x="457200" y="594360"/>
-            <a:ext cx="11247120" cy="640080"/>
-          </a:xfrm>
-          <a:prstGeom prst="rect">
-            <a:avLst/>
-          </a:prstGeom>
-          <a:noFill/>
-          <a:ln/>
-        </p:spPr>
-        <p:txBody>
-          <a:bodyPr wrap="square" lIns="0" tIns="0" rIns="0" bIns="0" rtlCol="0" anchor="t"/>
-          <a:lstStyle/>
-          <a:p>
-            <a:pPr indent="0" marL="0">
-              <a:buNone/>
-            </a:pPr>
-            <a:r>
-              <a:rPr lang="en-US" sz="2800" b="1" dirty="0">
-                <a:solidFill>
-                  <a:srgbClr val="1F2937"/>
-                </a:solidFill>
-                <a:latin typeface="Calibri" pitchFamily="34" charset="0"/>
-                <a:ea typeface="Calibri" pitchFamily="34" charset="-122"/>
-                <a:cs typeface="Calibri" pitchFamily="34" charset="-120"/>
-              </a:rPr>
-              <a:t>Tehnica 3B. Detaliul critic: .shift(1) anti-leakage</a:t>
-            </a:r>
-            <a:endParaRPr lang="en-US" sz="2800" dirty="0"/>
-          </a:p>
-        </p:txBody>
-      </p:sp>
-      <p:sp>
-        <p:nvSpPr>
-          <p:cNvPr id="5" name="Shape 3"/>
-          <p:cNvSpPr/>
-          <p:nvPr/>
-        </p:nvSpPr>
-        <p:spPr>
-          <a:xfrm>
-            <a:off x="457200" y="1280160"/>
-            <a:ext cx="1097280" cy="36576"/>
-          </a:xfrm>
-          <a:prstGeom prst="rect">
-            <a:avLst/>
-          </a:prstGeom>
-          <a:solidFill>
-            <a:srgbClr val="F96167"/>
-          </a:solidFill>
-          <a:ln w="12700">
-            <a:solidFill>
-              <a:srgbClr val="F96167"/>
-            </a:solidFill>
-            <a:prstDash val="solid"/>
-          </a:ln>
-        </p:spPr>
-      </p:sp>
-      <p:pic>
-        <p:nvPicPr>
-          <p:cNvPr id="6" name="Image 0" descr="/sessions/vibrant-elegant-pasteur/mnt/Disertatie_AI_Platform/reports/figures/fig_fe_shift1_demonstratie.png">    </p:cNvPr>
-          <p:cNvPicPr>
-            <a:picLocks noChangeAspect="1"/>
-          </p:cNvPicPr>
-          <p:nvPr/>
-        </p:nvPicPr>
-        <p:blipFill>
-          <a:blip r:embed="rId1"/>
-          <a:srcRect l="0" r="0" t="0" b="0"/>
-          <a:stretch/>
-        </p:blipFill>
-        <p:spPr>
-          <a:xfrm>
-            <a:off x="274320" y="1417320"/>
-            <a:ext cx="11612880" cy="3931920"/>
-          </a:xfrm>
-          <a:prstGeom prst="rect">
-            <a:avLst/>
-          </a:prstGeom>
-        </p:spPr>
-      </p:pic>
-      <p:sp>
-        <p:nvSpPr>
-          <p:cNvPr id="7" name="Shape 4"/>
-          <p:cNvSpPr/>
-          <p:nvPr/>
-        </p:nvSpPr>
-        <p:spPr>
-          <a:xfrm>
-            <a:off x="548640" y="5486400"/>
-            <a:ext cx="11064240" cy="1005840"/>
-          </a:xfrm>
-          <a:prstGeom prst="rect">
-            <a:avLst/>
-          </a:prstGeom>
-          <a:solidFill>
-            <a:srgbClr val="F4F5F7"/>
-          </a:solidFill>
-          <a:ln w="12700">
-            <a:solidFill>
-              <a:srgbClr val="6B7280"/>
-            </a:solidFill>
-            <a:prstDash val="solid"/>
-          </a:ln>
-        </p:spPr>
-      </p:sp>
-      <p:sp>
-        <p:nvSpPr>
-          <p:cNvPr id="8" name="Text 5"/>
-          <p:cNvSpPr/>
-          <p:nvPr/>
-        </p:nvSpPr>
-        <p:spPr>
-          <a:xfrm>
-            <a:off x="777240" y="5532120"/>
-            <a:ext cx="10607040" cy="960120"/>
-          </a:xfrm>
-          <a:prstGeom prst="rect">
-            <a:avLst/>
-          </a:prstGeom>
-          <a:noFill/>
-          <a:ln/>
-        </p:spPr>
-        <p:txBody>
-          <a:bodyPr wrap="square" rtlCol="0" anchor="ctr"/>
-          <a:lstStyle/>
-          <a:p>
-            <a:pPr indent="0" marL="0">
-              <a:buNone/>
-            </a:pPr>
-            <a:r>
-              <a:rPr lang="en-US" sz="1300" b="1" dirty="0">
-                <a:solidFill>
-                  <a:srgbClr val="1F2937"/>
-                </a:solidFill>
-                <a:latin typeface="Calibri" pitchFamily="34" charset="0"/>
-                <a:ea typeface="Calibri" pitchFamily="34" charset="-122"/>
-                <a:cs typeface="Calibri" pitchFamily="34" charset="-120"/>
-              </a:rPr>
-              <a:t>Ce s-a intamplat? </a:t>
-            </a:r>
-            <a:pPr indent="0" marL="0">
-              <a:buNone/>
-            </a:pPr>
-            <a:r>
-              <a:rPr lang="en-US" sz="1200" dirty="0">
-                <a:solidFill>
-                  <a:srgbClr val="1F2937"/>
-                </a:solidFill>
-                <a:latin typeface="Calibri" pitchFamily="34" charset="0"/>
-                <a:ea typeface="Calibri" pitchFamily="34" charset="-122"/>
-                <a:cs typeface="Calibri" pitchFamily="34" charset="-120"/>
-              </a:rPr>
-              <a:t>rolling(3).mean() la momentul t include si valoarea de la t! Modelul foloseste raspunsul ca sa-l prezica. </a:t>
-            </a:r>
-            <a:endParaRPr lang="en-US" sz="1300" dirty="0"/>
-          </a:p>
-          <a:p>
-            <a:pPr indent="0" marL="0">
-              <a:buNone/>
-            </a:pPr>
-            <a:r>
-              <a:rPr lang="en-US" sz="1300" b="1" dirty="0">
-                <a:solidFill>
-                  <a:srgbClr val="6FAE6F"/>
-                </a:solidFill>
-                <a:latin typeface="Calibri" pitchFamily="34" charset="0"/>
-                <a:ea typeface="Calibri" pitchFamily="34" charset="-122"/>
-                <a:cs typeface="Calibri" pitchFamily="34" charset="-120"/>
-              </a:rPr>
-              <a:t>Solutia: </a:t>
-            </a:r>
-            <a:pPr indent="0" marL="0">
-              <a:buNone/>
-            </a:pPr>
-            <a:r>
-              <a:rPr lang="en-US" sz="1200" dirty="0">
-                <a:solidFill>
-                  <a:srgbClr val="1F2937"/>
-                </a:solidFill>
-                <a:latin typeface="Calibri" pitchFamily="34" charset="0"/>
-                <a:ea typeface="Calibri" pitchFamily="34" charset="-122"/>
-                <a:cs typeface="Calibri" pitchFamily="34" charset="-120"/>
-              </a:rPr>
-              <a:t>scriem </a:t>
-            </a:r>
-            <a:pPr indent="0" marL="0">
-              <a:buNone/>
-            </a:pPr>
-            <a:r>
-              <a:rPr lang="en-US" sz="1200" b="1" dirty="0">
-                <a:solidFill>
-                  <a:srgbClr val="21295C"/>
-                </a:solidFill>
-                <a:latin typeface="Consolas" pitchFamily="34" charset="0"/>
-                <a:ea typeface="Consolas" pitchFamily="34" charset="-122"/>
-                <a:cs typeface="Consolas" pitchFamily="34" charset="-120"/>
-              </a:rPr>
-              <a:t>df['pret'].shift(1).rolling(3).mean()</a:t>
-            </a:r>
-            <a:pPr indent="0" marL="0">
-              <a:buNone/>
-            </a:pPr>
-            <a:r>
-              <a:rPr lang="en-US" sz="1200" dirty="0">
-                <a:solidFill>
-                  <a:srgbClr val="1F2937"/>
-                </a:solidFill>
-                <a:latin typeface="Calibri" pitchFamily="34" charset="0"/>
-                <a:ea typeface="Calibri" pitchFamily="34" charset="-122"/>
-                <a:cs typeface="Calibri" pitchFamily="34" charset="-120"/>
-              </a:rPr>
-              <a:t> - mutam mai intai valoarea cu un pas in trecut, apoi facem media. Acum feature-ul foloseste DOAR trecutul.</a:t>
-            </a:r>
-            <a:endParaRPr lang="en-US" sz="1300" dirty="0"/>
-          </a:p>
-        </p:txBody>
-      </p:sp>
-      <p:sp>
-        <p:nvSpPr>
-          <p:cNvPr id="9" name="Text 6"/>
-          <p:cNvSpPr/>
-          <p:nvPr/>
-        </p:nvSpPr>
-        <p:spPr>
-          <a:xfrm>
-            <a:off x="457200" y="6446520"/>
-            <a:ext cx="8229600" cy="274320"/>
-          </a:xfrm>
-          <a:prstGeom prst="rect">
-            <a:avLst/>
-          </a:prstGeom>
-          <a:noFill/>
-          <a:ln/>
-        </p:spPr>
-        <p:txBody>
-          <a:bodyPr wrap="square" rtlCol="0" anchor="ctr"/>
-          <a:lstStyle/>
-          <a:p>
-            <a:pPr indent="0" marL="0">
-              <a:buNone/>
-            </a:pPr>
-            <a:r>
-              <a:rPr lang="en-US" sz="900" dirty="0">
-                <a:solidFill>
-                  <a:srgbClr val="6B7280"/>
-                </a:solidFill>
-                <a:latin typeface="Calibri" pitchFamily="34" charset="0"/>
-                <a:ea typeface="Calibri" pitchFamily="34" charset="-122"/>
-                <a:cs typeface="Calibri" pitchFamily="34" charset="-120"/>
-              </a:rPr>
-              <a:t>Diana Nenu  -  SCSS 2026  -  Feature engineering pentru serii temporale</a:t>
-            </a:r>
-            <a:endParaRPr lang="en-US" sz="900" dirty="0"/>
-          </a:p>
-        </p:txBody>
-      </p:sp>
-      <p:sp>
-        <p:nvSpPr>
-          <p:cNvPr id="10" name="Text 7"/>
-          <p:cNvSpPr/>
-          <p:nvPr/>
-        </p:nvSpPr>
-        <p:spPr>
-          <a:xfrm>
-            <a:off x="10789920" y="6446520"/>
-            <a:ext cx="914400" cy="274320"/>
-          </a:xfrm>
-          <a:prstGeom prst="rect">
-            <a:avLst/>
-          </a:prstGeom>
-          <a:noFill/>
-          <a:ln/>
-        </p:spPr>
-        <p:txBody>
-          <a:bodyPr wrap="square" rtlCol="0" anchor="ctr"/>
-          <a:lstStyle/>
-          <a:p>
-            <a:pPr algn="r" indent="0" marL="0">
-              <a:buNone/>
-            </a:pPr>
-            <a:r>
-              <a:rPr lang="en-US" sz="900" dirty="0">
-                <a:solidFill>
-                  <a:srgbClr val="6B7280"/>
-                </a:solidFill>
-                <a:latin typeface="Calibri" pitchFamily="34" charset="0"/>
-                <a:ea typeface="Calibri" pitchFamily="34" charset="-122"/>
-                <a:cs typeface="Calibri" pitchFamily="34" charset="-120"/>
-              </a:rPr>
-              <a:t>9 / 13</a:t>
+              <a:t>9 / 15</a:t>
             </a:r>
             <a:endParaRPr lang="en-US" sz="900" dirty="0"/>
           </a:p>

--- a/docs/SCSS/SCSS_FeatureEngineering_Diana_Nenu.pptx
+++ b/docs/SCSS/SCSS_FeatureEngineering_Diana_Nenu.pptx
@@ -2403,6 +2403,9 @@
       </p:sp>
     </p:spTree>
   </p:cSld>
+  <p:transition xmlns:p="http://schemas.openxmlformats.org/presentationml/2006/main" spd="med">
+    <p:fade/>
+  </p:transition>
   <p:clrMapOvr>
     <a:masterClrMapping/>
   </p:clrMapOvr>
@@ -3248,6 +3251,9 @@
       </p:sp>
     </p:spTree>
   </p:cSld>
+  <p:transition xmlns:p="http://schemas.openxmlformats.org/presentationml/2006/main" spd="med">
+    <p:fade/>
+  </p:transition>
   <p:clrMapOvr>
     <a:masterClrMapping/>
   </p:clrMapOvr>
@@ -3408,7 +3414,7 @@
       </p:sp>
       <p:pic>
         <p:nvPicPr>
-          <p:cNvPr id="6" name="Image 0" descr="/sessions/vibrant-elegant-pasteur/mnt/Disertatie_AI_Platform/reports/figures/fig_fe_shift1_demonstratie.png">    </p:cNvPr>
+          <p:cNvPr id="6" name="Image 0" descr="/sessions/vibrant-elegant-pasteur/mnt/Disertatie_AI_Platform/reports/figures/fig_fe_shift1_animated.gif">    </p:cNvPr>
           <p:cNvPicPr>
             <a:picLocks noChangeAspect="1"/>
           </p:cNvPicPr>
@@ -3431,7 +3437,84 @@
       </p:pic>
       <p:sp>
         <p:nvSpPr>
-          <p:cNvPr id="7" name="Shape 4"/>
+          <p:cNvPr id="7" name="Shape 4">
+            <a:hlinkClick r:id="rId2" tooltip="Click pentru notebook interactiv"/>
+          </p:cNvPr>
+          <p:cNvSpPr/>
+          <p:nvPr/>
+        </p:nvSpPr>
+        <p:spPr>
+          <a:xfrm>
+            <a:off x="10058400" y="1325880"/>
+            <a:ext cx="1691640" cy="365760"/>
+          </a:xfrm>
+          <a:prstGeom prst="roundRect">
+            <a:avLst>
+              <a:gd name="adj" fmla="val 15000"/>
+            </a:avLst>
+          </a:prstGeom>
+          <a:solidFill>
+            <a:srgbClr val="F9C846"/>
+          </a:solidFill>
+          <a:ln w="12700">
+            <a:solidFill>
+              <a:srgbClr val="F9C846"/>
+            </a:solidFill>
+            <a:prstDash val="solid"/>
+          </a:ln>
+        </p:spPr>
+      </p:sp>
+      <p:sp>
+        <p:nvSpPr>
+          <p:cNvPr id="8" name="Text 5">
+            <a:hlinkClick r:id="rId3" tooltip="Click pentru notebook interactiv"/>
+          </p:cNvPr>
+          <p:cNvSpPr/>
+          <p:nvPr/>
+        </p:nvSpPr>
+        <p:spPr>
+          <a:xfrm>
+            <a:off x="10058400" y="1325880"/>
+            <a:ext cx="1691640" cy="365760"/>
+          </a:xfrm>
+          <a:prstGeom prst="rect">
+            <a:avLst/>
+          </a:prstGeom>
+          <a:noFill/>
+          <a:ln/>
+        </p:spPr>
+        <p:txBody>
+          <a:bodyPr wrap="square" rtlCol="0" anchor="ctr"/>
+          <a:lstStyle/>
+          <a:p>
+            <a:pPr algn="ctr" indent="0" marL="0">
+              <a:buNone/>
+            </a:pPr>
+            <a:r>
+              <a:rPr lang="en-US" sz="1000" b="1" u="sng" dirty="0">
+                <a:solidFill>
+                  <a:srgbClr val="21295C"/>
+                </a:solidFill>
+                <a:latin typeface="Calibri" pitchFamily="34" charset="0"/>
+                <a:ea typeface="Calibri" pitchFamily="34" charset="-122"/>
+                <a:cs typeface="Calibri" pitchFamily="34" charset="-120"/>
+                <a:hlinkClick r:id="rId3" invalidUrl="" action="" tgtFrame="" tooltip="Click pentru notebook interactiv" history="1" highlightClick="0" endSnd="0">
+                  <a:extLst>
+                    <a:ext uri="{A12FA001-AC4F-418D-AE19-62706E023703}">
+                      <ahyp:hlinkClr xmlns:ahyp="http://schemas.microsoft.com/office/drawing/2018/hyperlinkcolor" val="tx"/>
+                    </a:ext>
+                  </a:extLst>
+                </a:hlinkClick>
+              </a:rPr>
+              <a:t>▶ Demonstreaza live</a:t>
+            </a:r>
+            <a:endParaRPr lang="en-US" sz="1000" dirty="0"/>
+          </a:p>
+        </p:txBody>
+      </p:sp>
+      <p:sp>
+        <p:nvSpPr>
+          <p:cNvPr id="9" name="Shape 6"/>
           <p:cNvSpPr/>
           <p:nvPr/>
         </p:nvSpPr>
@@ -3456,7 +3539,7 @@
       </p:sp>
       <p:sp>
         <p:nvSpPr>
-          <p:cNvPr id="8" name="Text 5"/>
+          <p:cNvPr id="10" name="Text 7"/>
           <p:cNvSpPr/>
           <p:nvPr/>
         </p:nvSpPr>
@@ -3568,7 +3651,7 @@
       </p:sp>
       <p:sp>
         <p:nvSpPr>
-          <p:cNvPr id="9" name="Text 6"/>
+          <p:cNvPr id="11" name="Text 8"/>
           <p:cNvSpPr/>
           <p:nvPr/>
         </p:nvSpPr>
@@ -3624,7 +3707,7 @@
       </p:sp>
       <p:sp>
         <p:nvSpPr>
-          <p:cNvPr id="10" name="Text 7"/>
+          <p:cNvPr id="12" name="Text 9"/>
           <p:cNvSpPr/>
           <p:nvPr/>
         </p:nvSpPr>
@@ -3663,6 +3746,9 @@
       </p:sp>
     </p:spTree>
   </p:cSld>
+  <p:transition xmlns:p="http://schemas.openxmlformats.org/presentationml/2006/main" spd="med">
+    <p:fade/>
+  </p:transition>
   <p:clrMapOvr>
     <a:masterClrMapping/>
   </p:clrMapOvr>
@@ -4064,6 +4150,9 @@
       </p:sp>
     </p:spTree>
   </p:cSld>
+  <p:transition xmlns:p="http://schemas.openxmlformats.org/presentationml/2006/main" spd="med">
+    <p:fade/>
+  </p:transition>
   <p:clrMapOvr>
     <a:masterClrMapping/>
   </p:clrMapOvr>
@@ -4500,6 +4589,9 @@
       </p:sp>
     </p:spTree>
   </p:cSld>
+  <p:transition xmlns:p="http://schemas.openxmlformats.org/presentationml/2006/main" spd="med">
+    <p:fade/>
+  </p:transition>
   <p:clrMapOvr>
     <a:masterClrMapping/>
   </p:clrMapOvr>
@@ -5181,6 +5273,9 @@
       </p:sp>
     </p:spTree>
   </p:cSld>
+  <p:transition xmlns:p="http://schemas.openxmlformats.org/presentationml/2006/main" spd="med">
+    <p:fade/>
+  </p:transition>
   <p:clrMapOvr>
     <a:masterClrMapping/>
   </p:clrMapOvr>
@@ -5473,7 +5568,7 @@
         </p:nvSpPr>
         <p:spPr>
           <a:xfrm>
-            <a:off x="731520" y="6126480"/>
+            <a:off x="731520" y="5943600"/>
             <a:ext cx="10515600" cy="365760"/>
           </a:xfrm>
           <a:prstGeom prst="rect">
@@ -5534,7 +5629,105 @@
       </p:sp>
       <p:sp>
         <p:nvSpPr>
-          <p:cNvPr id="8" name="Text 6"/>
+          <p:cNvPr id="8" name="Shape 6">
+            <a:hlinkClick r:id="rId1" tooltip="Toate materialele pe GitHub"/>
+          </p:cNvPr>
+          <p:cNvSpPr/>
+          <p:nvPr/>
+        </p:nvSpPr>
+        <p:spPr>
+          <a:xfrm>
+            <a:off x="4251960" y="6327648"/>
+            <a:ext cx="3657600" cy="365760"/>
+          </a:xfrm>
+          <a:prstGeom prst="roundRect">
+            <a:avLst>
+              <a:gd name="adj" fmla="val 15000"/>
+            </a:avLst>
+          </a:prstGeom>
+          <a:solidFill>
+            <a:srgbClr val="F96167"/>
+          </a:solidFill>
+          <a:ln w="12700">
+            <a:solidFill>
+              <a:srgbClr val="F96167"/>
+            </a:solidFill>
+            <a:prstDash val="solid"/>
+          </a:ln>
+        </p:spPr>
+      </p:sp>
+      <p:sp>
+        <p:nvSpPr>
+          <p:cNvPr id="9" name="Text 7">
+            <a:hlinkClick r:id="rIdundefined" tooltip="Toate materialele pe GitHub"/>
+          </p:cNvPr>
+          <p:cNvSpPr/>
+          <p:nvPr/>
+        </p:nvSpPr>
+        <p:spPr>
+          <a:xfrm>
+            <a:off x="4251960" y="6327648"/>
+            <a:ext cx="3657600" cy="365760"/>
+          </a:xfrm>
+          <a:prstGeom prst="rect">
+            <a:avLst/>
+          </a:prstGeom>
+          <a:noFill/>
+          <a:ln/>
+        </p:spPr>
+        <p:txBody>
+          <a:bodyPr wrap="square" rtlCol="0" anchor="ctr"/>
+          <a:lstStyle/>
+          <a:p>
+            <a:pPr algn="ctr" indent="0" marL="0">
+              <a:buNone/>
+            </a:pPr>
+            <a:r>
+              <a:rPr lang="en-US" sz="1200" u="sng" dirty="0">
+                <a:solidFill>
+                  <a:srgbClr val="FFFFFF"/>
+                </a:solidFill>
+                <a:latin typeface="Calibri" pitchFamily="34" charset="0"/>
+                <a:ea typeface="Calibri" pitchFamily="34" charset="-122"/>
+                <a:cs typeface="Calibri" pitchFamily="34" charset="-120"/>
+                <a:hlinkClick r:id="rIdundefined" invalidUrl="" action="" tgtFrame="" tooltip="Toate materialele pe GitHub" history="1" highlightClick="0" endSnd="0">
+                  <a:extLst>
+                    <a:ext uri="{A12FA001-AC4F-418D-AE19-62706E023703}">
+                      <ahyp:hlinkClr xmlns:ahyp="http://schemas.microsoft.com/office/drawing/2018/hyperlinkcolor" val="tx"/>
+                    </a:ext>
+                  </a:extLst>
+                </a:hlinkClick>
+              </a:rPr>
+              <a:t>🔗 </a:t>
+            </a:r>
+            <a:pPr algn="ctr" indent="0" marL="0">
+              <a:buNone/>
+            </a:pPr>
+            <a:r>
+              <a:rPr lang="en-US" sz="1100" b="1" u="sng" dirty="0">
+                <a:solidFill>
+                  <a:srgbClr val="FFFFFF"/>
+                </a:solidFill>
+                <a:latin typeface="Calibri" pitchFamily="34" charset="0"/>
+                <a:ea typeface="Calibri" pitchFamily="34" charset="-122"/>
+                <a:cs typeface="Calibri" pitchFamily="34" charset="-120"/>
+                <a:hlinkClick r:id="rIdundefined" invalidUrl="" action="" tgtFrame="" tooltip="Toate materialele pe GitHub" history="1" highlightClick="0" endSnd="0">
+                  <a:extLst>
+                    <a:ext uri="{A12FA001-AC4F-418D-AE19-62706E023703}">
+                      <ahyp:hlinkClr xmlns:ahyp="http://schemas.microsoft.com/office/drawing/2018/hyperlinkcolor" val="tx"/>
+                    </a:ext>
+                  </a:extLst>
+                </a:hlinkClick>
+              </a:rPr>
+              <a:t>Toate materialele pe GitHub</a:t>
+            </a:r>
+            <a:endParaRPr lang="en-US" sz="1200" dirty="0"/>
+          </a:p>
+        </p:txBody>
+      </p:sp>
+      <p:sp>
+        <p:nvSpPr>
+          <p:cNvPr id="10" name="Text 8"/>
           <p:cNvSpPr/>
           <p:nvPr/>
         </p:nvSpPr>
@@ -5573,6 +5766,9 @@
       </p:sp>
     </p:spTree>
   </p:cSld>
+  <p:transition xmlns:p="http://schemas.openxmlformats.org/presentationml/2006/main" spd="med">
+    <p:fade/>
+  </p:transition>
   <p:clrMapOvr>
     <a:masterClrMapping/>
   </p:clrMapOvr>
@@ -6583,6 +6779,9 @@
       </p:sp>
     </p:spTree>
   </p:cSld>
+  <p:transition xmlns:p="http://schemas.openxmlformats.org/presentationml/2006/main" spd="med">
+    <p:fade/>
+  </p:transition>
   <p:clrMapOvr>
     <a:masterClrMapping/>
   </p:clrMapOvr>
@@ -8212,6 +8411,9 @@
       </p:sp>
     </p:spTree>
   </p:cSld>
+  <p:transition xmlns:p="http://schemas.openxmlformats.org/presentationml/2006/main" spd="med">
+    <p:fade/>
+  </p:transition>
   <p:clrMapOvr>
     <a:masterClrMapping/>
   </p:clrMapOvr>
@@ -9304,6 +9506,9 @@
       </p:sp>
     </p:spTree>
   </p:cSld>
+  <p:transition xmlns:p="http://schemas.openxmlformats.org/presentationml/2006/main" spd="med">
+    <p:fade/>
+  </p:transition>
   <p:clrMapOvr>
     <a:masterClrMapping/>
   </p:clrMapOvr>
@@ -9705,6 +9910,9 @@
       </p:sp>
     </p:spTree>
   </p:cSld>
+  <p:transition xmlns:p="http://schemas.openxmlformats.org/presentationml/2006/main" spd="med">
+    <p:fade/>
+  </p:transition>
   <p:clrMapOvr>
     <a:masterClrMapping/>
   </p:clrMapOvr>
@@ -10436,6 +10644,9 @@
       </p:sp>
     </p:spTree>
   </p:cSld>
+  <p:transition xmlns:p="http://schemas.openxmlformats.org/presentationml/2006/main" spd="med">
+    <p:fade/>
+  </p:transition>
   <p:clrMapOvr>
     <a:masterClrMapping/>
   </p:clrMapOvr>
@@ -10899,7 +11110,7 @@
       </p:sp>
       <p:pic>
         <p:nvPicPr>
-          <p:cNvPr id="12" name="Image 0" descr="/sessions/vibrant-elegant-pasteur/mnt/Disertatie_AI_Platform/reports/figures/fig_4_1_cercul_orelor.png">    </p:cNvPr>
+          <p:cNvPr id="12" name="Image 0" descr="/sessions/vibrant-elegant-pasteur/mnt/Disertatie_AI_Platform/reports/figures/fig_fe_cerc_ore_animated.gif">    </p:cNvPr>
           <p:cNvPicPr>
             <a:picLocks noChangeAspect="1"/>
           </p:cNvPicPr>
@@ -10922,7 +11133,84 @@
       </p:pic>
       <p:sp>
         <p:nvSpPr>
-          <p:cNvPr id="13" name="Text 10"/>
+          <p:cNvPr id="13" name="Shape 10">
+            <a:hlinkClick r:id="rId2" tooltip="Click pentru notebook interactiv"/>
+          </p:cNvPr>
+          <p:cNvSpPr/>
+          <p:nvPr/>
+        </p:nvSpPr>
+        <p:spPr>
+          <a:xfrm>
+            <a:off x="10058400" y="1325880"/>
+            <a:ext cx="1691640" cy="365760"/>
+          </a:xfrm>
+          <a:prstGeom prst="roundRect">
+            <a:avLst>
+              <a:gd name="adj" fmla="val 15000"/>
+            </a:avLst>
+          </a:prstGeom>
+          <a:solidFill>
+            <a:srgbClr val="F9C846"/>
+          </a:solidFill>
+          <a:ln w="12700">
+            <a:solidFill>
+              <a:srgbClr val="F9C846"/>
+            </a:solidFill>
+            <a:prstDash val="solid"/>
+          </a:ln>
+        </p:spPr>
+      </p:sp>
+      <p:sp>
+        <p:nvSpPr>
+          <p:cNvPr id="14" name="Text 11">
+            <a:hlinkClick r:id="rId3" tooltip="Click pentru notebook interactiv"/>
+          </p:cNvPr>
+          <p:cNvSpPr/>
+          <p:nvPr/>
+        </p:nvSpPr>
+        <p:spPr>
+          <a:xfrm>
+            <a:off x="10058400" y="1325880"/>
+            <a:ext cx="1691640" cy="365760"/>
+          </a:xfrm>
+          <a:prstGeom prst="rect">
+            <a:avLst/>
+          </a:prstGeom>
+          <a:noFill/>
+          <a:ln/>
+        </p:spPr>
+        <p:txBody>
+          <a:bodyPr wrap="square" rtlCol="0" anchor="ctr"/>
+          <a:lstStyle/>
+          <a:p>
+            <a:pPr algn="ctr" indent="0" marL="0">
+              <a:buNone/>
+            </a:pPr>
+            <a:r>
+              <a:rPr lang="en-US" sz="1000" b="1" u="sng" dirty="0">
+                <a:solidFill>
+                  <a:srgbClr val="21295C"/>
+                </a:solidFill>
+                <a:latin typeface="Calibri" pitchFamily="34" charset="0"/>
+                <a:ea typeface="Calibri" pitchFamily="34" charset="-122"/>
+                <a:cs typeface="Calibri" pitchFamily="34" charset="-120"/>
+                <a:hlinkClick r:id="rId3" invalidUrl="" action="" tgtFrame="" tooltip="Click pentru notebook interactiv" history="1" highlightClick="0" endSnd="0">
+                  <a:extLst>
+                    <a:ext uri="{A12FA001-AC4F-418D-AE19-62706E023703}">
+                      <ahyp:hlinkClr xmlns:ahyp="http://schemas.microsoft.com/office/drawing/2018/hyperlinkcolor" val="tx"/>
+                    </a:ext>
+                  </a:extLst>
+                </a:hlinkClick>
+              </a:rPr>
+              <a:t>▶ Demonstreaza live</a:t>
+            </a:r>
+            <a:endParaRPr lang="en-US" sz="1000" dirty="0"/>
+          </a:p>
+        </p:txBody>
+      </p:sp>
+      <p:sp>
+        <p:nvSpPr>
+          <p:cNvPr id="15" name="Text 12"/>
           <p:cNvSpPr/>
           <p:nvPr/>
         </p:nvSpPr>
@@ -10978,7 +11266,7 @@
       </p:sp>
       <p:sp>
         <p:nvSpPr>
-          <p:cNvPr id="14" name="Text 11"/>
+          <p:cNvPr id="16" name="Text 13"/>
           <p:cNvSpPr/>
           <p:nvPr/>
         </p:nvSpPr>
@@ -11017,6 +11305,9 @@
       </p:sp>
     </p:spTree>
   </p:cSld>
+  <p:transition xmlns:p="http://schemas.openxmlformats.org/presentationml/2006/main" spd="med">
+    <p:fade/>
+  </p:transition>
   <p:clrMapOvr>
     <a:masterClrMapping/>
   </p:clrMapOvr>
@@ -11644,7 +11935,7 @@
       </p:sp>
       <p:pic>
         <p:nvPicPr>
-          <p:cNvPr id="14" name="Image 0" descr="/sessions/vibrant-elegant-pasteur/mnt/Disertatie_AI_Platform/reports/figures/fig_fe_autoregresivitate.png">    </p:cNvPr>
+          <p:cNvPr id="14" name="Image 0" descr="/sessions/vibrant-elegant-pasteur/mnt/Disertatie_AI_Platform/reports/figures/fig_fe_autoregresivitate_animated.gif">    </p:cNvPr>
           <p:cNvPicPr>
             <a:picLocks noChangeAspect="1"/>
           </p:cNvPicPr>
@@ -11667,7 +11958,84 @@
       </p:pic>
       <p:sp>
         <p:nvSpPr>
-          <p:cNvPr id="15" name="Shape 12"/>
+          <p:cNvPr id="15" name="Shape 12">
+            <a:hlinkClick r:id="rId2" tooltip="Click pentru notebook interactiv"/>
+          </p:cNvPr>
+          <p:cNvSpPr/>
+          <p:nvPr/>
+        </p:nvSpPr>
+        <p:spPr>
+          <a:xfrm>
+            <a:off x="10058400" y="1325880"/>
+            <a:ext cx="1691640" cy="365760"/>
+          </a:xfrm>
+          <a:prstGeom prst="roundRect">
+            <a:avLst>
+              <a:gd name="adj" fmla="val 15000"/>
+            </a:avLst>
+          </a:prstGeom>
+          <a:solidFill>
+            <a:srgbClr val="F9C846"/>
+          </a:solidFill>
+          <a:ln w="12700">
+            <a:solidFill>
+              <a:srgbClr val="F9C846"/>
+            </a:solidFill>
+            <a:prstDash val="solid"/>
+          </a:ln>
+        </p:spPr>
+      </p:sp>
+      <p:sp>
+        <p:nvSpPr>
+          <p:cNvPr id="16" name="Text 13">
+            <a:hlinkClick r:id="rId3" tooltip="Click pentru notebook interactiv"/>
+          </p:cNvPr>
+          <p:cNvSpPr/>
+          <p:nvPr/>
+        </p:nvSpPr>
+        <p:spPr>
+          <a:xfrm>
+            <a:off x="10058400" y="1325880"/>
+            <a:ext cx="1691640" cy="365760"/>
+          </a:xfrm>
+          <a:prstGeom prst="rect">
+            <a:avLst/>
+          </a:prstGeom>
+          <a:noFill/>
+          <a:ln/>
+        </p:spPr>
+        <p:txBody>
+          <a:bodyPr wrap="square" rtlCol="0" anchor="ctr"/>
+          <a:lstStyle/>
+          <a:p>
+            <a:pPr algn="ctr" indent="0" marL="0">
+              <a:buNone/>
+            </a:pPr>
+            <a:r>
+              <a:rPr lang="en-US" sz="1000" b="1" u="sng" dirty="0">
+                <a:solidFill>
+                  <a:srgbClr val="21295C"/>
+                </a:solidFill>
+                <a:latin typeface="Calibri" pitchFamily="34" charset="0"/>
+                <a:ea typeface="Calibri" pitchFamily="34" charset="-122"/>
+                <a:cs typeface="Calibri" pitchFamily="34" charset="-120"/>
+                <a:hlinkClick r:id="rId3" invalidUrl="" action="" tgtFrame="" tooltip="Click pentru notebook interactiv" history="1" highlightClick="0" endSnd="0">
+                  <a:extLst>
+                    <a:ext uri="{A12FA001-AC4F-418D-AE19-62706E023703}">
+                      <ahyp:hlinkClr xmlns:ahyp="http://schemas.microsoft.com/office/drawing/2018/hyperlinkcolor" val="tx"/>
+                    </a:ext>
+                  </a:extLst>
+                </a:hlinkClick>
+              </a:rPr>
+              <a:t>▶ Demonstreaza live</a:t>
+            </a:r>
+            <a:endParaRPr lang="en-US" sz="1000" dirty="0"/>
+          </a:p>
+        </p:txBody>
+      </p:sp>
+      <p:sp>
+        <p:nvSpPr>
+          <p:cNvPr id="17" name="Shape 14"/>
           <p:cNvSpPr/>
           <p:nvPr/>
         </p:nvSpPr>
@@ -11692,7 +12060,7 @@
       </p:sp>
       <p:sp>
         <p:nvSpPr>
-          <p:cNvPr id="16" name="Text 13"/>
+          <p:cNvPr id="18" name="Text 15"/>
           <p:cNvSpPr/>
           <p:nvPr/>
         </p:nvSpPr>
@@ -11731,7 +12099,7 @@
       </p:sp>
       <p:sp>
         <p:nvSpPr>
-          <p:cNvPr id="17" name="Text 14"/>
+          <p:cNvPr id="19" name="Text 16"/>
           <p:cNvSpPr/>
           <p:nvPr/>
         </p:nvSpPr>
@@ -11787,7 +12155,7 @@
       </p:sp>
       <p:sp>
         <p:nvSpPr>
-          <p:cNvPr id="18" name="Text 15"/>
+          <p:cNvPr id="20" name="Text 17"/>
           <p:cNvSpPr/>
           <p:nvPr/>
         </p:nvSpPr>
@@ -11826,6 +12194,9 @@
       </p:sp>
     </p:spTree>
   </p:cSld>
+  <p:transition xmlns:p="http://schemas.openxmlformats.org/presentationml/2006/main" spd="med">
+    <p:fade/>
+  </p:transition>
   <p:clrMapOvr>
     <a:masterClrMapping/>
   </p:clrMapOvr>
@@ -14422,6 +14793,9 @@
       </p:sp>
     </p:spTree>
   </p:cSld>
+  <p:transition xmlns:p="http://schemas.openxmlformats.org/presentationml/2006/main" spd="med">
+    <p:fade/>
+  </p:transition>
   <p:clrMapOvr>
     <a:masterClrMapping/>
   </p:clrMapOvr>

--- a/docs/SCSS/SCSS_FeatureEngineering_Diana_Nenu.pptx
+++ b/docs/SCSS/SCSS_FeatureEngineering_Diana_Nenu.pptx
@@ -3260,7 +3260,7 @@
     <p:bg>
       <p:bgPr>
         <a:solidFill>
-          <a:srgbClr val="151025"/>
+          <a:srgbClr val="1E1B4B"/>
         </a:solidFill>
       </p:bgPr>
     </p:bg>
@@ -3293,13 +3293,13 @@
             <a:avLst/>
           </a:prstGeom>
           <a:solidFill>
-            <a:srgbClr val="818CF8">
+            <a:srgbClr val="4F46E5">
               <a:alpha val="25000"/>
             </a:srgbClr>
           </a:solidFill>
           <a:ln w="12700">
             <a:solidFill>
-              <a:srgbClr val="818CF8">
+              <a:srgbClr val="4F46E5">
                 <a:alpha val="25000"/>
               </a:srgbClr>
             </a:solidFill>
@@ -3322,13 +3322,13 @@
             <a:avLst/>
           </a:prstGeom>
           <a:solidFill>
-            <a:srgbClr val="F472B6">
+            <a:srgbClr val="DB2777">
               <a:alpha val="20000"/>
             </a:srgbClr>
           </a:solidFill>
           <a:ln w="12700">
             <a:solidFill>
-              <a:srgbClr val="F472B6">
+              <a:srgbClr val="DB2777">
                 <a:alpha val="20000"/>
               </a:srgbClr>
             </a:solidFill>
@@ -3351,11 +3351,11 @@
             <a:avLst/>
           </a:prstGeom>
           <a:solidFill>
-            <a:srgbClr val="FBBF24"/>
+            <a:srgbClr val="D97706"/>
           </a:solidFill>
           <a:ln w="12700">
             <a:solidFill>
-              <a:srgbClr val="FBBF24"/>
+              <a:srgbClr val="D97706"/>
             </a:solidFill>
             <a:prstDash val="solid"/>
           </a:ln>
@@ -3388,7 +3388,7 @@
             <a:r>
               <a:rPr lang="en-US" sz="1600" b="1" spc="1200" kern="0" dirty="0">
                 <a:solidFill>
-                  <a:srgbClr val="FBBF24"/>
+                  <a:srgbClr val="D97706"/>
                 </a:solidFill>
                 <a:latin typeface="Calibri" pitchFamily="34" charset="0"/>
                 <a:ea typeface="Calibri" pitchFamily="34" charset="-122"/>
@@ -3489,7 +3489,7 @@
             <a:r>
               <a:rPr lang="en-US" sz="2600" i="1" dirty="0">
                 <a:solidFill>
-                  <a:srgbClr val="E2E8F0"/>
+                  <a:srgbClr val="334155"/>
                 </a:solidFill>
                 <a:latin typeface="Cambria" pitchFamily="34" charset="0"/>
                 <a:ea typeface="Cambria" pitchFamily="34" charset="-122"/>
@@ -3516,11 +3516,11 @@
             <a:avLst/>
           </a:prstGeom>
           <a:solidFill>
-            <a:srgbClr val="FBBF24"/>
+            <a:srgbClr val="D97706"/>
           </a:solidFill>
           <a:ln w="12700">
             <a:solidFill>
-              <a:srgbClr val="FBBF24"/>
+              <a:srgbClr val="D97706"/>
             </a:solidFill>
             <a:prstDash val="solid"/>
           </a:ln>
@@ -3570,7 +3570,7 @@
             <a:r>
               <a:rPr lang="en-US" sz="1600" dirty="0">
                 <a:solidFill>
-                  <a:srgbClr val="CBD5E1"/>
+                  <a:srgbClr val="64748B"/>
                 </a:solidFill>
                 <a:latin typeface="Calibri" pitchFamily="34" charset="0"/>
                 <a:ea typeface="Calibri" pitchFamily="34" charset="-122"/>
@@ -3587,7 +3587,7 @@
             <a:r>
               <a:rPr lang="en-US" sz="1600" dirty="0">
                 <a:solidFill>
-                  <a:srgbClr val="CBD5E1"/>
+                  <a:srgbClr val="64748B"/>
                 </a:solidFill>
                 <a:latin typeface="Calibri" pitchFamily="34" charset="0"/>
                 <a:ea typeface="Calibri" pitchFamily="34" charset="-122"/>
@@ -3616,7 +3616,7 @@
     <p:bg>
       <p:bgPr>
         <a:solidFill>
-          <a:srgbClr val="151025"/>
+          <a:srgbClr val="F8FAFC"/>
         </a:solidFill>
       </p:bgPr>
     </p:bg>
@@ -3649,13 +3649,13 @@
             <a:avLst/>
           </a:prstGeom>
           <a:solidFill>
-            <a:srgbClr val="818CF8">
+            <a:srgbClr val="4F46E5">
               <a:alpha val="15000"/>
             </a:srgbClr>
           </a:solidFill>
           <a:ln w="12700">
             <a:solidFill>
-              <a:srgbClr val="818CF8">
+              <a:srgbClr val="4F46E5">
                 <a:alpha val="15000"/>
               </a:srgbClr>
             </a:solidFill>
@@ -3678,13 +3678,13 @@
             <a:avLst/>
           </a:prstGeom>
           <a:solidFill>
-            <a:srgbClr val="F472B6">
+            <a:srgbClr val="DB2777">
               <a:alpha val="12000"/>
             </a:srgbClr>
           </a:solidFill>
           <a:ln w="12700">
             <a:solidFill>
-              <a:srgbClr val="F472B6">
+              <a:srgbClr val="DB2777">
                 <a:alpha val="12000"/>
               </a:srgbClr>
             </a:solidFill>
@@ -3707,11 +3707,11 @@
             <a:avLst/>
           </a:prstGeom>
           <a:solidFill>
-            <a:srgbClr val="FBBF24"/>
+            <a:srgbClr val="D97706"/>
           </a:solidFill>
           <a:ln w="12700">
             <a:solidFill>
-              <a:srgbClr val="FBBF24"/>
+              <a:srgbClr val="D97706"/>
             </a:solidFill>
             <a:prstDash val="solid"/>
           </a:ln>
@@ -3744,7 +3744,7 @@
             <a:r>
               <a:rPr lang="en-US" sz="1300" b="1" spc="1000" kern="0" dirty="0">
                 <a:solidFill>
-                  <a:srgbClr val="FBBF24"/>
+                  <a:srgbClr val="D97706"/>
                 </a:solidFill>
                 <a:latin typeface="Calibri" pitchFamily="34" charset="0"/>
                 <a:ea typeface="Calibri" pitchFamily="34" charset="-122"/>
@@ -3783,7 +3783,7 @@
             <a:r>
               <a:rPr lang="en-US" sz="3600" b="1" dirty="0">
                 <a:solidFill>
-                  <a:srgbClr val="FFFFFF"/>
+                  <a:srgbClr val="0F172A"/>
                 </a:solidFill>
                 <a:latin typeface="Cambria" pitchFamily="34" charset="0"/>
                 <a:ea typeface="Cambria" pitchFamily="34" charset="-122"/>
@@ -3810,11 +3810,11 @@
             <a:avLst/>
           </a:prstGeom>
           <a:solidFill>
-            <a:srgbClr val="F472B6"/>
+            <a:srgbClr val="DB2777"/>
           </a:solidFill>
           <a:ln w="12700">
             <a:solidFill>
-              <a:srgbClr val="F472B6"/>
+              <a:srgbClr val="DB2777"/>
             </a:solidFill>
             <a:prstDash val="solid"/>
           </a:ln>
@@ -3847,7 +3847,7 @@
             <a:r>
               <a:rPr lang="en-US" sz="1900" i="1" dirty="0">
                 <a:solidFill>
-                  <a:srgbClr val="E2E8F0"/>
+                  <a:srgbClr val="334155"/>
                 </a:solidFill>
                 <a:latin typeface="Calibri" pitchFamily="34" charset="0"/>
                 <a:ea typeface="Calibri" pitchFamily="34" charset="-122"/>
@@ -3874,11 +3874,11 @@
             <a:avLst/>
           </a:prstGeom>
           <a:solidFill>
-            <a:srgbClr val="1E1A3A"/>
+            <a:srgbClr val="FFFFFF"/>
           </a:solidFill>
           <a:ln w="38100">
             <a:solidFill>
-              <a:srgbClr val="818CF8"/>
+              <a:srgbClr val="4F46E5"/>
             </a:solidFill>
             <a:prstDash val="solid"/>
           </a:ln>
@@ -3899,11 +3899,11 @@
             <a:avLst/>
           </a:prstGeom>
           <a:solidFill>
-            <a:srgbClr val="818CF8"/>
+            <a:srgbClr val="4F46E5"/>
           </a:solidFill>
           <a:ln w="12700">
             <a:solidFill>
-              <a:srgbClr val="818CF8"/>
+              <a:srgbClr val="4F46E5"/>
             </a:solidFill>
             <a:prstDash val="solid"/>
           </a:ln>
@@ -3936,7 +3936,7 @@
             <a:r>
               <a:rPr lang="en-US" sz="5000" b="1" dirty="0">
                 <a:solidFill>
-                  <a:srgbClr val="151025"/>
+                  <a:srgbClr val="FFFFFF"/>
                 </a:solidFill>
                 <a:latin typeface="Cambria" pitchFamily="34" charset="0"/>
                 <a:ea typeface="Cambria" pitchFamily="34" charset="-122"/>
@@ -3975,7 +3975,7 @@
             <a:r>
               <a:rPr lang="en-US" sz="2400" b="1" dirty="0">
                 <a:solidFill>
-                  <a:srgbClr val="818CF8"/>
+                  <a:srgbClr val="4F46E5"/>
                 </a:solidFill>
                 <a:latin typeface="Cambria" pitchFamily="34" charset="0"/>
                 <a:ea typeface="Cambria" pitchFamily="34" charset="-122"/>
@@ -3992,7 +3992,7 @@
             <a:r>
               <a:rPr lang="en-US" sz="2400" b="1" dirty="0">
                 <a:solidFill>
-                  <a:srgbClr val="818CF8"/>
+                  <a:srgbClr val="4F46E5"/>
                 </a:solidFill>
                 <a:latin typeface="Cambria" pitchFamily="34" charset="0"/>
                 <a:ea typeface="Cambria" pitchFamily="34" charset="-122"/>
@@ -4070,7 +4070,7 @@
             <a:r>
               <a:rPr lang="en-US" sz="1400" dirty="0">
                 <a:solidFill>
-                  <a:srgbClr val="E2E8F0"/>
+                  <a:srgbClr val="334155"/>
                 </a:solidFill>
                 <a:latin typeface="Calibri" pitchFamily="34" charset="0"/>
                 <a:ea typeface="Calibri" pitchFamily="34" charset="-122"/>
@@ -4097,11 +4097,11 @@
             <a:avLst/>
           </a:prstGeom>
           <a:solidFill>
-            <a:srgbClr val="1E1A3A"/>
+            <a:srgbClr val="FFFFFF"/>
           </a:solidFill>
           <a:ln w="38100">
             <a:solidFill>
-              <a:srgbClr val="F472B6"/>
+              <a:srgbClr val="DB2777"/>
             </a:solidFill>
             <a:prstDash val="solid"/>
           </a:ln>
@@ -4122,11 +4122,11 @@
             <a:avLst/>
           </a:prstGeom>
           <a:solidFill>
-            <a:srgbClr val="F472B6"/>
+            <a:srgbClr val="DB2777"/>
           </a:solidFill>
           <a:ln w="12700">
             <a:solidFill>
-              <a:srgbClr val="F472B6"/>
+              <a:srgbClr val="DB2777"/>
             </a:solidFill>
             <a:prstDash val="solid"/>
           </a:ln>
@@ -4159,7 +4159,7 @@
             <a:r>
               <a:rPr lang="en-US" sz="5000" b="1" dirty="0">
                 <a:solidFill>
-                  <a:srgbClr val="151025"/>
+                  <a:srgbClr val="FFFFFF"/>
                 </a:solidFill>
                 <a:latin typeface="Cambria" pitchFamily="34" charset="0"/>
                 <a:ea typeface="Cambria" pitchFamily="34" charset="-122"/>
@@ -4198,7 +4198,7 @@
             <a:r>
               <a:rPr lang="en-US" sz="2400" b="1" dirty="0">
                 <a:solidFill>
-                  <a:srgbClr val="F472B6"/>
+                  <a:srgbClr val="DB2777"/>
                 </a:solidFill>
                 <a:latin typeface="Cambria" pitchFamily="34" charset="0"/>
                 <a:ea typeface="Cambria" pitchFamily="34" charset="-122"/>
@@ -4215,7 +4215,7 @@
             <a:r>
               <a:rPr lang="en-US" sz="2400" b="1" dirty="0">
                 <a:solidFill>
-                  <a:srgbClr val="F472B6"/>
+                  <a:srgbClr val="DB2777"/>
                 </a:solidFill>
                 <a:latin typeface="Cambria" pitchFamily="34" charset="0"/>
                 <a:ea typeface="Cambria" pitchFamily="34" charset="-122"/>
@@ -4293,7 +4293,7 @@
             <a:r>
               <a:rPr lang="en-US" sz="1400" dirty="0">
                 <a:solidFill>
-                  <a:srgbClr val="E2E8F0"/>
+                  <a:srgbClr val="334155"/>
                 </a:solidFill>
                 <a:latin typeface="Calibri" pitchFamily="34" charset="0"/>
                 <a:ea typeface="Calibri" pitchFamily="34" charset="-122"/>
@@ -4320,11 +4320,11 @@
             <a:avLst/>
           </a:prstGeom>
           <a:solidFill>
-            <a:srgbClr val="1E1A3A"/>
+            <a:srgbClr val="FFFFFF"/>
           </a:solidFill>
           <a:ln w="38100">
             <a:solidFill>
-              <a:srgbClr val="FBBF24"/>
+              <a:srgbClr val="D97706"/>
             </a:solidFill>
             <a:prstDash val="solid"/>
           </a:ln>
@@ -4345,11 +4345,11 @@
             <a:avLst/>
           </a:prstGeom>
           <a:solidFill>
-            <a:srgbClr val="FBBF24"/>
+            <a:srgbClr val="D97706"/>
           </a:solidFill>
           <a:ln w="12700">
             <a:solidFill>
-              <a:srgbClr val="FBBF24"/>
+              <a:srgbClr val="D97706"/>
             </a:solidFill>
             <a:prstDash val="solid"/>
           </a:ln>
@@ -4382,7 +4382,7 @@
             <a:r>
               <a:rPr lang="en-US" sz="5000" b="1" dirty="0">
                 <a:solidFill>
-                  <a:srgbClr val="151025"/>
+                  <a:srgbClr val="FFFFFF"/>
                 </a:solidFill>
                 <a:latin typeface="Cambria" pitchFamily="34" charset="0"/>
                 <a:ea typeface="Cambria" pitchFamily="34" charset="-122"/>
@@ -4421,7 +4421,7 @@
             <a:r>
               <a:rPr lang="en-US" sz="2400" b="1" dirty="0">
                 <a:solidFill>
-                  <a:srgbClr val="FBBF24"/>
+                  <a:srgbClr val="D97706"/>
                 </a:solidFill>
                 <a:latin typeface="Cambria" pitchFamily="34" charset="0"/>
                 <a:ea typeface="Cambria" pitchFamily="34" charset="-122"/>
@@ -4438,7 +4438,7 @@
             <a:r>
               <a:rPr lang="en-US" sz="2400" b="1" dirty="0">
                 <a:solidFill>
-                  <a:srgbClr val="FBBF24"/>
+                  <a:srgbClr val="D97706"/>
                 </a:solidFill>
                 <a:latin typeface="Cambria" pitchFamily="34" charset="0"/>
                 <a:ea typeface="Cambria" pitchFamily="34" charset="-122"/>
@@ -4516,7 +4516,7 @@
             <a:r>
               <a:rPr lang="en-US" sz="1400" dirty="0">
                 <a:solidFill>
-                  <a:srgbClr val="E2E8F0"/>
+                  <a:srgbClr val="334155"/>
                 </a:solidFill>
                 <a:latin typeface="Calibri" pitchFamily="34" charset="0"/>
                 <a:ea typeface="Calibri" pitchFamily="34" charset="-122"/>
@@ -4640,7 +4640,7 @@
     <p:bg>
       <p:bgPr>
         <a:solidFill>
-          <a:srgbClr val="151025"/>
+          <a:srgbClr val="F8FAFC"/>
         </a:solidFill>
       </p:bgPr>
     </p:bg>
@@ -4673,13 +4673,13 @@
             <a:avLst/>
           </a:prstGeom>
           <a:solidFill>
-            <a:srgbClr val="818CF8">
+            <a:srgbClr val="4F46E5">
               <a:alpha val="15000"/>
             </a:srgbClr>
           </a:solidFill>
           <a:ln w="12700">
             <a:solidFill>
-              <a:srgbClr val="818CF8">
+              <a:srgbClr val="4F46E5">
                 <a:alpha val="15000"/>
               </a:srgbClr>
             </a:solidFill>
@@ -4702,13 +4702,13 @@
             <a:avLst/>
           </a:prstGeom>
           <a:solidFill>
-            <a:srgbClr val="F472B6">
+            <a:srgbClr val="DB2777">
               <a:alpha val="12000"/>
             </a:srgbClr>
           </a:solidFill>
           <a:ln w="12700">
             <a:solidFill>
-              <a:srgbClr val="F472B6">
+              <a:srgbClr val="DB2777">
                 <a:alpha val="12000"/>
               </a:srgbClr>
             </a:solidFill>
@@ -4731,11 +4731,11 @@
             <a:avLst/>
           </a:prstGeom>
           <a:solidFill>
-            <a:srgbClr val="FBBF24"/>
+            <a:srgbClr val="D97706"/>
           </a:solidFill>
           <a:ln w="12700">
             <a:solidFill>
-              <a:srgbClr val="FBBF24"/>
+              <a:srgbClr val="D97706"/>
             </a:solidFill>
             <a:prstDash val="solid"/>
           </a:ln>
@@ -4768,7 +4768,7 @@
             <a:r>
               <a:rPr lang="en-US" sz="1300" b="1" spc="1000" kern="0" dirty="0">
                 <a:solidFill>
-                  <a:srgbClr val="FBBF24"/>
+                  <a:srgbClr val="D97706"/>
                 </a:solidFill>
                 <a:latin typeface="Calibri" pitchFamily="34" charset="0"/>
                 <a:ea typeface="Calibri" pitchFamily="34" charset="-122"/>
@@ -4807,7 +4807,7 @@
             <a:r>
               <a:rPr lang="en-US" sz="3600" b="1" dirty="0">
                 <a:solidFill>
-                  <a:srgbClr val="FFFFFF"/>
+                  <a:srgbClr val="0F172A"/>
                 </a:solidFill>
                 <a:latin typeface="Cambria" pitchFamily="34" charset="0"/>
                 <a:ea typeface="Cambria" pitchFamily="34" charset="-122"/>
@@ -4834,11 +4834,11 @@
             <a:avLst/>
           </a:prstGeom>
           <a:solidFill>
-            <a:srgbClr val="F472B6"/>
+            <a:srgbClr val="DB2777"/>
           </a:solidFill>
           <a:ln w="12700">
             <a:solidFill>
-              <a:srgbClr val="F472B6"/>
+              <a:srgbClr val="DB2777"/>
             </a:solidFill>
             <a:prstDash val="solid"/>
           </a:ln>
@@ -4871,7 +4871,7 @@
             <a:r>
               <a:rPr lang="en-US" sz="1900" i="1" dirty="0">
                 <a:solidFill>
-                  <a:srgbClr val="E2E8F0"/>
+                  <a:srgbClr val="334155"/>
                 </a:solidFill>
                 <a:latin typeface="Calibri" pitchFamily="34" charset="0"/>
                 <a:ea typeface="Calibri" pitchFamily="34" charset="-122"/>
@@ -4898,11 +4898,11 @@
             <a:avLst/>
           </a:prstGeom>
           <a:solidFill>
-            <a:srgbClr val="1E1A3A"/>
+            <a:srgbClr val="FFFFFF"/>
           </a:solidFill>
           <a:ln w="12700">
             <a:solidFill>
-              <a:srgbClr val="1E1A3A"/>
+              <a:srgbClr val="E2E8F0"/>
             </a:solidFill>
             <a:prstDash val="solid"/>
           </a:ln>
@@ -4923,11 +4923,11 @@
             <a:avLst/>
           </a:prstGeom>
           <a:solidFill>
-            <a:srgbClr val="34D399"/>
+            <a:srgbClr val="059669"/>
           </a:solidFill>
           <a:ln w="12700">
             <a:solidFill>
-              <a:srgbClr val="34D399"/>
+              <a:srgbClr val="059669"/>
             </a:solidFill>
             <a:prstDash val="solid"/>
           </a:ln>
@@ -4960,7 +4960,7 @@
             <a:r>
               <a:rPr lang="en-US" sz="2100" b="1" dirty="0">
                 <a:solidFill>
-                  <a:srgbClr val="34D399"/>
+                  <a:srgbClr val="059669"/>
                 </a:solidFill>
                 <a:latin typeface="Cambria" pitchFamily="34" charset="0"/>
                 <a:ea typeface="Cambria" pitchFamily="34" charset="-122"/>
@@ -5002,7 +5002,7 @@
             <a:r>
               <a:rPr lang="en-US" sz="1700" dirty="0">
                 <a:solidFill>
-                  <a:srgbClr val="E2E8F0"/>
+                  <a:srgbClr val="334155"/>
                 </a:solidFill>
                 <a:latin typeface="Calibri" pitchFamily="34" charset="0"/>
                 <a:ea typeface="Calibri" pitchFamily="34" charset="-122"/>
@@ -5019,7 +5019,7 @@
             <a:r>
               <a:rPr lang="en-US" sz="1700" b="1" dirty="0">
                 <a:solidFill>
-                  <a:srgbClr val="FFFFFF"/>
+                  <a:srgbClr val="0F172A"/>
                 </a:solidFill>
                 <a:latin typeface="Calibri" pitchFamily="34" charset="0"/>
                 <a:ea typeface="Calibri" pitchFamily="34" charset="-122"/>
@@ -5036,7 +5036,7 @@
             <a:r>
               <a:rPr lang="en-US" sz="1700" dirty="0">
                 <a:solidFill>
-                  <a:srgbClr val="E2E8F0"/>
+                  <a:srgbClr val="334155"/>
                 </a:solidFill>
                 <a:latin typeface="Calibri" pitchFamily="34" charset="0"/>
                 <a:ea typeface="Calibri" pitchFamily="34" charset="-122"/>
@@ -5054,7 +5054,7 @@
             <a:r>
               <a:rPr lang="en-US" sz="1700" dirty="0">
                 <a:solidFill>
-                  <a:srgbClr val="E2E8F0"/>
+                  <a:srgbClr val="334155"/>
                 </a:solidFill>
                 <a:latin typeface="Calibri" pitchFamily="34" charset="0"/>
                 <a:ea typeface="Calibri" pitchFamily="34" charset="-122"/>
@@ -5071,7 +5071,7 @@
             <a:r>
               <a:rPr lang="en-US" sz="1700" b="1" dirty="0">
                 <a:solidFill>
-                  <a:srgbClr val="FFFFFF"/>
+                  <a:srgbClr val="0F172A"/>
                 </a:solidFill>
                 <a:latin typeface="Calibri" pitchFamily="34" charset="0"/>
                 <a:ea typeface="Calibri" pitchFamily="34" charset="-122"/>
@@ -5088,7 +5088,7 @@
             <a:r>
               <a:rPr lang="en-US" sz="1700" dirty="0">
                 <a:solidFill>
-                  <a:srgbClr val="E2E8F0"/>
+                  <a:srgbClr val="334155"/>
                 </a:solidFill>
                 <a:latin typeface="Calibri" pitchFamily="34" charset="0"/>
                 <a:ea typeface="Calibri" pitchFamily="34" charset="-122"/>
@@ -5115,11 +5115,11 @@
             <a:avLst/>
           </a:prstGeom>
           <a:solidFill>
-            <a:srgbClr val="1E1A3A"/>
+            <a:srgbClr val="FFFFFF"/>
           </a:solidFill>
           <a:ln w="12700">
             <a:solidFill>
-              <a:srgbClr val="1E1A3A"/>
+              <a:srgbClr val="E2E8F0"/>
             </a:solidFill>
             <a:prstDash val="solid"/>
           </a:ln>
@@ -5140,11 +5140,11 @@
             <a:avLst/>
           </a:prstGeom>
           <a:solidFill>
-            <a:srgbClr val="F472B6"/>
+            <a:srgbClr val="DB2777"/>
           </a:solidFill>
           <a:ln w="12700">
             <a:solidFill>
-              <a:srgbClr val="F472B6"/>
+              <a:srgbClr val="DB2777"/>
             </a:solidFill>
             <a:prstDash val="solid"/>
           </a:ln>
@@ -5177,7 +5177,7 @@
             <a:r>
               <a:rPr lang="en-US" sz="2100" b="1" dirty="0">
                 <a:solidFill>
-                  <a:srgbClr val="F472B6"/>
+                  <a:srgbClr val="DB2777"/>
                 </a:solidFill>
                 <a:latin typeface="Cambria" pitchFamily="34" charset="0"/>
                 <a:ea typeface="Cambria" pitchFamily="34" charset="-122"/>
@@ -5219,7 +5219,7 @@
             <a:r>
               <a:rPr lang="en-US" sz="1700" dirty="0">
                 <a:solidFill>
-                  <a:srgbClr val="E2E8F0"/>
+                  <a:srgbClr val="334155"/>
                 </a:solidFill>
                 <a:latin typeface="Calibri" pitchFamily="34" charset="0"/>
                 <a:ea typeface="Calibri" pitchFamily="34" charset="-122"/>
@@ -5237,7 +5237,7 @@
             <a:r>
               <a:rPr lang="en-US" sz="1700" dirty="0">
                 <a:solidFill>
-                  <a:srgbClr val="E2E8F0"/>
+                  <a:srgbClr val="334155"/>
                 </a:solidFill>
                 <a:latin typeface="Calibri" pitchFamily="34" charset="0"/>
                 <a:ea typeface="Calibri" pitchFamily="34" charset="-122"/>
@@ -5254,7 +5254,7 @@
             <a:r>
               <a:rPr lang="en-US" sz="1700" b="1" dirty="0">
                 <a:solidFill>
-                  <a:srgbClr val="FFFFFF"/>
+                  <a:srgbClr val="0F172A"/>
                 </a:solidFill>
                 <a:latin typeface="Calibri" pitchFamily="34" charset="0"/>
                 <a:ea typeface="Calibri" pitchFamily="34" charset="-122"/>
@@ -5271,7 +5271,7 @@
             <a:r>
               <a:rPr lang="en-US" sz="1700" dirty="0">
                 <a:solidFill>
-                  <a:srgbClr val="E2E8F0"/>
+                  <a:srgbClr val="334155"/>
                 </a:solidFill>
                 <a:latin typeface="Calibri" pitchFamily="34" charset="0"/>
                 <a:ea typeface="Calibri" pitchFamily="34" charset="-122"/>
@@ -5395,7 +5395,7 @@
     <p:bg>
       <p:bgPr>
         <a:solidFill>
-          <a:srgbClr val="151025"/>
+          <a:srgbClr val="F8FAFC"/>
         </a:solidFill>
       </p:bgPr>
     </p:bg>
@@ -5428,13 +5428,13 @@
             <a:avLst/>
           </a:prstGeom>
           <a:solidFill>
-            <a:srgbClr val="818CF8">
+            <a:srgbClr val="4F46E5">
               <a:alpha val="15000"/>
             </a:srgbClr>
           </a:solidFill>
           <a:ln w="12700">
             <a:solidFill>
-              <a:srgbClr val="818CF8">
+              <a:srgbClr val="4F46E5">
                 <a:alpha val="15000"/>
               </a:srgbClr>
             </a:solidFill>
@@ -5457,13 +5457,13 @@
             <a:avLst/>
           </a:prstGeom>
           <a:solidFill>
-            <a:srgbClr val="F472B6">
+            <a:srgbClr val="DB2777">
               <a:alpha val="12000"/>
             </a:srgbClr>
           </a:solidFill>
           <a:ln w="12700">
             <a:solidFill>
-              <a:srgbClr val="F472B6">
+              <a:srgbClr val="DB2777">
                 <a:alpha val="12000"/>
               </a:srgbClr>
             </a:solidFill>
@@ -5486,11 +5486,11 @@
             <a:avLst/>
           </a:prstGeom>
           <a:solidFill>
-            <a:srgbClr val="FBBF24"/>
+            <a:srgbClr val="D97706"/>
           </a:solidFill>
           <a:ln w="12700">
             <a:solidFill>
-              <a:srgbClr val="FBBF24"/>
+              <a:srgbClr val="D97706"/>
             </a:solidFill>
             <a:prstDash val="solid"/>
           </a:ln>
@@ -5523,7 +5523,7 @@
             <a:r>
               <a:rPr lang="en-US" sz="1300" b="1" spc="1000" kern="0" dirty="0">
                 <a:solidFill>
-                  <a:srgbClr val="FBBF24"/>
+                  <a:srgbClr val="D97706"/>
                 </a:solidFill>
                 <a:latin typeface="Calibri" pitchFamily="34" charset="0"/>
                 <a:ea typeface="Calibri" pitchFamily="34" charset="-122"/>
@@ -5562,7 +5562,7 @@
             <a:r>
               <a:rPr lang="en-US" sz="3600" b="1" dirty="0">
                 <a:solidFill>
-                  <a:srgbClr val="FFFFFF"/>
+                  <a:srgbClr val="0F172A"/>
                 </a:solidFill>
                 <a:latin typeface="Cambria" pitchFamily="34" charset="0"/>
                 <a:ea typeface="Cambria" pitchFamily="34" charset="-122"/>
@@ -5589,11 +5589,11 @@
             <a:avLst/>
           </a:prstGeom>
           <a:solidFill>
-            <a:srgbClr val="F472B6"/>
+            <a:srgbClr val="DB2777"/>
           </a:solidFill>
           <a:ln w="12700">
             <a:solidFill>
-              <a:srgbClr val="F472B6"/>
+              <a:srgbClr val="DB2777"/>
             </a:solidFill>
             <a:prstDash val="solid"/>
           </a:ln>
@@ -5637,11 +5637,11 @@
             <a:avLst/>
           </a:prstGeom>
           <a:solidFill>
-            <a:srgbClr val="1E1A3A"/>
+            <a:srgbClr val="FFFFFF"/>
           </a:solidFill>
           <a:ln w="12700">
             <a:solidFill>
-              <a:srgbClr val="1E1A3A"/>
+              <a:srgbClr val="E2E8F0"/>
             </a:solidFill>
             <a:prstDash val="solid"/>
           </a:ln>
@@ -5662,11 +5662,11 @@
             <a:avLst/>
           </a:prstGeom>
           <a:solidFill>
-            <a:srgbClr val="F472B6"/>
+            <a:srgbClr val="DB2777"/>
           </a:solidFill>
           <a:ln w="12700">
             <a:solidFill>
-              <a:srgbClr val="F472B6"/>
+              <a:srgbClr val="DB2777"/>
             </a:solidFill>
             <a:prstDash val="solid"/>
           </a:ln>
@@ -5699,7 +5699,7 @@
             <a:r>
               <a:rPr lang="en-US" sz="1900" b="1" dirty="0">
                 <a:solidFill>
-                  <a:srgbClr val="F472B6"/>
+                  <a:srgbClr val="DB2777"/>
                 </a:solidFill>
                 <a:latin typeface="Cambria" pitchFamily="34" charset="0"/>
                 <a:ea typeface="Cambria" pitchFamily="34" charset="-122"/>
@@ -5741,7 +5741,7 @@
             <a:r>
               <a:rPr lang="en-US" sz="1400" dirty="0">
                 <a:solidFill>
-                  <a:srgbClr val="E2E8F0"/>
+                  <a:srgbClr val="334155"/>
                 </a:solidFill>
                 <a:latin typeface="Calibri" pitchFamily="34" charset="0"/>
                 <a:ea typeface="Calibri" pitchFamily="34" charset="-122"/>
@@ -5759,7 +5759,7 @@
             <a:r>
               <a:rPr lang="en-US" sz="1400" dirty="0">
                 <a:solidFill>
-                  <a:srgbClr val="E2E8F0"/>
+                  <a:srgbClr val="334155"/>
                 </a:solidFill>
                 <a:latin typeface="Calibri" pitchFamily="34" charset="0"/>
                 <a:ea typeface="Calibri" pitchFamily="34" charset="-122"/>
@@ -5777,7 +5777,7 @@
             <a:r>
               <a:rPr lang="en-US" sz="1400" dirty="0">
                 <a:solidFill>
-                  <a:srgbClr val="E2E8F0"/>
+                  <a:srgbClr val="334155"/>
                 </a:solidFill>
                 <a:latin typeface="Calibri" pitchFamily="34" charset="0"/>
                 <a:ea typeface="Calibri" pitchFamily="34" charset="-122"/>
@@ -5794,7 +5794,7 @@
             <a:r>
               <a:rPr lang="en-US" sz="1400" b="1" dirty="0">
                 <a:solidFill>
-                  <a:srgbClr val="FFFFFF"/>
+                  <a:srgbClr val="0F172A"/>
                 </a:solidFill>
                 <a:latin typeface="Calibri" pitchFamily="34" charset="0"/>
                 <a:ea typeface="Calibri" pitchFamily="34" charset="-122"/>
@@ -5811,7 +5811,7 @@
             <a:r>
               <a:rPr lang="en-US" sz="1400" dirty="0">
                 <a:solidFill>
-                  <a:srgbClr val="E2E8F0"/>
+                  <a:srgbClr val="334155"/>
                 </a:solidFill>
                 <a:latin typeface="Calibri" pitchFamily="34" charset="0"/>
                 <a:ea typeface="Calibri" pitchFamily="34" charset="-122"/>
@@ -5829,7 +5829,7 @@
             <a:r>
               <a:rPr lang="en-US" sz="1400" dirty="0">
                 <a:solidFill>
-                  <a:srgbClr val="E2E8F0"/>
+                  <a:srgbClr val="334155"/>
                 </a:solidFill>
                 <a:latin typeface="Calibri" pitchFamily="34" charset="0"/>
                 <a:ea typeface="Calibri" pitchFamily="34" charset="-122"/>
@@ -5846,7 +5846,7 @@
             <a:r>
               <a:rPr lang="en-US" sz="1400" b="1" dirty="0">
                 <a:solidFill>
-                  <a:srgbClr val="F472B6"/>
+                  <a:srgbClr val="DB2777"/>
                 </a:solidFill>
                 <a:latin typeface="Calibri" pitchFamily="34" charset="0"/>
                 <a:ea typeface="Calibri" pitchFamily="34" charset="-122"/>
@@ -5863,7 +5863,7 @@
             <a:r>
               <a:rPr lang="en-US" sz="1400" dirty="0">
                 <a:solidFill>
-                  <a:srgbClr val="E2E8F0"/>
+                  <a:srgbClr val="334155"/>
                 </a:solidFill>
                 <a:latin typeface="Calibri" pitchFamily="34" charset="0"/>
                 <a:ea typeface="Calibri" pitchFamily="34" charset="-122"/>
@@ -5880,7 +5880,7 @@
             <a:r>
               <a:rPr lang="en-US" sz="1400" b="1" dirty="0">
                 <a:solidFill>
-                  <a:srgbClr val="34D399"/>
+                  <a:srgbClr val="059669"/>
                 </a:solidFill>
                 <a:latin typeface="Calibri" pitchFamily="34" charset="0"/>
                 <a:ea typeface="Calibri" pitchFamily="34" charset="-122"/>
@@ -6004,7 +6004,7 @@
     <p:bg>
       <p:bgPr>
         <a:solidFill>
-          <a:srgbClr val="151025"/>
+          <a:srgbClr val="F8FAFC"/>
         </a:solidFill>
       </p:bgPr>
     </p:bg>
@@ -6037,13 +6037,13 @@
             <a:avLst/>
           </a:prstGeom>
           <a:solidFill>
-            <a:srgbClr val="818CF8">
+            <a:srgbClr val="4F46E5">
               <a:alpha val="15000"/>
             </a:srgbClr>
           </a:solidFill>
           <a:ln w="12700">
             <a:solidFill>
-              <a:srgbClr val="818CF8">
+              <a:srgbClr val="4F46E5">
                 <a:alpha val="15000"/>
               </a:srgbClr>
             </a:solidFill>
@@ -6066,13 +6066,13 @@
             <a:avLst/>
           </a:prstGeom>
           <a:solidFill>
-            <a:srgbClr val="F472B6">
+            <a:srgbClr val="DB2777">
               <a:alpha val="12000"/>
             </a:srgbClr>
           </a:solidFill>
           <a:ln w="12700">
             <a:solidFill>
-              <a:srgbClr val="F472B6">
+              <a:srgbClr val="DB2777">
                 <a:alpha val="12000"/>
               </a:srgbClr>
             </a:solidFill>
@@ -6095,11 +6095,11 @@
             <a:avLst/>
           </a:prstGeom>
           <a:solidFill>
-            <a:srgbClr val="FBBF24"/>
+            <a:srgbClr val="D97706"/>
           </a:solidFill>
           <a:ln w="12700">
             <a:solidFill>
-              <a:srgbClr val="FBBF24"/>
+              <a:srgbClr val="D97706"/>
             </a:solidFill>
             <a:prstDash val="solid"/>
           </a:ln>
@@ -6132,7 +6132,7 @@
             <a:r>
               <a:rPr lang="en-US" sz="1300" b="1" spc="1000" kern="0" dirty="0">
                 <a:solidFill>
-                  <a:srgbClr val="FBBF24"/>
+                  <a:srgbClr val="D97706"/>
                 </a:solidFill>
                 <a:latin typeface="Calibri" pitchFamily="34" charset="0"/>
                 <a:ea typeface="Calibri" pitchFamily="34" charset="-122"/>
@@ -6171,7 +6171,7 @@
             <a:r>
               <a:rPr lang="en-US" sz="3600" b="1" dirty="0">
                 <a:solidFill>
-                  <a:srgbClr val="FFFFFF"/>
+                  <a:srgbClr val="0F172A"/>
                 </a:solidFill>
                 <a:latin typeface="Cambria" pitchFamily="34" charset="0"/>
                 <a:ea typeface="Cambria" pitchFamily="34" charset="-122"/>
@@ -6198,11 +6198,11 @@
             <a:avLst/>
           </a:prstGeom>
           <a:solidFill>
-            <a:srgbClr val="F472B6"/>
+            <a:srgbClr val="DB2777"/>
           </a:solidFill>
           <a:ln w="12700">
             <a:solidFill>
-              <a:srgbClr val="F472B6"/>
+              <a:srgbClr val="DB2777"/>
             </a:solidFill>
             <a:prstDash val="solid"/>
           </a:ln>
@@ -6246,11 +6246,11 @@
             <a:avLst/>
           </a:prstGeom>
           <a:solidFill>
-            <a:srgbClr val="1E1A3A"/>
+            <a:srgbClr val="FFFFFF"/>
           </a:solidFill>
           <a:ln w="12700">
             <a:solidFill>
-              <a:srgbClr val="1E1A3A"/>
+              <a:srgbClr val="E2E8F0"/>
             </a:solidFill>
             <a:prstDash val="solid"/>
           </a:ln>
@@ -6271,11 +6271,11 @@
             <a:avLst/>
           </a:prstGeom>
           <a:solidFill>
-            <a:srgbClr val="34D399"/>
+            <a:srgbClr val="059669"/>
           </a:solidFill>
           <a:ln w="12700">
             <a:solidFill>
-              <a:srgbClr val="34D399"/>
+              <a:srgbClr val="059669"/>
             </a:solidFill>
             <a:prstDash val="solid"/>
           </a:ln>
@@ -6308,7 +6308,7 @@
             <a:r>
               <a:rPr lang="en-US" sz="1900" b="1" dirty="0">
                 <a:solidFill>
-                  <a:srgbClr val="34D399"/>
+                  <a:srgbClr val="059669"/>
                 </a:solidFill>
                 <a:latin typeface="Cambria" pitchFamily="34" charset="0"/>
                 <a:ea typeface="Cambria" pitchFamily="34" charset="-122"/>
@@ -6350,7 +6350,7 @@
             <a:r>
               <a:rPr lang="en-US" sz="1400" dirty="0">
                 <a:solidFill>
-                  <a:srgbClr val="E2E8F0"/>
+                  <a:srgbClr val="334155"/>
                 </a:solidFill>
                 <a:latin typeface="Calibri" pitchFamily="34" charset="0"/>
                 <a:ea typeface="Calibri" pitchFamily="34" charset="-122"/>
@@ -6367,7 +6367,7 @@
             <a:r>
               <a:rPr lang="en-US" sz="1400" b="1" dirty="0">
                 <a:solidFill>
-                  <a:srgbClr val="FFFFFF"/>
+                  <a:srgbClr val="0F172A"/>
                 </a:solidFill>
                 <a:latin typeface="Calibri" pitchFamily="34" charset="0"/>
                 <a:ea typeface="Calibri" pitchFamily="34" charset="-122"/>
@@ -6385,7 +6385,7 @@
             <a:r>
               <a:rPr lang="en-US" sz="1400" dirty="0">
                 <a:solidFill>
-                  <a:srgbClr val="E2E8F0"/>
+                  <a:srgbClr val="334155"/>
                 </a:solidFill>
                 <a:latin typeface="Calibri" pitchFamily="34" charset="0"/>
                 <a:ea typeface="Calibri" pitchFamily="34" charset="-122"/>
@@ -6403,7 +6403,7 @@
             <a:r>
               <a:rPr lang="en-US" sz="1400" dirty="0">
                 <a:solidFill>
-                  <a:srgbClr val="E2E8F0"/>
+                  <a:srgbClr val="334155"/>
                 </a:solidFill>
                 <a:latin typeface="Calibri" pitchFamily="34" charset="0"/>
                 <a:ea typeface="Calibri" pitchFamily="34" charset="-122"/>
@@ -6420,7 +6420,7 @@
             <a:r>
               <a:rPr lang="en-US" sz="1400" b="1" dirty="0">
                 <a:solidFill>
-                  <a:srgbClr val="FFFFFF"/>
+                  <a:srgbClr val="0F172A"/>
                 </a:solidFill>
                 <a:latin typeface="Calibri" pitchFamily="34" charset="0"/>
                 <a:ea typeface="Calibri" pitchFamily="34" charset="-122"/>
@@ -6437,7 +6437,7 @@
             <a:r>
               <a:rPr lang="en-US" sz="1400" dirty="0">
                 <a:solidFill>
-                  <a:srgbClr val="E2E8F0"/>
+                  <a:srgbClr val="334155"/>
                 </a:solidFill>
                 <a:latin typeface="Calibri" pitchFamily="34" charset="0"/>
                 <a:ea typeface="Calibri" pitchFamily="34" charset="-122"/>
@@ -6455,7 +6455,7 @@
             <a:r>
               <a:rPr lang="en-US" sz="1400" dirty="0">
                 <a:solidFill>
-                  <a:srgbClr val="E2E8F0"/>
+                  <a:srgbClr val="334155"/>
                 </a:solidFill>
                 <a:latin typeface="Calibri" pitchFamily="34" charset="0"/>
                 <a:ea typeface="Calibri" pitchFamily="34" charset="-122"/>
@@ -6472,7 +6472,7 @@
             <a:r>
               <a:rPr lang="en-US" sz="1400" b="1" dirty="0">
                 <a:solidFill>
-                  <a:srgbClr val="34D399"/>
+                  <a:srgbClr val="059669"/>
                 </a:solidFill>
                 <a:latin typeface="Calibri" pitchFamily="34" charset="0"/>
                 <a:ea typeface="Calibri" pitchFamily="34" charset="-122"/>
@@ -6489,7 +6489,7 @@
             <a:r>
               <a:rPr lang="en-US" sz="1400" dirty="0">
                 <a:solidFill>
-                  <a:srgbClr val="E2E8F0"/>
+                  <a:srgbClr val="334155"/>
                 </a:solidFill>
                 <a:latin typeface="Calibri" pitchFamily="34" charset="0"/>
                 <a:ea typeface="Calibri" pitchFamily="34" charset="-122"/>
@@ -6613,7 +6613,7 @@
     <p:bg>
       <p:bgPr>
         <a:solidFill>
-          <a:srgbClr val="151025"/>
+          <a:srgbClr val="F8FAFC"/>
         </a:solidFill>
       </p:bgPr>
     </p:bg>
@@ -6646,13 +6646,13 @@
             <a:avLst/>
           </a:prstGeom>
           <a:solidFill>
-            <a:srgbClr val="818CF8">
+            <a:srgbClr val="4F46E5">
               <a:alpha val="15000"/>
             </a:srgbClr>
           </a:solidFill>
           <a:ln w="12700">
             <a:solidFill>
-              <a:srgbClr val="818CF8">
+              <a:srgbClr val="4F46E5">
                 <a:alpha val="15000"/>
               </a:srgbClr>
             </a:solidFill>
@@ -6675,13 +6675,13 @@
             <a:avLst/>
           </a:prstGeom>
           <a:solidFill>
-            <a:srgbClr val="F472B6">
+            <a:srgbClr val="DB2777">
               <a:alpha val="12000"/>
             </a:srgbClr>
           </a:solidFill>
           <a:ln w="12700">
             <a:solidFill>
-              <a:srgbClr val="F472B6">
+              <a:srgbClr val="DB2777">
                 <a:alpha val="12000"/>
               </a:srgbClr>
             </a:solidFill>
@@ -6704,11 +6704,11 @@
             <a:avLst/>
           </a:prstGeom>
           <a:solidFill>
-            <a:srgbClr val="FBBF24"/>
+            <a:srgbClr val="D97706"/>
           </a:solidFill>
           <a:ln w="12700">
             <a:solidFill>
-              <a:srgbClr val="FBBF24"/>
+              <a:srgbClr val="D97706"/>
             </a:solidFill>
             <a:prstDash val="solid"/>
           </a:ln>
@@ -6741,7 +6741,7 @@
             <a:r>
               <a:rPr lang="en-US" sz="1300" b="1" spc="1000" kern="0" dirty="0">
                 <a:solidFill>
-                  <a:srgbClr val="FBBF24"/>
+                  <a:srgbClr val="D97706"/>
                 </a:solidFill>
                 <a:latin typeface="Calibri" pitchFamily="34" charset="0"/>
                 <a:ea typeface="Calibri" pitchFamily="34" charset="-122"/>
@@ -6780,7 +6780,7 @@
             <a:r>
               <a:rPr lang="en-US" sz="3600" b="1" dirty="0">
                 <a:solidFill>
-                  <a:srgbClr val="FFFFFF"/>
+                  <a:srgbClr val="0F172A"/>
                 </a:solidFill>
                 <a:latin typeface="Cambria" pitchFamily="34" charset="0"/>
                 <a:ea typeface="Cambria" pitchFamily="34" charset="-122"/>
@@ -6807,11 +6807,11 @@
             <a:avLst/>
           </a:prstGeom>
           <a:solidFill>
-            <a:srgbClr val="F472B6"/>
+            <a:srgbClr val="DB2777"/>
           </a:solidFill>
           <a:ln w="12700">
             <a:solidFill>
-              <a:srgbClr val="F472B6"/>
+              <a:srgbClr val="DB2777"/>
             </a:solidFill>
             <a:prstDash val="solid"/>
           </a:ln>
@@ -6844,7 +6844,7 @@
             <a:r>
               <a:rPr lang="en-US" sz="1900" i="1" dirty="0">
                 <a:solidFill>
-                  <a:srgbClr val="E2E8F0"/>
+                  <a:srgbClr val="334155"/>
                 </a:solidFill>
                 <a:latin typeface="Calibri" pitchFamily="34" charset="0"/>
                 <a:ea typeface="Calibri" pitchFamily="34" charset="-122"/>
@@ -6894,11 +6894,11 @@
             <a:avLst/>
           </a:prstGeom>
           <a:solidFill>
-            <a:srgbClr val="1E1A3A"/>
+            <a:srgbClr val="FFFFFF"/>
           </a:solidFill>
           <a:ln w="12700">
             <a:solidFill>
-              <a:srgbClr val="1E1A3A"/>
+              <a:srgbClr val="E2E8F0"/>
             </a:solidFill>
             <a:prstDash val="solid"/>
           </a:ln>
@@ -6919,11 +6919,11 @@
             <a:avLst/>
           </a:prstGeom>
           <a:solidFill>
-            <a:srgbClr val="818CF8"/>
+            <a:srgbClr val="4F46E5"/>
           </a:solidFill>
           <a:ln w="12700">
             <a:solidFill>
-              <a:srgbClr val="818CF8"/>
+              <a:srgbClr val="4F46E5"/>
             </a:solidFill>
             <a:prstDash val="solid"/>
           </a:ln>
@@ -6959,7 +6959,7 @@
             <a:r>
               <a:rPr lang="en-US" sz="1700" b="1" dirty="0">
                 <a:solidFill>
-                  <a:srgbClr val="818CF8"/>
+                  <a:srgbClr val="4F46E5"/>
                 </a:solidFill>
                 <a:latin typeface="Calibri" pitchFamily="34" charset="0"/>
                 <a:ea typeface="Calibri" pitchFamily="34" charset="-122"/>
@@ -6977,7 +6977,7 @@
             <a:r>
               <a:rPr lang="en-US" sz="1400" dirty="0">
                 <a:solidFill>
-                  <a:srgbClr val="E2E8F0"/>
+                  <a:srgbClr val="334155"/>
                 </a:solidFill>
                 <a:latin typeface="Calibri" pitchFamily="34" charset="0"/>
                 <a:ea typeface="Calibri" pitchFamily="34" charset="-122"/>
@@ -7004,11 +7004,11 @@
             <a:avLst/>
           </a:prstGeom>
           <a:solidFill>
-            <a:srgbClr val="1E1A3A"/>
+            <a:srgbClr val="FFFFFF"/>
           </a:solidFill>
           <a:ln w="12700">
             <a:solidFill>
-              <a:srgbClr val="1E1A3A"/>
+              <a:srgbClr val="E2E8F0"/>
             </a:solidFill>
             <a:prstDash val="solid"/>
           </a:ln>
@@ -7029,11 +7029,11 @@
             <a:avLst/>
           </a:prstGeom>
           <a:solidFill>
-            <a:srgbClr val="F472B6"/>
+            <a:srgbClr val="DB2777"/>
           </a:solidFill>
           <a:ln w="12700">
             <a:solidFill>
-              <a:srgbClr val="F472B6"/>
+              <a:srgbClr val="DB2777"/>
             </a:solidFill>
             <a:prstDash val="solid"/>
           </a:ln>
@@ -7069,7 +7069,7 @@
             <a:r>
               <a:rPr lang="en-US" sz="1700" b="1" dirty="0">
                 <a:solidFill>
-                  <a:srgbClr val="F472B6"/>
+                  <a:srgbClr val="DB2777"/>
                 </a:solidFill>
                 <a:latin typeface="Calibri" pitchFamily="34" charset="0"/>
                 <a:ea typeface="Calibri" pitchFamily="34" charset="-122"/>
@@ -7087,7 +7087,7 @@
             <a:r>
               <a:rPr lang="en-US" sz="1400" dirty="0">
                 <a:solidFill>
-                  <a:srgbClr val="E2E8F0"/>
+                  <a:srgbClr val="334155"/>
                 </a:solidFill>
                 <a:latin typeface="Calibri" pitchFamily="34" charset="0"/>
                 <a:ea typeface="Calibri" pitchFamily="34" charset="-122"/>
@@ -7114,11 +7114,11 @@
             <a:avLst/>
           </a:prstGeom>
           <a:solidFill>
-            <a:srgbClr val="1E1A3A"/>
+            <a:srgbClr val="FFFFFF"/>
           </a:solidFill>
           <a:ln w="12700">
             <a:solidFill>
-              <a:srgbClr val="1E1A3A"/>
+              <a:srgbClr val="E2E8F0"/>
             </a:solidFill>
             <a:prstDash val="solid"/>
           </a:ln>
@@ -7139,11 +7139,11 @@
             <a:avLst/>
           </a:prstGeom>
           <a:solidFill>
-            <a:srgbClr val="FBBF24"/>
+            <a:srgbClr val="D97706"/>
           </a:solidFill>
           <a:ln w="12700">
             <a:solidFill>
-              <a:srgbClr val="FBBF24"/>
+              <a:srgbClr val="D97706"/>
             </a:solidFill>
             <a:prstDash val="solid"/>
           </a:ln>
@@ -7179,7 +7179,7 @@
             <a:r>
               <a:rPr lang="en-US" sz="1700" b="1" dirty="0">
                 <a:solidFill>
-                  <a:srgbClr val="FBBF24"/>
+                  <a:srgbClr val="D97706"/>
                 </a:solidFill>
                 <a:latin typeface="Calibri" pitchFamily="34" charset="0"/>
                 <a:ea typeface="Calibri" pitchFamily="34" charset="-122"/>
@@ -7197,7 +7197,7 @@
             <a:r>
               <a:rPr lang="en-US" sz="1400" dirty="0">
                 <a:solidFill>
-                  <a:srgbClr val="E2E8F0"/>
+                  <a:srgbClr val="334155"/>
                 </a:solidFill>
                 <a:latin typeface="Calibri" pitchFamily="34" charset="0"/>
                 <a:ea typeface="Calibri" pitchFamily="34" charset="-122"/>
@@ -7321,7 +7321,7 @@
     <p:bg>
       <p:bgPr>
         <a:solidFill>
-          <a:srgbClr val="151025"/>
+          <a:srgbClr val="F8FAFC"/>
         </a:solidFill>
       </p:bgPr>
     </p:bg>
@@ -7354,13 +7354,13 @@
             <a:avLst/>
           </a:prstGeom>
           <a:solidFill>
-            <a:srgbClr val="818CF8">
+            <a:srgbClr val="4F46E5">
               <a:alpha val="15000"/>
             </a:srgbClr>
           </a:solidFill>
           <a:ln w="12700">
             <a:solidFill>
-              <a:srgbClr val="818CF8">
+              <a:srgbClr val="4F46E5">
                 <a:alpha val="15000"/>
               </a:srgbClr>
             </a:solidFill>
@@ -7383,13 +7383,13 @@
             <a:avLst/>
           </a:prstGeom>
           <a:solidFill>
-            <a:srgbClr val="F472B6">
+            <a:srgbClr val="DB2777">
               <a:alpha val="12000"/>
             </a:srgbClr>
           </a:solidFill>
           <a:ln w="12700">
             <a:solidFill>
-              <a:srgbClr val="F472B6">
+              <a:srgbClr val="DB2777">
                 <a:alpha val="12000"/>
               </a:srgbClr>
             </a:solidFill>
@@ -7412,11 +7412,11 @@
             <a:avLst/>
           </a:prstGeom>
           <a:solidFill>
-            <a:srgbClr val="FBBF24"/>
+            <a:srgbClr val="D97706"/>
           </a:solidFill>
           <a:ln w="12700">
             <a:solidFill>
-              <a:srgbClr val="FBBF24"/>
+              <a:srgbClr val="D97706"/>
             </a:solidFill>
             <a:prstDash val="solid"/>
           </a:ln>
@@ -7449,7 +7449,7 @@
             <a:r>
               <a:rPr lang="en-US" sz="1300" b="1" spc="1000" kern="0" dirty="0">
                 <a:solidFill>
-                  <a:srgbClr val="FBBF24"/>
+                  <a:srgbClr val="D97706"/>
                 </a:solidFill>
                 <a:latin typeface="Calibri" pitchFamily="34" charset="0"/>
                 <a:ea typeface="Calibri" pitchFamily="34" charset="-122"/>
@@ -7488,7 +7488,7 @@
             <a:r>
               <a:rPr lang="en-US" sz="3600" b="1" dirty="0">
                 <a:solidFill>
-                  <a:srgbClr val="FFFFFF"/>
+                  <a:srgbClr val="0F172A"/>
                 </a:solidFill>
                 <a:latin typeface="Cambria" pitchFamily="34" charset="0"/>
                 <a:ea typeface="Cambria" pitchFamily="34" charset="-122"/>
@@ -7515,11 +7515,11 @@
             <a:avLst/>
           </a:prstGeom>
           <a:solidFill>
-            <a:srgbClr val="F472B6"/>
+            <a:srgbClr val="DB2777"/>
           </a:solidFill>
           <a:ln w="12700">
             <a:solidFill>
-              <a:srgbClr val="F472B6"/>
+              <a:srgbClr val="DB2777"/>
             </a:solidFill>
             <a:prstDash val="solid"/>
           </a:ln>
@@ -7540,11 +7540,11 @@
             <a:avLst/>
           </a:prstGeom>
           <a:solidFill>
-            <a:srgbClr val="1E1A3A"/>
+            <a:srgbClr val="FFFFFF"/>
           </a:solidFill>
           <a:ln w="12700">
             <a:solidFill>
-              <a:srgbClr val="1E1A3A"/>
+              <a:srgbClr val="E2E8F0"/>
             </a:solidFill>
             <a:prstDash val="solid"/>
           </a:ln>
@@ -7565,11 +7565,11 @@
             <a:avLst/>
           </a:prstGeom>
           <a:solidFill>
-            <a:srgbClr val="34D399"/>
+            <a:srgbClr val="059669"/>
           </a:solidFill>
           <a:ln w="12700">
             <a:solidFill>
-              <a:srgbClr val="34D399"/>
+              <a:srgbClr val="059669"/>
             </a:solidFill>
             <a:prstDash val="solid"/>
           </a:ln>
@@ -7602,7 +7602,7 @@
             <a:r>
               <a:rPr lang="en-US" sz="2100" b="1" dirty="0">
                 <a:solidFill>
-                  <a:srgbClr val="34D399"/>
+                  <a:srgbClr val="059669"/>
                 </a:solidFill>
                 <a:latin typeface="Cambria" pitchFamily="34" charset="0"/>
                 <a:ea typeface="Cambria" pitchFamily="34" charset="-122"/>
@@ -7629,11 +7629,11 @@
             <a:avLst/>
           </a:prstGeom>
           <a:solidFill>
-            <a:srgbClr val="151025"/>
+            <a:srgbClr val="F8FAFC"/>
           </a:solidFill>
           <a:ln w="12700">
             <a:solidFill>
-              <a:srgbClr val="151025"/>
+              <a:srgbClr val="F8FAFC"/>
             </a:solidFill>
             <a:prstDash val="solid"/>
           </a:ln>
@@ -7720,7 +7720,7 @@
             <a:r>
               <a:rPr lang="en-US" sz="1800" b="1" dirty="0">
                 <a:solidFill>
-                  <a:srgbClr val="34D399"/>
+                  <a:srgbClr val="059669"/>
                 </a:solidFill>
                 <a:latin typeface="Calibri" pitchFamily="34" charset="0"/>
                 <a:ea typeface="Calibri" pitchFamily="34" charset="-122"/>
@@ -7762,7 +7762,7 @@
             <a:r>
               <a:rPr lang="en-US" sz="1600" b="1" dirty="0">
                 <a:solidFill>
-                  <a:srgbClr val="FBBF24"/>
+                  <a:srgbClr val="D97706"/>
                 </a:solidFill>
                 <a:latin typeface="Calibri" pitchFamily="34" charset="0"/>
                 <a:ea typeface="Calibri" pitchFamily="34" charset="-122"/>
@@ -7779,7 +7779,7 @@
             <a:r>
               <a:rPr lang="en-US" sz="1600" dirty="0">
                 <a:solidFill>
-                  <a:srgbClr val="E2E8F0"/>
+                  <a:srgbClr val="334155"/>
                 </a:solidFill>
                 <a:latin typeface="Calibri" pitchFamily="34" charset="0"/>
                 <a:ea typeface="Calibri" pitchFamily="34" charset="-122"/>
@@ -7797,7 +7797,7 @@
             <a:r>
               <a:rPr lang="en-US" sz="1600" b="1" dirty="0">
                 <a:solidFill>
-                  <a:srgbClr val="FBBF24"/>
+                  <a:srgbClr val="D97706"/>
                 </a:solidFill>
                 <a:latin typeface="Calibri" pitchFamily="34" charset="0"/>
                 <a:ea typeface="Calibri" pitchFamily="34" charset="-122"/>
@@ -7814,7 +7814,7 @@
             <a:r>
               <a:rPr lang="en-US" sz="1600" dirty="0">
                 <a:solidFill>
-                  <a:srgbClr val="E2E8F0"/>
+                  <a:srgbClr val="334155"/>
                 </a:solidFill>
                 <a:latin typeface="Calibri" pitchFamily="34" charset="0"/>
                 <a:ea typeface="Calibri" pitchFamily="34" charset="-122"/>
@@ -7832,7 +7832,7 @@
             <a:r>
               <a:rPr lang="en-US" sz="1600" b="1" dirty="0">
                 <a:solidFill>
-                  <a:srgbClr val="FBBF24"/>
+                  <a:srgbClr val="D97706"/>
                 </a:solidFill>
                 <a:latin typeface="Calibri" pitchFamily="34" charset="0"/>
                 <a:ea typeface="Calibri" pitchFamily="34" charset="-122"/>
@@ -7849,7 +7849,7 @@
             <a:r>
               <a:rPr lang="en-US" sz="1600" dirty="0">
                 <a:solidFill>
-                  <a:srgbClr val="E2E8F0"/>
+                  <a:srgbClr val="334155"/>
                 </a:solidFill>
                 <a:latin typeface="Calibri" pitchFamily="34" charset="0"/>
                 <a:ea typeface="Calibri" pitchFamily="34" charset="-122"/>
@@ -7867,7 +7867,7 @@
             <a:r>
               <a:rPr lang="en-US" sz="1600" b="1" dirty="0">
                 <a:solidFill>
-                  <a:srgbClr val="FBBF24"/>
+                  <a:srgbClr val="D97706"/>
                 </a:solidFill>
                 <a:latin typeface="Calibri" pitchFamily="34" charset="0"/>
                 <a:ea typeface="Calibri" pitchFamily="34" charset="-122"/>
@@ -7884,7 +7884,7 @@
             <a:r>
               <a:rPr lang="en-US" sz="1600" dirty="0">
                 <a:solidFill>
-                  <a:srgbClr val="E2E8F0"/>
+                  <a:srgbClr val="334155"/>
                 </a:solidFill>
                 <a:latin typeface="Calibri" pitchFamily="34" charset="0"/>
                 <a:ea typeface="Calibri" pitchFamily="34" charset="-122"/>
@@ -8031,7 +8031,7 @@
     <p:bg>
       <p:bgPr>
         <a:solidFill>
-          <a:srgbClr val="151025"/>
+          <a:srgbClr val="F8FAFC"/>
         </a:solidFill>
       </p:bgPr>
     </p:bg>
@@ -8064,13 +8064,13 @@
             <a:avLst/>
           </a:prstGeom>
           <a:solidFill>
-            <a:srgbClr val="818CF8">
+            <a:srgbClr val="4F46E5">
               <a:alpha val="15000"/>
             </a:srgbClr>
           </a:solidFill>
           <a:ln w="12700">
             <a:solidFill>
-              <a:srgbClr val="818CF8">
+              <a:srgbClr val="4F46E5">
                 <a:alpha val="15000"/>
               </a:srgbClr>
             </a:solidFill>
@@ -8093,13 +8093,13 @@
             <a:avLst/>
           </a:prstGeom>
           <a:solidFill>
-            <a:srgbClr val="F472B6">
+            <a:srgbClr val="DB2777">
               <a:alpha val="12000"/>
             </a:srgbClr>
           </a:solidFill>
           <a:ln w="12700">
             <a:solidFill>
-              <a:srgbClr val="F472B6">
+              <a:srgbClr val="DB2777">
                 <a:alpha val="12000"/>
               </a:srgbClr>
             </a:solidFill>
@@ -8122,11 +8122,11 @@
             <a:avLst/>
           </a:prstGeom>
           <a:solidFill>
-            <a:srgbClr val="FBBF24"/>
+            <a:srgbClr val="D97706"/>
           </a:solidFill>
           <a:ln w="12700">
             <a:solidFill>
-              <a:srgbClr val="FBBF24"/>
+              <a:srgbClr val="D97706"/>
             </a:solidFill>
             <a:prstDash val="solid"/>
           </a:ln>
@@ -8159,7 +8159,7 @@
             <a:r>
               <a:rPr lang="en-US" sz="1300" b="1" spc="1000" kern="0" dirty="0">
                 <a:solidFill>
-                  <a:srgbClr val="FBBF24"/>
+                  <a:srgbClr val="D97706"/>
                 </a:solidFill>
                 <a:latin typeface="Calibri" pitchFamily="34" charset="0"/>
                 <a:ea typeface="Calibri" pitchFamily="34" charset="-122"/>
@@ -8198,7 +8198,7 @@
             <a:r>
               <a:rPr lang="en-US" sz="3600" b="1" dirty="0">
                 <a:solidFill>
-                  <a:srgbClr val="FFFFFF"/>
+                  <a:srgbClr val="0F172A"/>
                 </a:solidFill>
                 <a:latin typeface="Cambria" pitchFamily="34" charset="0"/>
                 <a:ea typeface="Cambria" pitchFamily="34" charset="-122"/>
@@ -8225,11 +8225,11 @@
             <a:avLst/>
           </a:prstGeom>
           <a:solidFill>
-            <a:srgbClr val="F472B6"/>
+            <a:srgbClr val="DB2777"/>
           </a:solidFill>
           <a:ln w="12700">
             <a:solidFill>
-              <a:srgbClr val="F472B6"/>
+              <a:srgbClr val="DB2777"/>
             </a:solidFill>
             <a:prstDash val="solid"/>
           </a:ln>
@@ -8262,7 +8262,7 @@
             <a:r>
               <a:rPr lang="en-US" sz="1900" i="1" dirty="0">
                 <a:solidFill>
-                  <a:srgbClr val="E2E8F0"/>
+                  <a:srgbClr val="334155"/>
                 </a:solidFill>
                 <a:latin typeface="Calibri" pitchFamily="34" charset="0"/>
                 <a:ea typeface="Calibri" pitchFamily="34" charset="-122"/>
@@ -8289,11 +8289,11 @@
             <a:avLst/>
           </a:prstGeom>
           <a:solidFill>
-            <a:srgbClr val="1E1A3A"/>
+            <a:srgbClr val="FFFFFF"/>
           </a:solidFill>
           <a:ln w="12700">
             <a:solidFill>
-              <a:srgbClr val="1E1A3A"/>
+              <a:srgbClr val="E2E8F0"/>
             </a:solidFill>
             <a:prstDash val="solid"/>
           </a:ln>
@@ -8314,11 +8314,11 @@
             <a:avLst/>
           </a:prstGeom>
           <a:solidFill>
-            <a:srgbClr val="34D399"/>
+            <a:srgbClr val="059669"/>
           </a:solidFill>
           <a:ln w="12700">
             <a:solidFill>
-              <a:srgbClr val="34D399"/>
+              <a:srgbClr val="059669"/>
             </a:solidFill>
             <a:prstDash val="solid"/>
           </a:ln>
@@ -8354,7 +8354,7 @@
             <a:r>
               <a:rPr lang="en-US" sz="1900" b="1" dirty="0">
                 <a:solidFill>
-                  <a:srgbClr val="34D399"/>
+                  <a:srgbClr val="059669"/>
                 </a:solidFill>
                 <a:latin typeface="Calibri" pitchFamily="34" charset="0"/>
                 <a:ea typeface="Calibri" pitchFamily="34" charset="-122"/>
@@ -8371,7 +8371,7 @@
             <a:r>
               <a:rPr lang="en-US" sz="1600" dirty="0">
                 <a:solidFill>
-                  <a:srgbClr val="E2E8F0"/>
+                  <a:srgbClr val="334155"/>
                 </a:solidFill>
                 <a:latin typeface="Calibri" pitchFamily="34" charset="0"/>
                 <a:ea typeface="Calibri" pitchFamily="34" charset="-122"/>
@@ -8398,11 +8398,11 @@
             <a:avLst/>
           </a:prstGeom>
           <a:solidFill>
-            <a:srgbClr val="1E1A3A"/>
+            <a:srgbClr val="FFFFFF"/>
           </a:solidFill>
           <a:ln w="12700">
             <a:solidFill>
-              <a:srgbClr val="1E1A3A"/>
+              <a:srgbClr val="E2E8F0"/>
             </a:solidFill>
             <a:prstDash val="solid"/>
           </a:ln>
@@ -8423,11 +8423,11 @@
             <a:avLst/>
           </a:prstGeom>
           <a:solidFill>
-            <a:srgbClr val="818CF8"/>
+            <a:srgbClr val="4F46E5"/>
           </a:solidFill>
           <a:ln w="12700">
             <a:solidFill>
-              <a:srgbClr val="818CF8"/>
+              <a:srgbClr val="4F46E5"/>
             </a:solidFill>
             <a:prstDash val="solid"/>
           </a:ln>
@@ -8463,7 +8463,7 @@
             <a:r>
               <a:rPr lang="en-US" sz="1900" b="1" dirty="0">
                 <a:solidFill>
-                  <a:srgbClr val="818CF8"/>
+                  <a:srgbClr val="4F46E5"/>
                 </a:solidFill>
                 <a:latin typeface="Calibri" pitchFamily="34" charset="0"/>
                 <a:ea typeface="Calibri" pitchFamily="34" charset="-122"/>
@@ -8480,7 +8480,7 @@
             <a:r>
               <a:rPr lang="en-US" sz="1600" dirty="0">
                 <a:solidFill>
-                  <a:srgbClr val="E2E8F0"/>
+                  <a:srgbClr val="334155"/>
                 </a:solidFill>
                 <a:latin typeface="Calibri" pitchFamily="34" charset="0"/>
                 <a:ea typeface="Calibri" pitchFamily="34" charset="-122"/>
@@ -8507,11 +8507,11 @@
             <a:avLst/>
           </a:prstGeom>
           <a:solidFill>
-            <a:srgbClr val="1E1A3A"/>
+            <a:srgbClr val="FFFFFF"/>
           </a:solidFill>
           <a:ln w="12700">
             <a:solidFill>
-              <a:srgbClr val="1E1A3A"/>
+              <a:srgbClr val="E2E8F0"/>
             </a:solidFill>
             <a:prstDash val="solid"/>
           </a:ln>
@@ -8532,11 +8532,11 @@
             <a:avLst/>
           </a:prstGeom>
           <a:solidFill>
-            <a:srgbClr val="F472B6"/>
+            <a:srgbClr val="DB2777"/>
           </a:solidFill>
           <a:ln w="12700">
             <a:solidFill>
-              <a:srgbClr val="F472B6"/>
+              <a:srgbClr val="DB2777"/>
             </a:solidFill>
             <a:prstDash val="solid"/>
           </a:ln>
@@ -8572,7 +8572,7 @@
             <a:r>
               <a:rPr lang="en-US" sz="1900" b="1" dirty="0">
                 <a:solidFill>
-                  <a:srgbClr val="F472B6"/>
+                  <a:srgbClr val="DB2777"/>
                 </a:solidFill>
                 <a:latin typeface="Calibri" pitchFamily="34" charset="0"/>
                 <a:ea typeface="Calibri" pitchFamily="34" charset="-122"/>
@@ -8589,7 +8589,7 @@
             <a:r>
               <a:rPr lang="en-US" sz="1600" dirty="0">
                 <a:solidFill>
-                  <a:srgbClr val="E2E8F0"/>
+                  <a:srgbClr val="334155"/>
                 </a:solidFill>
                 <a:latin typeface="Calibri" pitchFamily="34" charset="0"/>
                 <a:ea typeface="Calibri" pitchFamily="34" charset="-122"/>
@@ -8616,11 +8616,11 @@
             <a:avLst/>
           </a:prstGeom>
           <a:solidFill>
-            <a:srgbClr val="FBBF24"/>
+            <a:srgbClr val="D97706"/>
           </a:solidFill>
           <a:ln w="12700">
             <a:solidFill>
-              <a:srgbClr val="FBBF24"/>
+              <a:srgbClr val="D97706"/>
             </a:solidFill>
             <a:prstDash val="solid"/>
           </a:ln>
@@ -8653,7 +8653,7 @@
             <a:r>
               <a:rPr lang="en-US" sz="1600" b="1" i="1" dirty="0">
                 <a:solidFill>
-                  <a:srgbClr val="151025"/>
+                  <a:srgbClr val="FFFFFF"/>
                 </a:solidFill>
                 <a:latin typeface="Calibri" pitchFamily="34" charset="0"/>
                 <a:ea typeface="Calibri" pitchFamily="34" charset="-122"/>
@@ -8777,7 +8777,7 @@
     <p:bg>
       <p:bgPr>
         <a:solidFill>
-          <a:srgbClr val="151025"/>
+          <a:srgbClr val="F8FAFC"/>
         </a:solidFill>
       </p:bgPr>
     </p:bg>
@@ -8810,13 +8810,13 @@
             <a:avLst/>
           </a:prstGeom>
           <a:solidFill>
-            <a:srgbClr val="818CF8">
+            <a:srgbClr val="4F46E5">
               <a:alpha val="15000"/>
             </a:srgbClr>
           </a:solidFill>
           <a:ln w="12700">
             <a:solidFill>
-              <a:srgbClr val="818CF8">
+              <a:srgbClr val="4F46E5">
                 <a:alpha val="15000"/>
               </a:srgbClr>
             </a:solidFill>
@@ -8839,13 +8839,13 @@
             <a:avLst/>
           </a:prstGeom>
           <a:solidFill>
-            <a:srgbClr val="F472B6">
+            <a:srgbClr val="DB2777">
               <a:alpha val="12000"/>
             </a:srgbClr>
           </a:solidFill>
           <a:ln w="12700">
             <a:solidFill>
-              <a:srgbClr val="F472B6">
+              <a:srgbClr val="DB2777">
                 <a:alpha val="12000"/>
               </a:srgbClr>
             </a:solidFill>
@@ -8868,11 +8868,11 @@
             <a:avLst/>
           </a:prstGeom>
           <a:solidFill>
-            <a:srgbClr val="FBBF24"/>
+            <a:srgbClr val="D97706"/>
           </a:solidFill>
           <a:ln w="12700">
             <a:solidFill>
-              <a:srgbClr val="FBBF24"/>
+              <a:srgbClr val="D97706"/>
             </a:solidFill>
             <a:prstDash val="solid"/>
           </a:ln>
@@ -8905,7 +8905,7 @@
             <a:r>
               <a:rPr lang="en-US" sz="1300" b="1" spc="1000" kern="0" dirty="0">
                 <a:solidFill>
-                  <a:srgbClr val="FBBF24"/>
+                  <a:srgbClr val="D97706"/>
                 </a:solidFill>
                 <a:latin typeface="Calibri" pitchFamily="34" charset="0"/>
                 <a:ea typeface="Calibri" pitchFamily="34" charset="-122"/>
@@ -8944,7 +8944,7 @@
             <a:r>
               <a:rPr lang="en-US" sz="3600" b="1" dirty="0">
                 <a:solidFill>
-                  <a:srgbClr val="FFFFFF"/>
+                  <a:srgbClr val="0F172A"/>
                 </a:solidFill>
                 <a:latin typeface="Cambria" pitchFamily="34" charset="0"/>
                 <a:ea typeface="Cambria" pitchFamily="34" charset="-122"/>
@@ -8971,11 +8971,11 @@
             <a:avLst/>
           </a:prstGeom>
           <a:solidFill>
-            <a:srgbClr val="F472B6"/>
+            <a:srgbClr val="DB2777"/>
           </a:solidFill>
           <a:ln w="12700">
             <a:solidFill>
-              <a:srgbClr val="F472B6"/>
+              <a:srgbClr val="DB2777"/>
             </a:solidFill>
             <a:prstDash val="solid"/>
           </a:ln>
@@ -9008,7 +9008,7 @@
             <a:r>
               <a:rPr lang="en-US" sz="1900" i="1" dirty="0">
                 <a:solidFill>
-                  <a:srgbClr val="E2E8F0"/>
+                  <a:srgbClr val="334155"/>
                 </a:solidFill>
                 <a:latin typeface="Calibri" pitchFamily="34" charset="0"/>
                 <a:ea typeface="Calibri" pitchFamily="34" charset="-122"/>
@@ -9035,11 +9035,11 @@
             <a:avLst/>
           </a:prstGeom>
           <a:solidFill>
-            <a:srgbClr val="1E1A3A"/>
+            <a:srgbClr val="FFFFFF"/>
           </a:solidFill>
           <a:ln w="12700">
             <a:solidFill>
-              <a:srgbClr val="1E1A3A"/>
+              <a:srgbClr val="E2E8F0"/>
             </a:solidFill>
             <a:prstDash val="solid"/>
           </a:ln>
@@ -9060,11 +9060,11 @@
             <a:avLst/>
           </a:prstGeom>
           <a:solidFill>
-            <a:srgbClr val="F472B6"/>
+            <a:srgbClr val="DB2777"/>
           </a:solidFill>
           <a:ln w="12700">
             <a:solidFill>
-              <a:srgbClr val="F472B6"/>
+              <a:srgbClr val="DB2777"/>
             </a:solidFill>
             <a:prstDash val="solid"/>
           </a:ln>
@@ -9097,7 +9097,7 @@
             <a:r>
               <a:rPr lang="en-US" sz="2100" b="1" dirty="0">
                 <a:solidFill>
-                  <a:srgbClr val="F472B6"/>
+                  <a:srgbClr val="DB2777"/>
                 </a:solidFill>
                 <a:latin typeface="Cambria" pitchFamily="34" charset="0"/>
                 <a:ea typeface="Cambria" pitchFamily="34" charset="-122"/>
@@ -9139,7 +9139,7 @@
             <a:r>
               <a:rPr lang="en-US" sz="1700" dirty="0">
                 <a:solidFill>
-                  <a:srgbClr val="E2E8F0"/>
+                  <a:srgbClr val="334155"/>
                 </a:solidFill>
                 <a:latin typeface="Calibri" pitchFamily="34" charset="0"/>
                 <a:ea typeface="Calibri" pitchFamily="34" charset="-122"/>
@@ -9156,7 +9156,7 @@
             <a:r>
               <a:rPr lang="en-US" sz="1700" b="1" dirty="0">
                 <a:solidFill>
-                  <a:srgbClr val="FFFFFF"/>
+                  <a:srgbClr val="0F172A"/>
                 </a:solidFill>
                 <a:latin typeface="Calibri" pitchFamily="34" charset="0"/>
                 <a:ea typeface="Calibri" pitchFamily="34" charset="-122"/>
@@ -9173,7 +9173,7 @@
             <a:r>
               <a:rPr lang="en-US" sz="1700" dirty="0">
                 <a:solidFill>
-                  <a:srgbClr val="E2E8F0"/>
+                  <a:srgbClr val="334155"/>
                 </a:solidFill>
                 <a:latin typeface="Calibri" pitchFamily="34" charset="0"/>
                 <a:ea typeface="Calibri" pitchFamily="34" charset="-122"/>
@@ -9191,7 +9191,7 @@
             <a:r>
               <a:rPr lang="en-US" sz="1700" dirty="0">
                 <a:solidFill>
-                  <a:srgbClr val="E2E8F0"/>
+                  <a:srgbClr val="334155"/>
                 </a:solidFill>
                 <a:latin typeface="Calibri" pitchFamily="34" charset="0"/>
                 <a:ea typeface="Calibri" pitchFamily="34" charset="-122"/>
@@ -9209,7 +9209,7 @@
             <a:r>
               <a:rPr lang="en-US" sz="1700" dirty="0">
                 <a:solidFill>
-                  <a:srgbClr val="E2E8F0"/>
+                  <a:srgbClr val="334155"/>
                 </a:solidFill>
                 <a:latin typeface="Calibri" pitchFamily="34" charset="0"/>
                 <a:ea typeface="Calibri" pitchFamily="34" charset="-122"/>
@@ -9226,7 +9226,7 @@
             <a:r>
               <a:rPr lang="en-US" sz="1700" b="1" dirty="0">
                 <a:solidFill>
-                  <a:srgbClr val="F472B6"/>
+                  <a:srgbClr val="DB2777"/>
                 </a:solidFill>
                 <a:latin typeface="Calibri" pitchFamily="34" charset="0"/>
                 <a:ea typeface="Calibri" pitchFamily="34" charset="-122"/>
@@ -9243,7 +9243,7 @@
             <a:r>
               <a:rPr lang="en-US" sz="1700" dirty="0">
                 <a:solidFill>
-                  <a:srgbClr val="E2E8F0"/>
+                  <a:srgbClr val="334155"/>
                 </a:solidFill>
                 <a:latin typeface="Calibri" pitchFamily="34" charset="0"/>
                 <a:ea typeface="Calibri" pitchFamily="34" charset="-122"/>
@@ -9270,11 +9270,11 @@
             <a:avLst/>
           </a:prstGeom>
           <a:solidFill>
-            <a:srgbClr val="1E1A3A"/>
+            <a:srgbClr val="FFFFFF"/>
           </a:solidFill>
           <a:ln w="12700">
             <a:solidFill>
-              <a:srgbClr val="1E1A3A"/>
+              <a:srgbClr val="E2E8F0"/>
             </a:solidFill>
             <a:prstDash val="solid"/>
           </a:ln>
@@ -9295,11 +9295,11 @@
             <a:avLst/>
           </a:prstGeom>
           <a:solidFill>
-            <a:srgbClr val="34D399"/>
+            <a:srgbClr val="059669"/>
           </a:solidFill>
           <a:ln w="12700">
             <a:solidFill>
-              <a:srgbClr val="34D399"/>
+              <a:srgbClr val="059669"/>
             </a:solidFill>
             <a:prstDash val="solid"/>
           </a:ln>
@@ -9332,7 +9332,7 @@
             <a:r>
               <a:rPr lang="en-US" sz="2100" b="1" dirty="0">
                 <a:solidFill>
-                  <a:srgbClr val="34D399"/>
+                  <a:srgbClr val="059669"/>
                 </a:solidFill>
                 <a:latin typeface="Cambria" pitchFamily="34" charset="0"/>
                 <a:ea typeface="Cambria" pitchFamily="34" charset="-122"/>
@@ -9374,7 +9374,7 @@
             <a:r>
               <a:rPr lang="en-US" sz="1700" dirty="0">
                 <a:solidFill>
-                  <a:srgbClr val="E2E8F0"/>
+                  <a:srgbClr val="334155"/>
                 </a:solidFill>
                 <a:latin typeface="Calibri" pitchFamily="34" charset="0"/>
                 <a:ea typeface="Calibri" pitchFamily="34" charset="-122"/>
@@ -9391,7 +9391,7 @@
             <a:r>
               <a:rPr lang="en-US" sz="1700" b="1" dirty="0">
                 <a:solidFill>
-                  <a:srgbClr val="FFFFFF"/>
+                  <a:srgbClr val="0F172A"/>
                 </a:solidFill>
                 <a:latin typeface="Calibri" pitchFamily="34" charset="0"/>
                 <a:ea typeface="Calibri" pitchFamily="34" charset="-122"/>
@@ -9408,7 +9408,7 @@
             <a:r>
               <a:rPr lang="en-US" sz="1700" dirty="0">
                 <a:solidFill>
-                  <a:srgbClr val="E2E8F0"/>
+                  <a:srgbClr val="334155"/>
                 </a:solidFill>
                 <a:latin typeface="Calibri" pitchFamily="34" charset="0"/>
                 <a:ea typeface="Calibri" pitchFamily="34" charset="-122"/>
@@ -9426,7 +9426,7 @@
             <a:r>
               <a:rPr lang="en-US" sz="1700" dirty="0">
                 <a:solidFill>
-                  <a:srgbClr val="E2E8F0"/>
+                  <a:srgbClr val="334155"/>
                 </a:solidFill>
                 <a:latin typeface="Calibri" pitchFamily="34" charset="0"/>
                 <a:ea typeface="Calibri" pitchFamily="34" charset="-122"/>
@@ -9443,7 +9443,7 @@
             <a:r>
               <a:rPr lang="en-US" sz="1700" b="1" dirty="0">
                 <a:solidFill>
-                  <a:srgbClr val="FFFFFF"/>
+                  <a:srgbClr val="0F172A"/>
                 </a:solidFill>
                 <a:latin typeface="Calibri" pitchFamily="34" charset="0"/>
                 <a:ea typeface="Calibri" pitchFamily="34" charset="-122"/>
@@ -9460,7 +9460,7 @@
             <a:r>
               <a:rPr lang="en-US" sz="1700" dirty="0">
                 <a:solidFill>
-                  <a:srgbClr val="E2E8F0"/>
+                  <a:srgbClr val="334155"/>
                 </a:solidFill>
                 <a:latin typeface="Calibri" pitchFamily="34" charset="0"/>
                 <a:ea typeface="Calibri" pitchFamily="34" charset="-122"/>
@@ -9478,7 +9478,7 @@
             <a:r>
               <a:rPr lang="en-US" sz="1700" dirty="0">
                 <a:solidFill>
-                  <a:srgbClr val="E2E8F0"/>
+                  <a:srgbClr val="334155"/>
                 </a:solidFill>
                 <a:latin typeface="Calibri" pitchFamily="34" charset="0"/>
                 <a:ea typeface="Calibri" pitchFamily="34" charset="-122"/>
@@ -9495,7 +9495,7 @@
             <a:r>
               <a:rPr lang="en-US" sz="1700" b="1" dirty="0">
                 <a:solidFill>
-                  <a:srgbClr val="34D399"/>
+                  <a:srgbClr val="059669"/>
                 </a:solidFill>
                 <a:latin typeface="Calibri" pitchFamily="34" charset="0"/>
                 <a:ea typeface="Calibri" pitchFamily="34" charset="-122"/>
@@ -9512,7 +9512,7 @@
             <a:r>
               <a:rPr lang="en-US" sz="1700" dirty="0">
                 <a:solidFill>
-                  <a:srgbClr val="E2E8F0"/>
+                  <a:srgbClr val="334155"/>
                 </a:solidFill>
                 <a:latin typeface="Calibri" pitchFamily="34" charset="0"/>
                 <a:ea typeface="Calibri" pitchFamily="34" charset="-122"/>
@@ -9636,7 +9636,7 @@
     <p:bg>
       <p:bgPr>
         <a:solidFill>
-          <a:srgbClr val="151025"/>
+          <a:srgbClr val="F8FAFC"/>
         </a:solidFill>
       </p:bgPr>
     </p:bg>
@@ -9669,13 +9669,13 @@
             <a:avLst/>
           </a:prstGeom>
           <a:solidFill>
-            <a:srgbClr val="818CF8">
+            <a:srgbClr val="4F46E5">
               <a:alpha val="15000"/>
             </a:srgbClr>
           </a:solidFill>
           <a:ln w="12700">
             <a:solidFill>
-              <a:srgbClr val="818CF8">
+              <a:srgbClr val="4F46E5">
                 <a:alpha val="15000"/>
               </a:srgbClr>
             </a:solidFill>
@@ -9698,13 +9698,13 @@
             <a:avLst/>
           </a:prstGeom>
           <a:solidFill>
-            <a:srgbClr val="F472B6">
+            <a:srgbClr val="DB2777">
               <a:alpha val="12000"/>
             </a:srgbClr>
           </a:solidFill>
           <a:ln w="12700">
             <a:solidFill>
-              <a:srgbClr val="F472B6">
+              <a:srgbClr val="DB2777">
                 <a:alpha val="12000"/>
               </a:srgbClr>
             </a:solidFill>
@@ -9727,11 +9727,11 @@
             <a:avLst/>
           </a:prstGeom>
           <a:solidFill>
-            <a:srgbClr val="FBBF24"/>
+            <a:srgbClr val="D97706"/>
           </a:solidFill>
           <a:ln w="12700">
             <a:solidFill>
-              <a:srgbClr val="FBBF24"/>
+              <a:srgbClr val="D97706"/>
             </a:solidFill>
             <a:prstDash val="solid"/>
           </a:ln>
@@ -9764,7 +9764,7 @@
             <a:r>
               <a:rPr lang="en-US" sz="1300" b="1" spc="1000" kern="0" dirty="0">
                 <a:solidFill>
-                  <a:srgbClr val="FBBF24"/>
+                  <a:srgbClr val="D97706"/>
                 </a:solidFill>
                 <a:latin typeface="Calibri" pitchFamily="34" charset="0"/>
                 <a:ea typeface="Calibri" pitchFamily="34" charset="-122"/>
@@ -9803,7 +9803,7 @@
             <a:r>
               <a:rPr lang="en-US" sz="3600" b="1" dirty="0">
                 <a:solidFill>
-                  <a:srgbClr val="FFFFFF"/>
+                  <a:srgbClr val="0F172A"/>
                 </a:solidFill>
                 <a:latin typeface="Cambria" pitchFamily="34" charset="0"/>
                 <a:ea typeface="Cambria" pitchFamily="34" charset="-122"/>
@@ -9830,11 +9830,11 @@
             <a:avLst/>
           </a:prstGeom>
           <a:solidFill>
-            <a:srgbClr val="F472B6"/>
+            <a:srgbClr val="DB2777"/>
           </a:solidFill>
           <a:ln w="12700">
             <a:solidFill>
-              <a:srgbClr val="F472B6"/>
+              <a:srgbClr val="DB2777"/>
             </a:solidFill>
             <a:prstDash val="solid"/>
           </a:ln>
@@ -9867,7 +9867,7 @@
             <a:r>
               <a:rPr lang="en-US" sz="1900" i="1" dirty="0">
                 <a:solidFill>
-                  <a:srgbClr val="E2E8F0"/>
+                  <a:srgbClr val="334155"/>
                 </a:solidFill>
                 <a:latin typeface="Calibri" pitchFamily="34" charset="0"/>
                 <a:ea typeface="Calibri" pitchFamily="34" charset="-122"/>
@@ -9894,11 +9894,11 @@
             <a:avLst/>
           </a:prstGeom>
           <a:solidFill>
-            <a:srgbClr val="1E1A3A"/>
+            <a:srgbClr val="FFFFFF"/>
           </a:solidFill>
           <a:ln w="25400">
             <a:solidFill>
-              <a:srgbClr val="FBBF24"/>
+              <a:srgbClr val="D97706"/>
             </a:solidFill>
             <a:prstDash val="solid"/>
           </a:ln>
@@ -9970,7 +9970,7 @@
             <a:r>
               <a:rPr lang="en-US" sz="1600" b="1" dirty="0">
                 <a:solidFill>
-                  <a:srgbClr val="FBBF24"/>
+                  <a:srgbClr val="D97706"/>
                 </a:solidFill>
                 <a:latin typeface="Cambria" pitchFamily="34" charset="0"/>
                 <a:ea typeface="Cambria" pitchFamily="34" charset="-122"/>
@@ -9984,7 +9984,7 @@
             <a:r>
               <a:rPr lang="en-US" sz="1500" dirty="0">
                 <a:solidFill>
-                  <a:srgbClr val="E2E8F0"/>
+                  <a:srgbClr val="334155"/>
                 </a:solidFill>
                 <a:latin typeface="Calibri" pitchFamily="34" charset="0"/>
                 <a:ea typeface="Calibri" pitchFamily="34" charset="-122"/>
@@ -10023,7 +10023,7 @@
             <a:r>
               <a:rPr lang="en-US" sz="1600" b="1" dirty="0">
                 <a:solidFill>
-                  <a:srgbClr val="FBBF24"/>
+                  <a:srgbClr val="D97706"/>
                 </a:solidFill>
                 <a:latin typeface="Cambria" pitchFamily="34" charset="0"/>
                 <a:ea typeface="Cambria" pitchFamily="34" charset="-122"/>
@@ -10037,7 +10037,7 @@
             <a:r>
               <a:rPr lang="en-US" sz="1500" dirty="0">
                 <a:solidFill>
-                  <a:srgbClr val="E2E8F0"/>
+                  <a:srgbClr val="334155"/>
                 </a:solidFill>
                 <a:latin typeface="Calibri" pitchFamily="34" charset="0"/>
                 <a:ea typeface="Calibri" pitchFamily="34" charset="-122"/>
@@ -10076,7 +10076,7 @@
             <a:r>
               <a:rPr lang="en-US" sz="1600" b="1" dirty="0">
                 <a:solidFill>
-                  <a:srgbClr val="FBBF24"/>
+                  <a:srgbClr val="D97706"/>
                 </a:solidFill>
                 <a:latin typeface="Cambria" pitchFamily="34" charset="0"/>
                 <a:ea typeface="Cambria" pitchFamily="34" charset="-122"/>
@@ -10090,7 +10090,7 @@
             <a:r>
               <a:rPr lang="en-US" sz="1500" dirty="0">
                 <a:solidFill>
-                  <a:srgbClr val="E2E8F0"/>
+                  <a:srgbClr val="334155"/>
                 </a:solidFill>
                 <a:latin typeface="Calibri" pitchFamily="34" charset="0"/>
                 <a:ea typeface="Calibri" pitchFamily="34" charset="-122"/>
@@ -10129,7 +10129,7 @@
             <a:r>
               <a:rPr lang="en-US" sz="1600" b="1" dirty="0">
                 <a:solidFill>
-                  <a:srgbClr val="FBBF24"/>
+                  <a:srgbClr val="D97706"/>
                 </a:solidFill>
                 <a:latin typeface="Cambria" pitchFamily="34" charset="0"/>
                 <a:ea typeface="Cambria" pitchFamily="34" charset="-122"/>
@@ -10143,7 +10143,7 @@
             <a:r>
               <a:rPr lang="en-US" sz="1500" dirty="0">
                 <a:solidFill>
-                  <a:srgbClr val="E2E8F0"/>
+                  <a:srgbClr val="334155"/>
                 </a:solidFill>
                 <a:latin typeface="Calibri" pitchFamily="34" charset="0"/>
                 <a:ea typeface="Calibri" pitchFamily="34" charset="-122"/>
@@ -10170,11 +10170,11 @@
             <a:avLst/>
           </a:prstGeom>
           <a:solidFill>
-            <a:srgbClr val="1E1A3A"/>
+            <a:srgbClr val="FFFFFF"/>
           </a:solidFill>
           <a:ln w="12700">
             <a:solidFill>
-              <a:srgbClr val="1E1A3A"/>
+              <a:srgbClr val="E2E8F0"/>
             </a:solidFill>
             <a:prstDash val="solid"/>
           </a:ln>
@@ -10195,11 +10195,11 @@
             <a:avLst/>
           </a:prstGeom>
           <a:solidFill>
-            <a:srgbClr val="818CF8"/>
+            <a:srgbClr val="4F46E5"/>
           </a:solidFill>
           <a:ln w="12700">
             <a:solidFill>
-              <a:srgbClr val="818CF8"/>
+              <a:srgbClr val="4F46E5"/>
             </a:solidFill>
             <a:prstDash val="solid"/>
           </a:ln>
@@ -10232,7 +10232,7 @@
             <a:r>
               <a:rPr lang="en-US" sz="2000" b="1" dirty="0">
                 <a:solidFill>
-                  <a:srgbClr val="818CF8"/>
+                  <a:srgbClr val="4F46E5"/>
                 </a:solidFill>
                 <a:latin typeface="Cambria" pitchFamily="34" charset="0"/>
                 <a:ea typeface="Cambria" pitchFamily="34" charset="-122"/>
@@ -10274,7 +10274,7 @@
             <a:r>
               <a:rPr lang="en-US" sz="1700" b="1" dirty="0">
                 <a:solidFill>
-                  <a:srgbClr val="34D399"/>
+                  <a:srgbClr val="059669"/>
                 </a:solidFill>
                 <a:latin typeface="Calibri" pitchFamily="34" charset="0"/>
                 <a:ea typeface="Calibri" pitchFamily="34" charset="-122"/>
@@ -10291,7 +10291,7 @@
             <a:r>
               <a:rPr lang="en-US" sz="1600" dirty="0">
                 <a:solidFill>
-                  <a:srgbClr val="E2E8F0"/>
+                  <a:srgbClr val="334155"/>
                 </a:solidFill>
                 <a:latin typeface="Calibri" pitchFamily="34" charset="0"/>
                 <a:ea typeface="Calibri" pitchFamily="34" charset="-122"/>
@@ -10327,7 +10327,7 @@
             <a:r>
               <a:rPr lang="en-US" sz="1700" b="1" dirty="0">
                 <a:solidFill>
-                  <a:srgbClr val="FBBF24"/>
+                  <a:srgbClr val="D97706"/>
                 </a:solidFill>
                 <a:latin typeface="Calibri" pitchFamily="34" charset="0"/>
                 <a:ea typeface="Calibri" pitchFamily="34" charset="-122"/>
@@ -10344,7 +10344,7 @@
             <a:r>
               <a:rPr lang="en-US" sz="1600" dirty="0">
                 <a:solidFill>
-                  <a:srgbClr val="E2E8F0"/>
+                  <a:srgbClr val="334155"/>
                 </a:solidFill>
                 <a:latin typeface="Calibri" pitchFamily="34" charset="0"/>
                 <a:ea typeface="Calibri" pitchFamily="34" charset="-122"/>
@@ -10380,7 +10380,7 @@
             <a:r>
               <a:rPr lang="en-US" sz="1700" b="1" dirty="0">
                 <a:solidFill>
-                  <a:srgbClr val="F472B6"/>
+                  <a:srgbClr val="DB2777"/>
                 </a:solidFill>
                 <a:latin typeface="Calibri" pitchFamily="34" charset="0"/>
                 <a:ea typeface="Calibri" pitchFamily="34" charset="-122"/>
@@ -10397,7 +10397,7 @@
             <a:r>
               <a:rPr lang="en-US" sz="1600" dirty="0">
                 <a:solidFill>
-                  <a:srgbClr val="E2E8F0"/>
+                  <a:srgbClr val="334155"/>
                 </a:solidFill>
                 <a:latin typeface="Calibri" pitchFamily="34" charset="0"/>
                 <a:ea typeface="Calibri" pitchFamily="34" charset="-122"/>
@@ -10539,7 +10539,7 @@
     <p:bg>
       <p:bgPr>
         <a:solidFill>
-          <a:srgbClr val="151025"/>
+          <a:srgbClr val="F8FAFC"/>
         </a:solidFill>
       </p:bgPr>
     </p:bg>
@@ -10572,13 +10572,13 @@
             <a:avLst/>
           </a:prstGeom>
           <a:solidFill>
-            <a:srgbClr val="818CF8">
+            <a:srgbClr val="4F46E5">
               <a:alpha val="15000"/>
             </a:srgbClr>
           </a:solidFill>
           <a:ln w="12700">
             <a:solidFill>
-              <a:srgbClr val="818CF8">
+              <a:srgbClr val="4F46E5">
                 <a:alpha val="15000"/>
               </a:srgbClr>
             </a:solidFill>
@@ -10601,13 +10601,13 @@
             <a:avLst/>
           </a:prstGeom>
           <a:solidFill>
-            <a:srgbClr val="F472B6">
+            <a:srgbClr val="DB2777">
               <a:alpha val="12000"/>
             </a:srgbClr>
           </a:solidFill>
           <a:ln w="12700">
             <a:solidFill>
-              <a:srgbClr val="F472B6">
+              <a:srgbClr val="DB2777">
                 <a:alpha val="12000"/>
               </a:srgbClr>
             </a:solidFill>
@@ -10630,11 +10630,11 @@
             <a:avLst/>
           </a:prstGeom>
           <a:solidFill>
-            <a:srgbClr val="FBBF24"/>
+            <a:srgbClr val="D97706"/>
           </a:solidFill>
           <a:ln w="12700">
             <a:solidFill>
-              <a:srgbClr val="FBBF24"/>
+              <a:srgbClr val="D97706"/>
             </a:solidFill>
             <a:prstDash val="solid"/>
           </a:ln>
@@ -10667,7 +10667,7 @@
             <a:r>
               <a:rPr lang="en-US" sz="1300" b="1" spc="1000" kern="0" dirty="0">
                 <a:solidFill>
-                  <a:srgbClr val="FBBF24"/>
+                  <a:srgbClr val="D97706"/>
                 </a:solidFill>
                 <a:latin typeface="Calibri" pitchFamily="34" charset="0"/>
                 <a:ea typeface="Calibri" pitchFamily="34" charset="-122"/>
@@ -10706,7 +10706,7 @@
             <a:r>
               <a:rPr lang="en-US" sz="3600" b="1" dirty="0">
                 <a:solidFill>
-                  <a:srgbClr val="FFFFFF"/>
+                  <a:srgbClr val="0F172A"/>
                 </a:solidFill>
                 <a:latin typeface="Cambria" pitchFamily="34" charset="0"/>
                 <a:ea typeface="Cambria" pitchFamily="34" charset="-122"/>
@@ -10733,11 +10733,11 @@
             <a:avLst/>
           </a:prstGeom>
           <a:solidFill>
-            <a:srgbClr val="F472B6"/>
+            <a:srgbClr val="DB2777"/>
           </a:solidFill>
           <a:ln w="12700">
             <a:solidFill>
-              <a:srgbClr val="F472B6"/>
+              <a:srgbClr val="DB2777"/>
             </a:solidFill>
             <a:prstDash val="solid"/>
           </a:ln>
@@ -10770,7 +10770,7 @@
             <a:r>
               <a:rPr lang="en-US" sz="1900" i="1" dirty="0">
                 <a:solidFill>
-                  <a:srgbClr val="E2E8F0"/>
+                  <a:srgbClr val="334155"/>
                 </a:solidFill>
                 <a:latin typeface="Calibri" pitchFamily="34" charset="0"/>
                 <a:ea typeface="Calibri" pitchFamily="34" charset="-122"/>
@@ -10797,11 +10797,11 @@
             <a:avLst/>
           </a:prstGeom>
           <a:solidFill>
-            <a:srgbClr val="1E1A3A"/>
+            <a:srgbClr val="FFFFFF"/>
           </a:solidFill>
           <a:ln w="25400">
             <a:solidFill>
-              <a:srgbClr val="F472B6"/>
+              <a:srgbClr val="DB2777"/>
             </a:solidFill>
             <a:prstDash val="solid"/>
           </a:ln>
@@ -10834,7 +10834,7 @@
             <a:r>
               <a:rPr lang="en-US" sz="1700" b="1" dirty="0">
                 <a:solidFill>
-                  <a:srgbClr val="F472B6"/>
+                  <a:srgbClr val="DB2777"/>
                 </a:solidFill>
                 <a:latin typeface="Calibri" pitchFamily="34" charset="0"/>
                 <a:ea typeface="Calibri" pitchFamily="34" charset="-122"/>
@@ -10861,11 +10861,11 @@
             <a:avLst/>
           </a:prstGeom>
           <a:solidFill>
-            <a:srgbClr val="151025"/>
+            <a:srgbClr val="1E293B"/>
           </a:solidFill>
           <a:ln w="12700">
             <a:solidFill>
-              <a:srgbClr val="151025"/>
+              <a:srgbClr val="1E293B"/>
             </a:solidFill>
             <a:prstDash val="solid"/>
           </a:ln>
@@ -10955,11 +10955,11 @@
             <a:avLst/>
           </a:prstGeom>
           <a:solidFill>
-            <a:srgbClr val="1E1A3A"/>
+            <a:srgbClr val="FFFFFF"/>
           </a:solidFill>
           <a:ln w="12700">
             <a:solidFill>
-              <a:srgbClr val="1E1A3A"/>
+              <a:srgbClr val="E2E8F0"/>
             </a:solidFill>
             <a:prstDash val="solid"/>
           </a:ln>
@@ -10980,11 +10980,11 @@
             <a:avLst/>
           </a:prstGeom>
           <a:solidFill>
-            <a:srgbClr val="818CF8"/>
+            <a:srgbClr val="4F46E5"/>
           </a:solidFill>
           <a:ln w="12700">
             <a:solidFill>
-              <a:srgbClr val="818CF8"/>
+              <a:srgbClr val="4F46E5"/>
             </a:solidFill>
             <a:prstDash val="solid"/>
           </a:ln>
@@ -11020,7 +11020,7 @@
             <a:r>
               <a:rPr lang="en-US" sz="1600" b="1" dirty="0">
                 <a:solidFill>
-                  <a:srgbClr val="818CF8"/>
+                  <a:srgbClr val="4F46E5"/>
                 </a:solidFill>
                 <a:latin typeface="Consolas" pitchFamily="34" charset="0"/>
                 <a:ea typeface="Consolas" pitchFamily="34" charset="-122"/>
@@ -11054,7 +11054,7 @@
             <a:r>
               <a:rPr lang="en-US" sz="1400" b="1" dirty="0">
                 <a:solidFill>
-                  <a:srgbClr val="E2E8F0"/>
+                  <a:srgbClr val="334155"/>
                 </a:solidFill>
                 <a:latin typeface="Calibri" pitchFamily="34" charset="0"/>
                 <a:ea typeface="Calibri" pitchFamily="34" charset="-122"/>
@@ -11099,11 +11099,11 @@
             <a:avLst/>
           </a:prstGeom>
           <a:solidFill>
-            <a:srgbClr val="1E1A3A"/>
+            <a:srgbClr val="FFFFFF"/>
           </a:solidFill>
           <a:ln w="12700">
             <a:solidFill>
-              <a:srgbClr val="1E1A3A"/>
+              <a:srgbClr val="E2E8F0"/>
             </a:solidFill>
             <a:prstDash val="solid"/>
           </a:ln>
@@ -11124,11 +11124,11 @@
             <a:avLst/>
           </a:prstGeom>
           <a:solidFill>
-            <a:srgbClr val="F472B6"/>
+            <a:srgbClr val="DB2777"/>
           </a:solidFill>
           <a:ln w="12700">
             <a:solidFill>
-              <a:srgbClr val="F472B6"/>
+              <a:srgbClr val="DB2777"/>
             </a:solidFill>
             <a:prstDash val="solid"/>
           </a:ln>
@@ -11164,7 +11164,7 @@
             <a:r>
               <a:rPr lang="en-US" sz="1600" b="1" dirty="0">
                 <a:solidFill>
-                  <a:srgbClr val="F472B6"/>
+                  <a:srgbClr val="DB2777"/>
                 </a:solidFill>
                 <a:latin typeface="Consolas" pitchFamily="34" charset="0"/>
                 <a:ea typeface="Consolas" pitchFamily="34" charset="-122"/>
@@ -11198,7 +11198,7 @@
             <a:r>
               <a:rPr lang="en-US" sz="1400" b="1" dirty="0">
                 <a:solidFill>
-                  <a:srgbClr val="E2E8F0"/>
+                  <a:srgbClr val="334155"/>
                 </a:solidFill>
                 <a:latin typeface="Calibri" pitchFamily="34" charset="0"/>
                 <a:ea typeface="Calibri" pitchFamily="34" charset="-122"/>
@@ -11243,11 +11243,11 @@
             <a:avLst/>
           </a:prstGeom>
           <a:solidFill>
-            <a:srgbClr val="1E1A3A"/>
+            <a:srgbClr val="FFFFFF"/>
           </a:solidFill>
           <a:ln w="12700">
             <a:solidFill>
-              <a:srgbClr val="1E1A3A"/>
+              <a:srgbClr val="E2E8F0"/>
             </a:solidFill>
             <a:prstDash val="solid"/>
           </a:ln>
@@ -11268,11 +11268,11 @@
             <a:avLst/>
           </a:prstGeom>
           <a:solidFill>
-            <a:srgbClr val="FBBF24"/>
+            <a:srgbClr val="D97706"/>
           </a:solidFill>
           <a:ln w="12700">
             <a:solidFill>
-              <a:srgbClr val="FBBF24"/>
+              <a:srgbClr val="D97706"/>
             </a:solidFill>
             <a:prstDash val="solid"/>
           </a:ln>
@@ -11308,7 +11308,7 @@
             <a:r>
               <a:rPr lang="en-US" sz="1600" b="1" dirty="0">
                 <a:solidFill>
-                  <a:srgbClr val="FBBF24"/>
+                  <a:srgbClr val="D97706"/>
                 </a:solidFill>
                 <a:latin typeface="Consolas" pitchFamily="34" charset="0"/>
                 <a:ea typeface="Consolas" pitchFamily="34" charset="-122"/>
@@ -11342,7 +11342,7 @@
             <a:r>
               <a:rPr lang="en-US" sz="1400" b="1" dirty="0">
                 <a:solidFill>
-                  <a:srgbClr val="E2E8F0"/>
+                  <a:srgbClr val="334155"/>
                 </a:solidFill>
                 <a:latin typeface="Calibri" pitchFamily="34" charset="0"/>
                 <a:ea typeface="Calibri" pitchFamily="34" charset="-122"/>
@@ -11387,11 +11387,11 @@
             <a:avLst/>
           </a:prstGeom>
           <a:solidFill>
-            <a:srgbClr val="1E1A3A"/>
+            <a:srgbClr val="FFFFFF"/>
           </a:solidFill>
           <a:ln w="12700">
             <a:solidFill>
-              <a:srgbClr val="1E1A3A"/>
+              <a:srgbClr val="E2E8F0"/>
             </a:solidFill>
             <a:prstDash val="solid"/>
           </a:ln>
@@ -11412,11 +11412,11 @@
             <a:avLst/>
           </a:prstGeom>
           <a:solidFill>
-            <a:srgbClr val="34D399"/>
+            <a:srgbClr val="059669"/>
           </a:solidFill>
           <a:ln w="12700">
             <a:solidFill>
-              <a:srgbClr val="34D399"/>
+              <a:srgbClr val="059669"/>
             </a:solidFill>
             <a:prstDash val="solid"/>
           </a:ln>
@@ -11452,7 +11452,7 @@
             <a:r>
               <a:rPr lang="en-US" sz="1900" b="1" dirty="0">
                 <a:solidFill>
-                  <a:srgbClr val="34D399"/>
+                  <a:srgbClr val="059669"/>
                 </a:solidFill>
                 <a:latin typeface="Calibri" pitchFamily="34" charset="0"/>
                 <a:ea typeface="Calibri" pitchFamily="34" charset="-122"/>
@@ -11470,7 +11470,7 @@
             <a:r>
               <a:rPr lang="en-US" sz="1600" dirty="0">
                 <a:solidFill>
-                  <a:srgbClr val="E2E8F0"/>
+                  <a:srgbClr val="334155"/>
                 </a:solidFill>
                 <a:latin typeface="Calibri" pitchFamily="34" charset="0"/>
                 <a:ea typeface="Calibri" pitchFamily="34" charset="-122"/>
@@ -11487,7 +11487,7 @@
             <a:r>
               <a:rPr lang="en-US" sz="1600" b="1" dirty="0">
                 <a:solidFill>
-                  <a:srgbClr val="FFFFFF"/>
+                  <a:srgbClr val="0F172A"/>
                 </a:solidFill>
                 <a:latin typeface="Calibri" pitchFamily="34" charset="0"/>
                 <a:ea typeface="Calibri" pitchFamily="34" charset="-122"/>
@@ -11504,7 +11504,7 @@
             <a:r>
               <a:rPr lang="en-US" sz="1600" dirty="0">
                 <a:solidFill>
-                  <a:srgbClr val="E2E8F0"/>
+                  <a:srgbClr val="334155"/>
                 </a:solidFill>
                 <a:latin typeface="Calibri" pitchFamily="34" charset="0"/>
                 <a:ea typeface="Calibri" pitchFamily="34" charset="-122"/>
@@ -11628,7 +11628,7 @@
     <p:bg>
       <p:bgPr>
         <a:solidFill>
-          <a:srgbClr val="151025"/>
+          <a:srgbClr val="F8FAFC"/>
         </a:solidFill>
       </p:bgPr>
     </p:bg>
@@ -11661,13 +11661,13 @@
             <a:avLst/>
           </a:prstGeom>
           <a:solidFill>
-            <a:srgbClr val="818CF8">
+            <a:srgbClr val="4F46E5">
               <a:alpha val="15000"/>
             </a:srgbClr>
           </a:solidFill>
           <a:ln w="12700">
             <a:solidFill>
-              <a:srgbClr val="818CF8">
+              <a:srgbClr val="4F46E5">
                 <a:alpha val="15000"/>
               </a:srgbClr>
             </a:solidFill>
@@ -11690,13 +11690,13 @@
             <a:avLst/>
           </a:prstGeom>
           <a:solidFill>
-            <a:srgbClr val="F472B6">
+            <a:srgbClr val="DB2777">
               <a:alpha val="12000"/>
             </a:srgbClr>
           </a:solidFill>
           <a:ln w="12700">
             <a:solidFill>
-              <a:srgbClr val="F472B6">
+              <a:srgbClr val="DB2777">
                 <a:alpha val="12000"/>
               </a:srgbClr>
             </a:solidFill>
@@ -11719,11 +11719,11 @@
             <a:avLst/>
           </a:prstGeom>
           <a:solidFill>
-            <a:srgbClr val="FBBF24"/>
+            <a:srgbClr val="D97706"/>
           </a:solidFill>
           <a:ln w="12700">
             <a:solidFill>
-              <a:srgbClr val="FBBF24"/>
+              <a:srgbClr val="D97706"/>
             </a:solidFill>
             <a:prstDash val="solid"/>
           </a:ln>
@@ -11756,7 +11756,7 @@
             <a:r>
               <a:rPr lang="en-US" sz="1300" b="1" spc="1000" kern="0" dirty="0">
                 <a:solidFill>
-                  <a:srgbClr val="FBBF24"/>
+                  <a:srgbClr val="D97706"/>
                 </a:solidFill>
                 <a:latin typeface="Calibri" pitchFamily="34" charset="0"/>
                 <a:ea typeface="Calibri" pitchFamily="34" charset="-122"/>
@@ -11795,7 +11795,7 @@
             <a:r>
               <a:rPr lang="en-US" sz="3600" b="1" dirty="0">
                 <a:solidFill>
-                  <a:srgbClr val="FFFFFF"/>
+                  <a:srgbClr val="0F172A"/>
                 </a:solidFill>
                 <a:latin typeface="Cambria" pitchFamily="34" charset="0"/>
                 <a:ea typeface="Cambria" pitchFamily="34" charset="-122"/>
@@ -11822,11 +11822,11 @@
             <a:avLst/>
           </a:prstGeom>
           <a:solidFill>
-            <a:srgbClr val="F472B6"/>
+            <a:srgbClr val="DB2777"/>
           </a:solidFill>
           <a:ln w="12700">
             <a:solidFill>
-              <a:srgbClr val="F472B6"/>
+              <a:srgbClr val="DB2777"/>
             </a:solidFill>
             <a:prstDash val="solid"/>
           </a:ln>
@@ -11859,7 +11859,7 @@
             <a:r>
               <a:rPr lang="en-US" sz="2000" dirty="0">
                 <a:solidFill>
-                  <a:srgbClr val="E2E8F0"/>
+                  <a:srgbClr val="334155"/>
                 </a:solidFill>
                 <a:latin typeface="Calibri" pitchFamily="34" charset="0"/>
                 <a:ea typeface="Calibri" pitchFamily="34" charset="-122"/>
@@ -11886,11 +11886,11 @@
             <a:avLst/>
           </a:prstGeom>
           <a:solidFill>
-            <a:srgbClr val="1E1A3A"/>
+            <a:srgbClr val="FFFFFF"/>
           </a:solidFill>
           <a:ln w="38100">
             <a:solidFill>
-              <a:srgbClr val="818CF8"/>
+              <a:srgbClr val="4F46E5"/>
             </a:solidFill>
             <a:prstDash val="solid"/>
           </a:ln>
@@ -11923,7 +11923,7 @@
             <a:r>
               <a:rPr lang="en-US" sz="5800" b="1" dirty="0">
                 <a:solidFill>
-                  <a:srgbClr val="818CF8"/>
+                  <a:srgbClr val="4F46E5"/>
                 </a:solidFill>
                 <a:latin typeface="Cambria" pitchFamily="34" charset="0"/>
                 <a:ea typeface="Cambria" pitchFamily="34" charset="-122"/>
@@ -11962,7 +11962,7 @@
             <a:r>
               <a:rPr lang="en-US" sz="1700" dirty="0">
                 <a:solidFill>
-                  <a:srgbClr val="E2E8F0"/>
+                  <a:srgbClr val="334155"/>
                 </a:solidFill>
                 <a:latin typeface="Calibri" pitchFamily="34" charset="0"/>
                 <a:ea typeface="Calibri" pitchFamily="34" charset="-122"/>
@@ -11989,11 +11989,11 @@
             <a:avLst/>
           </a:prstGeom>
           <a:solidFill>
-            <a:srgbClr val="1E1A3A"/>
+            <a:srgbClr val="FFFFFF"/>
           </a:solidFill>
           <a:ln w="38100">
             <a:solidFill>
-              <a:srgbClr val="F472B6"/>
+              <a:srgbClr val="DB2777"/>
             </a:solidFill>
             <a:prstDash val="solid"/>
           </a:ln>
@@ -12026,7 +12026,7 @@
             <a:r>
               <a:rPr lang="en-US" sz="5800" b="1" dirty="0">
                 <a:solidFill>
-                  <a:srgbClr val="F472B6"/>
+                  <a:srgbClr val="DB2777"/>
                 </a:solidFill>
                 <a:latin typeface="Cambria" pitchFamily="34" charset="0"/>
                 <a:ea typeface="Cambria" pitchFamily="34" charset="-122"/>
@@ -12065,7 +12065,7 @@
             <a:r>
               <a:rPr lang="en-US" sz="1700" dirty="0">
                 <a:solidFill>
-                  <a:srgbClr val="E2E8F0"/>
+                  <a:srgbClr val="334155"/>
                 </a:solidFill>
                 <a:latin typeface="Calibri" pitchFamily="34" charset="0"/>
                 <a:ea typeface="Calibri" pitchFamily="34" charset="-122"/>
@@ -12092,11 +12092,11 @@
             <a:avLst/>
           </a:prstGeom>
           <a:solidFill>
-            <a:srgbClr val="1E1A3A"/>
+            <a:srgbClr val="FFFFFF"/>
           </a:solidFill>
           <a:ln w="38100">
             <a:solidFill>
-              <a:srgbClr val="FBBF24"/>
+              <a:srgbClr val="D97706"/>
             </a:solidFill>
             <a:prstDash val="solid"/>
           </a:ln>
@@ -12129,7 +12129,7 @@
             <a:r>
               <a:rPr lang="en-US" sz="5800" b="1" dirty="0">
                 <a:solidFill>
-                  <a:srgbClr val="FBBF24"/>
+                  <a:srgbClr val="D97706"/>
                 </a:solidFill>
                 <a:latin typeface="Cambria" pitchFamily="34" charset="0"/>
                 <a:ea typeface="Cambria" pitchFamily="34" charset="-122"/>
@@ -12168,7 +12168,7 @@
             <a:r>
               <a:rPr lang="en-US" sz="1700" dirty="0">
                 <a:solidFill>
-                  <a:srgbClr val="E2E8F0"/>
+                  <a:srgbClr val="334155"/>
                 </a:solidFill>
                 <a:latin typeface="Calibri" pitchFamily="34" charset="0"/>
                 <a:ea typeface="Calibri" pitchFamily="34" charset="-122"/>
@@ -12207,7 +12207,7 @@
             <a:r>
               <a:rPr lang="en-US" sz="1800" b="1" i="1" dirty="0">
                 <a:solidFill>
-                  <a:srgbClr val="F472B6"/>
+                  <a:srgbClr val="DB2777"/>
                 </a:solidFill>
                 <a:latin typeface="Calibri" pitchFamily="34" charset="0"/>
                 <a:ea typeface="Calibri" pitchFamily="34" charset="-122"/>
@@ -12331,7 +12331,7 @@
     <p:bg>
       <p:bgPr>
         <a:solidFill>
-          <a:srgbClr val="151025"/>
+          <a:srgbClr val="F8FAFC"/>
         </a:solidFill>
       </p:bgPr>
     </p:bg>
@@ -12364,13 +12364,13 @@
             <a:avLst/>
           </a:prstGeom>
           <a:solidFill>
-            <a:srgbClr val="818CF8">
+            <a:srgbClr val="4F46E5">
               <a:alpha val="15000"/>
             </a:srgbClr>
           </a:solidFill>
           <a:ln w="12700">
             <a:solidFill>
-              <a:srgbClr val="818CF8">
+              <a:srgbClr val="4F46E5">
                 <a:alpha val="15000"/>
               </a:srgbClr>
             </a:solidFill>
@@ -12393,13 +12393,13 @@
             <a:avLst/>
           </a:prstGeom>
           <a:solidFill>
-            <a:srgbClr val="F472B6">
+            <a:srgbClr val="DB2777">
               <a:alpha val="12000"/>
             </a:srgbClr>
           </a:solidFill>
           <a:ln w="12700">
             <a:solidFill>
-              <a:srgbClr val="F472B6">
+              <a:srgbClr val="DB2777">
                 <a:alpha val="12000"/>
               </a:srgbClr>
             </a:solidFill>
@@ -12422,11 +12422,11 @@
             <a:avLst/>
           </a:prstGeom>
           <a:solidFill>
-            <a:srgbClr val="FBBF24"/>
+            <a:srgbClr val="D97706"/>
           </a:solidFill>
           <a:ln w="12700">
             <a:solidFill>
-              <a:srgbClr val="FBBF24"/>
+              <a:srgbClr val="D97706"/>
             </a:solidFill>
             <a:prstDash val="solid"/>
           </a:ln>
@@ -12459,7 +12459,7 @@
             <a:r>
               <a:rPr lang="en-US" sz="1300" b="1" spc="1000" kern="0" dirty="0">
                 <a:solidFill>
-                  <a:srgbClr val="FBBF24"/>
+                  <a:srgbClr val="D97706"/>
                 </a:solidFill>
                 <a:latin typeface="Calibri" pitchFamily="34" charset="0"/>
                 <a:ea typeface="Calibri" pitchFamily="34" charset="-122"/>
@@ -12498,7 +12498,7 @@
             <a:r>
               <a:rPr lang="en-US" sz="3600" b="1" dirty="0">
                 <a:solidFill>
-                  <a:srgbClr val="FFFFFF"/>
+                  <a:srgbClr val="0F172A"/>
                 </a:solidFill>
                 <a:latin typeface="Cambria" pitchFamily="34" charset="0"/>
                 <a:ea typeface="Cambria" pitchFamily="34" charset="-122"/>
@@ -12525,11 +12525,11 @@
             <a:avLst/>
           </a:prstGeom>
           <a:solidFill>
-            <a:srgbClr val="F472B6"/>
+            <a:srgbClr val="DB2777"/>
           </a:solidFill>
           <a:ln w="12700">
             <a:solidFill>
-              <a:srgbClr val="F472B6"/>
+              <a:srgbClr val="DB2777"/>
             </a:solidFill>
             <a:prstDash val="solid"/>
           </a:ln>
@@ -12573,11 +12573,11 @@
             <a:avLst/>
           </a:prstGeom>
           <a:solidFill>
-            <a:srgbClr val="1E1A3A"/>
+            <a:srgbClr val="FFFFFF"/>
           </a:solidFill>
           <a:ln w="12700">
             <a:solidFill>
-              <a:srgbClr val="1E1A3A"/>
+              <a:srgbClr val="E2E8F0"/>
             </a:solidFill>
             <a:prstDash val="solid"/>
           </a:ln>
@@ -12598,11 +12598,11 @@
             <a:avLst/>
           </a:prstGeom>
           <a:solidFill>
-            <a:srgbClr val="F472B6"/>
+            <a:srgbClr val="DB2777"/>
           </a:solidFill>
           <a:ln w="12700">
             <a:solidFill>
-              <a:srgbClr val="F472B6"/>
+              <a:srgbClr val="DB2777"/>
             </a:solidFill>
             <a:prstDash val="solid"/>
           </a:ln>
@@ -12635,7 +12635,7 @@
             <a:r>
               <a:rPr lang="en-US" sz="1700" b="1" dirty="0">
                 <a:solidFill>
-                  <a:srgbClr val="F472B6"/>
+                  <a:srgbClr val="DB2777"/>
                 </a:solidFill>
                 <a:latin typeface="Cambria" pitchFamily="34" charset="0"/>
                 <a:ea typeface="Cambria" pitchFamily="34" charset="-122"/>
@@ -12677,7 +12677,7 @@
             <a:r>
               <a:rPr lang="en-US" sz="1300" dirty="0">
                 <a:solidFill>
-                  <a:srgbClr val="E2E8F0"/>
+                  <a:srgbClr val="334155"/>
                 </a:solidFill>
                 <a:latin typeface="Calibri" pitchFamily="34" charset="0"/>
                 <a:ea typeface="Calibri" pitchFamily="34" charset="-122"/>
@@ -12694,7 +12694,7 @@
             <a:r>
               <a:rPr lang="en-US" sz="1300" b="1" dirty="0">
                 <a:solidFill>
-                  <a:srgbClr val="FFFFFF"/>
+                  <a:srgbClr val="0F172A"/>
                 </a:solidFill>
                 <a:latin typeface="Calibri" pitchFamily="34" charset="0"/>
                 <a:ea typeface="Calibri" pitchFamily="34" charset="-122"/>
@@ -12711,7 +12711,7 @@
             <a:r>
               <a:rPr lang="en-US" sz="1300" dirty="0">
                 <a:solidFill>
-                  <a:srgbClr val="E2E8F0"/>
+                  <a:srgbClr val="334155"/>
                 </a:solidFill>
                 <a:latin typeface="Calibri" pitchFamily="34" charset="0"/>
                 <a:ea typeface="Calibri" pitchFamily="34" charset="-122"/>
@@ -12729,7 +12729,7 @@
             <a:r>
               <a:rPr lang="en-US" sz="1300" dirty="0">
                 <a:solidFill>
-                  <a:srgbClr val="E2E8F0"/>
+                  <a:srgbClr val="334155"/>
                 </a:solidFill>
                 <a:latin typeface="Calibri" pitchFamily="34" charset="0"/>
                 <a:ea typeface="Calibri" pitchFamily="34" charset="-122"/>
@@ -12746,7 +12746,7 @@
             <a:r>
               <a:rPr lang="en-US" sz="1300" b="1" dirty="0">
                 <a:solidFill>
-                  <a:srgbClr val="F472B6"/>
+                  <a:srgbClr val="DB2777"/>
                 </a:solidFill>
                 <a:latin typeface="Calibri" pitchFamily="34" charset="0"/>
                 <a:ea typeface="Calibri" pitchFamily="34" charset="-122"/>
@@ -12763,7 +12763,7 @@
             <a:r>
               <a:rPr lang="en-US" sz="1300" dirty="0">
                 <a:solidFill>
-                  <a:srgbClr val="E2E8F0"/>
+                  <a:srgbClr val="334155"/>
                 </a:solidFill>
                 <a:latin typeface="Calibri" pitchFamily="34" charset="0"/>
                 <a:ea typeface="Calibri" pitchFamily="34" charset="-122"/>
@@ -12781,7 +12781,7 @@
             <a:r>
               <a:rPr lang="en-US" sz="1300" dirty="0">
                 <a:solidFill>
-                  <a:srgbClr val="E2E8F0"/>
+                  <a:srgbClr val="334155"/>
                 </a:solidFill>
                 <a:latin typeface="Calibri" pitchFamily="34" charset="0"/>
                 <a:ea typeface="Calibri" pitchFamily="34" charset="-122"/>
@@ -12798,7 +12798,7 @@
             <a:r>
               <a:rPr lang="en-US" sz="1300" b="1" dirty="0">
                 <a:solidFill>
-                  <a:srgbClr val="34D399"/>
+                  <a:srgbClr val="059669"/>
                 </a:solidFill>
                 <a:latin typeface="Calibri" pitchFamily="34" charset="0"/>
                 <a:ea typeface="Calibri" pitchFamily="34" charset="-122"/>
@@ -12815,7 +12815,7 @@
             <a:r>
               <a:rPr lang="en-US" sz="1300" dirty="0">
                 <a:solidFill>
-                  <a:srgbClr val="E2E8F0"/>
+                  <a:srgbClr val="334155"/>
                 </a:solidFill>
                 <a:latin typeface="Calibri" pitchFamily="34" charset="0"/>
                 <a:ea typeface="Calibri" pitchFamily="34" charset="-122"/>
@@ -12833,7 +12833,7 @@
             <a:r>
               <a:rPr lang="en-US" sz="1300" i="1" dirty="0">
                 <a:solidFill>
-                  <a:srgbClr val="E2E8F0"/>
+                  <a:srgbClr val="334155"/>
                 </a:solidFill>
                 <a:latin typeface="Calibri" pitchFamily="34" charset="0"/>
                 <a:ea typeface="Calibri" pitchFamily="34" charset="-122"/>
@@ -12860,11 +12860,11 @@
             <a:avLst/>
           </a:prstGeom>
           <a:solidFill>
-            <a:srgbClr val="FBBF24"/>
+            <a:srgbClr val="D97706"/>
           </a:solidFill>
           <a:ln w="12700">
             <a:solidFill>
-              <a:srgbClr val="FBBF24"/>
+              <a:srgbClr val="D97706"/>
             </a:solidFill>
             <a:prstDash val="solid"/>
           </a:ln>
@@ -12982,7 +12982,7 @@
     <p:bg>
       <p:bgPr>
         <a:solidFill>
-          <a:srgbClr val="151025"/>
+          <a:srgbClr val="F8FAFC"/>
         </a:solidFill>
       </p:bgPr>
     </p:bg>
@@ -13015,13 +13015,13 @@
             <a:avLst/>
           </a:prstGeom>
           <a:solidFill>
-            <a:srgbClr val="818CF8">
+            <a:srgbClr val="4F46E5">
               <a:alpha val="15000"/>
             </a:srgbClr>
           </a:solidFill>
           <a:ln w="12700">
             <a:solidFill>
-              <a:srgbClr val="818CF8">
+              <a:srgbClr val="4F46E5">
                 <a:alpha val="15000"/>
               </a:srgbClr>
             </a:solidFill>
@@ -13044,13 +13044,13 @@
             <a:avLst/>
           </a:prstGeom>
           <a:solidFill>
-            <a:srgbClr val="F472B6">
+            <a:srgbClr val="DB2777">
               <a:alpha val="12000"/>
             </a:srgbClr>
           </a:solidFill>
           <a:ln w="12700">
             <a:solidFill>
-              <a:srgbClr val="F472B6">
+              <a:srgbClr val="DB2777">
                 <a:alpha val="12000"/>
               </a:srgbClr>
             </a:solidFill>
@@ -13073,11 +13073,11 @@
             <a:avLst/>
           </a:prstGeom>
           <a:solidFill>
-            <a:srgbClr val="FBBF24"/>
+            <a:srgbClr val="D97706"/>
           </a:solidFill>
           <a:ln w="12700">
             <a:solidFill>
-              <a:srgbClr val="FBBF24"/>
+              <a:srgbClr val="D97706"/>
             </a:solidFill>
             <a:prstDash val="solid"/>
           </a:ln>
@@ -13110,7 +13110,7 @@
             <a:r>
               <a:rPr lang="en-US" sz="1300" b="1" spc="1000" kern="0" dirty="0">
                 <a:solidFill>
-                  <a:srgbClr val="FBBF24"/>
+                  <a:srgbClr val="D97706"/>
                 </a:solidFill>
                 <a:latin typeface="Calibri" pitchFamily="34" charset="0"/>
                 <a:ea typeface="Calibri" pitchFamily="34" charset="-122"/>
@@ -13149,7 +13149,7 @@
             <a:r>
               <a:rPr lang="en-US" sz="3600" b="1" dirty="0">
                 <a:solidFill>
-                  <a:srgbClr val="FFFFFF"/>
+                  <a:srgbClr val="0F172A"/>
                 </a:solidFill>
                 <a:latin typeface="Cambria" pitchFamily="34" charset="0"/>
                 <a:ea typeface="Cambria" pitchFamily="34" charset="-122"/>
@@ -13176,11 +13176,11 @@
             <a:avLst/>
           </a:prstGeom>
           <a:solidFill>
-            <a:srgbClr val="F472B6"/>
+            <a:srgbClr val="DB2777"/>
           </a:solidFill>
           <a:ln w="12700">
             <a:solidFill>
-              <a:srgbClr val="F472B6"/>
+              <a:srgbClr val="DB2777"/>
             </a:solidFill>
             <a:prstDash val="solid"/>
           </a:ln>
@@ -13224,11 +13224,11 @@
             <a:avLst/>
           </a:prstGeom>
           <a:solidFill>
-            <a:srgbClr val="1E1A3A"/>
+            <a:srgbClr val="FFFFFF"/>
           </a:solidFill>
           <a:ln w="12700">
             <a:solidFill>
-              <a:srgbClr val="1E1A3A"/>
+              <a:srgbClr val="E2E8F0"/>
             </a:solidFill>
             <a:prstDash val="solid"/>
           </a:ln>
@@ -13249,11 +13249,11 @@
             <a:avLst/>
           </a:prstGeom>
           <a:solidFill>
-            <a:srgbClr val="818CF8"/>
+            <a:srgbClr val="4F46E5"/>
           </a:solidFill>
           <a:ln w="12700">
             <a:solidFill>
-              <a:srgbClr val="818CF8"/>
+              <a:srgbClr val="4F46E5"/>
             </a:solidFill>
             <a:prstDash val="solid"/>
           </a:ln>
@@ -13286,7 +13286,7 @@
             <a:r>
               <a:rPr lang="en-US" sz="1700" b="1" dirty="0">
                 <a:solidFill>
-                  <a:srgbClr val="818CF8"/>
+                  <a:srgbClr val="4F46E5"/>
                 </a:solidFill>
                 <a:latin typeface="Cambria" pitchFamily="34" charset="0"/>
                 <a:ea typeface="Cambria" pitchFamily="34" charset="-122"/>
@@ -13328,7 +13328,7 @@
             <a:r>
               <a:rPr lang="en-US" sz="1300" dirty="0">
                 <a:solidFill>
-                  <a:srgbClr val="E2E8F0"/>
+                  <a:srgbClr val="334155"/>
                 </a:solidFill>
                 <a:latin typeface="Calibri" pitchFamily="34" charset="0"/>
                 <a:ea typeface="Calibri" pitchFamily="34" charset="-122"/>
@@ -13345,7 +13345,7 @@
             <a:r>
               <a:rPr lang="en-US" sz="1300" b="1" dirty="0">
                 <a:solidFill>
-                  <a:srgbClr val="FFFFFF"/>
+                  <a:srgbClr val="0F172A"/>
                 </a:solidFill>
                 <a:latin typeface="Calibri" pitchFamily="34" charset="0"/>
                 <a:ea typeface="Calibri" pitchFamily="34" charset="-122"/>
@@ -13362,7 +13362,7 @@
             <a:r>
               <a:rPr lang="en-US" sz="1300" dirty="0">
                 <a:solidFill>
-                  <a:srgbClr val="E2E8F0"/>
+                  <a:srgbClr val="334155"/>
                 </a:solidFill>
                 <a:latin typeface="Calibri" pitchFamily="34" charset="0"/>
                 <a:ea typeface="Calibri" pitchFamily="34" charset="-122"/>
@@ -13380,7 +13380,7 @@
             <a:r>
               <a:rPr lang="en-US" sz="1300" dirty="0">
                 <a:solidFill>
-                  <a:srgbClr val="E2E8F0"/>
+                  <a:srgbClr val="334155"/>
                 </a:solidFill>
                 <a:latin typeface="Calibri" pitchFamily="34" charset="0"/>
                 <a:ea typeface="Calibri" pitchFamily="34" charset="-122"/>
@@ -13397,7 +13397,7 @@
             <a:r>
               <a:rPr lang="en-US" sz="1300" b="1" dirty="0">
                 <a:solidFill>
-                  <a:srgbClr val="F472B6"/>
+                  <a:srgbClr val="DB2777"/>
                 </a:solidFill>
                 <a:latin typeface="Calibri" pitchFamily="34" charset="0"/>
                 <a:ea typeface="Calibri" pitchFamily="34" charset="-122"/>
@@ -13414,7 +13414,7 @@
             <a:r>
               <a:rPr lang="en-US" sz="1300" dirty="0">
                 <a:solidFill>
-                  <a:srgbClr val="E2E8F0"/>
+                  <a:srgbClr val="334155"/>
                 </a:solidFill>
                 <a:latin typeface="Calibri" pitchFamily="34" charset="0"/>
                 <a:ea typeface="Calibri" pitchFamily="34" charset="-122"/>
@@ -13432,7 +13432,7 @@
             <a:r>
               <a:rPr lang="en-US" sz="1300" dirty="0">
                 <a:solidFill>
-                  <a:srgbClr val="E2E8F0"/>
+                  <a:srgbClr val="334155"/>
                 </a:solidFill>
                 <a:latin typeface="Calibri" pitchFamily="34" charset="0"/>
                 <a:ea typeface="Calibri" pitchFamily="34" charset="-122"/>
@@ -13449,7 +13449,7 @@
             <a:r>
               <a:rPr lang="en-US" sz="1300" b="1" dirty="0">
                 <a:solidFill>
-                  <a:srgbClr val="F472B6"/>
+                  <a:srgbClr val="DB2777"/>
                 </a:solidFill>
                 <a:latin typeface="Calibri" pitchFamily="34" charset="0"/>
                 <a:ea typeface="Calibri" pitchFamily="34" charset="-122"/>
@@ -13466,7 +13466,7 @@
             <a:r>
               <a:rPr lang="en-US" sz="1300" dirty="0">
                 <a:solidFill>
-                  <a:srgbClr val="E2E8F0"/>
+                  <a:srgbClr val="334155"/>
                 </a:solidFill>
                 <a:latin typeface="Calibri" pitchFamily="34" charset="0"/>
                 <a:ea typeface="Calibri" pitchFamily="34" charset="-122"/>
@@ -13484,7 +13484,7 @@
             <a:r>
               <a:rPr lang="en-US" sz="1300" dirty="0">
                 <a:solidFill>
-                  <a:srgbClr val="E2E8F0"/>
+                  <a:srgbClr val="334155"/>
                 </a:solidFill>
                 <a:latin typeface="Calibri" pitchFamily="34" charset="0"/>
                 <a:ea typeface="Calibri" pitchFamily="34" charset="-122"/>
@@ -13501,7 +13501,7 @@
             <a:r>
               <a:rPr lang="en-US" sz="1300" b="1" dirty="0">
                 <a:solidFill>
-                  <a:srgbClr val="34D399"/>
+                  <a:srgbClr val="059669"/>
                 </a:solidFill>
                 <a:latin typeface="Calibri" pitchFamily="34" charset="0"/>
                 <a:ea typeface="Calibri" pitchFamily="34" charset="-122"/>
@@ -13518,7 +13518,7 @@
             <a:r>
               <a:rPr lang="en-US" sz="1300" dirty="0">
                 <a:solidFill>
-                  <a:srgbClr val="E2E8F0"/>
+                  <a:srgbClr val="334155"/>
                 </a:solidFill>
                 <a:latin typeface="Calibri" pitchFamily="34" charset="0"/>
                 <a:ea typeface="Calibri" pitchFamily="34" charset="-122"/>
@@ -13536,7 +13536,7 @@
             <a:r>
               <a:rPr lang="en-US" sz="1300" i="1" dirty="0">
                 <a:solidFill>
-                  <a:srgbClr val="E2E8F0"/>
+                  <a:srgbClr val="334155"/>
                 </a:solidFill>
                 <a:latin typeface="Calibri" pitchFamily="34" charset="0"/>
                 <a:ea typeface="Calibri" pitchFamily="34" charset="-122"/>
@@ -13660,7 +13660,7 @@
     <p:bg>
       <p:bgPr>
         <a:solidFill>
-          <a:srgbClr val="151025"/>
+          <a:srgbClr val="F8FAFC"/>
         </a:solidFill>
       </p:bgPr>
     </p:bg>
@@ -13693,13 +13693,13 @@
             <a:avLst/>
           </a:prstGeom>
           <a:solidFill>
-            <a:srgbClr val="818CF8">
+            <a:srgbClr val="4F46E5">
               <a:alpha val="15000"/>
             </a:srgbClr>
           </a:solidFill>
           <a:ln w="12700">
             <a:solidFill>
-              <a:srgbClr val="818CF8">
+              <a:srgbClr val="4F46E5">
                 <a:alpha val="15000"/>
               </a:srgbClr>
             </a:solidFill>
@@ -13722,13 +13722,13 @@
             <a:avLst/>
           </a:prstGeom>
           <a:solidFill>
-            <a:srgbClr val="F472B6">
+            <a:srgbClr val="DB2777">
               <a:alpha val="12000"/>
             </a:srgbClr>
           </a:solidFill>
           <a:ln w="12700">
             <a:solidFill>
-              <a:srgbClr val="F472B6">
+              <a:srgbClr val="DB2777">
                 <a:alpha val="12000"/>
               </a:srgbClr>
             </a:solidFill>
@@ -13751,11 +13751,11 @@
             <a:avLst/>
           </a:prstGeom>
           <a:solidFill>
-            <a:srgbClr val="FBBF24"/>
+            <a:srgbClr val="D97706"/>
           </a:solidFill>
           <a:ln w="12700">
             <a:solidFill>
-              <a:srgbClr val="FBBF24"/>
+              <a:srgbClr val="D97706"/>
             </a:solidFill>
             <a:prstDash val="solid"/>
           </a:ln>
@@ -13788,7 +13788,7 @@
             <a:r>
               <a:rPr lang="en-US" sz="1300" b="1" spc="1000" kern="0" dirty="0">
                 <a:solidFill>
-                  <a:srgbClr val="FBBF24"/>
+                  <a:srgbClr val="D97706"/>
                 </a:solidFill>
                 <a:latin typeface="Calibri" pitchFamily="34" charset="0"/>
                 <a:ea typeface="Calibri" pitchFamily="34" charset="-122"/>
@@ -13827,7 +13827,7 @@
             <a:r>
               <a:rPr lang="en-US" sz="3600" b="1" dirty="0">
                 <a:solidFill>
-                  <a:srgbClr val="FFFFFF"/>
+                  <a:srgbClr val="0F172A"/>
                 </a:solidFill>
                 <a:latin typeface="Cambria" pitchFamily="34" charset="0"/>
                 <a:ea typeface="Cambria" pitchFamily="34" charset="-122"/>
@@ -13854,11 +13854,11 @@
             <a:avLst/>
           </a:prstGeom>
           <a:solidFill>
-            <a:srgbClr val="F472B6"/>
+            <a:srgbClr val="DB2777"/>
           </a:solidFill>
           <a:ln w="12700">
             <a:solidFill>
-              <a:srgbClr val="F472B6"/>
+              <a:srgbClr val="DB2777"/>
             </a:solidFill>
             <a:prstDash val="solid"/>
           </a:ln>
@@ -13891,7 +13891,7 @@
             <a:r>
               <a:rPr lang="en-US" sz="1900" i="1" dirty="0">
                 <a:solidFill>
-                  <a:srgbClr val="E2E8F0"/>
+                  <a:srgbClr val="334155"/>
                 </a:solidFill>
                 <a:latin typeface="Calibri" pitchFamily="34" charset="0"/>
                 <a:ea typeface="Calibri" pitchFamily="34" charset="-122"/>
@@ -13918,11 +13918,11 @@
             <a:avLst/>
           </a:prstGeom>
           <a:solidFill>
-            <a:srgbClr val="1E1A3A"/>
+            <a:srgbClr val="FFFFFF"/>
           </a:solidFill>
           <a:ln w="12700">
             <a:solidFill>
-              <a:srgbClr val="1E1A3A"/>
+              <a:srgbClr val="E2E8F0"/>
             </a:solidFill>
             <a:prstDash val="solid"/>
           </a:ln>
@@ -13943,11 +13943,11 @@
             <a:avLst/>
           </a:prstGeom>
           <a:solidFill>
-            <a:srgbClr val="F472B6"/>
+            <a:srgbClr val="DB2777"/>
           </a:solidFill>
           <a:ln w="12700">
             <a:solidFill>
-              <a:srgbClr val="F472B6"/>
+              <a:srgbClr val="DB2777"/>
             </a:solidFill>
             <a:prstDash val="solid"/>
           </a:ln>
@@ -13980,7 +13980,7 @@
             <a:r>
               <a:rPr lang="en-US" sz="1900" b="1" dirty="0">
                 <a:solidFill>
-                  <a:srgbClr val="F472B6"/>
+                  <a:srgbClr val="DB2777"/>
                 </a:solidFill>
                 <a:latin typeface="Cambria" pitchFamily="34" charset="0"/>
                 <a:ea typeface="Cambria" pitchFamily="34" charset="-122"/>
@@ -14022,7 +14022,7 @@
             <a:r>
               <a:rPr lang="en-US" sz="1600" dirty="0">
                 <a:solidFill>
-                  <a:srgbClr val="E2E8F0"/>
+                  <a:srgbClr val="334155"/>
                 </a:solidFill>
                 <a:latin typeface="Calibri" pitchFamily="34" charset="0"/>
                 <a:ea typeface="Calibri" pitchFamily="34" charset="-122"/>
@@ -14039,7 +14039,7 @@
             <a:r>
               <a:rPr lang="en-US" sz="1600" b="1" dirty="0">
                 <a:solidFill>
-                  <a:srgbClr val="FFFFFF"/>
+                  <a:srgbClr val="0F172A"/>
                 </a:solidFill>
                 <a:latin typeface="Calibri" pitchFamily="34" charset="0"/>
                 <a:ea typeface="Calibri" pitchFamily="34" charset="-122"/>
@@ -14056,7 +14056,7 @@
             <a:r>
               <a:rPr lang="en-US" sz="1600" dirty="0">
                 <a:solidFill>
-                  <a:srgbClr val="E2E8F0"/>
+                  <a:srgbClr val="334155"/>
                 </a:solidFill>
                 <a:latin typeface="Calibri" pitchFamily="34" charset="0"/>
                 <a:ea typeface="Calibri" pitchFamily="34" charset="-122"/>
@@ -14074,7 +14074,7 @@
             <a:r>
               <a:rPr lang="en-US" sz="1400" dirty="0">
                 <a:solidFill>
-                  <a:srgbClr val="CBD5E1"/>
+                  <a:srgbClr val="64748B"/>
                 </a:solidFill>
                 <a:latin typeface="Calibri" pitchFamily="34" charset="0"/>
                 <a:ea typeface="Calibri" pitchFamily="34" charset="-122"/>
@@ -14092,7 +14092,7 @@
             <a:r>
               <a:rPr lang="en-US" sz="1400" dirty="0">
                 <a:solidFill>
-                  <a:srgbClr val="CBD5E1"/>
+                  <a:srgbClr val="64748B"/>
                 </a:solidFill>
                 <a:latin typeface="Calibri" pitchFamily="34" charset="0"/>
                 <a:ea typeface="Calibri" pitchFamily="34" charset="-122"/>
@@ -14110,7 +14110,7 @@
             <a:r>
               <a:rPr lang="en-US" sz="1400" dirty="0">
                 <a:solidFill>
-                  <a:srgbClr val="CBD5E1"/>
+                  <a:srgbClr val="64748B"/>
                 </a:solidFill>
                 <a:latin typeface="Calibri" pitchFamily="34" charset="0"/>
                 <a:ea typeface="Calibri" pitchFamily="34" charset="-122"/>
@@ -14128,7 +14128,7 @@
             <a:r>
               <a:rPr lang="en-US" sz="1600" dirty="0">
                 <a:solidFill>
-                  <a:srgbClr val="E2E8F0"/>
+                  <a:srgbClr val="334155"/>
                 </a:solidFill>
                 <a:latin typeface="Calibri" pitchFamily="34" charset="0"/>
                 <a:ea typeface="Calibri" pitchFamily="34" charset="-122"/>
@@ -14155,11 +14155,11 @@
             <a:avLst/>
           </a:prstGeom>
           <a:solidFill>
-            <a:srgbClr val="1E1A3A"/>
+            <a:srgbClr val="FFFFFF"/>
           </a:solidFill>
           <a:ln w="12700">
             <a:solidFill>
-              <a:srgbClr val="1E1A3A"/>
+              <a:srgbClr val="E2E8F0"/>
             </a:solidFill>
             <a:prstDash val="solid"/>
           </a:ln>
@@ -14180,11 +14180,11 @@
             <a:avLst/>
           </a:prstGeom>
           <a:solidFill>
-            <a:srgbClr val="34D399"/>
+            <a:srgbClr val="059669"/>
           </a:solidFill>
           <a:ln w="12700">
             <a:solidFill>
-              <a:srgbClr val="34D399"/>
+              <a:srgbClr val="059669"/>
             </a:solidFill>
             <a:prstDash val="solid"/>
           </a:ln>
@@ -14217,7 +14217,7 @@
             <a:r>
               <a:rPr lang="en-US" sz="1900" b="1" dirty="0">
                 <a:solidFill>
-                  <a:srgbClr val="34D399"/>
+                  <a:srgbClr val="059669"/>
                 </a:solidFill>
                 <a:latin typeface="Cambria" pitchFamily="34" charset="0"/>
                 <a:ea typeface="Cambria" pitchFamily="34" charset="-122"/>
@@ -14259,7 +14259,7 @@
             <a:r>
               <a:rPr lang="en-US" sz="1600" dirty="0">
                 <a:solidFill>
-                  <a:srgbClr val="E2E8F0"/>
+                  <a:srgbClr val="334155"/>
                 </a:solidFill>
                 <a:latin typeface="Calibri" pitchFamily="34" charset="0"/>
                 <a:ea typeface="Calibri" pitchFamily="34" charset="-122"/>
@@ -14276,7 +14276,7 @@
             <a:r>
               <a:rPr lang="en-US" sz="1600" b="1" dirty="0">
                 <a:solidFill>
-                  <a:srgbClr val="FFFFFF"/>
+                  <a:srgbClr val="0F172A"/>
                 </a:solidFill>
                 <a:latin typeface="Calibri" pitchFamily="34" charset="0"/>
                 <a:ea typeface="Calibri" pitchFamily="34" charset="-122"/>
@@ -14293,7 +14293,7 @@
             <a:r>
               <a:rPr lang="en-US" sz="1600" dirty="0">
                 <a:solidFill>
-                  <a:srgbClr val="E2E8F0"/>
+                  <a:srgbClr val="334155"/>
                 </a:solidFill>
                 <a:latin typeface="Calibri" pitchFamily="34" charset="0"/>
                 <a:ea typeface="Calibri" pitchFamily="34" charset="-122"/>
@@ -14311,7 +14311,7 @@
             <a:r>
               <a:rPr lang="en-US" sz="1600" dirty="0">
                 <a:solidFill>
-                  <a:srgbClr val="E2E8F0"/>
+                  <a:srgbClr val="334155"/>
                 </a:solidFill>
                 <a:latin typeface="Calibri" pitchFamily="34" charset="0"/>
                 <a:ea typeface="Calibri" pitchFamily="34" charset="-122"/>
@@ -14328,7 +14328,7 @@
             <a:r>
               <a:rPr lang="en-US" sz="1600" b="1" dirty="0">
                 <a:solidFill>
-                  <a:srgbClr val="34D399"/>
+                  <a:srgbClr val="059669"/>
                 </a:solidFill>
                 <a:latin typeface="Calibri" pitchFamily="34" charset="0"/>
                 <a:ea typeface="Calibri" pitchFamily="34" charset="-122"/>
@@ -14345,7 +14345,7 @@
             <a:r>
               <a:rPr lang="en-US" sz="1600" dirty="0">
                 <a:solidFill>
-                  <a:srgbClr val="E2E8F0"/>
+                  <a:srgbClr val="334155"/>
                 </a:solidFill>
                 <a:latin typeface="Calibri" pitchFamily="34" charset="0"/>
                 <a:ea typeface="Calibri" pitchFamily="34" charset="-122"/>
@@ -14363,7 +14363,7 @@
             <a:r>
               <a:rPr lang="en-US" sz="1600" dirty="0">
                 <a:solidFill>
-                  <a:srgbClr val="E2E8F0"/>
+                  <a:srgbClr val="334155"/>
                 </a:solidFill>
                 <a:latin typeface="Calibri" pitchFamily="34" charset="0"/>
                 <a:ea typeface="Calibri" pitchFamily="34" charset="-122"/>
@@ -14380,7 +14380,7 @@
             <a:r>
               <a:rPr lang="en-US" sz="1600" i="1" dirty="0">
                 <a:solidFill>
-                  <a:srgbClr val="FFFFFF"/>
+                  <a:srgbClr val="0F172A"/>
                 </a:solidFill>
                 <a:latin typeface="Calibri" pitchFamily="34" charset="0"/>
                 <a:ea typeface="Calibri" pitchFamily="34" charset="-122"/>
@@ -14397,7 +14397,7 @@
             <a:r>
               <a:rPr lang="en-US" sz="1600" dirty="0">
                 <a:solidFill>
-                  <a:srgbClr val="E2E8F0"/>
+                  <a:srgbClr val="334155"/>
                 </a:solidFill>
                 <a:latin typeface="Calibri" pitchFamily="34" charset="0"/>
                 <a:ea typeface="Calibri" pitchFamily="34" charset="-122"/>
@@ -14521,7 +14521,7 @@
     <p:bg>
       <p:bgPr>
         <a:solidFill>
-          <a:srgbClr val="151025"/>
+          <a:srgbClr val="F8FAFC"/>
         </a:solidFill>
       </p:bgPr>
     </p:bg>
@@ -14554,13 +14554,13 @@
             <a:avLst/>
           </a:prstGeom>
           <a:solidFill>
-            <a:srgbClr val="818CF8">
+            <a:srgbClr val="4F46E5">
               <a:alpha val="15000"/>
             </a:srgbClr>
           </a:solidFill>
           <a:ln w="12700">
             <a:solidFill>
-              <a:srgbClr val="818CF8">
+              <a:srgbClr val="4F46E5">
                 <a:alpha val="15000"/>
               </a:srgbClr>
             </a:solidFill>
@@ -14583,13 +14583,13 @@
             <a:avLst/>
           </a:prstGeom>
           <a:solidFill>
-            <a:srgbClr val="F472B6">
+            <a:srgbClr val="DB2777">
               <a:alpha val="12000"/>
             </a:srgbClr>
           </a:solidFill>
           <a:ln w="12700">
             <a:solidFill>
-              <a:srgbClr val="F472B6">
+              <a:srgbClr val="DB2777">
                 <a:alpha val="12000"/>
               </a:srgbClr>
             </a:solidFill>
@@ -14612,11 +14612,11 @@
             <a:avLst/>
           </a:prstGeom>
           <a:solidFill>
-            <a:srgbClr val="FBBF24"/>
+            <a:srgbClr val="D97706"/>
           </a:solidFill>
           <a:ln w="12700">
             <a:solidFill>
-              <a:srgbClr val="FBBF24"/>
+              <a:srgbClr val="D97706"/>
             </a:solidFill>
             <a:prstDash val="solid"/>
           </a:ln>
@@ -14649,7 +14649,7 @@
             <a:r>
               <a:rPr lang="en-US" sz="1300" b="1" spc="1000" kern="0" dirty="0">
                 <a:solidFill>
-                  <a:srgbClr val="FBBF24"/>
+                  <a:srgbClr val="D97706"/>
                 </a:solidFill>
                 <a:latin typeface="Calibri" pitchFamily="34" charset="0"/>
                 <a:ea typeface="Calibri" pitchFamily="34" charset="-122"/>
@@ -14688,7 +14688,7 @@
             <a:r>
               <a:rPr lang="en-US" sz="3600" b="1" dirty="0">
                 <a:solidFill>
-                  <a:srgbClr val="FFFFFF"/>
+                  <a:srgbClr val="0F172A"/>
                 </a:solidFill>
                 <a:latin typeface="Cambria" pitchFamily="34" charset="0"/>
                 <a:ea typeface="Cambria" pitchFamily="34" charset="-122"/>
@@ -14715,11 +14715,11 @@
             <a:avLst/>
           </a:prstGeom>
           <a:solidFill>
-            <a:srgbClr val="F472B6"/>
+            <a:srgbClr val="DB2777"/>
           </a:solidFill>
           <a:ln w="12700">
             <a:solidFill>
-              <a:srgbClr val="F472B6"/>
+              <a:srgbClr val="DB2777"/>
             </a:solidFill>
             <a:prstDash val="solid"/>
           </a:ln>
@@ -14740,11 +14740,11 @@
             <a:avLst/>
           </a:prstGeom>
           <a:solidFill>
-            <a:srgbClr val="1E1A3A"/>
+            <a:srgbClr val="FFFFFF"/>
           </a:solidFill>
           <a:ln w="12700">
             <a:solidFill>
-              <a:srgbClr val="1E1A3A"/>
+              <a:srgbClr val="E2E8F0"/>
             </a:solidFill>
             <a:prstDash val="solid"/>
           </a:ln>
@@ -14765,11 +14765,11 @@
             <a:avLst/>
           </a:prstGeom>
           <a:solidFill>
-            <a:srgbClr val="818CF8"/>
+            <a:srgbClr val="4F46E5"/>
           </a:solidFill>
           <a:ln w="12700">
             <a:solidFill>
-              <a:srgbClr val="818CF8"/>
+              <a:srgbClr val="4F46E5"/>
             </a:solidFill>
             <a:prstDash val="solid"/>
           </a:ln>
@@ -14802,7 +14802,7 @@
             <a:r>
               <a:rPr lang="en-US" sz="2100" b="1" dirty="0">
                 <a:solidFill>
-                  <a:srgbClr val="818CF8"/>
+                  <a:srgbClr val="4F46E5"/>
                 </a:solidFill>
                 <a:latin typeface="Cambria" pitchFamily="34" charset="0"/>
                 <a:ea typeface="Cambria" pitchFamily="34" charset="-122"/>
@@ -14829,11 +14829,11 @@
             <a:avLst/>
           </a:prstGeom>
           <a:solidFill>
-            <a:srgbClr val="151025"/>
+            <a:srgbClr val="1E293B"/>
           </a:solidFill>
           <a:ln w="12700">
             <a:solidFill>
-              <a:srgbClr val="151025"/>
+              <a:srgbClr val="1E293B"/>
             </a:solidFill>
             <a:prstDash val="solid"/>
           </a:ln>
@@ -14908,7 +14908,7 @@
             <a:r>
               <a:rPr lang="en-US" sz="1700" b="1" dirty="0">
                 <a:solidFill>
-                  <a:srgbClr val="818CF8"/>
+                  <a:srgbClr val="4F46E5"/>
                 </a:solidFill>
                 <a:latin typeface="Calibri" pitchFamily="34" charset="0"/>
                 <a:ea typeface="Calibri" pitchFamily="34" charset="-122"/>
@@ -14926,7 +14926,7 @@
             <a:r>
               <a:rPr lang="en-US" sz="1700" b="1" dirty="0">
                 <a:solidFill>
-                  <a:srgbClr val="FFFFFF"/>
+                  <a:srgbClr val="0F172A"/>
                 </a:solidFill>
                 <a:latin typeface="Calibri" pitchFamily="34" charset="0"/>
                 <a:ea typeface="Calibri" pitchFamily="34" charset="-122"/>
@@ -14943,7 +14943,7 @@
             <a:r>
               <a:rPr lang="en-US" sz="1700" dirty="0">
                 <a:solidFill>
-                  <a:srgbClr val="E2E8F0"/>
+                  <a:srgbClr val="334155"/>
                 </a:solidFill>
                 <a:latin typeface="Calibri" pitchFamily="34" charset="0"/>
                 <a:ea typeface="Calibri" pitchFamily="34" charset="-122"/>
@@ -14961,7 +14961,7 @@
             <a:r>
               <a:rPr lang="en-US" sz="1600" dirty="0">
                 <a:solidFill>
-                  <a:srgbClr val="E2E8F0"/>
+                  <a:srgbClr val="334155"/>
                 </a:solidFill>
                 <a:latin typeface="Calibri" pitchFamily="34" charset="0"/>
                 <a:ea typeface="Calibri" pitchFamily="34" charset="-122"/>
@@ -14979,7 +14979,7 @@
             <a:r>
               <a:rPr lang="en-US" sz="1600" i="1" dirty="0">
                 <a:solidFill>
-                  <a:srgbClr val="CBD5E1"/>
+                  <a:srgbClr val="64748B"/>
                 </a:solidFill>
                 <a:latin typeface="Calibri" pitchFamily="34" charset="0"/>
                 <a:ea typeface="Calibri" pitchFamily="34" charset="-122"/>
@@ -15006,11 +15006,11 @@
             <a:avLst/>
           </a:prstGeom>
           <a:solidFill>
-            <a:srgbClr val="1E1A3A"/>
+            <a:srgbClr val="FFFFFF"/>
           </a:solidFill>
           <a:ln w="12700">
             <a:solidFill>
-              <a:srgbClr val="1E1A3A"/>
+              <a:srgbClr val="E2E8F0"/>
             </a:solidFill>
             <a:prstDash val="solid"/>
           </a:ln>
@@ -15031,11 +15031,11 @@
             <a:avLst/>
           </a:prstGeom>
           <a:solidFill>
-            <a:srgbClr val="FBBF24"/>
+            <a:srgbClr val="D97706"/>
           </a:solidFill>
           <a:ln w="12700">
             <a:solidFill>
-              <a:srgbClr val="FBBF24"/>
+              <a:srgbClr val="D97706"/>
             </a:solidFill>
             <a:prstDash val="solid"/>
           </a:ln>
@@ -15068,7 +15068,7 @@
             <a:r>
               <a:rPr lang="en-US" sz="2100" b="1" dirty="0">
                 <a:solidFill>
-                  <a:srgbClr val="FBBF24"/>
+                  <a:srgbClr val="D97706"/>
                 </a:solidFill>
                 <a:latin typeface="Cambria" pitchFamily="34" charset="0"/>
                 <a:ea typeface="Cambria" pitchFamily="34" charset="-122"/>
@@ -15095,11 +15095,11 @@
             <a:avLst/>
           </a:prstGeom>
           <a:solidFill>
-            <a:srgbClr val="151025"/>
+            <a:srgbClr val="1E293B"/>
           </a:solidFill>
           <a:ln w="12700">
             <a:solidFill>
-              <a:srgbClr val="151025"/>
+              <a:srgbClr val="1E293B"/>
             </a:solidFill>
             <a:prstDash val="solid"/>
           </a:ln>
@@ -15174,7 +15174,7 @@
             <a:r>
               <a:rPr lang="en-US" sz="1700" b="1" dirty="0">
                 <a:solidFill>
-                  <a:srgbClr val="FBBF24"/>
+                  <a:srgbClr val="D97706"/>
                 </a:solidFill>
                 <a:latin typeface="Calibri" pitchFamily="34" charset="0"/>
                 <a:ea typeface="Calibri" pitchFamily="34" charset="-122"/>
@@ -15192,7 +15192,7 @@
             <a:r>
               <a:rPr lang="en-US" sz="1700" b="1" dirty="0">
                 <a:solidFill>
-                  <a:srgbClr val="FFFFFF"/>
+                  <a:srgbClr val="0F172A"/>
                 </a:solidFill>
                 <a:latin typeface="Calibri" pitchFamily="34" charset="0"/>
                 <a:ea typeface="Calibri" pitchFamily="34" charset="-122"/>
@@ -15209,7 +15209,7 @@
             <a:r>
               <a:rPr lang="en-US" sz="1700" dirty="0">
                 <a:solidFill>
-                  <a:srgbClr val="E2E8F0"/>
+                  <a:srgbClr val="334155"/>
                 </a:solidFill>
                 <a:latin typeface="Calibri" pitchFamily="34" charset="0"/>
                 <a:ea typeface="Calibri" pitchFamily="34" charset="-122"/>
@@ -15227,7 +15227,7 @@
             <a:r>
               <a:rPr lang="en-US" sz="1600" dirty="0">
                 <a:solidFill>
-                  <a:srgbClr val="E2E8F0"/>
+                  <a:srgbClr val="334155"/>
                 </a:solidFill>
                 <a:latin typeface="Calibri" pitchFamily="34" charset="0"/>
                 <a:ea typeface="Calibri" pitchFamily="34" charset="-122"/>
@@ -15245,7 +15245,7 @@
             <a:r>
               <a:rPr lang="en-US" sz="1600" i="1" dirty="0">
                 <a:solidFill>
-                  <a:srgbClr val="CBD5E1"/>
+                  <a:srgbClr val="64748B"/>
                 </a:solidFill>
                 <a:latin typeface="Calibri" pitchFamily="34" charset="0"/>
                 <a:ea typeface="Calibri" pitchFamily="34" charset="-122"/>
@@ -15369,7 +15369,7 @@
     <p:bg>
       <p:bgPr>
         <a:solidFill>
-          <a:srgbClr val="151025"/>
+          <a:srgbClr val="F8FAFC"/>
         </a:solidFill>
       </p:bgPr>
     </p:bg>
@@ -15402,13 +15402,13 @@
             <a:avLst/>
           </a:prstGeom>
           <a:solidFill>
-            <a:srgbClr val="818CF8">
+            <a:srgbClr val="4F46E5">
               <a:alpha val="15000"/>
             </a:srgbClr>
           </a:solidFill>
           <a:ln w="12700">
             <a:solidFill>
-              <a:srgbClr val="818CF8">
+              <a:srgbClr val="4F46E5">
                 <a:alpha val="15000"/>
               </a:srgbClr>
             </a:solidFill>
@@ -15431,13 +15431,13 @@
             <a:avLst/>
           </a:prstGeom>
           <a:solidFill>
-            <a:srgbClr val="F472B6">
+            <a:srgbClr val="DB2777">
               <a:alpha val="12000"/>
             </a:srgbClr>
           </a:solidFill>
           <a:ln w="12700">
             <a:solidFill>
-              <a:srgbClr val="F472B6">
+              <a:srgbClr val="DB2777">
                 <a:alpha val="12000"/>
               </a:srgbClr>
             </a:solidFill>
@@ -15460,11 +15460,11 @@
             <a:avLst/>
           </a:prstGeom>
           <a:solidFill>
-            <a:srgbClr val="FBBF24"/>
+            <a:srgbClr val="D97706"/>
           </a:solidFill>
           <a:ln w="12700">
             <a:solidFill>
-              <a:srgbClr val="FBBF24"/>
+              <a:srgbClr val="D97706"/>
             </a:solidFill>
             <a:prstDash val="solid"/>
           </a:ln>
@@ -15497,7 +15497,7 @@
             <a:r>
               <a:rPr lang="en-US" sz="1300" b="1" spc="1000" kern="0" dirty="0">
                 <a:solidFill>
-                  <a:srgbClr val="FBBF24"/>
+                  <a:srgbClr val="D97706"/>
                 </a:solidFill>
                 <a:latin typeface="Calibri" pitchFamily="34" charset="0"/>
                 <a:ea typeface="Calibri" pitchFamily="34" charset="-122"/>
@@ -15536,7 +15536,7 @@
             <a:r>
               <a:rPr lang="en-US" sz="3600" b="1" dirty="0">
                 <a:solidFill>
-                  <a:srgbClr val="FFFFFF"/>
+                  <a:srgbClr val="0F172A"/>
                 </a:solidFill>
                 <a:latin typeface="Cambria" pitchFamily="34" charset="0"/>
                 <a:ea typeface="Cambria" pitchFamily="34" charset="-122"/>
@@ -15563,11 +15563,11 @@
             <a:avLst/>
           </a:prstGeom>
           <a:solidFill>
-            <a:srgbClr val="F472B6"/>
+            <a:srgbClr val="DB2777"/>
           </a:solidFill>
           <a:ln w="12700">
             <a:solidFill>
-              <a:srgbClr val="F472B6"/>
+              <a:srgbClr val="DB2777"/>
             </a:solidFill>
             <a:prstDash val="solid"/>
           </a:ln>
@@ -15600,7 +15600,7 @@
             <a:r>
               <a:rPr lang="en-US" sz="1900" i="1" dirty="0">
                 <a:solidFill>
-                  <a:srgbClr val="E2E8F0"/>
+                  <a:srgbClr val="334155"/>
                 </a:solidFill>
                 <a:latin typeface="Calibri" pitchFamily="34" charset="0"/>
                 <a:ea typeface="Calibri" pitchFamily="34" charset="-122"/>
@@ -15627,11 +15627,11 @@
             <a:avLst/>
           </a:prstGeom>
           <a:solidFill>
-            <a:srgbClr val="1E1A3A"/>
+            <a:srgbClr val="FFFFFF"/>
           </a:solidFill>
           <a:ln w="12700">
             <a:solidFill>
-              <a:srgbClr val="1E1A3A"/>
+              <a:srgbClr val="E2E8F0"/>
             </a:solidFill>
             <a:prstDash val="solid"/>
           </a:ln>
@@ -15652,11 +15652,11 @@
             <a:avLst/>
           </a:prstGeom>
           <a:solidFill>
-            <a:srgbClr val="F472B6"/>
+            <a:srgbClr val="DB2777"/>
           </a:solidFill>
           <a:ln w="12700">
             <a:solidFill>
-              <a:srgbClr val="F472B6"/>
+              <a:srgbClr val="DB2777"/>
             </a:solidFill>
             <a:prstDash val="solid"/>
           </a:ln>
@@ -15689,7 +15689,7 @@
             <a:r>
               <a:rPr lang="en-US" sz="2100" b="1" dirty="0">
                 <a:solidFill>
-                  <a:srgbClr val="F472B6"/>
+                  <a:srgbClr val="DB2777"/>
                 </a:solidFill>
                 <a:latin typeface="Cambria" pitchFamily="34" charset="0"/>
                 <a:ea typeface="Cambria" pitchFamily="34" charset="-122"/>
@@ -15731,7 +15731,7 @@
             <a:r>
               <a:rPr lang="en-US" sz="1700" b="1" dirty="0">
                 <a:solidFill>
-                  <a:srgbClr val="E2E8F0"/>
+                  <a:srgbClr val="334155"/>
                 </a:solidFill>
                 <a:latin typeface="Calibri" pitchFamily="34" charset="0"/>
                 <a:ea typeface="Calibri" pitchFamily="34" charset="-122"/>
@@ -15748,7 +15748,7 @@
             <a:r>
               <a:rPr lang="en-US" sz="1700" dirty="0">
                 <a:solidFill>
-                  <a:srgbClr val="E2E8F0"/>
+                  <a:srgbClr val="334155"/>
                 </a:solidFill>
                 <a:latin typeface="Calibri" pitchFamily="34" charset="0"/>
                 <a:ea typeface="Calibri" pitchFamily="34" charset="-122"/>
@@ -15766,7 +15766,7 @@
             <a:r>
               <a:rPr lang="en-US" sz="1700" b="1" dirty="0">
                 <a:solidFill>
-                  <a:srgbClr val="E2E8F0"/>
+                  <a:srgbClr val="334155"/>
                 </a:solidFill>
                 <a:latin typeface="Calibri" pitchFamily="34" charset="0"/>
                 <a:ea typeface="Calibri" pitchFamily="34" charset="-122"/>
@@ -15783,7 +15783,7 @@
             <a:r>
               <a:rPr lang="en-US" sz="1700" dirty="0">
                 <a:solidFill>
-                  <a:srgbClr val="E2E8F0"/>
+                  <a:srgbClr val="334155"/>
                 </a:solidFill>
                 <a:latin typeface="Calibri" pitchFamily="34" charset="0"/>
                 <a:ea typeface="Calibri" pitchFamily="34" charset="-122"/>
@@ -15801,7 +15801,7 @@
             <a:r>
               <a:rPr lang="en-US" sz="1700" b="1" dirty="0">
                 <a:solidFill>
-                  <a:srgbClr val="34D399"/>
+                  <a:srgbClr val="059669"/>
                 </a:solidFill>
                 <a:latin typeface="Calibri" pitchFamily="34" charset="0"/>
                 <a:ea typeface="Calibri" pitchFamily="34" charset="-122"/>
@@ -15818,7 +15818,7 @@
             <a:r>
               <a:rPr lang="en-US" sz="1700" dirty="0">
                 <a:solidFill>
-                  <a:srgbClr val="E2E8F0"/>
+                  <a:srgbClr val="334155"/>
                 </a:solidFill>
                 <a:latin typeface="Calibri" pitchFamily="34" charset="0"/>
                 <a:ea typeface="Calibri" pitchFamily="34" charset="-122"/>
@@ -15836,7 +15836,7 @@
             <a:r>
               <a:rPr lang="en-US" sz="1600" i="1" dirty="0">
                 <a:solidFill>
-                  <a:srgbClr val="34D399"/>
+                  <a:srgbClr val="059669"/>
                 </a:solidFill>
                 <a:latin typeface="Calibri" pitchFamily="34" charset="0"/>
                 <a:ea typeface="Calibri" pitchFamily="34" charset="-122"/>
@@ -15863,11 +15863,11 @@
             <a:avLst/>
           </a:prstGeom>
           <a:solidFill>
-            <a:srgbClr val="1E1A3A"/>
+            <a:srgbClr val="FFFFFF"/>
           </a:solidFill>
           <a:ln w="12700">
             <a:solidFill>
-              <a:srgbClr val="1E1A3A"/>
+              <a:srgbClr val="E2E8F0"/>
             </a:solidFill>
             <a:prstDash val="solid"/>
           </a:ln>
@@ -15888,11 +15888,11 @@
             <a:avLst/>
           </a:prstGeom>
           <a:solidFill>
-            <a:srgbClr val="FBBF24"/>
+            <a:srgbClr val="D97706"/>
           </a:solidFill>
           <a:ln w="12700">
             <a:solidFill>
-              <a:srgbClr val="FBBF24"/>
+              <a:srgbClr val="D97706"/>
             </a:solidFill>
             <a:prstDash val="solid"/>
           </a:ln>
@@ -15925,7 +15925,7 @@
             <a:r>
               <a:rPr lang="en-US" sz="2100" b="1" dirty="0">
                 <a:solidFill>
-                  <a:srgbClr val="FBBF24"/>
+                  <a:srgbClr val="D97706"/>
                 </a:solidFill>
                 <a:latin typeface="Cambria" pitchFamily="34" charset="0"/>
                 <a:ea typeface="Cambria" pitchFamily="34" charset="-122"/>
@@ -15967,7 +15967,7 @@
             <a:r>
               <a:rPr lang="en-US" sz="1700" b="1" dirty="0">
                 <a:solidFill>
-                  <a:srgbClr val="E2E8F0"/>
+                  <a:srgbClr val="334155"/>
                 </a:solidFill>
                 <a:latin typeface="Calibri" pitchFamily="34" charset="0"/>
                 <a:ea typeface="Calibri" pitchFamily="34" charset="-122"/>
@@ -15984,7 +15984,7 @@
             <a:r>
               <a:rPr lang="en-US" sz="1700" dirty="0">
                 <a:solidFill>
-                  <a:srgbClr val="E2E8F0"/>
+                  <a:srgbClr val="334155"/>
                 </a:solidFill>
                 <a:latin typeface="Calibri" pitchFamily="34" charset="0"/>
                 <a:ea typeface="Calibri" pitchFamily="34" charset="-122"/>
@@ -16002,7 +16002,7 @@
             <a:r>
               <a:rPr lang="en-US" sz="1700" b="1" dirty="0">
                 <a:solidFill>
-                  <a:srgbClr val="E2E8F0"/>
+                  <a:srgbClr val="334155"/>
                 </a:solidFill>
                 <a:latin typeface="Calibri" pitchFamily="34" charset="0"/>
                 <a:ea typeface="Calibri" pitchFamily="34" charset="-122"/>
@@ -16019,7 +16019,7 @@
             <a:r>
               <a:rPr lang="en-US" sz="1700" dirty="0">
                 <a:solidFill>
-                  <a:srgbClr val="E2E8F0"/>
+                  <a:srgbClr val="334155"/>
                 </a:solidFill>
                 <a:latin typeface="Calibri" pitchFamily="34" charset="0"/>
                 <a:ea typeface="Calibri" pitchFamily="34" charset="-122"/>
@@ -16037,7 +16037,7 @@
             <a:r>
               <a:rPr lang="en-US" sz="1700" b="1" dirty="0">
                 <a:solidFill>
-                  <a:srgbClr val="F472B6"/>
+                  <a:srgbClr val="DB2777"/>
                 </a:solidFill>
                 <a:latin typeface="Calibri" pitchFamily="34" charset="0"/>
                 <a:ea typeface="Calibri" pitchFamily="34" charset="-122"/>
@@ -16054,7 +16054,7 @@
             <a:r>
               <a:rPr lang="en-US" sz="1700" dirty="0">
                 <a:solidFill>
-                  <a:srgbClr val="E2E8F0"/>
+                  <a:srgbClr val="334155"/>
                 </a:solidFill>
                 <a:latin typeface="Calibri" pitchFamily="34" charset="0"/>
                 <a:ea typeface="Calibri" pitchFamily="34" charset="-122"/>
@@ -16072,7 +16072,7 @@
             <a:r>
               <a:rPr lang="en-US" sz="1600" i="1" dirty="0">
                 <a:solidFill>
-                  <a:srgbClr val="F472B6"/>
+                  <a:srgbClr val="DB2777"/>
                 </a:solidFill>
                 <a:latin typeface="Calibri" pitchFamily="34" charset="0"/>
                 <a:ea typeface="Calibri" pitchFamily="34" charset="-122"/>
@@ -16196,7 +16196,7 @@
     <p:bg>
       <p:bgPr>
         <a:solidFill>
-          <a:srgbClr val="151025"/>
+          <a:srgbClr val="F8FAFC"/>
         </a:solidFill>
       </p:bgPr>
     </p:bg>
@@ -16229,13 +16229,13 @@
             <a:avLst/>
           </a:prstGeom>
           <a:solidFill>
-            <a:srgbClr val="818CF8">
+            <a:srgbClr val="4F46E5">
               <a:alpha val="15000"/>
             </a:srgbClr>
           </a:solidFill>
           <a:ln w="12700">
             <a:solidFill>
-              <a:srgbClr val="818CF8">
+              <a:srgbClr val="4F46E5">
                 <a:alpha val="15000"/>
               </a:srgbClr>
             </a:solidFill>
@@ -16258,13 +16258,13 @@
             <a:avLst/>
           </a:prstGeom>
           <a:solidFill>
-            <a:srgbClr val="F472B6">
+            <a:srgbClr val="DB2777">
               <a:alpha val="12000"/>
             </a:srgbClr>
           </a:solidFill>
           <a:ln w="12700">
             <a:solidFill>
-              <a:srgbClr val="F472B6">
+              <a:srgbClr val="DB2777">
                 <a:alpha val="12000"/>
               </a:srgbClr>
             </a:solidFill>
@@ -16287,11 +16287,11 @@
             <a:avLst/>
           </a:prstGeom>
           <a:solidFill>
-            <a:srgbClr val="FBBF24"/>
+            <a:srgbClr val="D97706"/>
           </a:solidFill>
           <a:ln w="12700">
             <a:solidFill>
-              <a:srgbClr val="FBBF24"/>
+              <a:srgbClr val="D97706"/>
             </a:solidFill>
             <a:prstDash val="solid"/>
           </a:ln>
@@ -16324,7 +16324,7 @@
             <a:r>
               <a:rPr lang="en-US" sz="1300" b="1" spc="1000" kern="0" dirty="0">
                 <a:solidFill>
-                  <a:srgbClr val="FBBF24"/>
+                  <a:srgbClr val="D97706"/>
                 </a:solidFill>
                 <a:latin typeface="Calibri" pitchFamily="34" charset="0"/>
                 <a:ea typeface="Calibri" pitchFamily="34" charset="-122"/>
@@ -16363,7 +16363,7 @@
             <a:r>
               <a:rPr lang="en-US" sz="3600" b="1" dirty="0">
                 <a:solidFill>
-                  <a:srgbClr val="FFFFFF"/>
+                  <a:srgbClr val="0F172A"/>
                 </a:solidFill>
                 <a:latin typeface="Cambria" pitchFamily="34" charset="0"/>
                 <a:ea typeface="Cambria" pitchFamily="34" charset="-122"/>
@@ -16390,11 +16390,11 @@
             <a:avLst/>
           </a:prstGeom>
           <a:solidFill>
-            <a:srgbClr val="F472B6"/>
+            <a:srgbClr val="DB2777"/>
           </a:solidFill>
           <a:ln w="12700">
             <a:solidFill>
-              <a:srgbClr val="F472B6"/>
+              <a:srgbClr val="DB2777"/>
             </a:solidFill>
             <a:prstDash val="solid"/>
           </a:ln>
@@ -16438,11 +16438,11 @@
             <a:avLst/>
           </a:prstGeom>
           <a:solidFill>
-            <a:srgbClr val="1E1A3A"/>
+            <a:srgbClr val="FFFFFF"/>
           </a:solidFill>
           <a:ln w="12700">
             <a:solidFill>
-              <a:srgbClr val="1E1A3A"/>
+              <a:srgbClr val="E2E8F0"/>
             </a:solidFill>
             <a:prstDash val="solid"/>
           </a:ln>
@@ -16463,11 +16463,11 @@
             <a:avLst/>
           </a:prstGeom>
           <a:solidFill>
-            <a:srgbClr val="F472B6"/>
+            <a:srgbClr val="DB2777"/>
           </a:solidFill>
           <a:ln w="12700">
             <a:solidFill>
-              <a:srgbClr val="F472B6"/>
+              <a:srgbClr val="DB2777"/>
             </a:solidFill>
             <a:prstDash val="solid"/>
           </a:ln>
@@ -16503,7 +16503,7 @@
             <a:r>
               <a:rPr lang="en-US" sz="1800" b="1" dirty="0">
                 <a:solidFill>
-                  <a:srgbClr val="F472B6"/>
+                  <a:srgbClr val="DB2777"/>
                 </a:solidFill>
                 <a:latin typeface="Calibri" pitchFamily="34" charset="0"/>
                 <a:ea typeface="Calibri" pitchFamily="34" charset="-122"/>
@@ -16538,7 +16538,7 @@
             <a:r>
               <a:rPr lang="en-US" sz="1400" dirty="0">
                 <a:solidFill>
-                  <a:srgbClr val="E2E8F0"/>
+                  <a:srgbClr val="334155"/>
                 </a:solidFill>
                 <a:latin typeface="Calibri" pitchFamily="34" charset="0"/>
                 <a:ea typeface="Calibri" pitchFamily="34" charset="-122"/>
@@ -16565,11 +16565,11 @@
             <a:avLst/>
           </a:prstGeom>
           <a:solidFill>
-            <a:srgbClr val="1E1A3A"/>
+            <a:srgbClr val="FFFFFF"/>
           </a:solidFill>
           <a:ln w="12700">
             <a:solidFill>
-              <a:srgbClr val="1E1A3A"/>
+              <a:srgbClr val="E2E8F0"/>
             </a:solidFill>
             <a:prstDash val="solid"/>
           </a:ln>
@@ -16590,11 +16590,11 @@
             <a:avLst/>
           </a:prstGeom>
           <a:solidFill>
-            <a:srgbClr val="34D399"/>
+            <a:srgbClr val="059669"/>
           </a:solidFill>
           <a:ln w="12700">
             <a:solidFill>
-              <a:srgbClr val="34D399"/>
+              <a:srgbClr val="059669"/>
             </a:solidFill>
             <a:prstDash val="solid"/>
           </a:ln>
@@ -16630,7 +16630,7 @@
             <a:r>
               <a:rPr lang="en-US" sz="1800" b="1" dirty="0">
                 <a:solidFill>
-                  <a:srgbClr val="34D399"/>
+                  <a:srgbClr val="059669"/>
                 </a:solidFill>
                 <a:latin typeface="Calibri" pitchFamily="34" charset="0"/>
                 <a:ea typeface="Calibri" pitchFamily="34" charset="-122"/>
@@ -16665,7 +16665,7 @@
             <a:r>
               <a:rPr lang="en-US" sz="1400" dirty="0">
                 <a:solidFill>
-                  <a:srgbClr val="E2E8F0"/>
+                  <a:srgbClr val="334155"/>
                 </a:solidFill>
                 <a:latin typeface="Calibri" pitchFamily="34" charset="0"/>
                 <a:ea typeface="Calibri" pitchFamily="34" charset="-122"/>
@@ -16789,7 +16789,7 @@
     <p:bg>
       <p:bgPr>
         <a:solidFill>
-          <a:srgbClr val="151025"/>
+          <a:srgbClr val="F8FAFC"/>
         </a:solidFill>
       </p:bgPr>
     </p:bg>
@@ -16822,13 +16822,13 @@
             <a:avLst/>
           </a:prstGeom>
           <a:solidFill>
-            <a:srgbClr val="818CF8">
+            <a:srgbClr val="4F46E5">
               <a:alpha val="15000"/>
             </a:srgbClr>
           </a:solidFill>
           <a:ln w="12700">
             <a:solidFill>
-              <a:srgbClr val="818CF8">
+              <a:srgbClr val="4F46E5">
                 <a:alpha val="15000"/>
               </a:srgbClr>
             </a:solidFill>
@@ -16851,13 +16851,13 @@
             <a:avLst/>
           </a:prstGeom>
           <a:solidFill>
-            <a:srgbClr val="F472B6">
+            <a:srgbClr val="DB2777">
               <a:alpha val="12000"/>
             </a:srgbClr>
           </a:solidFill>
           <a:ln w="12700">
             <a:solidFill>
-              <a:srgbClr val="F472B6">
+              <a:srgbClr val="DB2777">
                 <a:alpha val="12000"/>
               </a:srgbClr>
             </a:solidFill>
@@ -16880,11 +16880,11 @@
             <a:avLst/>
           </a:prstGeom>
           <a:solidFill>
-            <a:srgbClr val="FBBF24"/>
+            <a:srgbClr val="D97706"/>
           </a:solidFill>
           <a:ln w="12700">
             <a:solidFill>
-              <a:srgbClr val="FBBF24"/>
+              <a:srgbClr val="D97706"/>
             </a:solidFill>
             <a:prstDash val="solid"/>
           </a:ln>
@@ -16917,7 +16917,7 @@
             <a:r>
               <a:rPr lang="en-US" sz="1300" b="1" spc="1000" kern="0" dirty="0">
                 <a:solidFill>
-                  <a:srgbClr val="FBBF24"/>
+                  <a:srgbClr val="D97706"/>
                 </a:solidFill>
                 <a:latin typeface="Calibri" pitchFamily="34" charset="0"/>
                 <a:ea typeface="Calibri" pitchFamily="34" charset="-122"/>
@@ -16956,7 +16956,7 @@
             <a:r>
               <a:rPr lang="en-US" sz="3600" b="1" dirty="0">
                 <a:solidFill>
-                  <a:srgbClr val="FFFFFF"/>
+                  <a:srgbClr val="0F172A"/>
                 </a:solidFill>
                 <a:latin typeface="Cambria" pitchFamily="34" charset="0"/>
                 <a:ea typeface="Cambria" pitchFamily="34" charset="-122"/>
@@ -16983,11 +16983,11 @@
             <a:avLst/>
           </a:prstGeom>
           <a:solidFill>
-            <a:srgbClr val="F472B6"/>
+            <a:srgbClr val="DB2777"/>
           </a:solidFill>
           <a:ln w="12700">
             <a:solidFill>
-              <a:srgbClr val="F472B6"/>
+              <a:srgbClr val="DB2777"/>
             </a:solidFill>
             <a:prstDash val="solid"/>
           </a:ln>
@@ -17031,11 +17031,11 @@
             <a:avLst/>
           </a:prstGeom>
           <a:solidFill>
-            <a:srgbClr val="1E1A3A"/>
+            <a:srgbClr val="FFFFFF"/>
           </a:solidFill>
           <a:ln w="12700">
             <a:solidFill>
-              <a:srgbClr val="1E1A3A"/>
+              <a:srgbClr val="E2E8F0"/>
             </a:solidFill>
             <a:prstDash val="solid"/>
           </a:ln>
@@ -17056,11 +17056,11 @@
             <a:avLst/>
           </a:prstGeom>
           <a:solidFill>
-            <a:srgbClr val="34D399"/>
+            <a:srgbClr val="059669"/>
           </a:solidFill>
           <a:ln w="12700">
             <a:solidFill>
-              <a:srgbClr val="34D399"/>
+              <a:srgbClr val="059669"/>
             </a:solidFill>
             <a:prstDash val="solid"/>
           </a:ln>
@@ -17093,7 +17093,7 @@
             <a:r>
               <a:rPr lang="en-US" sz="1600" b="1" dirty="0">
                 <a:solidFill>
-                  <a:srgbClr val="34D399"/>
+                  <a:srgbClr val="059669"/>
                 </a:solidFill>
                 <a:latin typeface="Calibri" pitchFamily="34" charset="0"/>
                 <a:ea typeface="Calibri" pitchFamily="34" charset="-122"/>
@@ -17107,7 +17107,7 @@
             <a:r>
               <a:rPr lang="en-US" sz="1300" dirty="0">
                 <a:solidFill>
-                  <a:srgbClr val="E2E8F0"/>
+                  <a:srgbClr val="334155"/>
                 </a:solidFill>
                 <a:latin typeface="Calibri" pitchFamily="34" charset="0"/>
                 <a:ea typeface="Calibri" pitchFamily="34" charset="-122"/>
@@ -17134,11 +17134,11 @@
             <a:avLst/>
           </a:prstGeom>
           <a:solidFill>
-            <a:srgbClr val="1E1A3A"/>
+            <a:srgbClr val="FFFFFF"/>
           </a:solidFill>
           <a:ln w="12700">
             <a:solidFill>
-              <a:srgbClr val="1E1A3A"/>
+              <a:srgbClr val="E2E8F0"/>
             </a:solidFill>
             <a:prstDash val="solid"/>
           </a:ln>
@@ -17159,11 +17159,11 @@
             <a:avLst/>
           </a:prstGeom>
           <a:solidFill>
-            <a:srgbClr val="818CF8"/>
+            <a:srgbClr val="4F46E5"/>
           </a:solidFill>
           <a:ln w="12700">
             <a:solidFill>
-              <a:srgbClr val="818CF8"/>
+              <a:srgbClr val="4F46E5"/>
             </a:solidFill>
             <a:prstDash val="solid"/>
           </a:ln>
@@ -17196,7 +17196,7 @@
             <a:r>
               <a:rPr lang="en-US" sz="1600" b="1" dirty="0">
                 <a:solidFill>
-                  <a:srgbClr val="818CF8"/>
+                  <a:srgbClr val="4F46E5"/>
                 </a:solidFill>
                 <a:latin typeface="Calibri" pitchFamily="34" charset="0"/>
                 <a:ea typeface="Calibri" pitchFamily="34" charset="-122"/>
@@ -17210,7 +17210,7 @@
             <a:r>
               <a:rPr lang="en-US" sz="1300" dirty="0">
                 <a:solidFill>
-                  <a:srgbClr val="E2E8F0"/>
+                  <a:srgbClr val="334155"/>
                 </a:solidFill>
                 <a:latin typeface="Calibri" pitchFamily="34" charset="0"/>
                 <a:ea typeface="Calibri" pitchFamily="34" charset="-122"/>
@@ -17334,7 +17334,7 @@
     <p:bg>
       <p:bgPr>
         <a:solidFill>
-          <a:srgbClr val="151025"/>
+          <a:srgbClr val="F8FAFC"/>
         </a:solidFill>
       </p:bgPr>
     </p:bg>
@@ -17367,13 +17367,13 @@
             <a:avLst/>
           </a:prstGeom>
           <a:solidFill>
-            <a:srgbClr val="818CF8">
+            <a:srgbClr val="4F46E5">
               <a:alpha val="15000"/>
             </a:srgbClr>
           </a:solidFill>
           <a:ln w="12700">
             <a:solidFill>
-              <a:srgbClr val="818CF8">
+              <a:srgbClr val="4F46E5">
                 <a:alpha val="15000"/>
               </a:srgbClr>
             </a:solidFill>
@@ -17396,13 +17396,13 @@
             <a:avLst/>
           </a:prstGeom>
           <a:solidFill>
-            <a:srgbClr val="F472B6">
+            <a:srgbClr val="DB2777">
               <a:alpha val="12000"/>
             </a:srgbClr>
           </a:solidFill>
           <a:ln w="12700">
             <a:solidFill>
-              <a:srgbClr val="F472B6">
+              <a:srgbClr val="DB2777">
                 <a:alpha val="12000"/>
               </a:srgbClr>
             </a:solidFill>
@@ -17425,11 +17425,11 @@
             <a:avLst/>
           </a:prstGeom>
           <a:solidFill>
-            <a:srgbClr val="FBBF24"/>
+            <a:srgbClr val="D97706"/>
           </a:solidFill>
           <a:ln w="12700">
             <a:solidFill>
-              <a:srgbClr val="FBBF24"/>
+              <a:srgbClr val="D97706"/>
             </a:solidFill>
             <a:prstDash val="solid"/>
           </a:ln>
@@ -17462,7 +17462,7 @@
             <a:r>
               <a:rPr lang="en-US" sz="1300" b="1" spc="1000" kern="0" dirty="0">
                 <a:solidFill>
-                  <a:srgbClr val="FBBF24"/>
+                  <a:srgbClr val="D97706"/>
                 </a:solidFill>
                 <a:latin typeface="Calibri" pitchFamily="34" charset="0"/>
                 <a:ea typeface="Calibri" pitchFamily="34" charset="-122"/>
@@ -17501,7 +17501,7 @@
             <a:r>
               <a:rPr lang="en-US" sz="3600" b="1" dirty="0">
                 <a:solidFill>
-                  <a:srgbClr val="FFFFFF"/>
+                  <a:srgbClr val="0F172A"/>
                 </a:solidFill>
                 <a:latin typeface="Cambria" pitchFamily="34" charset="0"/>
                 <a:ea typeface="Cambria" pitchFamily="34" charset="-122"/>
@@ -17528,11 +17528,11 @@
             <a:avLst/>
           </a:prstGeom>
           <a:solidFill>
-            <a:srgbClr val="F472B6"/>
+            <a:srgbClr val="DB2777"/>
           </a:solidFill>
           <a:ln w="12700">
             <a:solidFill>
-              <a:srgbClr val="F472B6"/>
+              <a:srgbClr val="DB2777"/>
             </a:solidFill>
             <a:prstDash val="solid"/>
           </a:ln>
@@ -17576,11 +17576,11 @@
             <a:avLst/>
           </a:prstGeom>
           <a:solidFill>
-            <a:srgbClr val="1E1A3A"/>
+            <a:srgbClr val="FFFFFF"/>
           </a:solidFill>
           <a:ln w="12700">
             <a:solidFill>
-              <a:srgbClr val="1E1A3A"/>
+              <a:srgbClr val="E2E8F0"/>
             </a:solidFill>
             <a:prstDash val="solid"/>
           </a:ln>
@@ -17601,11 +17601,11 @@
             <a:avLst/>
           </a:prstGeom>
           <a:solidFill>
-            <a:srgbClr val="818CF8"/>
+            <a:srgbClr val="4F46E5"/>
           </a:solidFill>
           <a:ln w="12700">
             <a:solidFill>
-              <a:srgbClr val="818CF8"/>
+              <a:srgbClr val="4F46E5"/>
             </a:solidFill>
             <a:prstDash val="solid"/>
           </a:ln>
@@ -17638,7 +17638,7 @@
             <a:r>
               <a:rPr lang="en-US" sz="1700" b="1" dirty="0">
                 <a:solidFill>
-                  <a:srgbClr val="818CF8"/>
+                  <a:srgbClr val="4F46E5"/>
                 </a:solidFill>
                 <a:latin typeface="Calibri" pitchFamily="34" charset="0"/>
                 <a:ea typeface="Calibri" pitchFamily="34" charset="-122"/>
@@ -17652,7 +17652,7 @@
             <a:r>
               <a:rPr lang="en-US" sz="1400" dirty="0">
                 <a:solidFill>
-                  <a:srgbClr val="E2E8F0"/>
+                  <a:srgbClr val="334155"/>
                 </a:solidFill>
                 <a:latin typeface="Calibri" pitchFamily="34" charset="0"/>
                 <a:ea typeface="Calibri" pitchFamily="34" charset="-122"/>
@@ -17776,7 +17776,7 @@
     <p:bg>
       <p:bgPr>
         <a:solidFill>
-          <a:srgbClr val="151025"/>
+          <a:srgbClr val="1E1B4B"/>
         </a:solidFill>
       </p:bgPr>
     </p:bg>
@@ -17809,13 +17809,13 @@
             <a:avLst/>
           </a:prstGeom>
           <a:solidFill>
-            <a:srgbClr val="818CF8">
+            <a:srgbClr val="4F46E5">
               <a:alpha val="25000"/>
             </a:srgbClr>
           </a:solidFill>
           <a:ln w="12700">
             <a:solidFill>
-              <a:srgbClr val="818CF8">
+              <a:srgbClr val="4F46E5">
                 <a:alpha val="25000"/>
               </a:srgbClr>
             </a:solidFill>
@@ -17838,13 +17838,13 @@
             <a:avLst/>
           </a:prstGeom>
           <a:solidFill>
-            <a:srgbClr val="F472B6">
+            <a:srgbClr val="DB2777">
               <a:alpha val="20000"/>
             </a:srgbClr>
           </a:solidFill>
           <a:ln w="12700">
             <a:solidFill>
-              <a:srgbClr val="F472B6">
+              <a:srgbClr val="DB2777">
                 <a:alpha val="20000"/>
               </a:srgbClr>
             </a:solidFill>
@@ -17867,11 +17867,11 @@
             <a:avLst/>
           </a:prstGeom>
           <a:solidFill>
-            <a:srgbClr val="FBBF24"/>
+            <a:srgbClr val="D97706"/>
           </a:solidFill>
           <a:ln w="12700">
             <a:solidFill>
-              <a:srgbClr val="FBBF24"/>
+              <a:srgbClr val="D97706"/>
             </a:solidFill>
             <a:prstDash val="solid"/>
           </a:ln>
@@ -17904,7 +17904,7 @@
             <a:r>
               <a:rPr lang="en-US" sz="1400" b="1" spc="1000" kern="0" dirty="0">
                 <a:solidFill>
-                  <a:srgbClr val="FBBF24"/>
+                  <a:srgbClr val="D97706"/>
                 </a:solidFill>
                 <a:latin typeface="Calibri" pitchFamily="34" charset="0"/>
                 <a:ea typeface="Calibri" pitchFamily="34" charset="-122"/>
@@ -17974,7 +17974,7 @@
           </a:solidFill>
           <a:ln w="25400">
             <a:solidFill>
-              <a:srgbClr val="818CF8"/>
+              <a:srgbClr val="4F46E5"/>
             </a:solidFill>
             <a:prstDash val="solid"/>
           </a:ln>
@@ -17995,11 +17995,11 @@
             <a:avLst/>
           </a:prstGeom>
           <a:solidFill>
-            <a:srgbClr val="818CF8"/>
+            <a:srgbClr val="4F46E5"/>
           </a:solidFill>
           <a:ln w="12700">
             <a:solidFill>
-              <a:srgbClr val="818CF8"/>
+              <a:srgbClr val="4F46E5"/>
             </a:solidFill>
             <a:prstDash val="solid"/>
           </a:ln>
@@ -18035,7 +18035,7 @@
             <a:r>
               <a:rPr lang="en-US" sz="1800" b="1" dirty="0">
                 <a:solidFill>
-                  <a:srgbClr val="818CF8"/>
+                  <a:srgbClr val="4F46E5"/>
                 </a:solidFill>
                 <a:latin typeface="Calibri" pitchFamily="34" charset="0"/>
                 <a:ea typeface="Calibri" pitchFamily="34" charset="-122"/>
@@ -18053,7 +18053,7 @@
             <a:r>
               <a:rPr lang="en-US" sz="1400" dirty="0">
                 <a:solidFill>
-                  <a:srgbClr val="E2E8F0"/>
+                  <a:srgbClr val="FFFFFF"/>
                 </a:solidFill>
                 <a:latin typeface="Calibri" pitchFamily="34" charset="0"/>
                 <a:ea typeface="Calibri" pitchFamily="34" charset="-122"/>
@@ -18084,7 +18084,7 @@
           </a:solidFill>
           <a:ln w="25400">
             <a:solidFill>
-              <a:srgbClr val="F472B6"/>
+              <a:srgbClr val="DB2777"/>
             </a:solidFill>
             <a:prstDash val="solid"/>
           </a:ln>
@@ -18105,11 +18105,11 @@
             <a:avLst/>
           </a:prstGeom>
           <a:solidFill>
-            <a:srgbClr val="F472B6"/>
+            <a:srgbClr val="DB2777"/>
           </a:solidFill>
           <a:ln w="12700">
             <a:solidFill>
-              <a:srgbClr val="F472B6"/>
+              <a:srgbClr val="DB2777"/>
             </a:solidFill>
             <a:prstDash val="solid"/>
           </a:ln>
@@ -18145,7 +18145,7 @@
             <a:r>
               <a:rPr lang="en-US" sz="1800" b="1" dirty="0">
                 <a:solidFill>
-                  <a:srgbClr val="F472B6"/>
+                  <a:srgbClr val="DB2777"/>
                 </a:solidFill>
                 <a:latin typeface="Calibri" pitchFamily="34" charset="0"/>
                 <a:ea typeface="Calibri" pitchFamily="34" charset="-122"/>
@@ -18163,7 +18163,7 @@
             <a:r>
               <a:rPr lang="en-US" sz="1400" dirty="0">
                 <a:solidFill>
-                  <a:srgbClr val="E2E8F0"/>
+                  <a:srgbClr val="FFFFFF"/>
                 </a:solidFill>
                 <a:latin typeface="Calibri" pitchFamily="34" charset="0"/>
                 <a:ea typeface="Calibri" pitchFamily="34" charset="-122"/>
@@ -18194,7 +18194,7 @@
           </a:solidFill>
           <a:ln w="25400">
             <a:solidFill>
-              <a:srgbClr val="FBBF24"/>
+              <a:srgbClr val="D97706"/>
             </a:solidFill>
             <a:prstDash val="solid"/>
           </a:ln>
@@ -18215,11 +18215,11 @@
             <a:avLst/>
           </a:prstGeom>
           <a:solidFill>
-            <a:srgbClr val="FBBF24"/>
+            <a:srgbClr val="D97706"/>
           </a:solidFill>
           <a:ln w="12700">
             <a:solidFill>
-              <a:srgbClr val="FBBF24"/>
+              <a:srgbClr val="D97706"/>
             </a:solidFill>
             <a:prstDash val="solid"/>
           </a:ln>
@@ -18255,7 +18255,7 @@
             <a:r>
               <a:rPr lang="en-US" sz="1800" b="1" dirty="0">
                 <a:solidFill>
-                  <a:srgbClr val="FBBF24"/>
+                  <a:srgbClr val="D97706"/>
                 </a:solidFill>
                 <a:latin typeface="Calibri" pitchFamily="34" charset="0"/>
                 <a:ea typeface="Calibri" pitchFamily="34" charset="-122"/>
@@ -18273,7 +18273,7 @@
             <a:r>
               <a:rPr lang="en-US" sz="1400" dirty="0">
                 <a:solidFill>
-                  <a:srgbClr val="E2E8F0"/>
+                  <a:srgbClr val="FFFFFF"/>
                 </a:solidFill>
                 <a:latin typeface="Calibri" pitchFamily="34" charset="0"/>
                 <a:ea typeface="Calibri" pitchFamily="34" charset="-122"/>
@@ -18312,7 +18312,7 @@
             <a:r>
               <a:rPr lang="en-US" sz="1300" dirty="0">
                 <a:solidFill>
-                  <a:srgbClr val="CBD5E1"/>
+                  <a:srgbClr val="64748B"/>
                 </a:solidFill>
                 <a:latin typeface="Calibri" pitchFamily="34" charset="0"/>
                 <a:ea typeface="Calibri" pitchFamily="34" charset="-122"/>
@@ -18326,7 +18326,7 @@
             <a:r>
               <a:rPr lang="en-US" sz="1300" dirty="0">
                 <a:solidFill>
-                  <a:srgbClr val="CBD5E1"/>
+                  <a:srgbClr val="64748B"/>
                 </a:solidFill>
                 <a:latin typeface="Calibri" pitchFamily="34" charset="0"/>
                 <a:ea typeface="Calibri" pitchFamily="34" charset="-122"/>
@@ -18340,7 +18340,7 @@
             <a:r>
               <a:rPr lang="en-US" sz="1300" i="1" dirty="0">
                 <a:solidFill>
-                  <a:srgbClr val="CBD5E1"/>
+                  <a:srgbClr val="64748B"/>
                 </a:solidFill>
                 <a:latin typeface="Calibri" pitchFamily="34" charset="0"/>
                 <a:ea typeface="Calibri" pitchFamily="34" charset="-122"/>
@@ -18408,7 +18408,7 @@
     <p:bg>
       <p:bgPr>
         <a:solidFill>
-          <a:srgbClr val="151025"/>
+          <a:srgbClr val="F8FAFC"/>
         </a:solidFill>
       </p:bgPr>
     </p:bg>
@@ -18441,13 +18441,13 @@
             <a:avLst/>
           </a:prstGeom>
           <a:solidFill>
-            <a:srgbClr val="818CF8">
+            <a:srgbClr val="4F46E5">
               <a:alpha val="15000"/>
             </a:srgbClr>
           </a:solidFill>
           <a:ln w="12700">
             <a:solidFill>
-              <a:srgbClr val="818CF8">
+              <a:srgbClr val="4F46E5">
                 <a:alpha val="15000"/>
               </a:srgbClr>
             </a:solidFill>
@@ -18470,13 +18470,13 @@
             <a:avLst/>
           </a:prstGeom>
           <a:solidFill>
-            <a:srgbClr val="F472B6">
+            <a:srgbClr val="DB2777">
               <a:alpha val="12000"/>
             </a:srgbClr>
           </a:solidFill>
           <a:ln w="12700">
             <a:solidFill>
-              <a:srgbClr val="F472B6">
+              <a:srgbClr val="DB2777">
                 <a:alpha val="12000"/>
               </a:srgbClr>
             </a:solidFill>
@@ -18499,11 +18499,11 @@
             <a:avLst/>
           </a:prstGeom>
           <a:solidFill>
-            <a:srgbClr val="FBBF24"/>
+            <a:srgbClr val="D97706"/>
           </a:solidFill>
           <a:ln w="12700">
             <a:solidFill>
-              <a:srgbClr val="FBBF24"/>
+              <a:srgbClr val="D97706"/>
             </a:solidFill>
             <a:prstDash val="solid"/>
           </a:ln>
@@ -18536,7 +18536,7 @@
             <a:r>
               <a:rPr lang="en-US" sz="1300" b="1" spc="1000" kern="0" dirty="0">
                 <a:solidFill>
-                  <a:srgbClr val="818CF8"/>
+                  <a:srgbClr val="4F46E5"/>
                 </a:solidFill>
                 <a:latin typeface="Calibri" pitchFamily="34" charset="0"/>
                 <a:ea typeface="Calibri" pitchFamily="34" charset="-122"/>
@@ -18575,7 +18575,7 @@
             <a:r>
               <a:rPr lang="en-US" sz="3600" b="1" dirty="0">
                 <a:solidFill>
-                  <a:srgbClr val="FFFFFF"/>
+                  <a:srgbClr val="0F172A"/>
                 </a:solidFill>
                 <a:latin typeface="Cambria" pitchFamily="34" charset="0"/>
                 <a:ea typeface="Cambria" pitchFamily="34" charset="-122"/>
@@ -18602,11 +18602,11 @@
             <a:avLst/>
           </a:prstGeom>
           <a:solidFill>
-            <a:srgbClr val="F472B6"/>
+            <a:srgbClr val="DB2777"/>
           </a:solidFill>
           <a:ln w="12700">
             <a:solidFill>
-              <a:srgbClr val="F472B6"/>
+              <a:srgbClr val="DB2777"/>
             </a:solidFill>
             <a:prstDash val="solid"/>
           </a:ln>
@@ -18627,11 +18627,11 @@
             <a:avLst/>
           </a:prstGeom>
           <a:solidFill>
-            <a:srgbClr val="818CF8"/>
+            <a:srgbClr val="4F46E5"/>
           </a:solidFill>
           <a:ln w="12700">
             <a:solidFill>
-              <a:srgbClr val="818CF8"/>
+              <a:srgbClr val="4F46E5"/>
             </a:solidFill>
             <a:prstDash val="solid"/>
           </a:ln>
@@ -18664,7 +18664,7 @@
             <a:r>
               <a:rPr lang="en-US" sz="6400" b="1" dirty="0">
                 <a:solidFill>
-                  <a:srgbClr val="151025"/>
+                  <a:srgbClr val="FFFFFF"/>
                 </a:solidFill>
                 <a:latin typeface="Cambria" pitchFamily="34" charset="0"/>
                 <a:ea typeface="Cambria" pitchFamily="34" charset="-122"/>
@@ -18691,11 +18691,11 @@
             <a:avLst/>
           </a:prstGeom>
           <a:solidFill>
-            <a:srgbClr val="1E1A3A"/>
+            <a:srgbClr val="FFFFFF"/>
           </a:solidFill>
           <a:ln w="12700">
             <a:solidFill>
-              <a:srgbClr val="1E1A3A"/>
+              <a:srgbClr val="E2E8F0"/>
             </a:solidFill>
             <a:prstDash val="solid"/>
           </a:ln>
@@ -18716,11 +18716,11 @@
             <a:avLst/>
           </a:prstGeom>
           <a:solidFill>
-            <a:srgbClr val="818CF8"/>
+            <a:srgbClr val="4F46E5"/>
           </a:solidFill>
           <a:ln w="12700">
             <a:solidFill>
-              <a:srgbClr val="818CF8"/>
+              <a:srgbClr val="4F46E5"/>
             </a:solidFill>
             <a:prstDash val="solid"/>
           </a:ln>
@@ -18756,7 +18756,7 @@
             <a:r>
               <a:rPr lang="en-US" sz="1800" b="1" dirty="0">
                 <a:solidFill>
-                  <a:srgbClr val="818CF8"/>
+                  <a:srgbClr val="4F46E5"/>
                 </a:solidFill>
                 <a:latin typeface="Calibri" pitchFamily="34" charset="0"/>
                 <a:ea typeface="Calibri" pitchFamily="34" charset="-122"/>
@@ -18774,7 +18774,7 @@
             <a:r>
               <a:rPr lang="en-US" sz="1600" dirty="0">
                 <a:solidFill>
-                  <a:srgbClr val="E2E8F0"/>
+                  <a:srgbClr val="334155"/>
                 </a:solidFill>
                 <a:latin typeface="Calibri" pitchFamily="34" charset="0"/>
                 <a:ea typeface="Calibri" pitchFamily="34" charset="-122"/>
@@ -18801,11 +18801,11 @@
             <a:avLst/>
           </a:prstGeom>
           <a:solidFill>
-            <a:srgbClr val="1E1A3A"/>
+            <a:srgbClr val="FFFFFF"/>
           </a:solidFill>
           <a:ln w="12700">
             <a:solidFill>
-              <a:srgbClr val="1E1A3A"/>
+              <a:srgbClr val="E2E8F0"/>
             </a:solidFill>
             <a:prstDash val="solid"/>
           </a:ln>
@@ -18826,11 +18826,11 @@
             <a:avLst/>
           </a:prstGeom>
           <a:solidFill>
-            <a:srgbClr val="F472B6"/>
+            <a:srgbClr val="DB2777"/>
           </a:solidFill>
           <a:ln w="12700">
             <a:solidFill>
-              <a:srgbClr val="F472B6"/>
+              <a:srgbClr val="DB2777"/>
             </a:solidFill>
             <a:prstDash val="solid"/>
           </a:ln>
@@ -18866,7 +18866,7 @@
             <a:r>
               <a:rPr lang="en-US" sz="1800" b="1" dirty="0">
                 <a:solidFill>
-                  <a:srgbClr val="F472B6"/>
+                  <a:srgbClr val="DB2777"/>
                 </a:solidFill>
                 <a:latin typeface="Calibri" pitchFamily="34" charset="0"/>
                 <a:ea typeface="Calibri" pitchFamily="34" charset="-122"/>
@@ -18884,7 +18884,7 @@
             <a:r>
               <a:rPr lang="en-US" sz="1600" dirty="0">
                 <a:solidFill>
-                  <a:srgbClr val="E2E8F0"/>
+                  <a:srgbClr val="334155"/>
                 </a:solidFill>
                 <a:latin typeface="Calibri" pitchFamily="34" charset="0"/>
                 <a:ea typeface="Calibri" pitchFamily="34" charset="-122"/>
@@ -18911,11 +18911,11 @@
             <a:avLst/>
           </a:prstGeom>
           <a:solidFill>
-            <a:srgbClr val="1E1A3A"/>
+            <a:srgbClr val="FFFFFF"/>
           </a:solidFill>
           <a:ln w="12700">
             <a:solidFill>
-              <a:srgbClr val="1E1A3A"/>
+              <a:srgbClr val="E2E8F0"/>
             </a:solidFill>
             <a:prstDash val="solid"/>
           </a:ln>
@@ -18936,11 +18936,11 @@
             <a:avLst/>
           </a:prstGeom>
           <a:solidFill>
-            <a:srgbClr val="FBBF24"/>
+            <a:srgbClr val="D97706"/>
           </a:solidFill>
           <a:ln w="12700">
             <a:solidFill>
-              <a:srgbClr val="FBBF24"/>
+              <a:srgbClr val="D97706"/>
             </a:solidFill>
             <a:prstDash val="solid"/>
           </a:ln>
@@ -18976,7 +18976,7 @@
             <a:r>
               <a:rPr lang="en-US" sz="1800" b="1" dirty="0">
                 <a:solidFill>
-                  <a:srgbClr val="FBBF24"/>
+                  <a:srgbClr val="D97706"/>
                 </a:solidFill>
                 <a:latin typeface="Calibri" pitchFamily="34" charset="0"/>
                 <a:ea typeface="Calibri" pitchFamily="34" charset="-122"/>
@@ -18994,7 +18994,7 @@
             <a:r>
               <a:rPr lang="en-US" sz="1600" dirty="0">
                 <a:solidFill>
-                  <a:srgbClr val="E2E8F0"/>
+                  <a:srgbClr val="334155"/>
                 </a:solidFill>
                 <a:latin typeface="Calibri" pitchFamily="34" charset="0"/>
                 <a:ea typeface="Calibri" pitchFamily="34" charset="-122"/>
@@ -19118,7 +19118,7 @@
     <p:bg>
       <p:bgPr>
         <a:solidFill>
-          <a:srgbClr val="151025"/>
+          <a:srgbClr val="F8FAFC"/>
         </a:solidFill>
       </p:bgPr>
     </p:bg>
@@ -19151,13 +19151,13 @@
             <a:avLst/>
           </a:prstGeom>
           <a:solidFill>
-            <a:srgbClr val="818CF8">
+            <a:srgbClr val="4F46E5">
               <a:alpha val="15000"/>
             </a:srgbClr>
           </a:solidFill>
           <a:ln w="12700">
             <a:solidFill>
-              <a:srgbClr val="818CF8">
+              <a:srgbClr val="4F46E5">
                 <a:alpha val="15000"/>
               </a:srgbClr>
             </a:solidFill>
@@ -19180,13 +19180,13 @@
             <a:avLst/>
           </a:prstGeom>
           <a:solidFill>
-            <a:srgbClr val="F472B6">
+            <a:srgbClr val="DB2777">
               <a:alpha val="12000"/>
             </a:srgbClr>
           </a:solidFill>
           <a:ln w="12700">
             <a:solidFill>
-              <a:srgbClr val="F472B6">
+              <a:srgbClr val="DB2777">
                 <a:alpha val="12000"/>
               </a:srgbClr>
             </a:solidFill>
@@ -19209,11 +19209,11 @@
             <a:avLst/>
           </a:prstGeom>
           <a:solidFill>
-            <a:srgbClr val="FBBF24"/>
+            <a:srgbClr val="D97706"/>
           </a:solidFill>
           <a:ln w="12700">
             <a:solidFill>
-              <a:srgbClr val="FBBF24"/>
+              <a:srgbClr val="D97706"/>
             </a:solidFill>
             <a:prstDash val="solid"/>
           </a:ln>
@@ -19246,7 +19246,7 @@
             <a:r>
               <a:rPr lang="en-US" sz="1300" b="1" spc="1000" kern="0" dirty="0">
                 <a:solidFill>
-                  <a:srgbClr val="F472B6"/>
+                  <a:srgbClr val="DB2777"/>
                 </a:solidFill>
                 <a:latin typeface="Calibri" pitchFamily="34" charset="0"/>
                 <a:ea typeface="Calibri" pitchFamily="34" charset="-122"/>
@@ -19285,7 +19285,7 @@
             <a:r>
               <a:rPr lang="en-US" sz="3600" b="1" dirty="0">
                 <a:solidFill>
-                  <a:srgbClr val="FFFFFF"/>
+                  <a:srgbClr val="0F172A"/>
                 </a:solidFill>
                 <a:latin typeface="Cambria" pitchFamily="34" charset="0"/>
                 <a:ea typeface="Cambria" pitchFamily="34" charset="-122"/>
@@ -19312,11 +19312,11 @@
             <a:avLst/>
           </a:prstGeom>
           <a:solidFill>
-            <a:srgbClr val="F472B6"/>
+            <a:srgbClr val="DB2777"/>
           </a:solidFill>
           <a:ln w="12700">
             <a:solidFill>
-              <a:srgbClr val="F472B6"/>
+              <a:srgbClr val="DB2777"/>
             </a:solidFill>
             <a:prstDash val="solid"/>
           </a:ln>
@@ -19337,11 +19337,11 @@
             <a:avLst/>
           </a:prstGeom>
           <a:solidFill>
-            <a:srgbClr val="F472B6"/>
+            <a:srgbClr val="DB2777"/>
           </a:solidFill>
           <a:ln w="12700">
             <a:solidFill>
-              <a:srgbClr val="F472B6"/>
+              <a:srgbClr val="DB2777"/>
             </a:solidFill>
             <a:prstDash val="solid"/>
           </a:ln>
@@ -19374,7 +19374,7 @@
             <a:r>
               <a:rPr lang="en-US" sz="6400" b="1" dirty="0">
                 <a:solidFill>
-                  <a:srgbClr val="151025"/>
+                  <a:srgbClr val="FFFFFF"/>
                 </a:solidFill>
                 <a:latin typeface="Cambria" pitchFamily="34" charset="0"/>
                 <a:ea typeface="Cambria" pitchFamily="34" charset="-122"/>
@@ -19401,11 +19401,11 @@
             <a:avLst/>
           </a:prstGeom>
           <a:solidFill>
-            <a:srgbClr val="1E1A3A"/>
+            <a:srgbClr val="FFFFFF"/>
           </a:solidFill>
           <a:ln w="12700">
             <a:solidFill>
-              <a:srgbClr val="1E1A3A"/>
+              <a:srgbClr val="E2E8F0"/>
             </a:solidFill>
             <a:prstDash val="solid"/>
           </a:ln>
@@ -19426,11 +19426,11 @@
             <a:avLst/>
           </a:prstGeom>
           <a:solidFill>
-            <a:srgbClr val="818CF8"/>
+            <a:srgbClr val="4F46E5"/>
           </a:solidFill>
           <a:ln w="12700">
             <a:solidFill>
-              <a:srgbClr val="818CF8"/>
+              <a:srgbClr val="4F46E5"/>
             </a:solidFill>
             <a:prstDash val="solid"/>
           </a:ln>
@@ -19466,7 +19466,7 @@
             <a:r>
               <a:rPr lang="en-US" sz="1800" b="1" dirty="0">
                 <a:solidFill>
-                  <a:srgbClr val="818CF8"/>
+                  <a:srgbClr val="4F46E5"/>
                 </a:solidFill>
                 <a:latin typeface="Calibri" pitchFamily="34" charset="0"/>
                 <a:ea typeface="Calibri" pitchFamily="34" charset="-122"/>
@@ -19484,7 +19484,7 @@
             <a:r>
               <a:rPr lang="en-US" sz="1600" dirty="0">
                 <a:solidFill>
-                  <a:srgbClr val="E2E8F0"/>
+                  <a:srgbClr val="334155"/>
                 </a:solidFill>
                 <a:latin typeface="Calibri" pitchFamily="34" charset="0"/>
                 <a:ea typeface="Calibri" pitchFamily="34" charset="-122"/>
@@ -19511,11 +19511,11 @@
             <a:avLst/>
           </a:prstGeom>
           <a:solidFill>
-            <a:srgbClr val="1E1A3A"/>
+            <a:srgbClr val="FFFFFF"/>
           </a:solidFill>
           <a:ln w="12700">
             <a:solidFill>
-              <a:srgbClr val="1E1A3A"/>
+              <a:srgbClr val="E2E8F0"/>
             </a:solidFill>
             <a:prstDash val="solid"/>
           </a:ln>
@@ -19536,11 +19536,11 @@
             <a:avLst/>
           </a:prstGeom>
           <a:solidFill>
-            <a:srgbClr val="F472B6"/>
+            <a:srgbClr val="DB2777"/>
           </a:solidFill>
           <a:ln w="12700">
             <a:solidFill>
-              <a:srgbClr val="F472B6"/>
+              <a:srgbClr val="DB2777"/>
             </a:solidFill>
             <a:prstDash val="solid"/>
           </a:ln>
@@ -19576,7 +19576,7 @@
             <a:r>
               <a:rPr lang="en-US" sz="1800" b="1" dirty="0">
                 <a:solidFill>
-                  <a:srgbClr val="F472B6"/>
+                  <a:srgbClr val="DB2777"/>
                 </a:solidFill>
                 <a:latin typeface="Calibri" pitchFamily="34" charset="0"/>
                 <a:ea typeface="Calibri" pitchFamily="34" charset="-122"/>
@@ -19594,7 +19594,7 @@
             <a:r>
               <a:rPr lang="en-US" sz="1600" dirty="0">
                 <a:solidFill>
-                  <a:srgbClr val="E2E8F0"/>
+                  <a:srgbClr val="334155"/>
                 </a:solidFill>
                 <a:latin typeface="Calibri" pitchFamily="34" charset="0"/>
                 <a:ea typeface="Calibri" pitchFamily="34" charset="-122"/>
@@ -19621,11 +19621,11 @@
             <a:avLst/>
           </a:prstGeom>
           <a:solidFill>
-            <a:srgbClr val="1E1A3A"/>
+            <a:srgbClr val="FFFFFF"/>
           </a:solidFill>
           <a:ln w="12700">
             <a:solidFill>
-              <a:srgbClr val="1E1A3A"/>
+              <a:srgbClr val="E2E8F0"/>
             </a:solidFill>
             <a:prstDash val="solid"/>
           </a:ln>
@@ -19646,11 +19646,11 @@
             <a:avLst/>
           </a:prstGeom>
           <a:solidFill>
-            <a:srgbClr val="FBBF24"/>
+            <a:srgbClr val="D97706"/>
           </a:solidFill>
           <a:ln w="12700">
             <a:solidFill>
-              <a:srgbClr val="FBBF24"/>
+              <a:srgbClr val="D97706"/>
             </a:solidFill>
             <a:prstDash val="solid"/>
           </a:ln>
@@ -19686,7 +19686,7 @@
             <a:r>
               <a:rPr lang="en-US" sz="1800" b="1" dirty="0">
                 <a:solidFill>
-                  <a:srgbClr val="FBBF24"/>
+                  <a:srgbClr val="D97706"/>
                 </a:solidFill>
                 <a:latin typeface="Calibri" pitchFamily="34" charset="0"/>
                 <a:ea typeface="Calibri" pitchFamily="34" charset="-122"/>
@@ -19704,7 +19704,7 @@
             <a:r>
               <a:rPr lang="en-US" sz="1600" dirty="0">
                 <a:solidFill>
-                  <a:srgbClr val="E2E8F0"/>
+                  <a:srgbClr val="334155"/>
                 </a:solidFill>
                 <a:latin typeface="Calibri" pitchFamily="34" charset="0"/>
                 <a:ea typeface="Calibri" pitchFamily="34" charset="-122"/>
@@ -19828,7 +19828,7 @@
     <p:bg>
       <p:bgPr>
         <a:solidFill>
-          <a:srgbClr val="151025"/>
+          <a:srgbClr val="F8FAFC"/>
         </a:solidFill>
       </p:bgPr>
     </p:bg>
@@ -19861,13 +19861,13 @@
             <a:avLst/>
           </a:prstGeom>
           <a:solidFill>
-            <a:srgbClr val="818CF8">
+            <a:srgbClr val="4F46E5">
               <a:alpha val="15000"/>
             </a:srgbClr>
           </a:solidFill>
           <a:ln w="12700">
             <a:solidFill>
-              <a:srgbClr val="818CF8">
+              <a:srgbClr val="4F46E5">
                 <a:alpha val="15000"/>
               </a:srgbClr>
             </a:solidFill>
@@ -19890,13 +19890,13 @@
             <a:avLst/>
           </a:prstGeom>
           <a:solidFill>
-            <a:srgbClr val="F472B6">
+            <a:srgbClr val="DB2777">
               <a:alpha val="12000"/>
             </a:srgbClr>
           </a:solidFill>
           <a:ln w="12700">
             <a:solidFill>
-              <a:srgbClr val="F472B6">
+              <a:srgbClr val="DB2777">
                 <a:alpha val="12000"/>
               </a:srgbClr>
             </a:solidFill>
@@ -19919,11 +19919,11 @@
             <a:avLst/>
           </a:prstGeom>
           <a:solidFill>
-            <a:srgbClr val="FBBF24"/>
+            <a:srgbClr val="D97706"/>
           </a:solidFill>
           <a:ln w="12700">
             <a:solidFill>
-              <a:srgbClr val="FBBF24"/>
+              <a:srgbClr val="D97706"/>
             </a:solidFill>
             <a:prstDash val="solid"/>
           </a:ln>
@@ -19956,7 +19956,7 @@
             <a:r>
               <a:rPr lang="en-US" sz="1300" b="1" spc="1000" kern="0" dirty="0">
                 <a:solidFill>
-                  <a:srgbClr val="FBBF24"/>
+                  <a:srgbClr val="D97706"/>
                 </a:solidFill>
                 <a:latin typeface="Calibri" pitchFamily="34" charset="0"/>
                 <a:ea typeface="Calibri" pitchFamily="34" charset="-122"/>
@@ -19995,7 +19995,7 @@
             <a:r>
               <a:rPr lang="en-US" sz="3600" b="1" dirty="0">
                 <a:solidFill>
-                  <a:srgbClr val="FFFFFF"/>
+                  <a:srgbClr val="0F172A"/>
                 </a:solidFill>
                 <a:latin typeface="Cambria" pitchFamily="34" charset="0"/>
                 <a:ea typeface="Cambria" pitchFamily="34" charset="-122"/>
@@ -20022,11 +20022,11 @@
             <a:avLst/>
           </a:prstGeom>
           <a:solidFill>
-            <a:srgbClr val="F472B6"/>
+            <a:srgbClr val="DB2777"/>
           </a:solidFill>
           <a:ln w="12700">
             <a:solidFill>
-              <a:srgbClr val="F472B6"/>
+              <a:srgbClr val="DB2777"/>
             </a:solidFill>
             <a:prstDash val="solid"/>
           </a:ln>
@@ -20047,11 +20047,11 @@
             <a:avLst/>
           </a:prstGeom>
           <a:solidFill>
-            <a:srgbClr val="FBBF24"/>
+            <a:srgbClr val="D97706"/>
           </a:solidFill>
           <a:ln w="12700">
             <a:solidFill>
-              <a:srgbClr val="FBBF24"/>
+              <a:srgbClr val="D97706"/>
             </a:solidFill>
             <a:prstDash val="solid"/>
           </a:ln>
@@ -20084,7 +20084,7 @@
             <a:r>
               <a:rPr lang="en-US" sz="6400" b="1" dirty="0">
                 <a:solidFill>
-                  <a:srgbClr val="151025"/>
+                  <a:srgbClr val="FFFFFF"/>
                 </a:solidFill>
                 <a:latin typeface="Cambria" pitchFamily="34" charset="0"/>
                 <a:ea typeface="Cambria" pitchFamily="34" charset="-122"/>
@@ -20111,11 +20111,11 @@
             <a:avLst/>
           </a:prstGeom>
           <a:solidFill>
-            <a:srgbClr val="1E1A3A"/>
+            <a:srgbClr val="FFFFFF"/>
           </a:solidFill>
           <a:ln w="12700">
             <a:solidFill>
-              <a:srgbClr val="1E1A3A"/>
+              <a:srgbClr val="E2E8F0"/>
             </a:solidFill>
             <a:prstDash val="solid"/>
           </a:ln>
@@ -20136,11 +20136,11 @@
             <a:avLst/>
           </a:prstGeom>
           <a:solidFill>
-            <a:srgbClr val="818CF8"/>
+            <a:srgbClr val="4F46E5"/>
           </a:solidFill>
           <a:ln w="12700">
             <a:solidFill>
-              <a:srgbClr val="818CF8"/>
+              <a:srgbClr val="4F46E5"/>
             </a:solidFill>
             <a:prstDash val="solid"/>
           </a:ln>
@@ -20176,7 +20176,7 @@
             <a:r>
               <a:rPr lang="en-US" sz="1800" b="1" dirty="0">
                 <a:solidFill>
-                  <a:srgbClr val="818CF8"/>
+                  <a:srgbClr val="4F46E5"/>
                 </a:solidFill>
                 <a:latin typeface="Calibri" pitchFamily="34" charset="0"/>
                 <a:ea typeface="Calibri" pitchFamily="34" charset="-122"/>
@@ -20194,7 +20194,7 @@
             <a:r>
               <a:rPr lang="en-US" sz="1600" dirty="0">
                 <a:solidFill>
-                  <a:srgbClr val="E2E8F0"/>
+                  <a:srgbClr val="334155"/>
                 </a:solidFill>
                 <a:latin typeface="Calibri" pitchFamily="34" charset="0"/>
                 <a:ea typeface="Calibri" pitchFamily="34" charset="-122"/>
@@ -20221,11 +20221,11 @@
             <a:avLst/>
           </a:prstGeom>
           <a:solidFill>
-            <a:srgbClr val="1E1A3A"/>
+            <a:srgbClr val="FFFFFF"/>
           </a:solidFill>
           <a:ln w="12700">
             <a:solidFill>
-              <a:srgbClr val="1E1A3A"/>
+              <a:srgbClr val="E2E8F0"/>
             </a:solidFill>
             <a:prstDash val="solid"/>
           </a:ln>
@@ -20246,11 +20246,11 @@
             <a:avLst/>
           </a:prstGeom>
           <a:solidFill>
-            <a:srgbClr val="F472B6"/>
+            <a:srgbClr val="DB2777"/>
           </a:solidFill>
           <a:ln w="12700">
             <a:solidFill>
-              <a:srgbClr val="F472B6"/>
+              <a:srgbClr val="DB2777"/>
             </a:solidFill>
             <a:prstDash val="solid"/>
           </a:ln>
@@ -20286,7 +20286,7 @@
             <a:r>
               <a:rPr lang="en-US" sz="1800" b="1" dirty="0">
                 <a:solidFill>
-                  <a:srgbClr val="F472B6"/>
+                  <a:srgbClr val="DB2777"/>
                 </a:solidFill>
                 <a:latin typeface="Calibri" pitchFamily="34" charset="0"/>
                 <a:ea typeface="Calibri" pitchFamily="34" charset="-122"/>
@@ -20304,7 +20304,7 @@
             <a:r>
               <a:rPr lang="en-US" sz="1600" dirty="0">
                 <a:solidFill>
-                  <a:srgbClr val="E2E8F0"/>
+                  <a:srgbClr val="334155"/>
                 </a:solidFill>
                 <a:latin typeface="Calibri" pitchFamily="34" charset="0"/>
                 <a:ea typeface="Calibri" pitchFamily="34" charset="-122"/>
@@ -20331,11 +20331,11 @@
             <a:avLst/>
           </a:prstGeom>
           <a:solidFill>
-            <a:srgbClr val="1E1A3A"/>
+            <a:srgbClr val="FFFFFF"/>
           </a:solidFill>
           <a:ln w="12700">
             <a:solidFill>
-              <a:srgbClr val="1E1A3A"/>
+              <a:srgbClr val="E2E8F0"/>
             </a:solidFill>
             <a:prstDash val="solid"/>
           </a:ln>
@@ -20356,11 +20356,11 @@
             <a:avLst/>
           </a:prstGeom>
           <a:solidFill>
-            <a:srgbClr val="FBBF24"/>
+            <a:srgbClr val="D97706"/>
           </a:solidFill>
           <a:ln w="12700">
             <a:solidFill>
-              <a:srgbClr val="FBBF24"/>
+              <a:srgbClr val="D97706"/>
             </a:solidFill>
             <a:prstDash val="solid"/>
           </a:ln>
@@ -20396,7 +20396,7 @@
             <a:r>
               <a:rPr lang="en-US" sz="1800" b="1" dirty="0">
                 <a:solidFill>
-                  <a:srgbClr val="FBBF24"/>
+                  <a:srgbClr val="D97706"/>
                 </a:solidFill>
                 <a:latin typeface="Calibri" pitchFamily="34" charset="0"/>
                 <a:ea typeface="Calibri" pitchFamily="34" charset="-122"/>
@@ -20414,7 +20414,7 @@
             <a:r>
               <a:rPr lang="en-US" sz="1600" dirty="0">
                 <a:solidFill>
-                  <a:srgbClr val="E2E8F0"/>
+                  <a:srgbClr val="334155"/>
                 </a:solidFill>
                 <a:latin typeface="Calibri" pitchFamily="34" charset="0"/>
                 <a:ea typeface="Calibri" pitchFamily="34" charset="-122"/>
@@ -20538,7 +20538,7 @@
     <p:bg>
       <p:bgPr>
         <a:solidFill>
-          <a:srgbClr val="151025"/>
+          <a:srgbClr val="F8FAFC"/>
         </a:solidFill>
       </p:bgPr>
     </p:bg>
@@ -20571,13 +20571,13 @@
             <a:avLst/>
           </a:prstGeom>
           <a:solidFill>
-            <a:srgbClr val="818CF8">
+            <a:srgbClr val="4F46E5">
               <a:alpha val="15000"/>
             </a:srgbClr>
           </a:solidFill>
           <a:ln w="12700">
             <a:solidFill>
-              <a:srgbClr val="818CF8">
+              <a:srgbClr val="4F46E5">
                 <a:alpha val="15000"/>
               </a:srgbClr>
             </a:solidFill>
@@ -20600,13 +20600,13 @@
             <a:avLst/>
           </a:prstGeom>
           <a:solidFill>
-            <a:srgbClr val="F472B6">
+            <a:srgbClr val="DB2777">
               <a:alpha val="12000"/>
             </a:srgbClr>
           </a:solidFill>
           <a:ln w="12700">
             <a:solidFill>
-              <a:srgbClr val="F472B6">
+              <a:srgbClr val="DB2777">
                 <a:alpha val="12000"/>
               </a:srgbClr>
             </a:solidFill>
@@ -20629,11 +20629,11 @@
             <a:avLst/>
           </a:prstGeom>
           <a:solidFill>
-            <a:srgbClr val="FBBF24"/>
+            <a:srgbClr val="D97706"/>
           </a:solidFill>
           <a:ln w="12700">
             <a:solidFill>
-              <a:srgbClr val="FBBF24"/>
+              <a:srgbClr val="D97706"/>
             </a:solidFill>
             <a:prstDash val="solid"/>
           </a:ln>
@@ -20666,7 +20666,7 @@
             <a:r>
               <a:rPr lang="en-US" sz="1300" b="1" spc="1000" kern="0" dirty="0">
                 <a:solidFill>
-                  <a:srgbClr val="FBBF24"/>
+                  <a:srgbClr val="D97706"/>
                 </a:solidFill>
                 <a:latin typeface="Calibri" pitchFamily="34" charset="0"/>
                 <a:ea typeface="Calibri" pitchFamily="34" charset="-122"/>
@@ -20705,7 +20705,7 @@
             <a:r>
               <a:rPr lang="en-US" sz="3600" b="1" dirty="0">
                 <a:solidFill>
-                  <a:srgbClr val="FFFFFF"/>
+                  <a:srgbClr val="0F172A"/>
                 </a:solidFill>
                 <a:latin typeface="Cambria" pitchFamily="34" charset="0"/>
                 <a:ea typeface="Cambria" pitchFamily="34" charset="-122"/>
@@ -20732,11 +20732,11 @@
             <a:avLst/>
           </a:prstGeom>
           <a:solidFill>
-            <a:srgbClr val="F472B6"/>
+            <a:srgbClr val="DB2777"/>
           </a:solidFill>
           <a:ln w="12700">
             <a:solidFill>
-              <a:srgbClr val="F472B6"/>
+              <a:srgbClr val="DB2777"/>
             </a:solidFill>
             <a:prstDash val="solid"/>
           </a:ln>
@@ -20757,11 +20757,11 @@
             <a:avLst/>
           </a:prstGeom>
           <a:solidFill>
-            <a:srgbClr val="818CF8"/>
+            <a:srgbClr val="4F46E5"/>
           </a:solidFill>
           <a:ln w="12700">
             <a:solidFill>
-              <a:srgbClr val="818CF8"/>
+              <a:srgbClr val="4F46E5"/>
             </a:solidFill>
             <a:prstDash val="solid"/>
           </a:ln>
@@ -20877,11 +20877,11 @@
             <a:avLst/>
           </a:prstGeom>
           <a:solidFill>
-            <a:srgbClr val="F472B6"/>
+            <a:srgbClr val="DB2777"/>
           </a:solidFill>
           <a:ln w="12700">
             <a:solidFill>
-              <a:srgbClr val="F472B6"/>
+              <a:srgbClr val="DB2777"/>
             </a:solidFill>
             <a:prstDash val="solid"/>
           </a:ln>
@@ -20997,11 +20997,11 @@
             <a:avLst/>
           </a:prstGeom>
           <a:solidFill>
-            <a:srgbClr val="FBBF24"/>
+            <a:srgbClr val="D97706"/>
           </a:solidFill>
           <a:ln w="12700">
             <a:solidFill>
-              <a:srgbClr val="FBBF24"/>
+              <a:srgbClr val="D97706"/>
             </a:solidFill>
             <a:prstDash val="solid"/>
           </a:ln>
@@ -21034,7 +21034,7 @@
             <a:r>
               <a:rPr lang="en-US" sz="2400" b="1" dirty="0">
                 <a:solidFill>
-                  <a:srgbClr val="151025"/>
+                  <a:srgbClr val="FFFFFF"/>
                 </a:solidFill>
                 <a:latin typeface="Cambria" pitchFamily="34" charset="0"/>
                 <a:ea typeface="Cambria" pitchFamily="34" charset="-122"/>
@@ -21073,7 +21073,7 @@
             <a:r>
               <a:rPr lang="en-US" sz="1500" dirty="0">
                 <a:solidFill>
-                  <a:srgbClr val="151025"/>
+                  <a:srgbClr val="FFFFFF"/>
                 </a:solidFill>
                 <a:latin typeface="Calibri" pitchFamily="34" charset="0"/>
                 <a:ea typeface="Calibri" pitchFamily="34" charset="-122"/>
@@ -21090,7 +21090,7 @@
             <a:r>
               <a:rPr lang="en-US" sz="1500" dirty="0">
                 <a:solidFill>
-                  <a:srgbClr val="151025"/>
+                  <a:srgbClr val="FFFFFF"/>
                 </a:solidFill>
                 <a:latin typeface="Calibri" pitchFamily="34" charset="0"/>
                 <a:ea typeface="Calibri" pitchFamily="34" charset="-122"/>
@@ -21301,7 +21301,7 @@
     <p:bg>
       <p:bgPr>
         <a:solidFill>
-          <a:srgbClr val="151025"/>
+          <a:srgbClr val="F8FAFC"/>
         </a:solidFill>
       </p:bgPr>
     </p:bg>
@@ -21334,13 +21334,13 @@
             <a:avLst/>
           </a:prstGeom>
           <a:solidFill>
-            <a:srgbClr val="818CF8">
+            <a:srgbClr val="4F46E5">
               <a:alpha val="15000"/>
             </a:srgbClr>
           </a:solidFill>
           <a:ln w="12700">
             <a:solidFill>
-              <a:srgbClr val="818CF8">
+              <a:srgbClr val="4F46E5">
                 <a:alpha val="15000"/>
               </a:srgbClr>
             </a:solidFill>
@@ -21363,13 +21363,13 @@
             <a:avLst/>
           </a:prstGeom>
           <a:solidFill>
-            <a:srgbClr val="F472B6">
+            <a:srgbClr val="DB2777">
               <a:alpha val="12000"/>
             </a:srgbClr>
           </a:solidFill>
           <a:ln w="12700">
             <a:solidFill>
-              <a:srgbClr val="F472B6">
+              <a:srgbClr val="DB2777">
                 <a:alpha val="12000"/>
               </a:srgbClr>
             </a:solidFill>
@@ -21392,11 +21392,11 @@
             <a:avLst/>
           </a:prstGeom>
           <a:solidFill>
-            <a:srgbClr val="FBBF24"/>
+            <a:srgbClr val="D97706"/>
           </a:solidFill>
           <a:ln w="12700">
             <a:solidFill>
-              <a:srgbClr val="FBBF24"/>
+              <a:srgbClr val="D97706"/>
             </a:solidFill>
             <a:prstDash val="solid"/>
           </a:ln>
@@ -21429,7 +21429,7 @@
             <a:r>
               <a:rPr lang="en-US" sz="1300" b="1" spc="1000" kern="0" dirty="0">
                 <a:solidFill>
-                  <a:srgbClr val="FBBF24"/>
+                  <a:srgbClr val="D97706"/>
                 </a:solidFill>
                 <a:latin typeface="Calibri" pitchFamily="34" charset="0"/>
                 <a:ea typeface="Calibri" pitchFamily="34" charset="-122"/>
@@ -21468,7 +21468,7 @@
             <a:r>
               <a:rPr lang="en-US" sz="3600" b="1" dirty="0">
                 <a:solidFill>
-                  <a:srgbClr val="FFFFFF"/>
+                  <a:srgbClr val="0F172A"/>
                 </a:solidFill>
                 <a:latin typeface="Cambria" pitchFamily="34" charset="0"/>
                 <a:ea typeface="Cambria" pitchFamily="34" charset="-122"/>
@@ -21495,11 +21495,11 @@
             <a:avLst/>
           </a:prstGeom>
           <a:solidFill>
-            <a:srgbClr val="F472B6"/>
+            <a:srgbClr val="DB2777"/>
           </a:solidFill>
           <a:ln w="12700">
             <a:solidFill>
-              <a:srgbClr val="F472B6"/>
+              <a:srgbClr val="DB2777"/>
             </a:solidFill>
             <a:prstDash val="solid"/>
           </a:ln>
@@ -21532,7 +21532,7 @@
             <a:r>
               <a:rPr lang="en-US" sz="1900" b="1" dirty="0">
                 <a:solidFill>
-                  <a:srgbClr val="E2E8F0"/>
+                  <a:srgbClr val="334155"/>
                 </a:solidFill>
                 <a:latin typeface="Calibri" pitchFamily="34" charset="0"/>
                 <a:ea typeface="Calibri" pitchFamily="34" charset="-122"/>
@@ -21600,7 +21600,7 @@
                   <a:tcPr marL="91440" marR="91440" marT="45720" marB="45720">
                     <a:lnL w="6350" cap="flat" cmpd="sng" algn="ctr">
                       <a:solidFill>
-                        <a:srgbClr val="151025"/>
+                        <a:srgbClr val="E2E8F0"/>
                       </a:solidFill>
                       <a:prstDash val="solid"/>
                       <a:round/>
@@ -21609,7 +21609,7 @@
                     </a:lnL>
                     <a:lnR w="6350" cap="flat" cmpd="sng" algn="ctr">
                       <a:solidFill>
-                        <a:srgbClr val="151025"/>
+                        <a:srgbClr val="E2E8F0"/>
                       </a:solidFill>
                       <a:prstDash val="solid"/>
                       <a:round/>
@@ -21618,7 +21618,7 @@
                     </a:lnR>
                     <a:lnT w="6350" cap="flat" cmpd="sng" algn="ctr">
                       <a:solidFill>
-                        <a:srgbClr val="151025"/>
+                        <a:srgbClr val="E2E8F0"/>
                       </a:solidFill>
                       <a:prstDash val="solid"/>
                       <a:round/>
@@ -21627,7 +21627,7 @@
                     </a:lnT>
                     <a:lnB w="6350" cap="flat" cmpd="sng" algn="ctr">
                       <a:solidFill>
-                        <a:srgbClr val="151025"/>
+                        <a:srgbClr val="E2E8F0"/>
                       </a:solidFill>
                       <a:prstDash val="solid"/>
                       <a:round/>
@@ -21635,7 +21635,7 @@
                       <a:tailEnd type="none" w="med" len="med"/>
                     </a:lnB>
                     <a:solidFill>
-                      <a:srgbClr val="818CF8"/>
+                      <a:srgbClr val="4F46E5"/>
                     </a:solidFill>
                   </a:tcPr>
                 </a:tc>
@@ -21668,7 +21668,7 @@
                   <a:tcPr marL="91440" marR="91440" marT="45720" marB="45720">
                     <a:lnL w="6350" cap="flat" cmpd="sng" algn="ctr">
                       <a:solidFill>
-                        <a:srgbClr val="151025"/>
+                        <a:srgbClr val="E2E8F0"/>
                       </a:solidFill>
                       <a:prstDash val="solid"/>
                       <a:round/>
@@ -21677,7 +21677,7 @@
                     </a:lnL>
                     <a:lnR w="6350" cap="flat" cmpd="sng" algn="ctr">
                       <a:solidFill>
-                        <a:srgbClr val="151025"/>
+                        <a:srgbClr val="E2E8F0"/>
                       </a:solidFill>
                       <a:prstDash val="solid"/>
                       <a:round/>
@@ -21686,7 +21686,7 @@
                     </a:lnR>
                     <a:lnT w="6350" cap="flat" cmpd="sng" algn="ctr">
                       <a:solidFill>
-                        <a:srgbClr val="151025"/>
+                        <a:srgbClr val="E2E8F0"/>
                       </a:solidFill>
                       <a:prstDash val="solid"/>
                       <a:round/>
@@ -21695,7 +21695,7 @@
                     </a:lnT>
                     <a:lnB w="6350" cap="flat" cmpd="sng" algn="ctr">
                       <a:solidFill>
-                        <a:srgbClr val="151025"/>
+                        <a:srgbClr val="E2E8F0"/>
                       </a:solidFill>
                       <a:prstDash val="solid"/>
                       <a:round/>
@@ -21703,7 +21703,7 @@
                       <a:tailEnd type="none" w="med" len="med"/>
                     </a:lnB>
                     <a:solidFill>
-                      <a:srgbClr val="818CF8"/>
+                      <a:srgbClr val="4F46E5"/>
                     </a:solidFill>
                   </a:tcPr>
                 </a:tc>
@@ -21720,7 +21720,7 @@
                       <a:r>
                         <a:rPr lang="en-US" sz="1800" dirty="0">
                           <a:solidFill>
-                            <a:srgbClr val="E2E8F0"/>
+                            <a:srgbClr val="334155"/>
                           </a:solidFill>
                           <a:latin typeface="Calibri" pitchFamily="34" charset="0"/>
                           <a:ea typeface="Calibri" pitchFamily="34" charset="-122"/>
@@ -21738,7 +21738,7 @@
                   <a:tcPr marL="91440" marR="91440" marT="45720" marB="45720">
                     <a:lnL w="6350" cap="flat" cmpd="sng" algn="ctr">
                       <a:solidFill>
-                        <a:srgbClr val="151025"/>
+                        <a:srgbClr val="E2E8F0"/>
                       </a:solidFill>
                       <a:prstDash val="solid"/>
                       <a:round/>
@@ -21747,7 +21747,7 @@
                     </a:lnL>
                     <a:lnR w="6350" cap="flat" cmpd="sng" algn="ctr">
                       <a:solidFill>
-                        <a:srgbClr val="151025"/>
+                        <a:srgbClr val="E2E8F0"/>
                       </a:solidFill>
                       <a:prstDash val="solid"/>
                       <a:round/>
@@ -21756,7 +21756,7 @@
                     </a:lnR>
                     <a:lnT w="6350" cap="flat" cmpd="sng" algn="ctr">
                       <a:solidFill>
-                        <a:srgbClr val="151025"/>
+                        <a:srgbClr val="E2E8F0"/>
                       </a:solidFill>
                       <a:prstDash val="solid"/>
                       <a:round/>
@@ -21765,7 +21765,7 @@
                     </a:lnT>
                     <a:lnB w="6350" cap="flat" cmpd="sng" algn="ctr">
                       <a:solidFill>
-                        <a:srgbClr val="151025"/>
+                        <a:srgbClr val="E2E8F0"/>
                       </a:solidFill>
                       <a:prstDash val="solid"/>
                       <a:round/>
@@ -21773,7 +21773,7 @@
                       <a:tailEnd type="none" w="med" len="med"/>
                     </a:lnB>
                     <a:solidFill>
-                      <a:srgbClr val="1E1A3A"/>
+                      <a:srgbClr val="FFFFFF"/>
                     </a:solidFill>
                   </a:tcPr>
                 </a:tc>
@@ -21788,7 +21788,7 @@
                       <a:r>
                         <a:rPr lang="en-US" sz="1800" dirty="0">
                           <a:solidFill>
-                            <a:srgbClr val="E2E8F0"/>
+                            <a:srgbClr val="334155"/>
                           </a:solidFill>
                           <a:latin typeface="Calibri" pitchFamily="34" charset="0"/>
                           <a:ea typeface="Calibri" pitchFamily="34" charset="-122"/>
@@ -21806,7 +21806,7 @@
                   <a:tcPr marL="91440" marR="91440" marT="45720" marB="45720">
                     <a:lnL w="6350" cap="flat" cmpd="sng" algn="ctr">
                       <a:solidFill>
-                        <a:srgbClr val="151025"/>
+                        <a:srgbClr val="E2E8F0"/>
                       </a:solidFill>
                       <a:prstDash val="solid"/>
                       <a:round/>
@@ -21815,7 +21815,7 @@
                     </a:lnL>
                     <a:lnR w="6350" cap="flat" cmpd="sng" algn="ctr">
                       <a:solidFill>
-                        <a:srgbClr val="151025"/>
+                        <a:srgbClr val="E2E8F0"/>
                       </a:solidFill>
                       <a:prstDash val="solid"/>
                       <a:round/>
@@ -21824,7 +21824,7 @@
                     </a:lnR>
                     <a:lnT w="6350" cap="flat" cmpd="sng" algn="ctr">
                       <a:solidFill>
-                        <a:srgbClr val="151025"/>
+                        <a:srgbClr val="E2E8F0"/>
                       </a:solidFill>
                       <a:prstDash val="solid"/>
                       <a:round/>
@@ -21833,7 +21833,7 @@
                     </a:lnT>
                     <a:lnB w="6350" cap="flat" cmpd="sng" algn="ctr">
                       <a:solidFill>
-                        <a:srgbClr val="151025"/>
+                        <a:srgbClr val="E2E8F0"/>
                       </a:solidFill>
                       <a:prstDash val="solid"/>
                       <a:round/>
@@ -21841,7 +21841,7 @@
                       <a:tailEnd type="none" w="med" len="med"/>
                     </a:lnB>
                     <a:solidFill>
-                      <a:srgbClr val="1E1A3A"/>
+                      <a:srgbClr val="FFFFFF"/>
                     </a:solidFill>
                   </a:tcPr>
                 </a:tc>
@@ -21858,7 +21858,7 @@
                       <a:r>
                         <a:rPr lang="en-US" sz="1800" dirty="0">
                           <a:solidFill>
-                            <a:srgbClr val="E2E8F0"/>
+                            <a:srgbClr val="334155"/>
                           </a:solidFill>
                           <a:latin typeface="Calibri" pitchFamily="34" charset="0"/>
                           <a:ea typeface="Calibri" pitchFamily="34" charset="-122"/>
@@ -21876,7 +21876,7 @@
                   <a:tcPr marL="91440" marR="91440" marT="45720" marB="45720">
                     <a:lnL w="6350" cap="flat" cmpd="sng" algn="ctr">
                       <a:solidFill>
-                        <a:srgbClr val="151025"/>
+                        <a:srgbClr val="E2E8F0"/>
                       </a:solidFill>
                       <a:prstDash val="solid"/>
                       <a:round/>
@@ -21885,7 +21885,7 @@
                     </a:lnL>
                     <a:lnR w="6350" cap="flat" cmpd="sng" algn="ctr">
                       <a:solidFill>
-                        <a:srgbClr val="151025"/>
+                        <a:srgbClr val="E2E8F0"/>
                       </a:solidFill>
                       <a:prstDash val="solid"/>
                       <a:round/>
@@ -21894,7 +21894,7 @@
                     </a:lnR>
                     <a:lnT w="6350" cap="flat" cmpd="sng" algn="ctr">
                       <a:solidFill>
-                        <a:srgbClr val="151025"/>
+                        <a:srgbClr val="E2E8F0"/>
                       </a:solidFill>
                       <a:prstDash val="solid"/>
                       <a:round/>
@@ -21903,7 +21903,7 @@
                     </a:lnT>
                     <a:lnB w="6350" cap="flat" cmpd="sng" algn="ctr">
                       <a:solidFill>
-                        <a:srgbClr val="151025"/>
+                        <a:srgbClr val="E2E8F0"/>
                       </a:solidFill>
                       <a:prstDash val="solid"/>
                       <a:round/>
@@ -21911,7 +21911,7 @@
                       <a:tailEnd type="none" w="med" len="med"/>
                     </a:lnB>
                     <a:solidFill>
-                      <a:srgbClr val="1E1A3A"/>
+                      <a:srgbClr val="FFFFFF"/>
                     </a:solidFill>
                   </a:tcPr>
                 </a:tc>
@@ -21926,7 +21926,7 @@
                       <a:r>
                         <a:rPr lang="en-US" sz="1800" dirty="0">
                           <a:solidFill>
-                            <a:srgbClr val="E2E8F0"/>
+                            <a:srgbClr val="334155"/>
                           </a:solidFill>
                           <a:latin typeface="Calibri" pitchFamily="34" charset="0"/>
                           <a:ea typeface="Calibri" pitchFamily="34" charset="-122"/>
@@ -21944,7 +21944,7 @@
                   <a:tcPr marL="91440" marR="91440" marT="45720" marB="45720">
                     <a:lnL w="6350" cap="flat" cmpd="sng" algn="ctr">
                       <a:solidFill>
-                        <a:srgbClr val="151025"/>
+                        <a:srgbClr val="E2E8F0"/>
                       </a:solidFill>
                       <a:prstDash val="solid"/>
                       <a:round/>
@@ -21953,7 +21953,7 @@
                     </a:lnL>
                     <a:lnR w="6350" cap="flat" cmpd="sng" algn="ctr">
                       <a:solidFill>
-                        <a:srgbClr val="151025"/>
+                        <a:srgbClr val="E2E8F0"/>
                       </a:solidFill>
                       <a:prstDash val="solid"/>
                       <a:round/>
@@ -21962,7 +21962,7 @@
                     </a:lnR>
                     <a:lnT w="6350" cap="flat" cmpd="sng" algn="ctr">
                       <a:solidFill>
-                        <a:srgbClr val="151025"/>
+                        <a:srgbClr val="E2E8F0"/>
                       </a:solidFill>
                       <a:prstDash val="solid"/>
                       <a:round/>
@@ -21971,7 +21971,7 @@
                     </a:lnT>
                     <a:lnB w="6350" cap="flat" cmpd="sng" algn="ctr">
                       <a:solidFill>
-                        <a:srgbClr val="151025"/>
+                        <a:srgbClr val="E2E8F0"/>
                       </a:solidFill>
                       <a:prstDash val="solid"/>
                       <a:round/>
@@ -21979,7 +21979,7 @@
                       <a:tailEnd type="none" w="med" len="med"/>
                     </a:lnB>
                     <a:solidFill>
-                      <a:srgbClr val="1E1A3A"/>
+                      <a:srgbClr val="FFFFFF"/>
                     </a:solidFill>
                   </a:tcPr>
                 </a:tc>
@@ -21996,7 +21996,7 @@
                       <a:r>
                         <a:rPr lang="en-US" sz="1800" dirty="0">
                           <a:solidFill>
-                            <a:srgbClr val="E2E8F0"/>
+                            <a:srgbClr val="334155"/>
                           </a:solidFill>
                           <a:latin typeface="Calibri" pitchFamily="34" charset="0"/>
                           <a:ea typeface="Calibri" pitchFamily="34" charset="-122"/>
@@ -22014,7 +22014,7 @@
                   <a:tcPr marL="91440" marR="91440" marT="45720" marB="45720">
                     <a:lnL w="6350" cap="flat" cmpd="sng" algn="ctr">
                       <a:solidFill>
-                        <a:srgbClr val="151025"/>
+                        <a:srgbClr val="E2E8F0"/>
                       </a:solidFill>
                       <a:prstDash val="solid"/>
                       <a:round/>
@@ -22023,7 +22023,7 @@
                     </a:lnL>
                     <a:lnR w="6350" cap="flat" cmpd="sng" algn="ctr">
                       <a:solidFill>
-                        <a:srgbClr val="151025"/>
+                        <a:srgbClr val="E2E8F0"/>
                       </a:solidFill>
                       <a:prstDash val="solid"/>
                       <a:round/>
@@ -22032,7 +22032,7 @@
                     </a:lnR>
                     <a:lnT w="6350" cap="flat" cmpd="sng" algn="ctr">
                       <a:solidFill>
-                        <a:srgbClr val="151025"/>
+                        <a:srgbClr val="E2E8F0"/>
                       </a:solidFill>
                       <a:prstDash val="solid"/>
                       <a:round/>
@@ -22041,7 +22041,7 @@
                     </a:lnT>
                     <a:lnB w="6350" cap="flat" cmpd="sng" algn="ctr">
                       <a:solidFill>
-                        <a:srgbClr val="151025"/>
+                        <a:srgbClr val="E2E8F0"/>
                       </a:solidFill>
                       <a:prstDash val="solid"/>
                       <a:round/>
@@ -22049,7 +22049,7 @@
                       <a:tailEnd type="none" w="med" len="med"/>
                     </a:lnB>
                     <a:solidFill>
-                      <a:srgbClr val="1E1A3A"/>
+                      <a:srgbClr val="FFFFFF"/>
                     </a:solidFill>
                   </a:tcPr>
                 </a:tc>
@@ -22064,7 +22064,7 @@
                       <a:r>
                         <a:rPr lang="en-US" sz="1800" dirty="0">
                           <a:solidFill>
-                            <a:srgbClr val="E2E8F0"/>
+                            <a:srgbClr val="334155"/>
                           </a:solidFill>
                           <a:latin typeface="Calibri" pitchFamily="34" charset="0"/>
                           <a:ea typeface="Calibri" pitchFamily="34" charset="-122"/>
@@ -22082,7 +22082,7 @@
                   <a:tcPr marL="91440" marR="91440" marT="45720" marB="45720">
                     <a:lnL w="6350" cap="flat" cmpd="sng" algn="ctr">
                       <a:solidFill>
-                        <a:srgbClr val="151025"/>
+                        <a:srgbClr val="E2E8F0"/>
                       </a:solidFill>
                       <a:prstDash val="solid"/>
                       <a:round/>
@@ -22091,7 +22091,7 @@
                     </a:lnL>
                     <a:lnR w="6350" cap="flat" cmpd="sng" algn="ctr">
                       <a:solidFill>
-                        <a:srgbClr val="151025"/>
+                        <a:srgbClr val="E2E8F0"/>
                       </a:solidFill>
                       <a:prstDash val="solid"/>
                       <a:round/>
@@ -22100,7 +22100,7 @@
                     </a:lnR>
                     <a:lnT w="6350" cap="flat" cmpd="sng" algn="ctr">
                       <a:solidFill>
-                        <a:srgbClr val="151025"/>
+                        <a:srgbClr val="E2E8F0"/>
                       </a:solidFill>
                       <a:prstDash val="solid"/>
                       <a:round/>
@@ -22109,7 +22109,7 @@
                     </a:lnT>
                     <a:lnB w="6350" cap="flat" cmpd="sng" algn="ctr">
                       <a:solidFill>
-                        <a:srgbClr val="151025"/>
+                        <a:srgbClr val="E2E8F0"/>
                       </a:solidFill>
                       <a:prstDash val="solid"/>
                       <a:round/>
@@ -22117,7 +22117,7 @@
                       <a:tailEnd type="none" w="med" len="med"/>
                     </a:lnB>
                     <a:solidFill>
-                      <a:srgbClr val="1E1A3A"/>
+                      <a:srgbClr val="FFFFFF"/>
                     </a:solidFill>
                   </a:tcPr>
                 </a:tc>
@@ -22134,7 +22134,7 @@
                       <a:r>
                         <a:rPr lang="en-US" sz="1800" dirty="0">
                           <a:solidFill>
-                            <a:srgbClr val="E2E8F0"/>
+                            <a:srgbClr val="334155"/>
                           </a:solidFill>
                           <a:latin typeface="Calibri" pitchFamily="34" charset="0"/>
                           <a:ea typeface="Calibri" pitchFamily="34" charset="-122"/>
@@ -22152,7 +22152,7 @@
                   <a:tcPr marL="91440" marR="91440" marT="45720" marB="45720">
                     <a:lnL w="6350" cap="flat" cmpd="sng" algn="ctr">
                       <a:solidFill>
-                        <a:srgbClr val="151025"/>
+                        <a:srgbClr val="E2E8F0"/>
                       </a:solidFill>
                       <a:prstDash val="solid"/>
                       <a:round/>
@@ -22161,7 +22161,7 @@
                     </a:lnL>
                     <a:lnR w="6350" cap="flat" cmpd="sng" algn="ctr">
                       <a:solidFill>
-                        <a:srgbClr val="151025"/>
+                        <a:srgbClr val="E2E8F0"/>
                       </a:solidFill>
                       <a:prstDash val="solid"/>
                       <a:round/>
@@ -22170,7 +22170,7 @@
                     </a:lnR>
                     <a:lnT w="6350" cap="flat" cmpd="sng" algn="ctr">
                       <a:solidFill>
-                        <a:srgbClr val="151025"/>
+                        <a:srgbClr val="E2E8F0"/>
                       </a:solidFill>
                       <a:prstDash val="solid"/>
                       <a:round/>
@@ -22179,7 +22179,7 @@
                     </a:lnT>
                     <a:lnB w="6350" cap="flat" cmpd="sng" algn="ctr">
                       <a:solidFill>
-                        <a:srgbClr val="151025"/>
+                        <a:srgbClr val="E2E8F0"/>
                       </a:solidFill>
                       <a:prstDash val="solid"/>
                       <a:round/>
@@ -22187,7 +22187,7 @@
                       <a:tailEnd type="none" w="med" len="med"/>
                     </a:lnB>
                     <a:solidFill>
-                      <a:srgbClr val="1E1A3A"/>
+                      <a:srgbClr val="FFFFFF"/>
                     </a:solidFill>
                   </a:tcPr>
                 </a:tc>
@@ -22202,7 +22202,7 @@
                       <a:r>
                         <a:rPr lang="en-US" sz="1800" dirty="0">
                           <a:solidFill>
-                            <a:srgbClr val="E2E8F0"/>
+                            <a:srgbClr val="334155"/>
                           </a:solidFill>
                           <a:latin typeface="Calibri" pitchFamily="34" charset="0"/>
                           <a:ea typeface="Calibri" pitchFamily="34" charset="-122"/>
@@ -22220,7 +22220,7 @@
                   <a:tcPr marL="91440" marR="91440" marT="45720" marB="45720">
                     <a:lnL w="6350" cap="flat" cmpd="sng" algn="ctr">
                       <a:solidFill>
-                        <a:srgbClr val="151025"/>
+                        <a:srgbClr val="E2E8F0"/>
                       </a:solidFill>
                       <a:prstDash val="solid"/>
                       <a:round/>
@@ -22229,7 +22229,7 @@
                     </a:lnL>
                     <a:lnR w="6350" cap="flat" cmpd="sng" algn="ctr">
                       <a:solidFill>
-                        <a:srgbClr val="151025"/>
+                        <a:srgbClr val="E2E8F0"/>
                       </a:solidFill>
                       <a:prstDash val="solid"/>
                       <a:round/>
@@ -22238,7 +22238,7 @@
                     </a:lnR>
                     <a:lnT w="6350" cap="flat" cmpd="sng" algn="ctr">
                       <a:solidFill>
-                        <a:srgbClr val="151025"/>
+                        <a:srgbClr val="E2E8F0"/>
                       </a:solidFill>
                       <a:prstDash val="solid"/>
                       <a:round/>
@@ -22247,7 +22247,7 @@
                     </a:lnT>
                     <a:lnB w="6350" cap="flat" cmpd="sng" algn="ctr">
                       <a:solidFill>
-                        <a:srgbClr val="151025"/>
+                        <a:srgbClr val="E2E8F0"/>
                       </a:solidFill>
                       <a:prstDash val="solid"/>
                       <a:round/>
@@ -22255,7 +22255,7 @@
                       <a:tailEnd type="none" w="med" len="med"/>
                     </a:lnB>
                     <a:solidFill>
-                      <a:srgbClr val="1E1A3A"/>
+                      <a:srgbClr val="FFFFFF"/>
                     </a:solidFill>
                   </a:tcPr>
                 </a:tc>
@@ -22290,7 +22290,7 @@
                   <a:tcPr marL="91440" marR="91440" marT="45720" marB="45720">
                     <a:lnL w="6350" cap="flat" cmpd="sng" algn="ctr">
                       <a:solidFill>
-                        <a:srgbClr val="151025"/>
+                        <a:srgbClr val="E2E8F0"/>
                       </a:solidFill>
                       <a:prstDash val="solid"/>
                       <a:round/>
@@ -22299,7 +22299,7 @@
                     </a:lnL>
                     <a:lnR w="6350" cap="flat" cmpd="sng" algn="ctr">
                       <a:solidFill>
-                        <a:srgbClr val="151025"/>
+                        <a:srgbClr val="E2E8F0"/>
                       </a:solidFill>
                       <a:prstDash val="solid"/>
                       <a:round/>
@@ -22308,7 +22308,7 @@
                     </a:lnR>
                     <a:lnT w="6350" cap="flat" cmpd="sng" algn="ctr">
                       <a:solidFill>
-                        <a:srgbClr val="151025"/>
+                        <a:srgbClr val="E2E8F0"/>
                       </a:solidFill>
                       <a:prstDash val="solid"/>
                       <a:round/>
@@ -22317,7 +22317,7 @@
                     </a:lnT>
                     <a:lnB w="6350" cap="flat" cmpd="sng" algn="ctr">
                       <a:solidFill>
-                        <a:srgbClr val="151025"/>
+                        <a:srgbClr val="E2E8F0"/>
                       </a:solidFill>
                       <a:prstDash val="solid"/>
                       <a:round/>
@@ -22325,7 +22325,7 @@
                       <a:tailEnd type="none" w="med" len="med"/>
                     </a:lnB>
                     <a:solidFill>
-                      <a:srgbClr val="1E1A3A"/>
+                      <a:srgbClr val="FFFFFF"/>
                     </a:solidFill>
                   </a:tcPr>
                 </a:tc>
@@ -22358,7 +22358,7 @@
                   <a:tcPr marL="91440" marR="91440" marT="45720" marB="45720">
                     <a:lnL w="6350" cap="flat" cmpd="sng" algn="ctr">
                       <a:solidFill>
-                        <a:srgbClr val="151025"/>
+                        <a:srgbClr val="E2E8F0"/>
                       </a:solidFill>
                       <a:prstDash val="solid"/>
                       <a:round/>
@@ -22367,7 +22367,7 @@
                     </a:lnL>
                     <a:lnR w="6350" cap="flat" cmpd="sng" algn="ctr">
                       <a:solidFill>
-                        <a:srgbClr val="151025"/>
+                        <a:srgbClr val="E2E8F0"/>
                       </a:solidFill>
                       <a:prstDash val="solid"/>
                       <a:round/>
@@ -22376,7 +22376,7 @@
                     </a:lnR>
                     <a:lnT w="6350" cap="flat" cmpd="sng" algn="ctr">
                       <a:solidFill>
-                        <a:srgbClr val="151025"/>
+                        <a:srgbClr val="E2E8F0"/>
                       </a:solidFill>
                       <a:prstDash val="solid"/>
                       <a:round/>
@@ -22385,7 +22385,7 @@
                     </a:lnT>
                     <a:lnB w="6350" cap="flat" cmpd="sng" algn="ctr">
                       <a:solidFill>
-                        <a:srgbClr val="151025"/>
+                        <a:srgbClr val="E2E8F0"/>
                       </a:solidFill>
                       <a:prstDash val="solid"/>
                       <a:round/>
@@ -22393,7 +22393,7 @@
                       <a:tailEnd type="none" w="med" len="med"/>
                     </a:lnB>
                     <a:solidFill>
-                      <a:srgbClr val="1E1A3A"/>
+                      <a:srgbClr val="FFFFFF"/>
                     </a:solidFill>
                   </a:tcPr>
                 </a:tc>
@@ -22417,11 +22417,11 @@
             <a:avLst/>
           </a:prstGeom>
           <a:solidFill>
-            <a:srgbClr val="1E1A3A"/>
+            <a:srgbClr val="FFFFFF"/>
           </a:solidFill>
           <a:ln w="12700">
             <a:solidFill>
-              <a:srgbClr val="1E1A3A"/>
+              <a:srgbClr val="E2E8F0"/>
             </a:solidFill>
             <a:prstDash val="solid"/>
           </a:ln>
@@ -22442,11 +22442,11 @@
             <a:avLst/>
           </a:prstGeom>
           <a:solidFill>
-            <a:srgbClr val="F472B6"/>
+            <a:srgbClr val="DB2777"/>
           </a:solidFill>
           <a:ln w="12700">
             <a:solidFill>
-              <a:srgbClr val="F472B6"/>
+              <a:srgbClr val="DB2777"/>
             </a:solidFill>
             <a:prstDash val="solid"/>
           </a:ln>
@@ -22482,7 +22482,7 @@
             <a:r>
               <a:rPr lang="en-US" sz="2200" b="1" dirty="0">
                 <a:solidFill>
-                  <a:srgbClr val="F472B6"/>
+                  <a:srgbClr val="DB2777"/>
                 </a:solidFill>
                 <a:latin typeface="Calibri" pitchFamily="34" charset="0"/>
                 <a:ea typeface="Calibri" pitchFamily="34" charset="-122"/>
@@ -22500,7 +22500,7 @@
             <a:r>
               <a:rPr lang="en-US" sz="1700" dirty="0">
                 <a:solidFill>
-                  <a:srgbClr val="E2E8F0"/>
+                  <a:srgbClr val="334155"/>
                 </a:solidFill>
                 <a:latin typeface="Calibri" pitchFamily="34" charset="0"/>
                 <a:ea typeface="Calibri" pitchFamily="34" charset="-122"/>
@@ -22536,7 +22536,7 @@
             <a:r>
               <a:rPr lang="en-US" sz="1700" dirty="0">
                 <a:solidFill>
-                  <a:srgbClr val="E2E8F0"/>
+                  <a:srgbClr val="334155"/>
                 </a:solidFill>
                 <a:latin typeface="Calibri" pitchFamily="34" charset="0"/>
                 <a:ea typeface="Calibri" pitchFamily="34" charset="-122"/>
@@ -22553,7 +22553,7 @@
             <a:r>
               <a:rPr lang="en-US" sz="1700" b="1" dirty="0">
                 <a:solidFill>
-                  <a:srgbClr val="F472B6"/>
+                  <a:srgbClr val="DB2777"/>
                 </a:solidFill>
                 <a:latin typeface="Calibri" pitchFamily="34" charset="0"/>
                 <a:ea typeface="Calibri" pitchFamily="34" charset="-122"/>
@@ -22570,7 +22570,7 @@
             <a:r>
               <a:rPr lang="en-US" sz="1700" dirty="0">
                 <a:solidFill>
-                  <a:srgbClr val="E2E8F0"/>
+                  <a:srgbClr val="334155"/>
                 </a:solidFill>
                 <a:latin typeface="Calibri" pitchFamily="34" charset="0"/>
                 <a:ea typeface="Calibri" pitchFamily="34" charset="-122"/>
@@ -22588,7 +22588,7 @@
             <a:r>
               <a:rPr lang="en-US" sz="1700" dirty="0">
                 <a:solidFill>
-                  <a:srgbClr val="E2E8F0"/>
+                  <a:srgbClr val="334155"/>
                 </a:solidFill>
                 <a:latin typeface="Calibri" pitchFamily="34" charset="0"/>
                 <a:ea typeface="Calibri" pitchFamily="34" charset="-122"/>
@@ -22712,7 +22712,7 @@
     <p:bg>
       <p:bgPr>
         <a:solidFill>
-          <a:srgbClr val="151025"/>
+          <a:srgbClr val="F8FAFC"/>
         </a:solidFill>
       </p:bgPr>
     </p:bg>
@@ -22745,13 +22745,13 @@
             <a:avLst/>
           </a:prstGeom>
           <a:solidFill>
-            <a:srgbClr val="818CF8">
+            <a:srgbClr val="4F46E5">
               <a:alpha val="15000"/>
             </a:srgbClr>
           </a:solidFill>
           <a:ln w="12700">
             <a:solidFill>
-              <a:srgbClr val="818CF8">
+              <a:srgbClr val="4F46E5">
                 <a:alpha val="15000"/>
               </a:srgbClr>
             </a:solidFill>
@@ -22774,13 +22774,13 @@
             <a:avLst/>
           </a:prstGeom>
           <a:solidFill>
-            <a:srgbClr val="F472B6">
+            <a:srgbClr val="DB2777">
               <a:alpha val="12000"/>
             </a:srgbClr>
           </a:solidFill>
           <a:ln w="12700">
             <a:solidFill>
-              <a:srgbClr val="F472B6">
+              <a:srgbClr val="DB2777">
                 <a:alpha val="12000"/>
               </a:srgbClr>
             </a:solidFill>
@@ -22803,11 +22803,11 @@
             <a:avLst/>
           </a:prstGeom>
           <a:solidFill>
-            <a:srgbClr val="FBBF24"/>
+            <a:srgbClr val="D97706"/>
           </a:solidFill>
           <a:ln w="12700">
             <a:solidFill>
-              <a:srgbClr val="FBBF24"/>
+              <a:srgbClr val="D97706"/>
             </a:solidFill>
             <a:prstDash val="solid"/>
           </a:ln>
@@ -22840,7 +22840,7 @@
             <a:r>
               <a:rPr lang="en-US" sz="1300" b="1" spc="1000" kern="0" dirty="0">
                 <a:solidFill>
-                  <a:srgbClr val="FBBF24"/>
+                  <a:srgbClr val="D97706"/>
                 </a:solidFill>
                 <a:latin typeface="Calibri" pitchFamily="34" charset="0"/>
                 <a:ea typeface="Calibri" pitchFamily="34" charset="-122"/>
@@ -22879,7 +22879,7 @@
             <a:r>
               <a:rPr lang="en-US" sz="3600" b="1" dirty="0">
                 <a:solidFill>
-                  <a:srgbClr val="FFFFFF"/>
+                  <a:srgbClr val="0F172A"/>
                 </a:solidFill>
                 <a:latin typeface="Cambria" pitchFamily="34" charset="0"/>
                 <a:ea typeface="Cambria" pitchFamily="34" charset="-122"/>
@@ -22906,11 +22906,11 @@
             <a:avLst/>
           </a:prstGeom>
           <a:solidFill>
-            <a:srgbClr val="F472B6"/>
+            <a:srgbClr val="DB2777"/>
           </a:solidFill>
           <a:ln w="12700">
             <a:solidFill>
-              <a:srgbClr val="F472B6"/>
+              <a:srgbClr val="DB2777"/>
             </a:solidFill>
             <a:prstDash val="solid"/>
           </a:ln>
@@ -22943,7 +22943,7 @@
             <a:r>
               <a:rPr lang="en-US" sz="1800" i="1" dirty="0">
                 <a:solidFill>
-                  <a:srgbClr val="E2E8F0"/>
+                  <a:srgbClr val="334155"/>
                 </a:solidFill>
                 <a:latin typeface="Calibri" pitchFamily="34" charset="0"/>
                 <a:ea typeface="Calibri" pitchFamily="34" charset="-122"/>
@@ -22970,11 +22970,11 @@
             <a:avLst/>
           </a:prstGeom>
           <a:solidFill>
-            <a:srgbClr val="1E1A3A"/>
+            <a:srgbClr val="FFFFFF"/>
           </a:solidFill>
           <a:ln w="25400">
             <a:solidFill>
-              <a:srgbClr val="818CF8"/>
+              <a:srgbClr val="4F46E5"/>
             </a:solidFill>
             <a:prstDash val="solid"/>
           </a:ln>
@@ -22995,11 +22995,11 @@
             <a:avLst/>
           </a:prstGeom>
           <a:solidFill>
-            <a:srgbClr val="818CF8"/>
+            <a:srgbClr val="4F46E5"/>
           </a:solidFill>
           <a:ln w="12700">
             <a:solidFill>
-              <a:srgbClr val="818CF8"/>
+              <a:srgbClr val="4F46E5"/>
             </a:solidFill>
             <a:prstDash val="solid"/>
           </a:ln>
@@ -23032,7 +23032,7 @@
             <a:r>
               <a:rPr lang="en-US" sz="3200" b="1" dirty="0">
                 <a:solidFill>
-                  <a:srgbClr val="151025"/>
+                  <a:srgbClr val="FFFFFF"/>
                 </a:solidFill>
                 <a:latin typeface="Cambria" pitchFamily="34" charset="0"/>
                 <a:ea typeface="Cambria" pitchFamily="34" charset="-122"/>
@@ -23071,7 +23071,7 @@
             <a:r>
               <a:rPr lang="en-US" sz="2100" b="1" dirty="0">
                 <a:solidFill>
-                  <a:srgbClr val="818CF8"/>
+                  <a:srgbClr val="4F46E5"/>
                 </a:solidFill>
                 <a:latin typeface="Calibri" pitchFamily="34" charset="0"/>
                 <a:ea typeface="Calibri" pitchFamily="34" charset="-122"/>
@@ -23113,7 +23113,7 @@
             <a:r>
               <a:rPr lang="en-US" sz="1600" dirty="0">
                 <a:solidFill>
-                  <a:srgbClr val="E2E8F0"/>
+                  <a:srgbClr val="334155"/>
                 </a:solidFill>
                 <a:latin typeface="Calibri" pitchFamily="34" charset="0"/>
                 <a:ea typeface="Calibri" pitchFamily="34" charset="-122"/>
@@ -23140,11 +23140,11 @@
             <a:avLst/>
           </a:prstGeom>
           <a:solidFill>
-            <a:srgbClr val="1E1A3A"/>
+            <a:srgbClr val="FFFFFF"/>
           </a:solidFill>
           <a:ln w="25400">
             <a:solidFill>
-              <a:srgbClr val="F472B6"/>
+              <a:srgbClr val="DB2777"/>
             </a:solidFill>
             <a:prstDash val="solid"/>
           </a:ln>
@@ -23165,11 +23165,11 @@
             <a:avLst/>
           </a:prstGeom>
           <a:solidFill>
-            <a:srgbClr val="F472B6"/>
+            <a:srgbClr val="DB2777"/>
           </a:solidFill>
           <a:ln w="12700">
             <a:solidFill>
-              <a:srgbClr val="F472B6"/>
+              <a:srgbClr val="DB2777"/>
             </a:solidFill>
             <a:prstDash val="solid"/>
           </a:ln>
@@ -23202,7 +23202,7 @@
             <a:r>
               <a:rPr lang="en-US" sz="3200" b="1" dirty="0">
                 <a:solidFill>
-                  <a:srgbClr val="151025"/>
+                  <a:srgbClr val="FFFFFF"/>
                 </a:solidFill>
                 <a:latin typeface="Cambria" pitchFamily="34" charset="0"/>
                 <a:ea typeface="Cambria" pitchFamily="34" charset="-122"/>
@@ -23241,7 +23241,7 @@
             <a:r>
               <a:rPr lang="en-US" sz="2100" b="1" dirty="0">
                 <a:solidFill>
-                  <a:srgbClr val="F472B6"/>
+                  <a:srgbClr val="DB2777"/>
                 </a:solidFill>
                 <a:latin typeface="Calibri" pitchFamily="34" charset="0"/>
                 <a:ea typeface="Calibri" pitchFamily="34" charset="-122"/>
@@ -23283,7 +23283,7 @@
             <a:r>
               <a:rPr lang="en-US" sz="1600" dirty="0">
                 <a:solidFill>
-                  <a:srgbClr val="E2E8F0"/>
+                  <a:srgbClr val="334155"/>
                 </a:solidFill>
                 <a:latin typeface="Calibri" pitchFamily="34" charset="0"/>
                 <a:ea typeface="Calibri" pitchFamily="34" charset="-122"/>
@@ -23310,11 +23310,11 @@
             <a:avLst/>
           </a:prstGeom>
           <a:solidFill>
-            <a:srgbClr val="1E1A3A"/>
+            <a:srgbClr val="FFFFFF"/>
           </a:solidFill>
           <a:ln w="25400">
             <a:solidFill>
-              <a:srgbClr val="FBBF24"/>
+              <a:srgbClr val="D97706"/>
             </a:solidFill>
             <a:prstDash val="solid"/>
           </a:ln>
@@ -23335,11 +23335,11 @@
             <a:avLst/>
           </a:prstGeom>
           <a:solidFill>
-            <a:srgbClr val="FBBF24"/>
+            <a:srgbClr val="D97706"/>
           </a:solidFill>
           <a:ln w="12700">
             <a:solidFill>
-              <a:srgbClr val="FBBF24"/>
+              <a:srgbClr val="D97706"/>
             </a:solidFill>
             <a:prstDash val="solid"/>
           </a:ln>
@@ -23372,7 +23372,7 @@
             <a:r>
               <a:rPr lang="en-US" sz="3200" b="1" dirty="0">
                 <a:solidFill>
-                  <a:srgbClr val="151025"/>
+                  <a:srgbClr val="FFFFFF"/>
                 </a:solidFill>
                 <a:latin typeface="Cambria" pitchFamily="34" charset="0"/>
                 <a:ea typeface="Cambria" pitchFamily="34" charset="-122"/>
@@ -23411,7 +23411,7 @@
             <a:r>
               <a:rPr lang="en-US" sz="2100" b="1" dirty="0">
                 <a:solidFill>
-                  <a:srgbClr val="FBBF24"/>
+                  <a:srgbClr val="D97706"/>
                 </a:solidFill>
                 <a:latin typeface="Calibri" pitchFamily="34" charset="0"/>
                 <a:ea typeface="Calibri" pitchFamily="34" charset="-122"/>
@@ -23453,7 +23453,7 @@
             <a:r>
               <a:rPr lang="en-US" sz="1600" dirty="0">
                 <a:solidFill>
-                  <a:srgbClr val="E2E8F0"/>
+                  <a:srgbClr val="334155"/>
                 </a:solidFill>
                 <a:latin typeface="Calibri" pitchFamily="34" charset="0"/>
                 <a:ea typeface="Calibri" pitchFamily="34" charset="-122"/>
@@ -23480,11 +23480,11 @@
             <a:avLst/>
           </a:prstGeom>
           <a:solidFill>
-            <a:srgbClr val="1E1A3A"/>
+            <a:srgbClr val="FFFFFF"/>
           </a:solidFill>
           <a:ln w="25400">
             <a:solidFill>
-              <a:srgbClr val="34D399"/>
+              <a:srgbClr val="059669"/>
             </a:solidFill>
             <a:prstDash val="solid"/>
           </a:ln>
@@ -23505,11 +23505,11 @@
             <a:avLst/>
           </a:prstGeom>
           <a:solidFill>
-            <a:srgbClr val="34D399"/>
+            <a:srgbClr val="059669"/>
           </a:solidFill>
           <a:ln w="12700">
             <a:solidFill>
-              <a:srgbClr val="34D399"/>
+              <a:srgbClr val="059669"/>
             </a:solidFill>
             <a:prstDash val="solid"/>
           </a:ln>
@@ -23542,7 +23542,7 @@
             <a:r>
               <a:rPr lang="en-US" sz="3200" b="1" dirty="0">
                 <a:solidFill>
-                  <a:srgbClr val="151025"/>
+                  <a:srgbClr val="FFFFFF"/>
                 </a:solidFill>
                 <a:latin typeface="Cambria" pitchFamily="34" charset="0"/>
                 <a:ea typeface="Cambria" pitchFamily="34" charset="-122"/>
@@ -23581,7 +23581,7 @@
             <a:r>
               <a:rPr lang="en-US" sz="2100" b="1" dirty="0">
                 <a:solidFill>
-                  <a:srgbClr val="34D399"/>
+                  <a:srgbClr val="059669"/>
                 </a:solidFill>
                 <a:latin typeface="Calibri" pitchFamily="34" charset="0"/>
                 <a:ea typeface="Calibri" pitchFamily="34" charset="-122"/>
@@ -23623,7 +23623,7 @@
             <a:r>
               <a:rPr lang="en-US" sz="1600" dirty="0">
                 <a:solidFill>
-                  <a:srgbClr val="E2E8F0"/>
+                  <a:srgbClr val="334155"/>
                 </a:solidFill>
                 <a:latin typeface="Calibri" pitchFamily="34" charset="0"/>
                 <a:ea typeface="Calibri" pitchFamily="34" charset="-122"/>
@@ -23662,7 +23662,7 @@
             <a:r>
               <a:rPr lang="en-US" sz="1700" b="1" i="1" dirty="0">
                 <a:solidFill>
-                  <a:srgbClr val="FBBF24"/>
+                  <a:srgbClr val="D97706"/>
                 </a:solidFill>
                 <a:latin typeface="Calibri" pitchFamily="34" charset="0"/>
                 <a:ea typeface="Calibri" pitchFamily="34" charset="-122"/>
@@ -23786,7 +23786,7 @@
     <p:bg>
       <p:bgPr>
         <a:solidFill>
-          <a:srgbClr val="151025"/>
+          <a:srgbClr val="F8FAFC"/>
         </a:solidFill>
       </p:bgPr>
     </p:bg>
@@ -23819,13 +23819,13 @@
             <a:avLst/>
           </a:prstGeom>
           <a:solidFill>
-            <a:srgbClr val="818CF8">
+            <a:srgbClr val="4F46E5">
               <a:alpha val="15000"/>
             </a:srgbClr>
           </a:solidFill>
           <a:ln w="12700">
             <a:solidFill>
-              <a:srgbClr val="818CF8">
+              <a:srgbClr val="4F46E5">
                 <a:alpha val="15000"/>
               </a:srgbClr>
             </a:solidFill>
@@ -23848,13 +23848,13 @@
             <a:avLst/>
           </a:prstGeom>
           <a:solidFill>
-            <a:srgbClr val="F472B6">
+            <a:srgbClr val="DB2777">
               <a:alpha val="12000"/>
             </a:srgbClr>
           </a:solidFill>
           <a:ln w="12700">
             <a:solidFill>
-              <a:srgbClr val="F472B6">
+              <a:srgbClr val="DB2777">
                 <a:alpha val="12000"/>
               </a:srgbClr>
             </a:solidFill>
@@ -23877,11 +23877,11 @@
             <a:avLst/>
           </a:prstGeom>
           <a:solidFill>
-            <a:srgbClr val="FBBF24"/>
+            <a:srgbClr val="D97706"/>
           </a:solidFill>
           <a:ln w="12700">
             <a:solidFill>
-              <a:srgbClr val="FBBF24"/>
+              <a:srgbClr val="D97706"/>
             </a:solidFill>
             <a:prstDash val="solid"/>
           </a:ln>
@@ -23914,7 +23914,7 @@
             <a:r>
               <a:rPr lang="en-US" sz="1300" b="1" spc="1000" kern="0" dirty="0">
                 <a:solidFill>
-                  <a:srgbClr val="FBBF24"/>
+                  <a:srgbClr val="D97706"/>
                 </a:solidFill>
                 <a:latin typeface="Calibri" pitchFamily="34" charset="0"/>
                 <a:ea typeface="Calibri" pitchFamily="34" charset="-122"/>
@@ -23953,7 +23953,7 @@
             <a:r>
               <a:rPr lang="en-US" sz="3600" b="1" dirty="0">
                 <a:solidFill>
-                  <a:srgbClr val="FFFFFF"/>
+                  <a:srgbClr val="0F172A"/>
                 </a:solidFill>
                 <a:latin typeface="Cambria" pitchFamily="34" charset="0"/>
                 <a:ea typeface="Cambria" pitchFamily="34" charset="-122"/>
@@ -23980,11 +23980,11 @@
             <a:avLst/>
           </a:prstGeom>
           <a:solidFill>
-            <a:srgbClr val="F472B6"/>
+            <a:srgbClr val="DB2777"/>
           </a:solidFill>
           <a:ln w="12700">
             <a:solidFill>
-              <a:srgbClr val="F472B6"/>
+              <a:srgbClr val="DB2777"/>
             </a:solidFill>
             <a:prstDash val="solid"/>
           </a:ln>
@@ -24005,11 +24005,11 @@
             <a:avLst/>
           </a:prstGeom>
           <a:solidFill>
-            <a:srgbClr val="1E1A3A"/>
+            <a:srgbClr val="FFFFFF"/>
           </a:solidFill>
           <a:ln w="12700">
             <a:solidFill>
-              <a:srgbClr val="1E1A3A"/>
+              <a:srgbClr val="E2E8F0"/>
             </a:solidFill>
             <a:prstDash val="solid"/>
           </a:ln>
@@ -24030,11 +24030,11 @@
             <a:avLst/>
           </a:prstGeom>
           <a:solidFill>
-            <a:srgbClr val="F472B6"/>
+            <a:srgbClr val="DB2777"/>
           </a:solidFill>
           <a:ln w="12700">
             <a:solidFill>
-              <a:srgbClr val="F472B6"/>
+              <a:srgbClr val="DB2777"/>
             </a:solidFill>
             <a:prstDash val="solid"/>
           </a:ln>
@@ -24070,7 +24070,7 @@
             <a:r>
               <a:rPr lang="en-US" sz="1900" b="1" dirty="0">
                 <a:solidFill>
-                  <a:srgbClr val="F472B6"/>
+                  <a:srgbClr val="DB2777"/>
                 </a:solidFill>
                 <a:latin typeface="Calibri" pitchFamily="34" charset="0"/>
                 <a:ea typeface="Calibri" pitchFamily="34" charset="-122"/>
@@ -24088,7 +24088,7 @@
             <a:r>
               <a:rPr lang="en-US" sz="1600" dirty="0">
                 <a:solidFill>
-                  <a:srgbClr val="E2E8F0"/>
+                  <a:srgbClr val="334155"/>
                 </a:solidFill>
                 <a:latin typeface="Calibri" pitchFamily="34" charset="0"/>
                 <a:ea typeface="Calibri" pitchFamily="34" charset="-122"/>
@@ -24105,7 +24105,7 @@
             <a:r>
               <a:rPr lang="en-US" sz="1600" b="1" dirty="0">
                 <a:solidFill>
-                  <a:srgbClr val="FFFFFF"/>
+                  <a:srgbClr val="0F172A"/>
                 </a:solidFill>
                 <a:latin typeface="Calibri" pitchFamily="34" charset="0"/>
                 <a:ea typeface="Calibri" pitchFamily="34" charset="-122"/>
@@ -24122,7 +24122,7 @@
             <a:r>
               <a:rPr lang="en-US" sz="1600" dirty="0">
                 <a:solidFill>
-                  <a:srgbClr val="E2E8F0"/>
+                  <a:srgbClr val="334155"/>
                 </a:solidFill>
                 <a:latin typeface="Calibri" pitchFamily="34" charset="0"/>
                 <a:ea typeface="Calibri" pitchFamily="34" charset="-122"/>
@@ -24149,11 +24149,11 @@
             <a:avLst/>
           </a:prstGeom>
           <a:solidFill>
-            <a:srgbClr val="1E1A3A"/>
+            <a:srgbClr val="FFFFFF"/>
           </a:solidFill>
           <a:ln w="12700">
             <a:solidFill>
-              <a:srgbClr val="1E1A3A"/>
+              <a:srgbClr val="E2E8F0"/>
             </a:solidFill>
             <a:prstDash val="solid"/>
           </a:ln>
@@ -24174,11 +24174,11 @@
             <a:avLst/>
           </a:prstGeom>
           <a:solidFill>
-            <a:srgbClr val="FBBF24"/>
+            <a:srgbClr val="D97706"/>
           </a:solidFill>
           <a:ln w="12700">
             <a:solidFill>
-              <a:srgbClr val="FBBF24"/>
+              <a:srgbClr val="D97706"/>
             </a:solidFill>
             <a:prstDash val="solid"/>
           </a:ln>
@@ -24214,7 +24214,7 @@
             <a:r>
               <a:rPr lang="en-US" sz="1900" b="1" dirty="0">
                 <a:solidFill>
-                  <a:srgbClr val="FBBF24"/>
+                  <a:srgbClr val="D97706"/>
                 </a:solidFill>
                 <a:latin typeface="Calibri" pitchFamily="34" charset="0"/>
                 <a:ea typeface="Calibri" pitchFamily="34" charset="-122"/>
@@ -24232,7 +24232,7 @@
             <a:r>
               <a:rPr lang="en-US" sz="1600" dirty="0">
                 <a:solidFill>
-                  <a:srgbClr val="E2E8F0"/>
+                  <a:srgbClr val="334155"/>
                 </a:solidFill>
                 <a:latin typeface="Calibri" pitchFamily="34" charset="0"/>
                 <a:ea typeface="Calibri" pitchFamily="34" charset="-122"/>
@@ -24249,7 +24249,7 @@
             <a:r>
               <a:rPr lang="en-US" sz="1600" b="1" dirty="0">
                 <a:solidFill>
-                  <a:srgbClr val="FFFFFF"/>
+                  <a:srgbClr val="0F172A"/>
                 </a:solidFill>
                 <a:latin typeface="Calibri" pitchFamily="34" charset="0"/>
                 <a:ea typeface="Calibri" pitchFamily="34" charset="-122"/>
@@ -24266,7 +24266,7 @@
             <a:r>
               <a:rPr lang="en-US" sz="1600" dirty="0">
                 <a:solidFill>
-                  <a:srgbClr val="E2E8F0"/>
+                  <a:srgbClr val="334155"/>
                 </a:solidFill>
                 <a:latin typeface="Calibri" pitchFamily="34" charset="0"/>
                 <a:ea typeface="Calibri" pitchFamily="34" charset="-122"/>
@@ -24293,11 +24293,11 @@
             <a:avLst/>
           </a:prstGeom>
           <a:solidFill>
-            <a:srgbClr val="1E1A3A"/>
+            <a:srgbClr val="FFFFFF"/>
           </a:solidFill>
           <a:ln w="12700">
             <a:solidFill>
-              <a:srgbClr val="1E1A3A"/>
+              <a:srgbClr val="E2E8F0"/>
             </a:solidFill>
             <a:prstDash val="solid"/>
           </a:ln>
@@ -24318,11 +24318,11 @@
             <a:avLst/>
           </a:prstGeom>
           <a:solidFill>
-            <a:srgbClr val="818CF8"/>
+            <a:srgbClr val="4F46E5"/>
           </a:solidFill>
           <a:ln w="12700">
             <a:solidFill>
-              <a:srgbClr val="818CF8"/>
+              <a:srgbClr val="4F46E5"/>
             </a:solidFill>
             <a:prstDash val="solid"/>
           </a:ln>
@@ -24358,7 +24358,7 @@
             <a:r>
               <a:rPr lang="en-US" sz="1900" b="1" dirty="0">
                 <a:solidFill>
-                  <a:srgbClr val="818CF8"/>
+                  <a:srgbClr val="4F46E5"/>
                 </a:solidFill>
                 <a:latin typeface="Calibri" pitchFamily="34" charset="0"/>
                 <a:ea typeface="Calibri" pitchFamily="34" charset="-122"/>
@@ -24376,7 +24376,7 @@
             <a:r>
               <a:rPr lang="en-US" sz="1600" dirty="0">
                 <a:solidFill>
-                  <a:srgbClr val="E2E8F0"/>
+                  <a:srgbClr val="334155"/>
                 </a:solidFill>
                 <a:latin typeface="Calibri" pitchFamily="34" charset="0"/>
                 <a:ea typeface="Calibri" pitchFamily="34" charset="-122"/>
@@ -24393,7 +24393,7 @@
             <a:r>
               <a:rPr lang="en-US" sz="1600" b="1" dirty="0">
                 <a:solidFill>
-                  <a:srgbClr val="FFFFFF"/>
+                  <a:srgbClr val="0F172A"/>
                 </a:solidFill>
                 <a:latin typeface="Calibri" pitchFamily="34" charset="0"/>
                 <a:ea typeface="Calibri" pitchFamily="34" charset="-122"/>
@@ -24410,7 +24410,7 @@
             <a:r>
               <a:rPr lang="en-US" sz="1600" dirty="0">
                 <a:solidFill>
-                  <a:srgbClr val="E2E8F0"/>
+                  <a:srgbClr val="334155"/>
                 </a:solidFill>
                 <a:latin typeface="Calibri" pitchFamily="34" charset="0"/>
                 <a:ea typeface="Calibri" pitchFamily="34" charset="-122"/>
@@ -24427,7 +24427,7 @@
             <a:r>
               <a:rPr lang="en-US" sz="1600" b="1" dirty="0">
                 <a:solidFill>
-                  <a:srgbClr val="F472B6"/>
+                  <a:srgbClr val="DB2777"/>
                 </a:solidFill>
                 <a:latin typeface="Calibri" pitchFamily="34" charset="0"/>
                 <a:ea typeface="Calibri" pitchFamily="34" charset="-122"/>
